--- a/exec-deck/output/H&L Weekly Update - WC 19 Oct 2026.pptx
+++ b/exec-deck/output/H&L Weekly Update - WC 19 Oct 2026.pptx
@@ -25654,7 +25654,7 @@
                 <a:ea typeface="Poppins" pitchFamily="34" charset="-122"/>
                 <a:cs typeface="Poppins" pitchFamily="34" charset="-120"/>
               </a:rPr>
-              <a:t>billable utilisation 3.4% so far — 11.5h of 342h logged Mon–Fri; last week restated 13.0% → 16.8% (39.45h → 51.02h), so this is a floor</a:t>
+              <a:t>billable utilisation 3.7% so far — 11.5h of 311.6h (Argenis and Karim out Thu–Fri); last week restated 13.0% → 16.8% (39.45h → 51.02h), so this is a floor</a:t>
             </a:r>
             <a:endParaRPr lang="en-US" sz="900" dirty="0"/>
           </a:p>
@@ -39685,7 +39685,7 @@
                 <a:ea typeface="Poppins" pitchFamily="34" charset="-122"/>
                 <a:cs typeface="Poppins" pitchFamily="34" charset="-120"/>
               </a:rPr>
-              <a:t>3.4%</a:t>
+              <a:t>3.7%</a:t>
             </a:r>
             <a:endParaRPr lang="en-US" sz="2600" dirty="0"/>
           </a:p>
@@ -39724,7 +39724,7 @@
                 <a:ea typeface="Poppins" pitchFamily="34" charset="-122"/>
                 <a:cs typeface="Poppins" pitchFamily="34" charset="-120"/>
               </a:rPr>
-              <a:t>11.5h billed of 342h available · target 50% · partial week</a:t>
+              <a:t>11.5h billed of 311.6h available · target 50% · partial week</a:t>
             </a:r>
             <a:endParaRPr lang="en-US" sz="780" dirty="0"/>
           </a:p>
@@ -39831,7 +39831,7 @@
                 <a:ea typeface="Poppins" pitchFamily="34" charset="-122"/>
                 <a:cs typeface="Poppins" pitchFamily="34" charset="-120"/>
               </a:rPr>
-              <a:t>342h</a:t>
+              <a:t>311.6h</a:t>
             </a:r>
             <a:endParaRPr lang="en-US" sz="2600" dirty="0"/>
           </a:p>
@@ -39870,7 +39870,7 @@
                 <a:ea typeface="Poppins" pitchFamily="34" charset="-122"/>
                 <a:cs typeface="Poppins" pitchFamily="34" charset="-120"/>
               </a:rPr>
-              <a:t>9 people assigned to PS-pipeline tickets × 38h standard week</a:t>
+              <a:t>9 PS people × 38h, less Thu–Fri leave for Argenis Rafael Guevara and Karim AlRifaii (4 days × 7.6h)</a:t>
             </a:r>
             <a:endParaRPr lang="en-US" sz="780" dirty="0"/>
           </a:p>
@@ -41986,7 +41986,7 @@
                 <a:ea typeface="Poppins" pitchFamily="34" charset="-122"/>
                 <a:cs typeface="Poppins" pitchFamily="34" charset="-120"/>
               </a:rPr>
-              <a:t>9 PS people × 38h = 342h available</a:t>
+              <a:t>9 × 38h − 30.4h leave = 311.6h available</a:t>
             </a:r>
             <a:endParaRPr lang="en-US" sz="700" dirty="0"/>
           </a:p>
@@ -42064,7 +42064,7 @@
                 <a:ea typeface="Poppins" pitchFamily="34" charset="-122"/>
                 <a:cs typeface="Poppins" pitchFamily="34" charset="-120"/>
               </a:rPr>
-              <a:t>3.4%</a:t>
+              <a:t>3.7%</a:t>
             </a:r>
             <a:endParaRPr lang="en-US" sz="950" dirty="0"/>
           </a:p>
@@ -42103,7 +42103,7 @@
                 <a:ea typeface="Poppins" pitchFamily="34" charset="-122"/>
                 <a:cs typeface="Poppins" pitchFamily="34" charset="-120"/>
               </a:rPr>
-              <a:t>Available staff = the 9 Professional Services people holding PS-pipeline tickets this week at 38h each — Isayah Kuhlmann is back and logging; leave for the week is not yet confirmed. Lopez, Hikuroa, Magabo, Ho, Fenwick and Hettiarachchy hold PS tickets but are not PS staff — excluded; none carried hours. Hours logged Mon–Fri only; the week closes Sunday.</a:t>
+              <a:t>Available staff = the 9 Professional Services people holding PS-pipeline tickets this week at 38h each (7.6h a day), less Thursday and Friday leave for Argenis Rafael Guevara and Karim AlRifaii — 30.4h. Isayah Kuhlmann is back and logging. Lopez, Hikuroa, Magabo, Ho, Fenwick and Hettiarachchy hold PS tickets but are not PS staff — excluded; none carried hours. Hours logged Mon–Fri only; the week closes Sunday.</a:t>
             </a:r>
             <a:endParaRPr lang="en-US" sz="580" dirty="0"/>
           </a:p>
@@ -44315,7 +44315,7 @@
                 <a:ea typeface="Poppins" pitchFamily="34" charset="-122"/>
                 <a:cs typeface="Poppins" pitchFamily="34" charset="-120"/>
               </a:rPr>
-              <a:t>3.4%</a:t>
+              <a:t>3.7%</a:t>
             </a:r>
             <a:endParaRPr lang="en-US" sz="750" dirty="0"/>
           </a:p>
@@ -44393,7 +44393,7 @@
                 <a:ea typeface="Poppins" pitchFamily="34" charset="-122"/>
                 <a:cs typeface="Poppins" pitchFamily="34" charset="-120"/>
               </a:rPr>
-              <a:t>Base is available staff × 38h: 7 for 28 Sep–4 Oct (Rhys and Rodney on leave), 9 for 5–11 Oct, 8 for 12–18 Oct (Isayah on leave) and 9 this week. PS-pipeline tickets by Sydney week, re-pulled 24 Oct.</a:t>
+              <a:t>Base is available staff × 38h: 7 for 28 Sep–4 Oct (Rhys and Rodney on leave), 9 for 5–11 Oct, 8 for 12–18 Oct (Isayah on leave) and 9 this week less two days each for Argenis and Karim. PS-pipeline tickets by Sydney week, re-pulled 24 Oct.</a:t>
             </a:r>
             <a:endParaRPr lang="en-US" sz="580" dirty="0"/>
           </a:p>
@@ -44531,7 +44531,7 @@
                 <a:ea typeface="Poppins" pitchFamily="34" charset="-122"/>
                 <a:cs typeface="Poppins" pitchFamily="34" charset="-120"/>
               </a:rPr>
-              <a:t>12–18 Oct went out at 39.45h (13.0%) and now reads 51.02h (16.8%); 5–11 Oct has grown again to 35.25h from the 21.25h first published. This week's 3.4% covers five working days logged so far and will restate upward — treat it as a floor.</a:t>
+              <a:t>12–18 Oct went out at 39.45h (13.0%) and now reads 51.02h (16.8%); 5–11 Oct has grown again to 35.25h from the 21.25h first published. This week's 3.7% covers five working days logged so far and will restate upward — treat it as a floor.</a:t>
             </a:r>
             <a:endParaRPr lang="en-US" sz="900" dirty="0"/>
           </a:p>
@@ -44579,7 +44579,7 @@
                 <a:ea typeface="Poppins" pitchFamily="34" charset="-122"/>
                 <a:cs typeface="Poppins" pitchFamily="34" charset="-120"/>
               </a:rPr>
-              <a:t>Isayah Kuhlmann 4.00h, Joshua Casey and Rodney Nolan 3.50h each, Rhys Woolcock 0.50h; Gregory, Ryan, Isaac, Argenis and Karim have no time on this week's tickets yet.</a:t>
+              <a:t>Isayah Kuhlmann 4.00h, Joshua Casey and Rodney Nolan 3.50h each, Rhys Woolcock 0.50h. Gregory, Ryan and Isaac have no time on this week's tickets yet; Argenis and Karim were out Thursday and Friday and have none from Monday to Wednesday either.</a:t>
             </a:r>
             <a:endParaRPr lang="en-US" sz="900" dirty="0"/>
           </a:p>

--- a/exec-deck/output/H&L Weekly Update - WC 19 Oct 2026.pptx
+++ b/exec-deck/output/H&L Weekly Update - WC 19 Oct 2026.pptx
@@ -4605,7 +4605,7 @@
                 <a:ea typeface="Poppins" pitchFamily="34" charset="-122"/>
                 <a:cs typeface="Poppins" pitchFamily="34" charset="-120"/>
               </a:rPr>
-              <a:t>Generated: 24 Oct 2026 (first pass)</a:t>
+              <a:t>Generated: 26 Oct 2026</a:t>
             </a:r>
             <a:endParaRPr lang="en-US" sz="1100" dirty="0"/>
           </a:p>
@@ -4666,7 +4666,7 @@
                 <a:ea typeface="Poppins" pitchFamily="34" charset="-122"/>
                 <a:cs typeface="Poppins" pitchFamily="34" charset="-120"/>
               </a:rPr>
-              <a:t>FIRST PASS — HUBSPOT LIVE TO 24 OCT · FILE DROPS PENDING</a:t>
+              <a:t>Q4 — TARGETS CARRIED FORWARD</a:t>
             </a:r>
             <a:endParaRPr lang="en-US" sz="900" dirty="0"/>
           </a:p>
@@ -24999,7 +24999,7 @@
                 <a:ea typeface="Poppins" pitchFamily="34" charset="-122"/>
                 <a:cs typeface="Poppins" pitchFamily="34" charset="-120"/>
               </a:rPr>
-              <a:t>held at the 18 Oct Sysnet extract — Q4 hardware $99k = 14% of the $715k OKR2 against a 26% pace mark; this week's extract lands Monday</a:t>
+              <a:t>Q4 hardware $111k = 16% of the $715k OKR2 against a 27% pace mark — $12.0k this week, Bradford $10.3k of it</a:t>
             </a:r>
             <a:endParaRPr lang="en-US" sz="900" dirty="0"/>
           </a:p>
@@ -25188,7 +25188,7 @@
                 <a:ea typeface="Poppins" pitchFamily="34" charset="-122"/>
                 <a:cs typeface="Poppins" pitchFamily="34" charset="-120"/>
               </a:rPr>
-              <a:t>Q4 new MRR invoiced $3.8k = 14% of OKR2 (register as at 18 Oct); HubSpot shows $6.4k of software MRR won in October to 24 Oct, $2.6k of it this week</a:t>
+              <a:t>Q4 new MRR $3.8k = 14% of OKR2 with nothing invoiced this week; three churned logos net the week −$1,148 and Q4 −$8.9k</a:t>
             </a:r>
             <a:endParaRPr lang="en-US" sz="900" dirty="0"/>
           </a:p>
@@ -25377,7 +25377,7 @@
                 <a:ea typeface="Poppins" pitchFamily="34" charset="-122"/>
                 <a:cs typeface="Poppins" pitchFamily="34" charset="-120"/>
               </a:rPr>
-              <a:t>billable utilisation 3.7% so far — 11.5h of 311.6h (Argenis and Karim out Thu–Fri); last week restated 13.0% → 16.8% (39.45h → 51.02h), so this is a floor</a:t>
+              <a:t>billable utilisation 3.7% — 11.5h of 311.6h; 10.5h chargeable, 1.0h non-chargeable; Q4 hidden work 20h = $3,000 unrecognised PS revenue</a:t>
             </a:r>
             <a:endParaRPr lang="en-US" sz="900" dirty="0"/>
           </a:p>
@@ -25566,7 +25566,7 @@
                 <a:ea typeface="Poppins" pitchFamily="34" charset="-122"/>
                 <a:cs typeface="Poppins" pitchFamily="34" charset="-120"/>
               </a:rPr>
-              <a:t>inflow 358 vs resolved 555 to Sat — backlog 588 → 393, third straight fall; 54 of the closes were a single bulk close of September voice tickets</a:t>
+              <a:t>inflow 396 vs resolved 597 — backlog 588 → 389, third straight fall; 54 of the closes were one bulk close of September voice tickets</a:t>
             </a:r>
             <a:endParaRPr lang="en-US" sz="900" dirty="0"/>
           </a:p>
@@ -26508,7 +26508,7 @@
                 <a:ea typeface="Poppins" pitchFamily="34" charset="-122"/>
                 <a:cs typeface="Poppins" pitchFamily="34" charset="-120"/>
               </a:rPr>
-              <a:t>  of $28k target · register as at 18 Oct</a:t>
+              <a:t>  of $28k target · register live</a:t>
             </a:r>
             <a:endParaRPr lang="en-US" sz="2400" dirty="0"/>
           </a:p>
@@ -26541,13 +26541,13 @@
             <a:r>
               <a:rPr lang="en-US" sz="950" b="1" dirty="0">
                 <a:solidFill>
-                  <a:srgbClr val="C88A2E"/>
-                </a:solidFill>
-                <a:latin typeface="Poppins" pitchFamily="34" charset="0"/>
-                <a:ea typeface="Poppins" pitchFamily="34" charset="-122"/>
-                <a:cs typeface="Poppins" pitchFamily="34" charset="-120"/>
-              </a:rPr>
-              <a:t>refresh pending</a:t>
+                  <a:srgbClr val="B4552D"/>
+                </a:solidFill>
+                <a:latin typeface="Poppins" pitchFamily="34" charset="0"/>
+                <a:ea typeface="Poppins" pitchFamily="34" charset="-122"/>
+                <a:cs typeface="Poppins" pitchFamily="34" charset="-120"/>
+              </a:rPr>
+              <a:t>▼ −$1,148 net this wk</a:t>
             </a:r>
             <a:endParaRPr lang="en-US" sz="950" dirty="0"/>
           </a:p>
@@ -26605,7 +26605,7 @@
         </p:nvSpPr>
         <p:spPr>
           <a:xfrm>
-            <a:off x="1677924" y="1856232"/>
+            <a:off x="1719986" y="1856232"/>
             <a:ext cx="20117" cy="192024"/>
           </a:xfrm>
           <a:prstGeom prst="rect">
@@ -26664,7 +26664,7 @@
                 <a:ea typeface="Poppins" pitchFamily="34" charset="-122"/>
                 <a:cs typeface="Poppins" pitchFamily="34" charset="-120"/>
               </a:rPr>
-              <a:t> · pace 26%</a:t>
+              <a:t> · pace 27%</a:t>
             </a:r>
             <a:endParaRPr lang="en-US" sz="1000" dirty="0"/>
           </a:p>
@@ -26771,7 +26771,7 @@
                 <a:ea typeface="Poppins" pitchFamily="34" charset="-122"/>
                 <a:cs typeface="Poppins" pitchFamily="34" charset="-120"/>
               </a:rPr>
-              <a:t>$99k</a:t>
+              <a:t>$111k</a:t>
             </a:r>
             <a:pPr indent="0" marL="0">
               <a:buNone/>
@@ -26818,13 +26818,13 @@
             <a:r>
               <a:rPr lang="en-US" sz="950" b="1" dirty="0">
                 <a:solidFill>
-                  <a:srgbClr val="C88A2E"/>
-                </a:solidFill>
-                <a:latin typeface="Poppins" pitchFamily="34" charset="0"/>
-                <a:ea typeface="Poppins" pitchFamily="34" charset="-122"/>
-                <a:cs typeface="Poppins" pitchFamily="34" charset="-120"/>
-              </a:rPr>
-              <a:t>refresh pending</a:t>
+                  <a:srgbClr val="3D8F5F"/>
+                </a:solidFill>
+                <a:latin typeface="Poppins" pitchFamily="34" charset="0"/>
+                <a:ea typeface="Poppins" pitchFamily="34" charset="-122"/>
+                <a:cs typeface="Poppins" pitchFamily="34" charset="-120"/>
+              </a:rPr>
+              <a:t>▲ +$12k this wk</a:t>
             </a:r>
             <a:endParaRPr lang="en-US" sz="950" dirty="0"/>
           </a:p>
@@ -26861,7 +26861,7 @@
         <p:spPr>
           <a:xfrm>
             <a:off x="6428232" y="1901952"/>
-            <a:ext cx="588874" cy="100584"/>
+            <a:ext cx="672998" cy="100584"/>
           </a:xfrm>
           <a:prstGeom prst="roundRect">
             <a:avLst>
@@ -26882,7 +26882,7 @@
         </p:nvSpPr>
         <p:spPr>
           <a:xfrm>
-            <a:off x="7511796" y="1856232"/>
+            <a:off x="7553858" y="1856232"/>
             <a:ext cx="20117" cy="192024"/>
           </a:xfrm>
           <a:prstGeom prst="rect">
@@ -26927,7 +26927,7 @@
                 <a:ea typeface="Poppins" pitchFamily="34" charset="-122"/>
                 <a:cs typeface="Poppins" pitchFamily="34" charset="-120"/>
               </a:rPr>
-              <a:t>14%</a:t>
+              <a:t>16%</a:t>
             </a:r>
             <a:pPr algn="r" indent="0" marL="0">
               <a:buNone/>
@@ -26941,7 +26941,7 @@
                 <a:ea typeface="Poppins" pitchFamily="34" charset="-122"/>
                 <a:cs typeface="Poppins" pitchFamily="34" charset="-120"/>
               </a:rPr>
-              <a:t> · pace 26%</a:t>
+              <a:t> · pace 27%</a:t>
             </a:r>
             <a:endParaRPr lang="en-US" sz="1000" dirty="0"/>
           </a:p>
@@ -27023,7 +27023,7 @@
                 <a:ea typeface="Poppins" pitchFamily="34" charset="-122"/>
                 <a:cs typeface="Poppins" pitchFamily="34" charset="-120"/>
               </a:rPr>
-              <a:t>▮ pace mark = share of quarter elapsed (26%)</a:t>
+              <a:t>▮ pace mark = share of quarter elapsed (27%)</a:t>
             </a:r>
             <a:endParaRPr lang="en-US" sz="1200" dirty="0"/>
           </a:p>
@@ -27062,7 +27062,7 @@
                 <a:ea typeface="Poppins" pitchFamily="34" charset="-122"/>
                 <a:cs typeface="Poppins" pitchFamily="34" charset="-120"/>
               </a:rPr>
-              <a:t>NEW MRR ($/qtr) · register 18 Oct</a:t>
+              <a:t>NEW MRR ($/qtr) · register live</a:t>
             </a:r>
             <a:endParaRPr lang="en-US" sz="800" dirty="0"/>
           </a:p>
@@ -27101,7 +27101,7 @@
                 <a:ea typeface="Poppins" pitchFamily="34" charset="-122"/>
                 <a:cs typeface="Poppins" pitchFamily="34" charset="-120"/>
               </a:rPr>
-              <a:t>HARDWARE ($/qtr) · extracts to 18 Oct</a:t>
+              <a:t>HARDWARE ($/qtr) · extracts to 25 Oct</a:t>
             </a:r>
             <a:endParaRPr lang="en-US" sz="800" dirty="0"/>
           </a:p>
@@ -27647,7 +27647,7 @@
         </p:nvSpPr>
         <p:spPr>
           <a:xfrm>
-            <a:off x="3214116" y="3248406"/>
+            <a:off x="3219602" y="3248406"/>
             <a:ext cx="20117" cy="192024"/>
           </a:xfrm>
           <a:prstGeom prst="rect">
@@ -27867,7 +27867,7 @@
         </p:nvSpPr>
         <p:spPr>
           <a:xfrm>
-            <a:off x="6016935" y="3248406"/>
+            <a:off x="6022604" y="3248406"/>
             <a:ext cx="20117" cy="192024"/>
           </a:xfrm>
           <a:prstGeom prst="rect">
@@ -28146,7 +28146,7 @@
         </p:nvSpPr>
         <p:spPr>
           <a:xfrm>
-            <a:off x="3214116" y="3563874"/>
+            <a:off x="3219602" y="3563874"/>
             <a:ext cx="20117" cy="192024"/>
           </a:xfrm>
           <a:prstGeom prst="rect">
@@ -28222,15 +28222,15 @@
               <a:buNone/>
             </a:pPr>
             <a:r>
-              <a:rPr lang="en-US" sz="850" dirty="0">
-                <a:solidFill>
-                  <a:srgbClr val="8FA1AC"/>
-                </a:solidFill>
-                <a:latin typeface="Poppins" pitchFamily="34" charset="0"/>
-                <a:ea typeface="Poppins" pitchFamily="34" charset="-122"/>
-                <a:cs typeface="Poppins" pitchFamily="34" charset="-120"/>
-              </a:rPr>
-              <a:t>—</a:t>
+              <a:rPr lang="en-US" sz="850" b="1" dirty="0">
+                <a:solidFill>
+                  <a:srgbClr val="B4552D"/>
+                </a:solidFill>
+                <a:latin typeface="Poppins" pitchFamily="34" charset="0"/>
+                <a:ea typeface="Poppins" pitchFamily="34" charset="-122"/>
+                <a:cs typeface="Poppins" pitchFamily="34" charset="-120"/>
+              </a:rPr>
+              <a:t>−1,148</a:t>
             </a:r>
             <a:endParaRPr lang="en-US" sz="850" dirty="0"/>
           </a:p>
@@ -28345,6 +28345,505 @@
         <p:spPr>
           <a:xfrm>
             <a:off x="5879592" y="3609594"/>
+            <a:ext cx="68031" cy="100584"/>
+          </a:xfrm>
+          <a:prstGeom prst="roundRect">
+            <a:avLst>
+              <a:gd name="adj" fmla="val 67205"/>
+            </a:avLst>
+          </a:prstGeom>
+          <a:solidFill>
+            <a:srgbClr val="B4552D"/>
+          </a:solidFill>
+          <a:ln/>
+        </p:spPr>
+      </p:sp>
+      <p:sp>
+        <p:nvSpPr>
+          <p:cNvPr id="71" name="Shape 69"/>
+          <p:cNvSpPr/>
+          <p:nvPr/>
+        </p:nvSpPr>
+        <p:spPr>
+          <a:xfrm>
+            <a:off x="6022604" y="3563874"/>
+            <a:ext cx="20117" cy="192024"/>
+          </a:xfrm>
+          <a:prstGeom prst="rect">
+            <a:avLst/>
+          </a:prstGeom>
+          <a:solidFill>
+            <a:srgbClr val="12293A"/>
+          </a:solidFill>
+          <a:ln/>
+        </p:spPr>
+      </p:sp>
+      <p:sp>
+        <p:nvSpPr>
+          <p:cNvPr id="72" name="Text 70"/>
+          <p:cNvSpPr txBox="1"/>
+          <p:nvPr/>
+        </p:nvSpPr>
+        <p:spPr>
+          <a:xfrm>
+            <a:off x="6464808" y="3497580"/>
+            <a:ext cx="329184" cy="315468"/>
+          </a:xfrm>
+          <a:prstGeom prst="rect">
+            <a:avLst/>
+          </a:prstGeom>
+          <a:noFill/>
+          <a:ln/>
+        </p:spPr>
+        <p:txBody>
+          <a:bodyPr wrap="square" lIns="0" tIns="0" rIns="0" bIns="0" rtlCol="0" anchor="ctr"/>
+          <a:lstStyle/>
+          <a:p>
+            <a:pPr algn="r" indent="0" marL="0">
+              <a:buNone/>
+            </a:pPr>
+            <a:r>
+              <a:rPr lang="en-US" sz="800" b="1" dirty="0">
+                <a:solidFill>
+                  <a:srgbClr val="B4552D"/>
+                </a:solidFill>
+                <a:latin typeface="Poppins" pitchFamily="34" charset="0"/>
+                <a:ea typeface="Poppins" pitchFamily="34" charset="-122"/>
+                <a:cs typeface="Poppins" pitchFamily="34" charset="-120"/>
+              </a:rPr>
+              <a:t>12%</a:t>
+            </a:r>
+            <a:endParaRPr lang="en-US" sz="800" dirty="0"/>
+          </a:p>
+        </p:txBody>
+      </p:sp>
+      <p:sp>
+        <p:nvSpPr>
+          <p:cNvPr id="73" name="Text 71"/>
+          <p:cNvSpPr txBox="1"/>
+          <p:nvPr/>
+        </p:nvSpPr>
+        <p:spPr>
+          <a:xfrm>
+            <a:off x="6830568" y="3497580"/>
+            <a:ext cx="987552" cy="315468"/>
+          </a:xfrm>
+          <a:prstGeom prst="rect">
+            <a:avLst/>
+          </a:prstGeom>
+          <a:noFill/>
+          <a:ln/>
+        </p:spPr>
+        <p:txBody>
+          <a:bodyPr wrap="square" lIns="0" tIns="0" rIns="0" bIns="0" rtlCol="0" anchor="ctr"/>
+          <a:lstStyle/>
+          <a:p>
+            <a:pPr algn="r" indent="0" marL="0">
+              <a:buNone/>
+            </a:pPr>
+            <a:r>
+              <a:rPr lang="en-US" sz="850" b="1" dirty="0">
+                <a:solidFill>
+                  <a:srgbClr val="3D8F5F"/>
+                </a:solidFill>
+                <a:latin typeface="Poppins" pitchFamily="34" charset="0"/>
+                <a:ea typeface="Poppins" pitchFamily="34" charset="-122"/>
+                <a:cs typeface="Poppins" pitchFamily="34" charset="-120"/>
+              </a:rPr>
+              <a:t>+160</a:t>
+            </a:r>
+            <a:endParaRPr lang="en-US" sz="850" dirty="0"/>
+          </a:p>
+        </p:txBody>
+      </p:sp>
+      <p:sp>
+        <p:nvSpPr>
+          <p:cNvPr id="74" name="Shape 72"/>
+          <p:cNvSpPr/>
+          <p:nvPr/>
+        </p:nvSpPr>
+        <p:spPr>
+          <a:xfrm>
+            <a:off x="612648" y="4091940"/>
+            <a:ext cx="7232904" cy="6401"/>
+          </a:xfrm>
+          <a:prstGeom prst="rect">
+            <a:avLst/>
+          </a:prstGeom>
+          <a:solidFill>
+            <a:srgbClr val="E2EAEE"/>
+          </a:solidFill>
+          <a:ln/>
+        </p:spPr>
+      </p:sp>
+      <p:sp>
+        <p:nvSpPr>
+          <p:cNvPr id="75" name="Text 73"/>
+          <p:cNvSpPr txBox="1"/>
+          <p:nvPr/>
+        </p:nvSpPr>
+        <p:spPr>
+          <a:xfrm>
+            <a:off x="612648" y="3813048"/>
+            <a:ext cx="1371600" cy="315468"/>
+          </a:xfrm>
+          <a:prstGeom prst="rect">
+            <a:avLst/>
+          </a:prstGeom>
+          <a:noFill/>
+          <a:ln/>
+        </p:spPr>
+        <p:txBody>
+          <a:bodyPr wrap="square" lIns="0" tIns="0" rIns="0" bIns="0" rtlCol="0" anchor="ctr"/>
+          <a:lstStyle/>
+          <a:p>
+            <a:pPr indent="0" marL="0">
+              <a:buNone/>
+            </a:pPr>
+            <a:r>
+              <a:rPr lang="en-US" sz="900" dirty="0">
+                <a:solidFill>
+                  <a:srgbClr val="12293A"/>
+                </a:solidFill>
+                <a:latin typeface="Poppins" pitchFamily="34" charset="0"/>
+                <a:ea typeface="Poppins" pitchFamily="34" charset="-122"/>
+                <a:cs typeface="Poppins" pitchFamily="34" charset="-120"/>
+              </a:rPr>
+              <a:t>Bradford Young</a:t>
+            </a:r>
+            <a:endParaRPr lang="en-US" sz="900" dirty="0"/>
+          </a:p>
+        </p:txBody>
+      </p:sp>
+      <p:sp>
+        <p:nvSpPr>
+          <p:cNvPr id="76" name="Text 74"/>
+          <p:cNvSpPr txBox="1"/>
+          <p:nvPr/>
+        </p:nvSpPr>
+        <p:spPr>
+          <a:xfrm>
+            <a:off x="2002536" y="3813048"/>
+            <a:ext cx="475488" cy="315468"/>
+          </a:xfrm>
+          <a:prstGeom prst="rect">
+            <a:avLst/>
+          </a:prstGeom>
+          <a:noFill/>
+          <a:ln/>
+        </p:spPr>
+        <p:txBody>
+          <a:bodyPr wrap="square" lIns="0" tIns="0" rIns="0" bIns="0" rtlCol="0" anchor="ctr"/>
+          <a:lstStyle/>
+          <a:p>
+            <a:pPr algn="r" indent="0" marL="0">
+              <a:buNone/>
+            </a:pPr>
+            <a:r>
+              <a:rPr lang="en-US" sz="850" dirty="0">
+                <a:solidFill>
+                  <a:srgbClr val="5E7280"/>
+                </a:solidFill>
+                <a:latin typeface="Poppins" pitchFamily="34" charset="0"/>
+                <a:ea typeface="Poppins" pitchFamily="34" charset="-122"/>
+                <a:cs typeface="Poppins" pitchFamily="34" charset="-120"/>
+              </a:rPr>
+              <a:t>$5k</a:t>
+            </a:r>
+            <a:endParaRPr lang="en-US" sz="850" dirty="0"/>
+          </a:p>
+        </p:txBody>
+      </p:sp>
+      <p:sp>
+        <p:nvSpPr>
+          <p:cNvPr id="77" name="Text 75"/>
+          <p:cNvSpPr txBox="1"/>
+          <p:nvPr/>
+        </p:nvSpPr>
+        <p:spPr>
+          <a:xfrm>
+            <a:off x="2514600" y="3813048"/>
+            <a:ext cx="475488" cy="315468"/>
+          </a:xfrm>
+          <a:prstGeom prst="rect">
+            <a:avLst/>
+          </a:prstGeom>
+          <a:noFill/>
+          <a:ln/>
+        </p:spPr>
+        <p:txBody>
+          <a:bodyPr wrap="square" lIns="0" tIns="0" rIns="0" bIns="0" rtlCol="0" anchor="ctr"/>
+          <a:lstStyle/>
+          <a:p>
+            <a:pPr algn="r" indent="0" marL="0">
+              <a:buNone/>
+            </a:pPr>
+            <a:r>
+              <a:rPr lang="en-US" sz="850" b="1" dirty="0">
+                <a:solidFill>
+                  <a:srgbClr val="B4552D"/>
+                </a:solidFill>
+                <a:latin typeface="Poppins" pitchFamily="34" charset="0"/>
+                <a:ea typeface="Poppins" pitchFamily="34" charset="-122"/>
+                <a:cs typeface="Poppins" pitchFamily="34" charset="-120"/>
+              </a:rPr>
+              <a:t>$177</a:t>
+            </a:r>
+            <a:endParaRPr lang="en-US" sz="850" dirty="0"/>
+          </a:p>
+        </p:txBody>
+      </p:sp>
+      <p:sp>
+        <p:nvSpPr>
+          <p:cNvPr id="78" name="Shape 76"/>
+          <p:cNvSpPr/>
+          <p:nvPr/>
+        </p:nvSpPr>
+        <p:spPr>
+          <a:xfrm>
+            <a:off x="3081528" y="3925062"/>
+            <a:ext cx="548640" cy="100584"/>
+          </a:xfrm>
+          <a:prstGeom prst="roundRect">
+            <a:avLst>
+              <a:gd name="adj" fmla="val 45455"/>
+            </a:avLst>
+          </a:prstGeom>
+          <a:solidFill>
+            <a:srgbClr val="E2EAEE"/>
+          </a:solidFill>
+          <a:ln/>
+        </p:spPr>
+      </p:sp>
+      <p:sp>
+        <p:nvSpPr>
+          <p:cNvPr id="79" name="Shape 77"/>
+          <p:cNvSpPr/>
+          <p:nvPr/>
+        </p:nvSpPr>
+        <p:spPr>
+          <a:xfrm>
+            <a:off x="3081528" y="3925062"/>
+            <a:ext cx="54864" cy="100584"/>
+          </a:xfrm>
+          <a:prstGeom prst="roundRect">
+            <a:avLst>
+              <a:gd name="adj" fmla="val 83333"/>
+            </a:avLst>
+          </a:prstGeom>
+          <a:solidFill>
+            <a:srgbClr val="B4552D"/>
+          </a:solidFill>
+          <a:ln/>
+        </p:spPr>
+      </p:sp>
+      <p:sp>
+        <p:nvSpPr>
+          <p:cNvPr id="80" name="Shape 78"/>
+          <p:cNvSpPr/>
+          <p:nvPr/>
+        </p:nvSpPr>
+        <p:spPr>
+          <a:xfrm>
+            <a:off x="3219602" y="3879342"/>
+            <a:ext cx="20117" cy="192024"/>
+          </a:xfrm>
+          <a:prstGeom prst="rect">
+            <a:avLst/>
+          </a:prstGeom>
+          <a:solidFill>
+            <a:srgbClr val="12293A"/>
+          </a:solidFill>
+          <a:ln/>
+        </p:spPr>
+      </p:sp>
+      <p:sp>
+        <p:nvSpPr>
+          <p:cNvPr id="81" name="Text 79"/>
+          <p:cNvSpPr txBox="1"/>
+          <p:nvPr/>
+        </p:nvSpPr>
+        <p:spPr>
+          <a:xfrm>
+            <a:off x="3630168" y="3813048"/>
+            <a:ext cx="329184" cy="315468"/>
+          </a:xfrm>
+          <a:prstGeom prst="rect">
+            <a:avLst/>
+          </a:prstGeom>
+          <a:noFill/>
+          <a:ln/>
+        </p:spPr>
+        <p:txBody>
+          <a:bodyPr wrap="square" lIns="0" tIns="0" rIns="0" bIns="0" rtlCol="0" anchor="ctr"/>
+          <a:lstStyle/>
+          <a:p>
+            <a:pPr algn="r" indent="0" marL="0">
+              <a:buNone/>
+            </a:pPr>
+            <a:r>
+              <a:rPr lang="en-US" sz="800" b="1" dirty="0">
+                <a:solidFill>
+                  <a:srgbClr val="B4552D"/>
+                </a:solidFill>
+                <a:latin typeface="Poppins" pitchFamily="34" charset="0"/>
+                <a:ea typeface="Poppins" pitchFamily="34" charset="-122"/>
+                <a:cs typeface="Poppins" pitchFamily="34" charset="-120"/>
+              </a:rPr>
+              <a:t>4%</a:t>
+            </a:r>
+            <a:endParaRPr lang="en-US" sz="800" dirty="0"/>
+          </a:p>
+        </p:txBody>
+      </p:sp>
+      <p:sp>
+        <p:nvSpPr>
+          <p:cNvPr id="82" name="Text 80"/>
+          <p:cNvSpPr txBox="1"/>
+          <p:nvPr/>
+        </p:nvSpPr>
+        <p:spPr>
+          <a:xfrm>
+            <a:off x="3904488" y="3813048"/>
+            <a:ext cx="640080" cy="315468"/>
+          </a:xfrm>
+          <a:prstGeom prst="rect">
+            <a:avLst/>
+          </a:prstGeom>
+          <a:noFill/>
+          <a:ln/>
+        </p:spPr>
+        <p:txBody>
+          <a:bodyPr wrap="square" lIns="0" tIns="0" rIns="0" bIns="0" rtlCol="0" anchor="ctr"/>
+          <a:lstStyle/>
+          <a:p>
+            <a:pPr algn="r" indent="0" marL="0">
+              <a:buNone/>
+            </a:pPr>
+            <a:r>
+              <a:rPr lang="en-US" sz="850" dirty="0">
+                <a:solidFill>
+                  <a:srgbClr val="8FA1AC"/>
+                </a:solidFill>
+                <a:latin typeface="Poppins" pitchFamily="34" charset="0"/>
+                <a:ea typeface="Poppins" pitchFamily="34" charset="-122"/>
+                <a:cs typeface="Poppins" pitchFamily="34" charset="-120"/>
+              </a:rPr>
+              <a:t>—</a:t>
+            </a:r>
+            <a:endParaRPr lang="en-US" sz="850" dirty="0"/>
+          </a:p>
+        </p:txBody>
+      </p:sp>
+      <p:sp>
+        <p:nvSpPr>
+          <p:cNvPr id="83" name="Text 81"/>
+          <p:cNvSpPr txBox="1"/>
+          <p:nvPr/>
+        </p:nvSpPr>
+        <p:spPr>
+          <a:xfrm>
+            <a:off x="4599432" y="3813048"/>
+            <a:ext cx="548640" cy="315468"/>
+          </a:xfrm>
+          <a:prstGeom prst="rect">
+            <a:avLst/>
+          </a:prstGeom>
+          <a:noFill/>
+          <a:ln/>
+        </p:spPr>
+        <p:txBody>
+          <a:bodyPr wrap="square" lIns="0" tIns="0" rIns="0" bIns="0" rtlCol="0" anchor="ctr"/>
+          <a:lstStyle/>
+          <a:p>
+            <a:pPr algn="r" indent="0" marL="0">
+              <a:buNone/>
+            </a:pPr>
+            <a:r>
+              <a:rPr lang="en-US" sz="850" dirty="0">
+                <a:solidFill>
+                  <a:srgbClr val="5E7280"/>
+                </a:solidFill>
+                <a:latin typeface="Poppins" pitchFamily="34" charset="0"/>
+                <a:ea typeface="Poppins" pitchFamily="34" charset="-122"/>
+                <a:cs typeface="Poppins" pitchFamily="34" charset="-120"/>
+              </a:rPr>
+              <a:t>$163k</a:t>
+            </a:r>
+            <a:endParaRPr lang="en-US" sz="850" dirty="0"/>
+          </a:p>
+        </p:txBody>
+      </p:sp>
+      <p:sp>
+        <p:nvSpPr>
+          <p:cNvPr id="84" name="Text 82"/>
+          <p:cNvSpPr txBox="1"/>
+          <p:nvPr/>
+        </p:nvSpPr>
+        <p:spPr>
+          <a:xfrm>
+            <a:off x="5184648" y="3813048"/>
+            <a:ext cx="603504" cy="315468"/>
+          </a:xfrm>
+          <a:prstGeom prst="rect">
+            <a:avLst/>
+          </a:prstGeom>
+          <a:noFill/>
+          <a:ln/>
+        </p:spPr>
+        <p:txBody>
+          <a:bodyPr wrap="square" lIns="0" tIns="0" rIns="0" bIns="0" rtlCol="0" anchor="ctr"/>
+          <a:lstStyle/>
+          <a:p>
+            <a:pPr algn="r" indent="0" marL="0">
+              <a:buNone/>
+            </a:pPr>
+            <a:r>
+              <a:rPr lang="en-US" sz="850" b="1" dirty="0">
+                <a:solidFill>
+                  <a:srgbClr val="B4552D"/>
+                </a:solidFill>
+                <a:latin typeface="Poppins" pitchFamily="34" charset="0"/>
+                <a:ea typeface="Poppins" pitchFamily="34" charset="-122"/>
+                <a:cs typeface="Poppins" pitchFamily="34" charset="-120"/>
+              </a:rPr>
+              <a:t>$18k</a:t>
+            </a:r>
+            <a:endParaRPr lang="en-US" sz="850" dirty="0"/>
+          </a:p>
+        </p:txBody>
+      </p:sp>
+      <p:sp>
+        <p:nvSpPr>
+          <p:cNvPr id="85" name="Shape 83"/>
+          <p:cNvSpPr/>
+          <p:nvPr/>
+        </p:nvSpPr>
+        <p:spPr>
+          <a:xfrm>
+            <a:off x="5879592" y="3925062"/>
+            <a:ext cx="566928" cy="100584"/>
+          </a:xfrm>
+          <a:prstGeom prst="roundRect">
+            <a:avLst>
+              <a:gd name="adj" fmla="val 45455"/>
+            </a:avLst>
+          </a:prstGeom>
+          <a:solidFill>
+            <a:srgbClr val="E2EAEE"/>
+          </a:solidFill>
+          <a:ln/>
+        </p:spPr>
+      </p:sp>
+      <p:sp>
+        <p:nvSpPr>
+          <p:cNvPr id="86" name="Shape 84"/>
+          <p:cNvSpPr/>
+          <p:nvPr/>
+        </p:nvSpPr>
+        <p:spPr>
+          <a:xfrm>
+            <a:off x="5879592" y="3925062"/>
             <a:ext cx="62362" cy="100584"/>
           </a:xfrm>
           <a:prstGeom prst="roundRect">
@@ -28360,13 +28859,13 @@
       </p:sp>
       <p:sp>
         <p:nvSpPr>
-          <p:cNvPr id="71" name="Shape 69"/>
-          <p:cNvSpPr/>
-          <p:nvPr/>
-        </p:nvSpPr>
-        <p:spPr>
-          <a:xfrm>
-            <a:off x="6016935" y="3563874"/>
+          <p:cNvPr id="87" name="Shape 85"/>
+          <p:cNvSpPr/>
+          <p:nvPr/>
+        </p:nvSpPr>
+        <p:spPr>
+          <a:xfrm>
+            <a:off x="6022604" y="3879342"/>
             <a:ext cx="20117" cy="192024"/>
           </a:xfrm>
           <a:prstGeom prst="rect">
@@ -28380,13 +28879,13 @@
       </p:sp>
       <p:sp>
         <p:nvSpPr>
-          <p:cNvPr id="72" name="Text 70"/>
-          <p:cNvSpPr txBox="1"/>
-          <p:nvPr/>
-        </p:nvSpPr>
-        <p:spPr>
-          <a:xfrm>
-            <a:off x="6464808" y="3497580"/>
+          <p:cNvPr id="88" name="Text 86"/>
+          <p:cNvSpPr txBox="1"/>
+          <p:nvPr/>
+        </p:nvSpPr>
+        <p:spPr>
+          <a:xfrm>
+            <a:off x="6464808" y="3813048"/>
             <a:ext cx="329184" cy="315468"/>
           </a:xfrm>
           <a:prstGeom prst="rect">
@@ -28419,13 +28918,13 @@
       </p:sp>
       <p:sp>
         <p:nvSpPr>
-          <p:cNvPr id="73" name="Text 71"/>
-          <p:cNvSpPr txBox="1"/>
-          <p:nvPr/>
-        </p:nvSpPr>
-        <p:spPr>
-          <a:xfrm>
-            <a:off x="6830568" y="3497580"/>
+          <p:cNvPr id="89" name="Text 87"/>
+          <p:cNvSpPr txBox="1"/>
+          <p:nvPr/>
+        </p:nvSpPr>
+        <p:spPr>
+          <a:xfrm>
+            <a:off x="6830568" y="3813048"/>
             <a:ext cx="987552" cy="315468"/>
           </a:xfrm>
           <a:prstGeom prst="rect">
@@ -28444,13 +28943,13 @@
             <a:r>
               <a:rPr lang="en-US" sz="850" b="1" dirty="0">
                 <a:solidFill>
-                  <a:srgbClr val="8FA1AC"/>
-                </a:solidFill>
-                <a:latin typeface="Poppins" pitchFamily="34" charset="0"/>
-                <a:ea typeface="Poppins" pitchFamily="34" charset="-122"/>
-                <a:cs typeface="Poppins" pitchFamily="34" charset="-120"/>
-              </a:rPr>
-              <a:t>—</a:t>
+                  <a:srgbClr val="3D8F5F"/>
+                </a:solidFill>
+                <a:latin typeface="Poppins" pitchFamily="34" charset="0"/>
+                <a:ea typeface="Poppins" pitchFamily="34" charset="-122"/>
+                <a:cs typeface="Poppins" pitchFamily="34" charset="-120"/>
+              </a:rPr>
+              <a:t>+10k</a:t>
             </a:r>
             <a:endParaRPr lang="en-US" sz="850" dirty="0"/>
           </a:p>
@@ -28458,13 +28957,13 @@
       </p:sp>
       <p:sp>
         <p:nvSpPr>
-          <p:cNvPr id="74" name="Shape 72"/>
-          <p:cNvSpPr/>
-          <p:nvPr/>
-        </p:nvSpPr>
-        <p:spPr>
-          <a:xfrm>
-            <a:off x="612648" y="4091940"/>
+          <p:cNvPr id="90" name="Shape 88"/>
+          <p:cNvSpPr/>
+          <p:nvPr/>
+        </p:nvSpPr>
+        <p:spPr>
+          <a:xfrm>
+            <a:off x="612648" y="4407408"/>
             <a:ext cx="7232904" cy="6401"/>
           </a:xfrm>
           <a:prstGeom prst="rect">
@@ -28478,13 +28977,13 @@
       </p:sp>
       <p:sp>
         <p:nvSpPr>
-          <p:cNvPr id="75" name="Text 73"/>
-          <p:cNvSpPr txBox="1"/>
-          <p:nvPr/>
-        </p:nvSpPr>
-        <p:spPr>
-          <a:xfrm>
-            <a:off x="612648" y="3813048"/>
+          <p:cNvPr id="91" name="Text 89"/>
+          <p:cNvSpPr txBox="1"/>
+          <p:nvPr/>
+        </p:nvSpPr>
+        <p:spPr>
+          <a:xfrm>
+            <a:off x="612648" y="4128516"/>
             <a:ext cx="1371600" cy="315468"/>
           </a:xfrm>
           <a:prstGeom prst="rect">
@@ -28509,7 +29008,7 @@
                 <a:ea typeface="Poppins" pitchFamily="34" charset="-122"/>
                 <a:cs typeface="Poppins" pitchFamily="34" charset="-120"/>
               </a:rPr>
-              <a:t>Bradford Young</a:t>
+              <a:t>Jasmine Hikuroa</a:t>
             </a:r>
             <a:endParaRPr lang="en-US" sz="900" dirty="0"/>
           </a:p>
@@ -28517,13 +29016,13 @@
       </p:sp>
       <p:sp>
         <p:nvSpPr>
-          <p:cNvPr id="76" name="Text 74"/>
-          <p:cNvSpPr txBox="1"/>
-          <p:nvPr/>
-        </p:nvSpPr>
-        <p:spPr>
-          <a:xfrm>
-            <a:off x="2002536" y="3813048"/>
+          <p:cNvPr id="92" name="Text 90"/>
+          <p:cNvSpPr txBox="1"/>
+          <p:nvPr/>
+        </p:nvSpPr>
+        <p:spPr>
+          <a:xfrm>
+            <a:off x="2002536" y="4128516"/>
             <a:ext cx="475488" cy="315468"/>
           </a:xfrm>
           <a:prstGeom prst="rect">
@@ -28548,7 +29047,7 @@
                 <a:ea typeface="Poppins" pitchFamily="34" charset="-122"/>
                 <a:cs typeface="Poppins" pitchFamily="34" charset="-120"/>
               </a:rPr>
-              <a:t>$5k</a:t>
+              <a:t>$6k</a:t>
             </a:r>
             <a:endParaRPr lang="en-US" sz="850" dirty="0"/>
           </a:p>
@@ -28556,13 +29055,13 @@
       </p:sp>
       <p:sp>
         <p:nvSpPr>
-          <p:cNvPr id="77" name="Text 75"/>
-          <p:cNvSpPr txBox="1"/>
-          <p:nvPr/>
-        </p:nvSpPr>
-        <p:spPr>
-          <a:xfrm>
-            <a:off x="2514600" y="3813048"/>
+          <p:cNvPr id="93" name="Text 91"/>
+          <p:cNvSpPr txBox="1"/>
+          <p:nvPr/>
+        </p:nvSpPr>
+        <p:spPr>
+          <a:xfrm>
+            <a:off x="2514600" y="4128516"/>
             <a:ext cx="475488" cy="315468"/>
           </a:xfrm>
           <a:prstGeom prst="rect">
@@ -28587,7 +29086,7 @@
                 <a:ea typeface="Poppins" pitchFamily="34" charset="-122"/>
                 <a:cs typeface="Poppins" pitchFamily="34" charset="-120"/>
               </a:rPr>
-              <a:t>$177</a:t>
+              <a:t>$2k</a:t>
             </a:r>
             <a:endParaRPr lang="en-US" sz="850" dirty="0"/>
           </a:p>
@@ -28595,13 +29094,13 @@
       </p:sp>
       <p:sp>
         <p:nvSpPr>
-          <p:cNvPr id="78" name="Shape 76"/>
-          <p:cNvSpPr/>
-          <p:nvPr/>
-        </p:nvSpPr>
-        <p:spPr>
-          <a:xfrm>
-            <a:off x="3081528" y="3925062"/>
+          <p:cNvPr id="94" name="Shape 92"/>
+          <p:cNvSpPr/>
+          <p:nvPr/>
+        </p:nvSpPr>
+        <p:spPr>
+          <a:xfrm>
+            <a:off x="3081528" y="4240530"/>
             <a:ext cx="548640" cy="100584"/>
           </a:xfrm>
           <a:prstGeom prst="roundRect">
@@ -28617,13 +29116,512 @@
       </p:sp>
       <p:sp>
         <p:nvSpPr>
-          <p:cNvPr id="79" name="Shape 77"/>
-          <p:cNvSpPr/>
-          <p:nvPr/>
-        </p:nvSpPr>
-        <p:spPr>
-          <a:xfrm>
-            <a:off x="3081528" y="3925062"/>
+          <p:cNvPr id="95" name="Shape 93"/>
+          <p:cNvSpPr/>
+          <p:nvPr/>
+        </p:nvSpPr>
+        <p:spPr>
+          <a:xfrm>
+            <a:off x="3081528" y="4240530"/>
+            <a:ext cx="197510" cy="100584"/>
+          </a:xfrm>
+          <a:prstGeom prst="roundRect">
+            <a:avLst>
+              <a:gd name="adj" fmla="val 45455"/>
+            </a:avLst>
+          </a:prstGeom>
+          <a:solidFill>
+            <a:srgbClr val="B4552D"/>
+          </a:solidFill>
+          <a:ln/>
+        </p:spPr>
+      </p:sp>
+      <p:sp>
+        <p:nvSpPr>
+          <p:cNvPr id="96" name="Shape 94"/>
+          <p:cNvSpPr/>
+          <p:nvPr/>
+        </p:nvSpPr>
+        <p:spPr>
+          <a:xfrm>
+            <a:off x="3219602" y="4194810"/>
+            <a:ext cx="20117" cy="192024"/>
+          </a:xfrm>
+          <a:prstGeom prst="rect">
+            <a:avLst/>
+          </a:prstGeom>
+          <a:solidFill>
+            <a:srgbClr val="12293A"/>
+          </a:solidFill>
+          <a:ln/>
+        </p:spPr>
+      </p:sp>
+      <p:sp>
+        <p:nvSpPr>
+          <p:cNvPr id="97" name="Text 95"/>
+          <p:cNvSpPr txBox="1"/>
+          <p:nvPr/>
+        </p:nvSpPr>
+        <p:spPr>
+          <a:xfrm>
+            <a:off x="3630168" y="4128516"/>
+            <a:ext cx="329184" cy="315468"/>
+          </a:xfrm>
+          <a:prstGeom prst="rect">
+            <a:avLst/>
+          </a:prstGeom>
+          <a:noFill/>
+          <a:ln/>
+        </p:spPr>
+        <p:txBody>
+          <a:bodyPr wrap="square" lIns="0" tIns="0" rIns="0" bIns="0" rtlCol="0" anchor="ctr"/>
+          <a:lstStyle/>
+          <a:p>
+            <a:pPr algn="r" indent="0" marL="0">
+              <a:buNone/>
+            </a:pPr>
+            <a:r>
+              <a:rPr lang="en-US" sz="800" b="1" dirty="0">
+                <a:solidFill>
+                  <a:srgbClr val="B4552D"/>
+                </a:solidFill>
+                <a:latin typeface="Poppins" pitchFamily="34" charset="0"/>
+                <a:ea typeface="Poppins" pitchFamily="34" charset="-122"/>
+                <a:cs typeface="Poppins" pitchFamily="34" charset="-120"/>
+              </a:rPr>
+              <a:t>36%</a:t>
+            </a:r>
+            <a:endParaRPr lang="en-US" sz="800" dirty="0"/>
+          </a:p>
+        </p:txBody>
+      </p:sp>
+      <p:sp>
+        <p:nvSpPr>
+          <p:cNvPr id="98" name="Text 96"/>
+          <p:cNvSpPr txBox="1"/>
+          <p:nvPr/>
+        </p:nvSpPr>
+        <p:spPr>
+          <a:xfrm>
+            <a:off x="3904488" y="4128516"/>
+            <a:ext cx="640080" cy="315468"/>
+          </a:xfrm>
+          <a:prstGeom prst="rect">
+            <a:avLst/>
+          </a:prstGeom>
+          <a:noFill/>
+          <a:ln/>
+        </p:spPr>
+        <p:txBody>
+          <a:bodyPr wrap="square" lIns="0" tIns="0" rIns="0" bIns="0" rtlCol="0" anchor="ctr"/>
+          <a:lstStyle/>
+          <a:p>
+            <a:pPr algn="r" indent="0" marL="0">
+              <a:buNone/>
+            </a:pPr>
+            <a:r>
+              <a:rPr lang="en-US" sz="850" dirty="0">
+                <a:solidFill>
+                  <a:srgbClr val="8FA1AC"/>
+                </a:solidFill>
+                <a:latin typeface="Poppins" pitchFamily="34" charset="0"/>
+                <a:ea typeface="Poppins" pitchFamily="34" charset="-122"/>
+                <a:cs typeface="Poppins" pitchFamily="34" charset="-120"/>
+              </a:rPr>
+              <a:t>—</a:t>
+            </a:r>
+            <a:endParaRPr lang="en-US" sz="850" dirty="0"/>
+          </a:p>
+        </p:txBody>
+      </p:sp>
+      <p:sp>
+        <p:nvSpPr>
+          <p:cNvPr id="99" name="Text 97"/>
+          <p:cNvSpPr txBox="1"/>
+          <p:nvPr/>
+        </p:nvSpPr>
+        <p:spPr>
+          <a:xfrm>
+            <a:off x="4599432" y="4128516"/>
+            <a:ext cx="548640" cy="315468"/>
+          </a:xfrm>
+          <a:prstGeom prst="rect">
+            <a:avLst/>
+          </a:prstGeom>
+          <a:noFill/>
+          <a:ln/>
+        </p:spPr>
+        <p:txBody>
+          <a:bodyPr wrap="square" lIns="0" tIns="0" rIns="0" bIns="0" rtlCol="0" anchor="ctr"/>
+          <a:lstStyle/>
+          <a:p>
+            <a:pPr algn="r" indent="0" marL="0">
+              <a:buNone/>
+            </a:pPr>
+            <a:r>
+              <a:rPr lang="en-US" sz="850" dirty="0">
+                <a:solidFill>
+                  <a:srgbClr val="5E7280"/>
+                </a:solidFill>
+                <a:latin typeface="Poppins" pitchFamily="34" charset="0"/>
+                <a:ea typeface="Poppins" pitchFamily="34" charset="-122"/>
+                <a:cs typeface="Poppins" pitchFamily="34" charset="-120"/>
+              </a:rPr>
+              <a:t>$214k</a:t>
+            </a:r>
+            <a:endParaRPr lang="en-US" sz="850" dirty="0"/>
+          </a:p>
+        </p:txBody>
+      </p:sp>
+      <p:sp>
+        <p:nvSpPr>
+          <p:cNvPr id="100" name="Text 98"/>
+          <p:cNvSpPr txBox="1"/>
+          <p:nvPr/>
+        </p:nvSpPr>
+        <p:spPr>
+          <a:xfrm>
+            <a:off x="5184648" y="4128516"/>
+            <a:ext cx="603504" cy="315468"/>
+          </a:xfrm>
+          <a:prstGeom prst="rect">
+            <a:avLst/>
+          </a:prstGeom>
+          <a:noFill/>
+          <a:ln/>
+        </p:spPr>
+        <p:txBody>
+          <a:bodyPr wrap="square" lIns="0" tIns="0" rIns="0" bIns="0" rtlCol="0" anchor="ctr"/>
+          <a:lstStyle/>
+          <a:p>
+            <a:pPr algn="r" indent="0" marL="0">
+              <a:buNone/>
+            </a:pPr>
+            <a:r>
+              <a:rPr lang="en-US" sz="850" b="1" dirty="0">
+                <a:solidFill>
+                  <a:srgbClr val="B4552D"/>
+                </a:solidFill>
+                <a:latin typeface="Poppins" pitchFamily="34" charset="0"/>
+                <a:ea typeface="Poppins" pitchFamily="34" charset="-122"/>
+                <a:cs typeface="Poppins" pitchFamily="34" charset="-120"/>
+              </a:rPr>
+              <a:t>$33k</a:t>
+            </a:r>
+            <a:endParaRPr lang="en-US" sz="850" dirty="0"/>
+          </a:p>
+        </p:txBody>
+      </p:sp>
+      <p:sp>
+        <p:nvSpPr>
+          <p:cNvPr id="101" name="Shape 99"/>
+          <p:cNvSpPr/>
+          <p:nvPr/>
+        </p:nvSpPr>
+        <p:spPr>
+          <a:xfrm>
+            <a:off x="5879592" y="4240530"/>
+            <a:ext cx="566928" cy="100584"/>
+          </a:xfrm>
+          <a:prstGeom prst="roundRect">
+            <a:avLst>
+              <a:gd name="adj" fmla="val 45455"/>
+            </a:avLst>
+          </a:prstGeom>
+          <a:solidFill>
+            <a:srgbClr val="E2EAEE"/>
+          </a:solidFill>
+          <a:ln/>
+        </p:spPr>
+      </p:sp>
+      <p:sp>
+        <p:nvSpPr>
+          <p:cNvPr id="102" name="Shape 100"/>
+          <p:cNvSpPr/>
+          <p:nvPr/>
+        </p:nvSpPr>
+        <p:spPr>
+          <a:xfrm>
+            <a:off x="5879592" y="4240530"/>
+            <a:ext cx="85039" cy="100584"/>
+          </a:xfrm>
+          <a:prstGeom prst="roundRect">
+            <a:avLst>
+              <a:gd name="adj" fmla="val 53764"/>
+            </a:avLst>
+          </a:prstGeom>
+          <a:solidFill>
+            <a:srgbClr val="B4552D"/>
+          </a:solidFill>
+          <a:ln/>
+        </p:spPr>
+      </p:sp>
+      <p:sp>
+        <p:nvSpPr>
+          <p:cNvPr id="103" name="Shape 101"/>
+          <p:cNvSpPr/>
+          <p:nvPr/>
+        </p:nvSpPr>
+        <p:spPr>
+          <a:xfrm>
+            <a:off x="6022604" y="4194810"/>
+            <a:ext cx="20117" cy="192024"/>
+          </a:xfrm>
+          <a:prstGeom prst="rect">
+            <a:avLst/>
+          </a:prstGeom>
+          <a:solidFill>
+            <a:srgbClr val="12293A"/>
+          </a:solidFill>
+          <a:ln/>
+        </p:spPr>
+      </p:sp>
+      <p:sp>
+        <p:nvSpPr>
+          <p:cNvPr id="104" name="Text 102"/>
+          <p:cNvSpPr txBox="1"/>
+          <p:nvPr/>
+        </p:nvSpPr>
+        <p:spPr>
+          <a:xfrm>
+            <a:off x="6464808" y="4128516"/>
+            <a:ext cx="329184" cy="315468"/>
+          </a:xfrm>
+          <a:prstGeom prst="rect">
+            <a:avLst/>
+          </a:prstGeom>
+          <a:noFill/>
+          <a:ln/>
+        </p:spPr>
+        <p:txBody>
+          <a:bodyPr wrap="square" lIns="0" tIns="0" rIns="0" bIns="0" rtlCol="0" anchor="ctr"/>
+          <a:lstStyle/>
+          <a:p>
+            <a:pPr algn="r" indent="0" marL="0">
+              <a:buNone/>
+            </a:pPr>
+            <a:r>
+              <a:rPr lang="en-US" sz="800" b="1" dirty="0">
+                <a:solidFill>
+                  <a:srgbClr val="B4552D"/>
+                </a:solidFill>
+                <a:latin typeface="Poppins" pitchFamily="34" charset="0"/>
+                <a:ea typeface="Poppins" pitchFamily="34" charset="-122"/>
+                <a:cs typeface="Poppins" pitchFamily="34" charset="-120"/>
+              </a:rPr>
+              <a:t>15%</a:t>
+            </a:r>
+            <a:endParaRPr lang="en-US" sz="800" dirty="0"/>
+          </a:p>
+        </p:txBody>
+      </p:sp>
+      <p:sp>
+        <p:nvSpPr>
+          <p:cNvPr id="105" name="Text 103"/>
+          <p:cNvSpPr txBox="1"/>
+          <p:nvPr/>
+        </p:nvSpPr>
+        <p:spPr>
+          <a:xfrm>
+            <a:off x="6830568" y="4128516"/>
+            <a:ext cx="987552" cy="315468"/>
+          </a:xfrm>
+          <a:prstGeom prst="rect">
+            <a:avLst/>
+          </a:prstGeom>
+          <a:noFill/>
+          <a:ln/>
+        </p:spPr>
+        <p:txBody>
+          <a:bodyPr wrap="square" lIns="0" tIns="0" rIns="0" bIns="0" rtlCol="0" anchor="ctr"/>
+          <a:lstStyle/>
+          <a:p>
+            <a:pPr algn="r" indent="0" marL="0">
+              <a:buNone/>
+            </a:pPr>
+            <a:r>
+              <a:rPr lang="en-US" sz="850" b="1" dirty="0">
+                <a:solidFill>
+                  <a:srgbClr val="3D8F5F"/>
+                </a:solidFill>
+                <a:latin typeface="Poppins" pitchFamily="34" charset="0"/>
+                <a:ea typeface="Poppins" pitchFamily="34" charset="-122"/>
+                <a:cs typeface="Poppins" pitchFamily="34" charset="-120"/>
+              </a:rPr>
+              <a:t>+918</a:t>
+            </a:r>
+            <a:endParaRPr lang="en-US" sz="850" dirty="0"/>
+          </a:p>
+        </p:txBody>
+      </p:sp>
+      <p:sp>
+        <p:nvSpPr>
+          <p:cNvPr id="106" name="Shape 104"/>
+          <p:cNvSpPr/>
+          <p:nvPr/>
+        </p:nvSpPr>
+        <p:spPr>
+          <a:xfrm>
+            <a:off x="612648" y="4722876"/>
+            <a:ext cx="7232904" cy="6401"/>
+          </a:xfrm>
+          <a:prstGeom prst="rect">
+            <a:avLst/>
+          </a:prstGeom>
+          <a:solidFill>
+            <a:srgbClr val="E2EAEE"/>
+          </a:solidFill>
+          <a:ln/>
+        </p:spPr>
+      </p:sp>
+      <p:sp>
+        <p:nvSpPr>
+          <p:cNvPr id="107" name="Text 105"/>
+          <p:cNvSpPr txBox="1"/>
+          <p:nvPr/>
+        </p:nvSpPr>
+        <p:spPr>
+          <a:xfrm>
+            <a:off x="612648" y="4443984"/>
+            <a:ext cx="1371600" cy="315468"/>
+          </a:xfrm>
+          <a:prstGeom prst="rect">
+            <a:avLst/>
+          </a:prstGeom>
+          <a:noFill/>
+          <a:ln/>
+        </p:spPr>
+        <p:txBody>
+          <a:bodyPr wrap="square" lIns="0" tIns="0" rIns="0" bIns="0" rtlCol="0" anchor="ctr"/>
+          <a:lstStyle/>
+          <a:p>
+            <a:pPr indent="0" marL="0">
+              <a:buNone/>
+            </a:pPr>
+            <a:r>
+              <a:rPr lang="en-US" sz="900" dirty="0">
+                <a:solidFill>
+                  <a:srgbClr val="12293A"/>
+                </a:solidFill>
+                <a:latin typeface="Poppins" pitchFamily="34" charset="0"/>
+                <a:ea typeface="Poppins" pitchFamily="34" charset="-122"/>
+                <a:cs typeface="Poppins" pitchFamily="34" charset="-120"/>
+              </a:rPr>
+              <a:t>Phuong Ho</a:t>
+            </a:r>
+            <a:endParaRPr lang="en-US" sz="900" dirty="0"/>
+          </a:p>
+        </p:txBody>
+      </p:sp>
+      <p:sp>
+        <p:nvSpPr>
+          <p:cNvPr id="108" name="Text 106"/>
+          <p:cNvSpPr txBox="1"/>
+          <p:nvPr/>
+        </p:nvSpPr>
+        <p:spPr>
+          <a:xfrm>
+            <a:off x="2002536" y="4443984"/>
+            <a:ext cx="475488" cy="315468"/>
+          </a:xfrm>
+          <a:prstGeom prst="rect">
+            <a:avLst/>
+          </a:prstGeom>
+          <a:noFill/>
+          <a:ln/>
+        </p:spPr>
+        <p:txBody>
+          <a:bodyPr wrap="square" lIns="0" tIns="0" rIns="0" bIns="0" rtlCol="0" anchor="ctr"/>
+          <a:lstStyle/>
+          <a:p>
+            <a:pPr algn="r" indent="0" marL="0">
+              <a:buNone/>
+            </a:pPr>
+            <a:r>
+              <a:rPr lang="en-US" sz="850" dirty="0">
+                <a:solidFill>
+                  <a:srgbClr val="5E7280"/>
+                </a:solidFill>
+                <a:latin typeface="Poppins" pitchFamily="34" charset="0"/>
+                <a:ea typeface="Poppins" pitchFamily="34" charset="-122"/>
+                <a:cs typeface="Poppins" pitchFamily="34" charset="-120"/>
+              </a:rPr>
+              <a:t>$2k</a:t>
+            </a:r>
+            <a:endParaRPr lang="en-US" sz="850" dirty="0"/>
+          </a:p>
+        </p:txBody>
+      </p:sp>
+      <p:sp>
+        <p:nvSpPr>
+          <p:cNvPr id="109" name="Text 107"/>
+          <p:cNvSpPr txBox="1"/>
+          <p:nvPr/>
+        </p:nvSpPr>
+        <p:spPr>
+          <a:xfrm>
+            <a:off x="2514600" y="4443984"/>
+            <a:ext cx="475488" cy="315468"/>
+          </a:xfrm>
+          <a:prstGeom prst="rect">
+            <a:avLst/>
+          </a:prstGeom>
+          <a:noFill/>
+          <a:ln/>
+        </p:spPr>
+        <p:txBody>
+          <a:bodyPr wrap="square" lIns="0" tIns="0" rIns="0" bIns="0" rtlCol="0" anchor="ctr"/>
+          <a:lstStyle/>
+          <a:p>
+            <a:pPr algn="r" indent="0" marL="0">
+              <a:buNone/>
+            </a:pPr>
+            <a:r>
+              <a:rPr lang="en-US" sz="850" b="1" dirty="0">
+                <a:solidFill>
+                  <a:srgbClr val="B4552D"/>
+                </a:solidFill>
+                <a:latin typeface="Poppins" pitchFamily="34" charset="0"/>
+                <a:ea typeface="Poppins" pitchFamily="34" charset="-122"/>
+                <a:cs typeface="Poppins" pitchFamily="34" charset="-120"/>
+              </a:rPr>
+              <a:t>$98</a:t>
+            </a:r>
+            <a:endParaRPr lang="en-US" sz="850" dirty="0"/>
+          </a:p>
+        </p:txBody>
+      </p:sp>
+      <p:sp>
+        <p:nvSpPr>
+          <p:cNvPr id="110" name="Shape 108"/>
+          <p:cNvSpPr/>
+          <p:nvPr/>
+        </p:nvSpPr>
+        <p:spPr>
+          <a:xfrm>
+            <a:off x="3081528" y="4555998"/>
+            <a:ext cx="548640" cy="100584"/>
+          </a:xfrm>
+          <a:prstGeom prst="roundRect">
+            <a:avLst>
+              <a:gd name="adj" fmla="val 45455"/>
+            </a:avLst>
+          </a:prstGeom>
+          <a:solidFill>
+            <a:srgbClr val="E2EAEE"/>
+          </a:solidFill>
+          <a:ln/>
+        </p:spPr>
+      </p:sp>
+      <p:sp>
+        <p:nvSpPr>
+          <p:cNvPr id="111" name="Shape 109"/>
+          <p:cNvSpPr/>
+          <p:nvPr/>
+        </p:nvSpPr>
+        <p:spPr>
+          <a:xfrm>
+            <a:off x="3081528" y="4555998"/>
             <a:ext cx="54864" cy="100584"/>
           </a:xfrm>
           <a:prstGeom prst="roundRect">
@@ -28639,13 +29637,13 @@
       </p:sp>
       <p:sp>
         <p:nvSpPr>
-          <p:cNvPr id="80" name="Shape 78"/>
-          <p:cNvSpPr/>
-          <p:nvPr/>
-        </p:nvSpPr>
-        <p:spPr>
-          <a:xfrm>
-            <a:off x="3214116" y="3879342"/>
+          <p:cNvPr id="112" name="Shape 110"/>
+          <p:cNvSpPr/>
+          <p:nvPr/>
+        </p:nvSpPr>
+        <p:spPr>
+          <a:xfrm>
+            <a:off x="3219602" y="4510278"/>
             <a:ext cx="20117" cy="192024"/>
           </a:xfrm>
           <a:prstGeom prst="rect">
@@ -28659,13 +29657,13 @@
       </p:sp>
       <p:sp>
         <p:nvSpPr>
-          <p:cNvPr id="81" name="Text 79"/>
-          <p:cNvSpPr txBox="1"/>
-          <p:nvPr/>
-        </p:nvSpPr>
-        <p:spPr>
-          <a:xfrm>
-            <a:off x="3630168" y="3813048"/>
+          <p:cNvPr id="113" name="Text 111"/>
+          <p:cNvSpPr txBox="1"/>
+          <p:nvPr/>
+        </p:nvSpPr>
+        <p:spPr>
+          <a:xfrm>
+            <a:off x="3630168" y="4443984"/>
             <a:ext cx="329184" cy="315468"/>
           </a:xfrm>
           <a:prstGeom prst="rect">
@@ -28690,7 +29688,7 @@
                 <a:ea typeface="Poppins" pitchFamily="34" charset="-122"/>
                 <a:cs typeface="Poppins" pitchFamily="34" charset="-120"/>
               </a:rPr>
-              <a:t>4%</a:t>
+              <a:t>5%</a:t>
             </a:r>
             <a:endParaRPr lang="en-US" sz="800" dirty="0"/>
           </a:p>
@@ -28698,13 +29696,13 @@
       </p:sp>
       <p:sp>
         <p:nvSpPr>
-          <p:cNvPr id="82" name="Text 80"/>
-          <p:cNvSpPr txBox="1"/>
-          <p:nvPr/>
-        </p:nvSpPr>
-        <p:spPr>
-          <a:xfrm>
-            <a:off x="3904488" y="3813048"/>
+          <p:cNvPr id="114" name="Text 112"/>
+          <p:cNvSpPr txBox="1"/>
+          <p:nvPr/>
+        </p:nvSpPr>
+        <p:spPr>
+          <a:xfrm>
+            <a:off x="3904488" y="4443984"/>
             <a:ext cx="640080" cy="315468"/>
           </a:xfrm>
           <a:prstGeom prst="rect">
@@ -28737,13 +29735,13 @@
       </p:sp>
       <p:sp>
         <p:nvSpPr>
-          <p:cNvPr id="83" name="Text 81"/>
-          <p:cNvSpPr txBox="1"/>
-          <p:nvPr/>
-        </p:nvSpPr>
-        <p:spPr>
-          <a:xfrm>
-            <a:off x="4599432" y="3813048"/>
+          <p:cNvPr id="115" name="Text 113"/>
+          <p:cNvSpPr txBox="1"/>
+          <p:nvPr/>
+        </p:nvSpPr>
+        <p:spPr>
+          <a:xfrm>
+            <a:off x="4599432" y="4443984"/>
             <a:ext cx="548640" cy="315468"/>
           </a:xfrm>
           <a:prstGeom prst="rect">
@@ -28768,7 +29766,7 @@
                 <a:ea typeface="Poppins" pitchFamily="34" charset="-122"/>
                 <a:cs typeface="Poppins" pitchFamily="34" charset="-120"/>
               </a:rPr>
-              <a:t>$163k</a:t>
+              <a:t>$55k</a:t>
             </a:r>
             <a:endParaRPr lang="en-US" sz="850" dirty="0"/>
           </a:p>
@@ -28776,13 +29774,13 @@
       </p:sp>
       <p:sp>
         <p:nvSpPr>
-          <p:cNvPr id="84" name="Text 82"/>
-          <p:cNvSpPr txBox="1"/>
-          <p:nvPr/>
-        </p:nvSpPr>
-        <p:spPr>
-          <a:xfrm>
-            <a:off x="5184648" y="3813048"/>
+          <p:cNvPr id="116" name="Text 114"/>
+          <p:cNvSpPr txBox="1"/>
+          <p:nvPr/>
+        </p:nvSpPr>
+        <p:spPr>
+          <a:xfrm>
+            <a:off x="5184648" y="4443984"/>
             <a:ext cx="603504" cy="315468"/>
           </a:xfrm>
           <a:prstGeom prst="rect">
@@ -28807,7 +29805,7 @@
                 <a:ea typeface="Poppins" pitchFamily="34" charset="-122"/>
                 <a:cs typeface="Poppins" pitchFamily="34" charset="-120"/>
               </a:rPr>
-              <a:t>$8k</a:t>
+              <a:t>$38k</a:t>
             </a:r>
             <a:endParaRPr lang="en-US" sz="850" dirty="0"/>
           </a:p>
@@ -28815,13 +29813,13 @@
       </p:sp>
       <p:sp>
         <p:nvSpPr>
-          <p:cNvPr id="85" name="Shape 83"/>
-          <p:cNvSpPr/>
-          <p:nvPr/>
-        </p:nvSpPr>
-        <p:spPr>
-          <a:xfrm>
-            <a:off x="5879592" y="3925062"/>
+          <p:cNvPr id="117" name="Shape 115"/>
+          <p:cNvSpPr/>
+          <p:nvPr/>
+        </p:nvSpPr>
+        <p:spPr>
+          <a:xfrm>
+            <a:off x="5879592" y="4555998"/>
             <a:ext cx="566928" cy="100584"/>
           </a:xfrm>
           <a:prstGeom prst="roundRect">
@@ -28837,13 +29835,292 @@
       </p:sp>
       <p:sp>
         <p:nvSpPr>
-          <p:cNvPr id="86" name="Shape 84"/>
-          <p:cNvSpPr/>
-          <p:nvPr/>
-        </p:nvSpPr>
-        <p:spPr>
-          <a:xfrm>
-            <a:off x="5879592" y="3925062"/>
+          <p:cNvPr id="118" name="Shape 116"/>
+          <p:cNvSpPr/>
+          <p:nvPr/>
+        </p:nvSpPr>
+        <p:spPr>
+          <a:xfrm>
+            <a:off x="5879592" y="4555998"/>
+            <a:ext cx="391180" cy="100584"/>
+          </a:xfrm>
+          <a:prstGeom prst="roundRect">
+            <a:avLst>
+              <a:gd name="adj" fmla="val 45455"/>
+            </a:avLst>
+          </a:prstGeom>
+          <a:solidFill>
+            <a:srgbClr val="B4552D"/>
+          </a:solidFill>
+          <a:ln/>
+        </p:spPr>
+      </p:sp>
+      <p:sp>
+        <p:nvSpPr>
+          <p:cNvPr id="119" name="Shape 117"/>
+          <p:cNvSpPr/>
+          <p:nvPr/>
+        </p:nvSpPr>
+        <p:spPr>
+          <a:xfrm>
+            <a:off x="6022604" y="4510278"/>
+            <a:ext cx="20117" cy="192024"/>
+          </a:xfrm>
+          <a:prstGeom prst="rect">
+            <a:avLst/>
+          </a:prstGeom>
+          <a:solidFill>
+            <a:srgbClr val="12293A"/>
+          </a:solidFill>
+          <a:ln/>
+        </p:spPr>
+      </p:sp>
+      <p:sp>
+        <p:nvSpPr>
+          <p:cNvPr id="120" name="Text 118"/>
+          <p:cNvSpPr txBox="1"/>
+          <p:nvPr/>
+        </p:nvSpPr>
+        <p:spPr>
+          <a:xfrm>
+            <a:off x="6464808" y="4443984"/>
+            <a:ext cx="329184" cy="315468"/>
+          </a:xfrm>
+          <a:prstGeom prst="rect">
+            <a:avLst/>
+          </a:prstGeom>
+          <a:noFill/>
+          <a:ln/>
+        </p:spPr>
+        <p:txBody>
+          <a:bodyPr wrap="square" lIns="0" tIns="0" rIns="0" bIns="0" rtlCol="0" anchor="ctr"/>
+          <a:lstStyle/>
+          <a:p>
+            <a:pPr algn="r" indent="0" marL="0">
+              <a:buNone/>
+            </a:pPr>
+            <a:r>
+              <a:rPr lang="en-US" sz="800" b="1" dirty="0">
+                <a:solidFill>
+                  <a:srgbClr val="B4552D"/>
+                </a:solidFill>
+                <a:latin typeface="Poppins" pitchFamily="34" charset="0"/>
+                <a:ea typeface="Poppins" pitchFamily="34" charset="-122"/>
+                <a:cs typeface="Poppins" pitchFamily="34" charset="-120"/>
+              </a:rPr>
+              <a:t>69%</a:t>
+            </a:r>
+            <a:endParaRPr lang="en-US" sz="800" dirty="0"/>
+          </a:p>
+        </p:txBody>
+      </p:sp>
+      <p:sp>
+        <p:nvSpPr>
+          <p:cNvPr id="121" name="Text 119"/>
+          <p:cNvSpPr txBox="1"/>
+          <p:nvPr/>
+        </p:nvSpPr>
+        <p:spPr>
+          <a:xfrm>
+            <a:off x="6830568" y="4443984"/>
+            <a:ext cx="987552" cy="315468"/>
+          </a:xfrm>
+          <a:prstGeom prst="rect">
+            <a:avLst/>
+          </a:prstGeom>
+          <a:noFill/>
+          <a:ln/>
+        </p:spPr>
+        <p:txBody>
+          <a:bodyPr wrap="square" lIns="0" tIns="0" rIns="0" bIns="0" rtlCol="0" anchor="ctr"/>
+          <a:lstStyle/>
+          <a:p>
+            <a:pPr algn="r" indent="0" marL="0">
+              <a:buNone/>
+            </a:pPr>
+            <a:r>
+              <a:rPr lang="en-US" sz="850" b="1" dirty="0">
+                <a:solidFill>
+                  <a:srgbClr val="3D8F5F"/>
+                </a:solidFill>
+                <a:latin typeface="Poppins" pitchFamily="34" charset="0"/>
+                <a:ea typeface="Poppins" pitchFamily="34" charset="-122"/>
+                <a:cs typeface="Poppins" pitchFamily="34" charset="-120"/>
+              </a:rPr>
+              <a:t>+705</a:t>
+            </a:r>
+            <a:endParaRPr lang="en-US" sz="850" dirty="0"/>
+          </a:p>
+        </p:txBody>
+      </p:sp>
+      <p:sp>
+        <p:nvSpPr>
+          <p:cNvPr id="122" name="Shape 120"/>
+          <p:cNvSpPr/>
+          <p:nvPr/>
+        </p:nvSpPr>
+        <p:spPr>
+          <a:xfrm>
+            <a:off x="612648" y="5038344"/>
+            <a:ext cx="7232904" cy="6401"/>
+          </a:xfrm>
+          <a:prstGeom prst="rect">
+            <a:avLst/>
+          </a:prstGeom>
+          <a:solidFill>
+            <a:srgbClr val="E2EAEE"/>
+          </a:solidFill>
+          <a:ln/>
+        </p:spPr>
+      </p:sp>
+      <p:sp>
+        <p:nvSpPr>
+          <p:cNvPr id="123" name="Text 121"/>
+          <p:cNvSpPr txBox="1"/>
+          <p:nvPr/>
+        </p:nvSpPr>
+        <p:spPr>
+          <a:xfrm>
+            <a:off x="612648" y="4759452"/>
+            <a:ext cx="1371600" cy="315468"/>
+          </a:xfrm>
+          <a:prstGeom prst="rect">
+            <a:avLst/>
+          </a:prstGeom>
+          <a:noFill/>
+          <a:ln/>
+        </p:spPr>
+        <p:txBody>
+          <a:bodyPr wrap="square" lIns="0" tIns="0" rIns="0" bIns="0" rtlCol="0" anchor="ctr"/>
+          <a:lstStyle/>
+          <a:p>
+            <a:pPr indent="0" marL="0">
+              <a:buNone/>
+            </a:pPr>
+            <a:r>
+              <a:rPr lang="en-US" sz="900" dirty="0">
+                <a:solidFill>
+                  <a:srgbClr val="12293A"/>
+                </a:solidFill>
+                <a:latin typeface="Poppins" pitchFamily="34" charset="0"/>
+                <a:ea typeface="Poppins" pitchFamily="34" charset="-122"/>
+                <a:cs typeface="Poppins" pitchFamily="34" charset="-120"/>
+              </a:rPr>
+              <a:t>Mick Teasdale</a:t>
+            </a:r>
+            <a:endParaRPr lang="en-US" sz="900" dirty="0"/>
+          </a:p>
+        </p:txBody>
+      </p:sp>
+      <p:sp>
+        <p:nvSpPr>
+          <p:cNvPr id="124" name="Text 122"/>
+          <p:cNvSpPr txBox="1"/>
+          <p:nvPr/>
+        </p:nvSpPr>
+        <p:spPr>
+          <a:xfrm>
+            <a:off x="2002536" y="4759452"/>
+            <a:ext cx="475488" cy="315468"/>
+          </a:xfrm>
+          <a:prstGeom prst="rect">
+            <a:avLst/>
+          </a:prstGeom>
+          <a:noFill/>
+          <a:ln/>
+        </p:spPr>
+        <p:txBody>
+          <a:bodyPr wrap="square" lIns="0" tIns="0" rIns="0" bIns="0" rtlCol="0" anchor="ctr"/>
+          <a:lstStyle/>
+          <a:p>
+            <a:pPr algn="r" indent="0" marL="0">
+              <a:buNone/>
+            </a:pPr>
+            <a:r>
+              <a:rPr lang="en-US" sz="850" dirty="0">
+                <a:solidFill>
+                  <a:srgbClr val="5E7280"/>
+                </a:solidFill>
+                <a:latin typeface="Poppins" pitchFamily="34" charset="0"/>
+                <a:ea typeface="Poppins" pitchFamily="34" charset="-122"/>
+                <a:cs typeface="Poppins" pitchFamily="34" charset="-120"/>
+              </a:rPr>
+              <a:t>$3k</a:t>
+            </a:r>
+            <a:endParaRPr lang="en-US" sz="850" dirty="0"/>
+          </a:p>
+        </p:txBody>
+      </p:sp>
+      <p:sp>
+        <p:nvSpPr>
+          <p:cNvPr id="125" name="Text 123"/>
+          <p:cNvSpPr txBox="1"/>
+          <p:nvPr/>
+        </p:nvSpPr>
+        <p:spPr>
+          <a:xfrm>
+            <a:off x="2514600" y="4759452"/>
+            <a:ext cx="475488" cy="315468"/>
+          </a:xfrm>
+          <a:prstGeom prst="rect">
+            <a:avLst/>
+          </a:prstGeom>
+          <a:noFill/>
+          <a:ln/>
+        </p:spPr>
+        <p:txBody>
+          <a:bodyPr wrap="square" lIns="0" tIns="0" rIns="0" bIns="0" rtlCol="0" anchor="ctr"/>
+          <a:lstStyle/>
+          <a:p>
+            <a:pPr algn="r" indent="0" marL="0">
+              <a:buNone/>
+            </a:pPr>
+            <a:r>
+              <a:rPr lang="en-US" sz="850" b="1" dirty="0">
+                <a:solidFill>
+                  <a:srgbClr val="B4552D"/>
+                </a:solidFill>
+                <a:latin typeface="Poppins" pitchFamily="34" charset="0"/>
+                <a:ea typeface="Poppins" pitchFamily="34" charset="-122"/>
+                <a:cs typeface="Poppins" pitchFamily="34" charset="-120"/>
+              </a:rPr>
+              <a:t>$0</a:t>
+            </a:r>
+            <a:endParaRPr lang="en-US" sz="850" dirty="0"/>
+          </a:p>
+        </p:txBody>
+      </p:sp>
+      <p:sp>
+        <p:nvSpPr>
+          <p:cNvPr id="126" name="Shape 124"/>
+          <p:cNvSpPr/>
+          <p:nvPr/>
+        </p:nvSpPr>
+        <p:spPr>
+          <a:xfrm>
+            <a:off x="3081528" y="4871466"/>
+            <a:ext cx="548640" cy="100584"/>
+          </a:xfrm>
+          <a:prstGeom prst="roundRect">
+            <a:avLst>
+              <a:gd name="adj" fmla="val 45455"/>
+            </a:avLst>
+          </a:prstGeom>
+          <a:solidFill>
+            <a:srgbClr val="E2EAEE"/>
+          </a:solidFill>
+          <a:ln/>
+        </p:spPr>
+      </p:sp>
+      <p:sp>
+        <p:nvSpPr>
+          <p:cNvPr id="127" name="Shape 125"/>
+          <p:cNvSpPr/>
+          <p:nvPr/>
+        </p:nvSpPr>
+        <p:spPr>
+          <a:xfrm>
+            <a:off x="3081528" y="4871466"/>
             <a:ext cx="54864" cy="100584"/>
           </a:xfrm>
           <a:prstGeom prst="roundRect">
@@ -28859,13 +30136,13 @@
       </p:sp>
       <p:sp>
         <p:nvSpPr>
-          <p:cNvPr id="87" name="Shape 85"/>
-          <p:cNvSpPr/>
-          <p:nvPr/>
-        </p:nvSpPr>
-        <p:spPr>
-          <a:xfrm>
-            <a:off x="6016935" y="3879342"/>
+          <p:cNvPr id="128" name="Shape 126"/>
+          <p:cNvSpPr/>
+          <p:nvPr/>
+        </p:nvSpPr>
+        <p:spPr>
+          <a:xfrm>
+            <a:off x="3219602" y="4825746"/>
             <a:ext cx="20117" cy="192024"/>
           </a:xfrm>
           <a:prstGeom prst="rect">
@@ -28879,13 +30156,13 @@
       </p:sp>
       <p:sp>
         <p:nvSpPr>
-          <p:cNvPr id="88" name="Text 86"/>
-          <p:cNvSpPr txBox="1"/>
-          <p:nvPr/>
-        </p:nvSpPr>
-        <p:spPr>
-          <a:xfrm>
-            <a:off x="6464808" y="3813048"/>
+          <p:cNvPr id="129" name="Text 127"/>
+          <p:cNvSpPr txBox="1"/>
+          <p:nvPr/>
+        </p:nvSpPr>
+        <p:spPr>
+          <a:xfrm>
+            <a:off x="3630168" y="4759452"/>
             <a:ext cx="329184" cy="315468"/>
           </a:xfrm>
           <a:prstGeom prst="rect">
@@ -28910,7 +30187,7 @@
                 <a:ea typeface="Poppins" pitchFamily="34" charset="-122"/>
                 <a:cs typeface="Poppins" pitchFamily="34" charset="-120"/>
               </a:rPr>
-              <a:t>5%</a:t>
+              <a:t>0%</a:t>
             </a:r>
             <a:endParaRPr lang="en-US" sz="800" dirty="0"/>
           </a:p>
@@ -28918,13 +30195,169 @@
       </p:sp>
       <p:sp>
         <p:nvSpPr>
-          <p:cNvPr id="89" name="Text 87"/>
-          <p:cNvSpPr txBox="1"/>
-          <p:nvPr/>
-        </p:nvSpPr>
-        <p:spPr>
-          <a:xfrm>
-            <a:off x="6830568" y="3813048"/>
+          <p:cNvPr id="130" name="Text 128"/>
+          <p:cNvSpPr txBox="1"/>
+          <p:nvPr/>
+        </p:nvSpPr>
+        <p:spPr>
+          <a:xfrm>
+            <a:off x="3904488" y="4759452"/>
+            <a:ext cx="640080" cy="315468"/>
+          </a:xfrm>
+          <a:prstGeom prst="rect">
+            <a:avLst/>
+          </a:prstGeom>
+          <a:noFill/>
+          <a:ln/>
+        </p:spPr>
+        <p:txBody>
+          <a:bodyPr wrap="square" lIns="0" tIns="0" rIns="0" bIns="0" rtlCol="0" anchor="ctr"/>
+          <a:lstStyle/>
+          <a:p>
+            <a:pPr algn="r" indent="0" marL="0">
+              <a:buNone/>
+            </a:pPr>
+            <a:r>
+              <a:rPr lang="en-US" sz="850" dirty="0">
+                <a:solidFill>
+                  <a:srgbClr val="8FA1AC"/>
+                </a:solidFill>
+                <a:latin typeface="Poppins" pitchFamily="34" charset="0"/>
+                <a:ea typeface="Poppins" pitchFamily="34" charset="-122"/>
+                <a:cs typeface="Poppins" pitchFamily="34" charset="-120"/>
+              </a:rPr>
+              <a:t>—</a:t>
+            </a:r>
+            <a:endParaRPr lang="en-US" sz="850" dirty="0"/>
+          </a:p>
+        </p:txBody>
+      </p:sp>
+      <p:sp>
+        <p:nvSpPr>
+          <p:cNvPr id="131" name="Text 129"/>
+          <p:cNvSpPr txBox="1"/>
+          <p:nvPr/>
+        </p:nvSpPr>
+        <p:spPr>
+          <a:xfrm>
+            <a:off x="4599432" y="4759452"/>
+            <a:ext cx="548640" cy="315468"/>
+          </a:xfrm>
+          <a:prstGeom prst="rect">
+            <a:avLst/>
+          </a:prstGeom>
+          <a:noFill/>
+          <a:ln/>
+        </p:spPr>
+        <p:txBody>
+          <a:bodyPr wrap="square" lIns="0" tIns="0" rIns="0" bIns="0" rtlCol="0" anchor="ctr"/>
+          <a:lstStyle/>
+          <a:p>
+            <a:pPr algn="r" indent="0" marL="0">
+              <a:buNone/>
+            </a:pPr>
+            <a:r>
+              <a:rPr lang="en-US" sz="850" dirty="0">
+                <a:solidFill>
+                  <a:srgbClr val="5E7280"/>
+                </a:solidFill>
+                <a:latin typeface="Poppins" pitchFamily="34" charset="0"/>
+                <a:ea typeface="Poppins" pitchFamily="34" charset="-122"/>
+                <a:cs typeface="Poppins" pitchFamily="34" charset="-120"/>
+              </a:rPr>
+              <a:t>$46k</a:t>
+            </a:r>
+            <a:endParaRPr lang="en-US" sz="850" dirty="0"/>
+          </a:p>
+        </p:txBody>
+      </p:sp>
+      <p:sp>
+        <p:nvSpPr>
+          <p:cNvPr id="132" name="Text 130"/>
+          <p:cNvSpPr txBox="1"/>
+          <p:nvPr/>
+        </p:nvSpPr>
+        <p:spPr>
+          <a:xfrm>
+            <a:off x="5184648" y="4759452"/>
+            <a:ext cx="603504" cy="315468"/>
+          </a:xfrm>
+          <a:prstGeom prst="rect">
+            <a:avLst/>
+          </a:prstGeom>
+          <a:noFill/>
+          <a:ln/>
+        </p:spPr>
+        <p:txBody>
+          <a:bodyPr wrap="square" lIns="0" tIns="0" rIns="0" bIns="0" rtlCol="0" anchor="ctr"/>
+          <a:lstStyle/>
+          <a:p>
+            <a:pPr algn="r" indent="0" marL="0">
+              <a:buNone/>
+            </a:pPr>
+            <a:r>
+              <a:rPr lang="en-US" sz="850" b="1" dirty="0">
+                <a:solidFill>
+                  <a:srgbClr val="B4552D"/>
+                </a:solidFill>
+                <a:latin typeface="Poppins" pitchFamily="34" charset="0"/>
+                <a:ea typeface="Poppins" pitchFamily="34" charset="-122"/>
+                <a:cs typeface="Poppins" pitchFamily="34" charset="-120"/>
+              </a:rPr>
+              <a:t>—</a:t>
+            </a:r>
+            <a:endParaRPr lang="en-US" sz="850" dirty="0"/>
+          </a:p>
+        </p:txBody>
+      </p:sp>
+      <p:sp>
+        <p:nvSpPr>
+          <p:cNvPr id="133" name="Text 131"/>
+          <p:cNvSpPr txBox="1"/>
+          <p:nvPr/>
+        </p:nvSpPr>
+        <p:spPr>
+          <a:xfrm>
+            <a:off x="5843016" y="4759452"/>
+            <a:ext cx="932688" cy="315468"/>
+          </a:xfrm>
+          <a:prstGeom prst="rect">
+            <a:avLst/>
+          </a:prstGeom>
+          <a:noFill/>
+          <a:ln/>
+        </p:spPr>
+        <p:txBody>
+          <a:bodyPr wrap="square" lIns="0" tIns="0" rIns="0" bIns="0" rtlCol="0" anchor="ctr"/>
+          <a:lstStyle/>
+          <a:p>
+            <a:pPr algn="ctr" indent="0" marL="0">
+              <a:buNone/>
+            </a:pPr>
+            <a:r>
+              <a:rPr lang="en-US" sz="800" dirty="0">
+                <a:solidFill>
+                  <a:srgbClr val="8FA1AC"/>
+                </a:solidFill>
+                <a:latin typeface="Poppins" pitchFamily="34" charset="0"/>
+                <a:ea typeface="Poppins" pitchFamily="34" charset="-122"/>
+                <a:cs typeface="Poppins" pitchFamily="34" charset="-120"/>
+              </a:rPr>
+              <a:t>—</a:t>
+            </a:r>
+            <a:endParaRPr lang="en-US" sz="800" dirty="0"/>
+          </a:p>
+        </p:txBody>
+      </p:sp>
+      <p:sp>
+        <p:nvSpPr>
+          <p:cNvPr id="134" name="Text 132"/>
+          <p:cNvSpPr txBox="1"/>
+          <p:nvPr/>
+        </p:nvSpPr>
+        <p:spPr>
+          <a:xfrm>
+            <a:off x="6830568" y="4759452"/>
             <a:ext cx="987552" cy="315468"/>
           </a:xfrm>
           <a:prstGeom prst="rect">
@@ -28957,13 +30390,13 @@
       </p:sp>
       <p:sp>
         <p:nvSpPr>
-          <p:cNvPr id="90" name="Shape 88"/>
-          <p:cNvSpPr/>
-          <p:nvPr/>
-        </p:nvSpPr>
-        <p:spPr>
-          <a:xfrm>
-            <a:off x="612648" y="4407408"/>
+          <p:cNvPr id="135" name="Shape 133"/>
+          <p:cNvSpPr/>
+          <p:nvPr/>
+        </p:nvSpPr>
+        <p:spPr>
+          <a:xfrm>
+            <a:off x="612648" y="5353812"/>
             <a:ext cx="7232904" cy="6401"/>
           </a:xfrm>
           <a:prstGeom prst="rect">
@@ -28977,13 +30410,13 @@
       </p:sp>
       <p:sp>
         <p:nvSpPr>
-          <p:cNvPr id="91" name="Text 89"/>
-          <p:cNvSpPr txBox="1"/>
-          <p:nvPr/>
-        </p:nvSpPr>
-        <p:spPr>
-          <a:xfrm>
-            <a:off x="612648" y="4128516"/>
+          <p:cNvPr id="136" name="Text 134"/>
+          <p:cNvSpPr txBox="1"/>
+          <p:nvPr/>
+        </p:nvSpPr>
+        <p:spPr>
+          <a:xfrm>
+            <a:off x="612648" y="5074920"/>
             <a:ext cx="1371600" cy="315468"/>
           </a:xfrm>
           <a:prstGeom prst="rect">
@@ -29002,13 +30435,13 @@
             <a:r>
               <a:rPr lang="en-US" sz="900" dirty="0">
                 <a:solidFill>
-                  <a:srgbClr val="12293A"/>
-                </a:solidFill>
-                <a:latin typeface="Poppins" pitchFamily="34" charset="0"/>
-                <a:ea typeface="Poppins" pitchFamily="34" charset="-122"/>
-                <a:cs typeface="Poppins" pitchFamily="34" charset="-120"/>
-              </a:rPr>
-              <a:t>Jasmine Hikuroa</a:t>
+                  <a:srgbClr val="C88A2E"/>
+                </a:solidFill>
+                <a:latin typeface="Poppins" pitchFamily="34" charset="0"/>
+                <a:ea typeface="Poppins" pitchFamily="34" charset="-122"/>
+                <a:cs typeface="Poppins" pitchFamily="34" charset="-120"/>
+              </a:rPr>
+              <a:t>Unassigned</a:t>
             </a:r>
             <a:endParaRPr lang="en-US" sz="900" dirty="0"/>
           </a:p>
@@ -29016,13 +30449,13 @@
       </p:sp>
       <p:sp>
         <p:nvSpPr>
-          <p:cNvPr id="92" name="Text 90"/>
-          <p:cNvSpPr txBox="1"/>
-          <p:nvPr/>
-        </p:nvSpPr>
-        <p:spPr>
-          <a:xfrm>
-            <a:off x="2002536" y="4128516"/>
+          <p:cNvPr id="137" name="Text 135"/>
+          <p:cNvSpPr txBox="1"/>
+          <p:nvPr/>
+        </p:nvSpPr>
+        <p:spPr>
+          <a:xfrm>
+            <a:off x="2002536" y="5074920"/>
             <a:ext cx="475488" cy="315468"/>
           </a:xfrm>
           <a:prstGeom prst="rect">
@@ -29047,7 +30480,7 @@
                 <a:ea typeface="Poppins" pitchFamily="34" charset="-122"/>
                 <a:cs typeface="Poppins" pitchFamily="34" charset="-120"/>
               </a:rPr>
-              <a:t>$6k</a:t>
+              <a:t>$4k</a:t>
             </a:r>
             <a:endParaRPr lang="en-US" sz="850" dirty="0"/>
           </a:p>
@@ -29055,13 +30488,13 @@
       </p:sp>
       <p:sp>
         <p:nvSpPr>
-          <p:cNvPr id="93" name="Text 91"/>
-          <p:cNvSpPr txBox="1"/>
-          <p:nvPr/>
-        </p:nvSpPr>
-        <p:spPr>
-          <a:xfrm>
-            <a:off x="2514600" y="4128516"/>
+          <p:cNvPr id="138" name="Text 136"/>
+          <p:cNvSpPr txBox="1"/>
+          <p:nvPr/>
+        </p:nvSpPr>
+        <p:spPr>
+          <a:xfrm>
+            <a:off x="2514600" y="5074920"/>
             <a:ext cx="475488" cy="315468"/>
           </a:xfrm>
           <a:prstGeom prst="rect">
@@ -29086,7 +30519,7 @@
                 <a:ea typeface="Poppins" pitchFamily="34" charset="-122"/>
                 <a:cs typeface="Poppins" pitchFamily="34" charset="-120"/>
               </a:rPr>
-              <a:t>$2k</a:t>
+              <a:t>$294</a:t>
             </a:r>
             <a:endParaRPr lang="en-US" sz="850" dirty="0"/>
           </a:p>
@@ -29094,13 +30527,13 @@
       </p:sp>
       <p:sp>
         <p:nvSpPr>
-          <p:cNvPr id="94" name="Shape 92"/>
-          <p:cNvSpPr/>
-          <p:nvPr/>
-        </p:nvSpPr>
-        <p:spPr>
-          <a:xfrm>
-            <a:off x="3081528" y="4240530"/>
+          <p:cNvPr id="139" name="Shape 137"/>
+          <p:cNvSpPr/>
+          <p:nvPr/>
+        </p:nvSpPr>
+        <p:spPr>
+          <a:xfrm>
+            <a:off x="3081528" y="5186934"/>
             <a:ext cx="548640" cy="100584"/>
           </a:xfrm>
           <a:prstGeom prst="roundRect">
@@ -29116,512 +30549,13 @@
       </p:sp>
       <p:sp>
         <p:nvSpPr>
-          <p:cNvPr id="95" name="Shape 93"/>
-          <p:cNvSpPr/>
-          <p:nvPr/>
-        </p:nvSpPr>
-        <p:spPr>
-          <a:xfrm>
-            <a:off x="3081528" y="4240530"/>
-            <a:ext cx="197510" cy="100584"/>
-          </a:xfrm>
-          <a:prstGeom prst="roundRect">
-            <a:avLst>
-              <a:gd name="adj" fmla="val 45455"/>
-            </a:avLst>
-          </a:prstGeom>
-          <a:solidFill>
-            <a:srgbClr val="B4552D"/>
-          </a:solidFill>
-          <a:ln/>
-        </p:spPr>
-      </p:sp>
-      <p:sp>
-        <p:nvSpPr>
-          <p:cNvPr id="96" name="Shape 94"/>
-          <p:cNvSpPr/>
-          <p:nvPr/>
-        </p:nvSpPr>
-        <p:spPr>
-          <a:xfrm>
-            <a:off x="3214116" y="4194810"/>
-            <a:ext cx="20117" cy="192024"/>
-          </a:xfrm>
-          <a:prstGeom prst="rect">
-            <a:avLst/>
-          </a:prstGeom>
-          <a:solidFill>
-            <a:srgbClr val="12293A"/>
-          </a:solidFill>
-          <a:ln/>
-        </p:spPr>
-      </p:sp>
-      <p:sp>
-        <p:nvSpPr>
-          <p:cNvPr id="97" name="Text 95"/>
-          <p:cNvSpPr txBox="1"/>
-          <p:nvPr/>
-        </p:nvSpPr>
-        <p:spPr>
-          <a:xfrm>
-            <a:off x="3630168" y="4128516"/>
-            <a:ext cx="329184" cy="315468"/>
-          </a:xfrm>
-          <a:prstGeom prst="rect">
-            <a:avLst/>
-          </a:prstGeom>
-          <a:noFill/>
-          <a:ln/>
-        </p:spPr>
-        <p:txBody>
-          <a:bodyPr wrap="square" lIns="0" tIns="0" rIns="0" bIns="0" rtlCol="0" anchor="ctr"/>
-          <a:lstStyle/>
-          <a:p>
-            <a:pPr algn="r" indent="0" marL="0">
-              <a:buNone/>
-            </a:pPr>
-            <a:r>
-              <a:rPr lang="en-US" sz="800" b="1" dirty="0">
-                <a:solidFill>
-                  <a:srgbClr val="B4552D"/>
-                </a:solidFill>
-                <a:latin typeface="Poppins" pitchFamily="34" charset="0"/>
-                <a:ea typeface="Poppins" pitchFamily="34" charset="-122"/>
-                <a:cs typeface="Poppins" pitchFamily="34" charset="-120"/>
-              </a:rPr>
-              <a:t>36%</a:t>
-            </a:r>
-            <a:endParaRPr lang="en-US" sz="800" dirty="0"/>
-          </a:p>
-        </p:txBody>
-      </p:sp>
-      <p:sp>
-        <p:nvSpPr>
-          <p:cNvPr id="98" name="Text 96"/>
-          <p:cNvSpPr txBox="1"/>
-          <p:nvPr/>
-        </p:nvSpPr>
-        <p:spPr>
-          <a:xfrm>
-            <a:off x="3904488" y="4128516"/>
-            <a:ext cx="640080" cy="315468"/>
-          </a:xfrm>
-          <a:prstGeom prst="rect">
-            <a:avLst/>
-          </a:prstGeom>
-          <a:noFill/>
-          <a:ln/>
-        </p:spPr>
-        <p:txBody>
-          <a:bodyPr wrap="square" lIns="0" tIns="0" rIns="0" bIns="0" rtlCol="0" anchor="ctr"/>
-          <a:lstStyle/>
-          <a:p>
-            <a:pPr algn="r" indent="0" marL="0">
-              <a:buNone/>
-            </a:pPr>
-            <a:r>
-              <a:rPr lang="en-US" sz="850" dirty="0">
-                <a:solidFill>
-                  <a:srgbClr val="8FA1AC"/>
-                </a:solidFill>
-                <a:latin typeface="Poppins" pitchFamily="34" charset="0"/>
-                <a:ea typeface="Poppins" pitchFamily="34" charset="-122"/>
-                <a:cs typeface="Poppins" pitchFamily="34" charset="-120"/>
-              </a:rPr>
-              <a:t>—</a:t>
-            </a:r>
-            <a:endParaRPr lang="en-US" sz="850" dirty="0"/>
-          </a:p>
-        </p:txBody>
-      </p:sp>
-      <p:sp>
-        <p:nvSpPr>
-          <p:cNvPr id="99" name="Text 97"/>
-          <p:cNvSpPr txBox="1"/>
-          <p:nvPr/>
-        </p:nvSpPr>
-        <p:spPr>
-          <a:xfrm>
-            <a:off x="4599432" y="4128516"/>
-            <a:ext cx="548640" cy="315468"/>
-          </a:xfrm>
-          <a:prstGeom prst="rect">
-            <a:avLst/>
-          </a:prstGeom>
-          <a:noFill/>
-          <a:ln/>
-        </p:spPr>
-        <p:txBody>
-          <a:bodyPr wrap="square" lIns="0" tIns="0" rIns="0" bIns="0" rtlCol="0" anchor="ctr"/>
-          <a:lstStyle/>
-          <a:p>
-            <a:pPr algn="r" indent="0" marL="0">
-              <a:buNone/>
-            </a:pPr>
-            <a:r>
-              <a:rPr lang="en-US" sz="850" dirty="0">
-                <a:solidFill>
-                  <a:srgbClr val="5E7280"/>
-                </a:solidFill>
-                <a:latin typeface="Poppins" pitchFamily="34" charset="0"/>
-                <a:ea typeface="Poppins" pitchFamily="34" charset="-122"/>
-                <a:cs typeface="Poppins" pitchFamily="34" charset="-120"/>
-              </a:rPr>
-              <a:t>$214k</a:t>
-            </a:r>
-            <a:endParaRPr lang="en-US" sz="850" dirty="0"/>
-          </a:p>
-        </p:txBody>
-      </p:sp>
-      <p:sp>
-        <p:nvSpPr>
-          <p:cNvPr id="100" name="Text 98"/>
-          <p:cNvSpPr txBox="1"/>
-          <p:nvPr/>
-        </p:nvSpPr>
-        <p:spPr>
-          <a:xfrm>
-            <a:off x="5184648" y="4128516"/>
-            <a:ext cx="603504" cy="315468"/>
-          </a:xfrm>
-          <a:prstGeom prst="rect">
-            <a:avLst/>
-          </a:prstGeom>
-          <a:noFill/>
-          <a:ln/>
-        </p:spPr>
-        <p:txBody>
-          <a:bodyPr wrap="square" lIns="0" tIns="0" rIns="0" bIns="0" rtlCol="0" anchor="ctr"/>
-          <a:lstStyle/>
-          <a:p>
-            <a:pPr algn="r" indent="0" marL="0">
-              <a:buNone/>
-            </a:pPr>
-            <a:r>
-              <a:rPr lang="en-US" sz="850" b="1" dirty="0">
-                <a:solidFill>
-                  <a:srgbClr val="B4552D"/>
-                </a:solidFill>
-                <a:latin typeface="Poppins" pitchFamily="34" charset="0"/>
-                <a:ea typeface="Poppins" pitchFamily="34" charset="-122"/>
-                <a:cs typeface="Poppins" pitchFamily="34" charset="-120"/>
-              </a:rPr>
-              <a:t>$32k</a:t>
-            </a:r>
-            <a:endParaRPr lang="en-US" sz="850" dirty="0"/>
-          </a:p>
-        </p:txBody>
-      </p:sp>
-      <p:sp>
-        <p:nvSpPr>
-          <p:cNvPr id="101" name="Shape 99"/>
-          <p:cNvSpPr/>
-          <p:nvPr/>
-        </p:nvSpPr>
-        <p:spPr>
-          <a:xfrm>
-            <a:off x="5879592" y="4240530"/>
-            <a:ext cx="566928" cy="100584"/>
-          </a:xfrm>
-          <a:prstGeom prst="roundRect">
-            <a:avLst>
-              <a:gd name="adj" fmla="val 45455"/>
-            </a:avLst>
-          </a:prstGeom>
-          <a:solidFill>
-            <a:srgbClr val="E2EAEE"/>
-          </a:solidFill>
-          <a:ln/>
-        </p:spPr>
-      </p:sp>
-      <p:sp>
-        <p:nvSpPr>
-          <p:cNvPr id="102" name="Shape 100"/>
-          <p:cNvSpPr/>
-          <p:nvPr/>
-        </p:nvSpPr>
-        <p:spPr>
-          <a:xfrm>
-            <a:off x="5879592" y="4240530"/>
-            <a:ext cx="85039" cy="100584"/>
-          </a:xfrm>
-          <a:prstGeom prst="roundRect">
-            <a:avLst>
-              <a:gd name="adj" fmla="val 53764"/>
-            </a:avLst>
-          </a:prstGeom>
-          <a:solidFill>
-            <a:srgbClr val="B4552D"/>
-          </a:solidFill>
-          <a:ln/>
-        </p:spPr>
-      </p:sp>
-      <p:sp>
-        <p:nvSpPr>
-          <p:cNvPr id="103" name="Shape 101"/>
-          <p:cNvSpPr/>
-          <p:nvPr/>
-        </p:nvSpPr>
-        <p:spPr>
-          <a:xfrm>
-            <a:off x="6016935" y="4194810"/>
-            <a:ext cx="20117" cy="192024"/>
-          </a:xfrm>
-          <a:prstGeom prst="rect">
-            <a:avLst/>
-          </a:prstGeom>
-          <a:solidFill>
-            <a:srgbClr val="12293A"/>
-          </a:solidFill>
-          <a:ln/>
-        </p:spPr>
-      </p:sp>
-      <p:sp>
-        <p:nvSpPr>
-          <p:cNvPr id="104" name="Text 102"/>
-          <p:cNvSpPr txBox="1"/>
-          <p:nvPr/>
-        </p:nvSpPr>
-        <p:spPr>
-          <a:xfrm>
-            <a:off x="6464808" y="4128516"/>
-            <a:ext cx="329184" cy="315468"/>
-          </a:xfrm>
-          <a:prstGeom prst="rect">
-            <a:avLst/>
-          </a:prstGeom>
-          <a:noFill/>
-          <a:ln/>
-        </p:spPr>
-        <p:txBody>
-          <a:bodyPr wrap="square" lIns="0" tIns="0" rIns="0" bIns="0" rtlCol="0" anchor="ctr"/>
-          <a:lstStyle/>
-          <a:p>
-            <a:pPr algn="r" indent="0" marL="0">
-              <a:buNone/>
-            </a:pPr>
-            <a:r>
-              <a:rPr lang="en-US" sz="800" b="1" dirty="0">
-                <a:solidFill>
-                  <a:srgbClr val="B4552D"/>
-                </a:solidFill>
-                <a:latin typeface="Poppins" pitchFamily="34" charset="0"/>
-                <a:ea typeface="Poppins" pitchFamily="34" charset="-122"/>
-                <a:cs typeface="Poppins" pitchFamily="34" charset="-120"/>
-              </a:rPr>
-              <a:t>15%</a:t>
-            </a:r>
-            <a:endParaRPr lang="en-US" sz="800" dirty="0"/>
-          </a:p>
-        </p:txBody>
-      </p:sp>
-      <p:sp>
-        <p:nvSpPr>
-          <p:cNvPr id="105" name="Text 103"/>
-          <p:cNvSpPr txBox="1"/>
-          <p:nvPr/>
-        </p:nvSpPr>
-        <p:spPr>
-          <a:xfrm>
-            <a:off x="6830568" y="4128516"/>
-            <a:ext cx="987552" cy="315468"/>
-          </a:xfrm>
-          <a:prstGeom prst="rect">
-            <a:avLst/>
-          </a:prstGeom>
-          <a:noFill/>
-          <a:ln/>
-        </p:spPr>
-        <p:txBody>
-          <a:bodyPr wrap="square" lIns="0" tIns="0" rIns="0" bIns="0" rtlCol="0" anchor="ctr"/>
-          <a:lstStyle/>
-          <a:p>
-            <a:pPr algn="r" indent="0" marL="0">
-              <a:buNone/>
-            </a:pPr>
-            <a:r>
-              <a:rPr lang="en-US" sz="850" b="1" dirty="0">
-                <a:solidFill>
-                  <a:srgbClr val="8FA1AC"/>
-                </a:solidFill>
-                <a:latin typeface="Poppins" pitchFamily="34" charset="0"/>
-                <a:ea typeface="Poppins" pitchFamily="34" charset="-122"/>
-                <a:cs typeface="Poppins" pitchFamily="34" charset="-120"/>
-              </a:rPr>
-              <a:t>—</a:t>
-            </a:r>
-            <a:endParaRPr lang="en-US" sz="850" dirty="0"/>
-          </a:p>
-        </p:txBody>
-      </p:sp>
-      <p:sp>
-        <p:nvSpPr>
-          <p:cNvPr id="106" name="Shape 104"/>
-          <p:cNvSpPr/>
-          <p:nvPr/>
-        </p:nvSpPr>
-        <p:spPr>
-          <a:xfrm>
-            <a:off x="612648" y="4722876"/>
-            <a:ext cx="7232904" cy="6401"/>
-          </a:xfrm>
-          <a:prstGeom prst="rect">
-            <a:avLst/>
-          </a:prstGeom>
-          <a:solidFill>
-            <a:srgbClr val="E2EAEE"/>
-          </a:solidFill>
-          <a:ln/>
-        </p:spPr>
-      </p:sp>
-      <p:sp>
-        <p:nvSpPr>
-          <p:cNvPr id="107" name="Text 105"/>
-          <p:cNvSpPr txBox="1"/>
-          <p:nvPr/>
-        </p:nvSpPr>
-        <p:spPr>
-          <a:xfrm>
-            <a:off x="612648" y="4443984"/>
-            <a:ext cx="1371600" cy="315468"/>
-          </a:xfrm>
-          <a:prstGeom prst="rect">
-            <a:avLst/>
-          </a:prstGeom>
-          <a:noFill/>
-          <a:ln/>
-        </p:spPr>
-        <p:txBody>
-          <a:bodyPr wrap="square" lIns="0" tIns="0" rIns="0" bIns="0" rtlCol="0" anchor="ctr"/>
-          <a:lstStyle/>
-          <a:p>
-            <a:pPr indent="0" marL="0">
-              <a:buNone/>
-            </a:pPr>
-            <a:r>
-              <a:rPr lang="en-US" sz="900" dirty="0">
-                <a:solidFill>
-                  <a:srgbClr val="12293A"/>
-                </a:solidFill>
-                <a:latin typeface="Poppins" pitchFamily="34" charset="0"/>
-                <a:ea typeface="Poppins" pitchFamily="34" charset="-122"/>
-                <a:cs typeface="Poppins" pitchFamily="34" charset="-120"/>
-              </a:rPr>
-              <a:t>Phuong Ho</a:t>
-            </a:r>
-            <a:endParaRPr lang="en-US" sz="900" dirty="0"/>
-          </a:p>
-        </p:txBody>
-      </p:sp>
-      <p:sp>
-        <p:nvSpPr>
-          <p:cNvPr id="108" name="Text 106"/>
-          <p:cNvSpPr txBox="1"/>
-          <p:nvPr/>
-        </p:nvSpPr>
-        <p:spPr>
-          <a:xfrm>
-            <a:off x="2002536" y="4443984"/>
-            <a:ext cx="475488" cy="315468"/>
-          </a:xfrm>
-          <a:prstGeom prst="rect">
-            <a:avLst/>
-          </a:prstGeom>
-          <a:noFill/>
-          <a:ln/>
-        </p:spPr>
-        <p:txBody>
-          <a:bodyPr wrap="square" lIns="0" tIns="0" rIns="0" bIns="0" rtlCol="0" anchor="ctr"/>
-          <a:lstStyle/>
-          <a:p>
-            <a:pPr algn="r" indent="0" marL="0">
-              <a:buNone/>
-            </a:pPr>
-            <a:r>
-              <a:rPr lang="en-US" sz="850" dirty="0">
-                <a:solidFill>
-                  <a:srgbClr val="5E7280"/>
-                </a:solidFill>
-                <a:latin typeface="Poppins" pitchFamily="34" charset="0"/>
-                <a:ea typeface="Poppins" pitchFamily="34" charset="-122"/>
-                <a:cs typeface="Poppins" pitchFamily="34" charset="-120"/>
-              </a:rPr>
-              <a:t>$2k</a:t>
-            </a:r>
-            <a:endParaRPr lang="en-US" sz="850" dirty="0"/>
-          </a:p>
-        </p:txBody>
-      </p:sp>
-      <p:sp>
-        <p:nvSpPr>
-          <p:cNvPr id="109" name="Text 107"/>
-          <p:cNvSpPr txBox="1"/>
-          <p:nvPr/>
-        </p:nvSpPr>
-        <p:spPr>
-          <a:xfrm>
-            <a:off x="2514600" y="4443984"/>
-            <a:ext cx="475488" cy="315468"/>
-          </a:xfrm>
-          <a:prstGeom prst="rect">
-            <a:avLst/>
-          </a:prstGeom>
-          <a:noFill/>
-          <a:ln/>
-        </p:spPr>
-        <p:txBody>
-          <a:bodyPr wrap="square" lIns="0" tIns="0" rIns="0" bIns="0" rtlCol="0" anchor="ctr"/>
-          <a:lstStyle/>
-          <a:p>
-            <a:pPr algn="r" indent="0" marL="0">
-              <a:buNone/>
-            </a:pPr>
-            <a:r>
-              <a:rPr lang="en-US" sz="850" b="1" dirty="0">
-                <a:solidFill>
-                  <a:srgbClr val="B4552D"/>
-                </a:solidFill>
-                <a:latin typeface="Poppins" pitchFamily="34" charset="0"/>
-                <a:ea typeface="Poppins" pitchFamily="34" charset="-122"/>
-                <a:cs typeface="Poppins" pitchFamily="34" charset="-120"/>
-              </a:rPr>
-              <a:t>$98</a:t>
-            </a:r>
-            <a:endParaRPr lang="en-US" sz="850" dirty="0"/>
-          </a:p>
-        </p:txBody>
-      </p:sp>
-      <p:sp>
-        <p:nvSpPr>
-          <p:cNvPr id="110" name="Shape 108"/>
-          <p:cNvSpPr/>
-          <p:nvPr/>
-        </p:nvSpPr>
-        <p:spPr>
-          <a:xfrm>
-            <a:off x="3081528" y="4555998"/>
-            <a:ext cx="548640" cy="100584"/>
-          </a:xfrm>
-          <a:prstGeom prst="roundRect">
-            <a:avLst>
-              <a:gd name="adj" fmla="val 45455"/>
-            </a:avLst>
-          </a:prstGeom>
-          <a:solidFill>
-            <a:srgbClr val="E2EAEE"/>
-          </a:solidFill>
-          <a:ln/>
-        </p:spPr>
-      </p:sp>
-      <p:sp>
-        <p:nvSpPr>
-          <p:cNvPr id="111" name="Shape 109"/>
-          <p:cNvSpPr/>
-          <p:nvPr/>
-        </p:nvSpPr>
-        <p:spPr>
-          <a:xfrm>
-            <a:off x="3081528" y="4555998"/>
+          <p:cNvPr id="140" name="Shape 138"/>
+          <p:cNvSpPr/>
+          <p:nvPr/>
+        </p:nvSpPr>
+        <p:spPr>
+          <a:xfrm>
+            <a:off x="3081528" y="5186934"/>
             <a:ext cx="54864" cy="100584"/>
           </a:xfrm>
           <a:prstGeom prst="roundRect">
@@ -29637,947 +30571,13 @@
       </p:sp>
       <p:sp>
         <p:nvSpPr>
-          <p:cNvPr id="112" name="Shape 110"/>
-          <p:cNvSpPr/>
-          <p:nvPr/>
-        </p:nvSpPr>
-        <p:spPr>
-          <a:xfrm>
-            <a:off x="3214116" y="4510278"/>
-            <a:ext cx="20117" cy="192024"/>
-          </a:xfrm>
-          <a:prstGeom prst="rect">
-            <a:avLst/>
-          </a:prstGeom>
-          <a:solidFill>
-            <a:srgbClr val="12293A"/>
-          </a:solidFill>
-          <a:ln/>
-        </p:spPr>
-      </p:sp>
-      <p:sp>
-        <p:nvSpPr>
-          <p:cNvPr id="113" name="Text 111"/>
-          <p:cNvSpPr txBox="1"/>
-          <p:nvPr/>
-        </p:nvSpPr>
-        <p:spPr>
-          <a:xfrm>
-            <a:off x="3630168" y="4443984"/>
-            <a:ext cx="329184" cy="315468"/>
-          </a:xfrm>
-          <a:prstGeom prst="rect">
-            <a:avLst/>
-          </a:prstGeom>
-          <a:noFill/>
-          <a:ln/>
-        </p:spPr>
-        <p:txBody>
-          <a:bodyPr wrap="square" lIns="0" tIns="0" rIns="0" bIns="0" rtlCol="0" anchor="ctr"/>
-          <a:lstStyle/>
-          <a:p>
-            <a:pPr algn="r" indent="0" marL="0">
-              <a:buNone/>
-            </a:pPr>
-            <a:r>
-              <a:rPr lang="en-US" sz="800" b="1" dirty="0">
-                <a:solidFill>
-                  <a:srgbClr val="B4552D"/>
-                </a:solidFill>
-                <a:latin typeface="Poppins" pitchFamily="34" charset="0"/>
-                <a:ea typeface="Poppins" pitchFamily="34" charset="-122"/>
-                <a:cs typeface="Poppins" pitchFamily="34" charset="-120"/>
-              </a:rPr>
-              <a:t>5%</a:t>
-            </a:r>
-            <a:endParaRPr lang="en-US" sz="800" dirty="0"/>
-          </a:p>
-        </p:txBody>
-      </p:sp>
-      <p:sp>
-        <p:nvSpPr>
-          <p:cNvPr id="114" name="Text 112"/>
-          <p:cNvSpPr txBox="1"/>
-          <p:nvPr/>
-        </p:nvSpPr>
-        <p:spPr>
-          <a:xfrm>
-            <a:off x="3904488" y="4443984"/>
-            <a:ext cx="640080" cy="315468"/>
-          </a:xfrm>
-          <a:prstGeom prst="rect">
-            <a:avLst/>
-          </a:prstGeom>
-          <a:noFill/>
-          <a:ln/>
-        </p:spPr>
-        <p:txBody>
-          <a:bodyPr wrap="square" lIns="0" tIns="0" rIns="0" bIns="0" rtlCol="0" anchor="ctr"/>
-          <a:lstStyle/>
-          <a:p>
-            <a:pPr algn="r" indent="0" marL="0">
-              <a:buNone/>
-            </a:pPr>
-            <a:r>
-              <a:rPr lang="en-US" sz="850" dirty="0">
-                <a:solidFill>
-                  <a:srgbClr val="8FA1AC"/>
-                </a:solidFill>
-                <a:latin typeface="Poppins" pitchFamily="34" charset="0"/>
-                <a:ea typeface="Poppins" pitchFamily="34" charset="-122"/>
-                <a:cs typeface="Poppins" pitchFamily="34" charset="-120"/>
-              </a:rPr>
-              <a:t>—</a:t>
-            </a:r>
-            <a:endParaRPr lang="en-US" sz="850" dirty="0"/>
-          </a:p>
-        </p:txBody>
-      </p:sp>
-      <p:sp>
-        <p:nvSpPr>
-          <p:cNvPr id="115" name="Text 113"/>
-          <p:cNvSpPr txBox="1"/>
-          <p:nvPr/>
-        </p:nvSpPr>
-        <p:spPr>
-          <a:xfrm>
-            <a:off x="4599432" y="4443984"/>
-            <a:ext cx="548640" cy="315468"/>
-          </a:xfrm>
-          <a:prstGeom prst="rect">
-            <a:avLst/>
-          </a:prstGeom>
-          <a:noFill/>
-          <a:ln/>
-        </p:spPr>
-        <p:txBody>
-          <a:bodyPr wrap="square" lIns="0" tIns="0" rIns="0" bIns="0" rtlCol="0" anchor="ctr"/>
-          <a:lstStyle/>
-          <a:p>
-            <a:pPr algn="r" indent="0" marL="0">
-              <a:buNone/>
-            </a:pPr>
-            <a:r>
-              <a:rPr lang="en-US" sz="850" dirty="0">
-                <a:solidFill>
-                  <a:srgbClr val="5E7280"/>
-                </a:solidFill>
-                <a:latin typeface="Poppins" pitchFamily="34" charset="0"/>
-                <a:ea typeface="Poppins" pitchFamily="34" charset="-122"/>
-                <a:cs typeface="Poppins" pitchFamily="34" charset="-120"/>
-              </a:rPr>
-              <a:t>$55k</a:t>
-            </a:r>
-            <a:endParaRPr lang="en-US" sz="850" dirty="0"/>
-          </a:p>
-        </p:txBody>
-      </p:sp>
-      <p:sp>
-        <p:nvSpPr>
-          <p:cNvPr id="116" name="Text 114"/>
-          <p:cNvSpPr txBox="1"/>
-          <p:nvPr/>
-        </p:nvSpPr>
-        <p:spPr>
-          <a:xfrm>
-            <a:off x="5184648" y="4443984"/>
-            <a:ext cx="603504" cy="315468"/>
-          </a:xfrm>
-          <a:prstGeom prst="rect">
-            <a:avLst/>
-          </a:prstGeom>
-          <a:noFill/>
-          <a:ln/>
-        </p:spPr>
-        <p:txBody>
-          <a:bodyPr wrap="square" lIns="0" tIns="0" rIns="0" bIns="0" rtlCol="0" anchor="ctr"/>
-          <a:lstStyle/>
-          <a:p>
-            <a:pPr algn="r" indent="0" marL="0">
-              <a:buNone/>
-            </a:pPr>
-            <a:r>
-              <a:rPr lang="en-US" sz="850" b="1" dirty="0">
-                <a:solidFill>
-                  <a:srgbClr val="B4552D"/>
-                </a:solidFill>
-                <a:latin typeface="Poppins" pitchFamily="34" charset="0"/>
-                <a:ea typeface="Poppins" pitchFamily="34" charset="-122"/>
-                <a:cs typeface="Poppins" pitchFamily="34" charset="-120"/>
-              </a:rPr>
-              <a:t>$37k</a:t>
-            </a:r>
-            <a:endParaRPr lang="en-US" sz="850" dirty="0"/>
-          </a:p>
-        </p:txBody>
-      </p:sp>
-      <p:sp>
-        <p:nvSpPr>
-          <p:cNvPr id="117" name="Shape 115"/>
-          <p:cNvSpPr/>
-          <p:nvPr/>
-        </p:nvSpPr>
-        <p:spPr>
-          <a:xfrm>
-            <a:off x="5879592" y="4555998"/>
-            <a:ext cx="566928" cy="100584"/>
-          </a:xfrm>
-          <a:prstGeom prst="roundRect">
-            <a:avLst>
-              <a:gd name="adj" fmla="val 45455"/>
-            </a:avLst>
-          </a:prstGeom>
-          <a:solidFill>
-            <a:srgbClr val="E2EAEE"/>
-          </a:solidFill>
-          <a:ln/>
-        </p:spPr>
-      </p:sp>
-      <p:sp>
-        <p:nvSpPr>
-          <p:cNvPr id="118" name="Shape 116"/>
-          <p:cNvSpPr/>
-          <p:nvPr/>
-        </p:nvSpPr>
-        <p:spPr>
-          <a:xfrm>
-            <a:off x="5879592" y="4555998"/>
-            <a:ext cx="385511" cy="100584"/>
-          </a:xfrm>
-          <a:prstGeom prst="roundRect">
-            <a:avLst>
-              <a:gd name="adj" fmla="val 45455"/>
-            </a:avLst>
-          </a:prstGeom>
-          <a:solidFill>
-            <a:srgbClr val="B4552D"/>
-          </a:solidFill>
-          <a:ln/>
-        </p:spPr>
-      </p:sp>
-      <p:sp>
-        <p:nvSpPr>
-          <p:cNvPr id="119" name="Shape 117"/>
-          <p:cNvSpPr/>
-          <p:nvPr/>
-        </p:nvSpPr>
-        <p:spPr>
-          <a:xfrm>
-            <a:off x="6016935" y="4510278"/>
-            <a:ext cx="20117" cy="192024"/>
-          </a:xfrm>
-          <a:prstGeom prst="rect">
-            <a:avLst/>
-          </a:prstGeom>
-          <a:solidFill>
-            <a:srgbClr val="12293A"/>
-          </a:solidFill>
-          <a:ln/>
-        </p:spPr>
-      </p:sp>
-      <p:sp>
-        <p:nvSpPr>
-          <p:cNvPr id="120" name="Text 118"/>
-          <p:cNvSpPr txBox="1"/>
-          <p:nvPr/>
-        </p:nvSpPr>
-        <p:spPr>
-          <a:xfrm>
-            <a:off x="6464808" y="4443984"/>
-            <a:ext cx="329184" cy="315468"/>
-          </a:xfrm>
-          <a:prstGeom prst="rect">
-            <a:avLst/>
-          </a:prstGeom>
-          <a:noFill/>
-          <a:ln/>
-        </p:spPr>
-        <p:txBody>
-          <a:bodyPr wrap="square" lIns="0" tIns="0" rIns="0" bIns="0" rtlCol="0" anchor="ctr"/>
-          <a:lstStyle/>
-          <a:p>
-            <a:pPr algn="r" indent="0" marL="0">
-              <a:buNone/>
-            </a:pPr>
-            <a:r>
-              <a:rPr lang="en-US" sz="800" b="1" dirty="0">
-                <a:solidFill>
-                  <a:srgbClr val="B4552D"/>
-                </a:solidFill>
-                <a:latin typeface="Poppins" pitchFamily="34" charset="0"/>
-                <a:ea typeface="Poppins" pitchFamily="34" charset="-122"/>
-                <a:cs typeface="Poppins" pitchFamily="34" charset="-120"/>
-              </a:rPr>
-              <a:t>68%</a:t>
-            </a:r>
-            <a:endParaRPr lang="en-US" sz="800" dirty="0"/>
-          </a:p>
-        </p:txBody>
-      </p:sp>
-      <p:sp>
-        <p:nvSpPr>
-          <p:cNvPr id="121" name="Text 119"/>
-          <p:cNvSpPr txBox="1"/>
-          <p:nvPr/>
-        </p:nvSpPr>
-        <p:spPr>
-          <a:xfrm>
-            <a:off x="6830568" y="4443984"/>
-            <a:ext cx="987552" cy="315468"/>
-          </a:xfrm>
-          <a:prstGeom prst="rect">
-            <a:avLst/>
-          </a:prstGeom>
-          <a:noFill/>
-          <a:ln/>
-        </p:spPr>
-        <p:txBody>
-          <a:bodyPr wrap="square" lIns="0" tIns="0" rIns="0" bIns="0" rtlCol="0" anchor="ctr"/>
-          <a:lstStyle/>
-          <a:p>
-            <a:pPr algn="r" indent="0" marL="0">
-              <a:buNone/>
-            </a:pPr>
-            <a:r>
-              <a:rPr lang="en-US" sz="850" b="1" dirty="0">
-                <a:solidFill>
-                  <a:srgbClr val="8FA1AC"/>
-                </a:solidFill>
-                <a:latin typeface="Poppins" pitchFamily="34" charset="0"/>
-                <a:ea typeface="Poppins" pitchFamily="34" charset="-122"/>
-                <a:cs typeface="Poppins" pitchFamily="34" charset="-120"/>
-              </a:rPr>
-              <a:t>—</a:t>
-            </a:r>
-            <a:endParaRPr lang="en-US" sz="850" dirty="0"/>
-          </a:p>
-        </p:txBody>
-      </p:sp>
-      <p:sp>
-        <p:nvSpPr>
-          <p:cNvPr id="122" name="Shape 120"/>
-          <p:cNvSpPr/>
-          <p:nvPr/>
-        </p:nvSpPr>
-        <p:spPr>
-          <a:xfrm>
-            <a:off x="612648" y="5038344"/>
-            <a:ext cx="7232904" cy="6401"/>
-          </a:xfrm>
-          <a:prstGeom prst="rect">
-            <a:avLst/>
-          </a:prstGeom>
-          <a:solidFill>
-            <a:srgbClr val="E2EAEE"/>
-          </a:solidFill>
-          <a:ln/>
-        </p:spPr>
-      </p:sp>
-      <p:sp>
-        <p:nvSpPr>
-          <p:cNvPr id="123" name="Text 121"/>
-          <p:cNvSpPr txBox="1"/>
-          <p:nvPr/>
-        </p:nvSpPr>
-        <p:spPr>
-          <a:xfrm>
-            <a:off x="612648" y="4759452"/>
-            <a:ext cx="1371600" cy="315468"/>
-          </a:xfrm>
-          <a:prstGeom prst="rect">
-            <a:avLst/>
-          </a:prstGeom>
-          <a:noFill/>
-          <a:ln/>
-        </p:spPr>
-        <p:txBody>
-          <a:bodyPr wrap="square" lIns="0" tIns="0" rIns="0" bIns="0" rtlCol="0" anchor="ctr"/>
-          <a:lstStyle/>
-          <a:p>
-            <a:pPr indent="0" marL="0">
-              <a:buNone/>
-            </a:pPr>
-            <a:r>
-              <a:rPr lang="en-US" sz="900" dirty="0">
-                <a:solidFill>
-                  <a:srgbClr val="12293A"/>
-                </a:solidFill>
-                <a:latin typeface="Poppins" pitchFamily="34" charset="0"/>
-                <a:ea typeface="Poppins" pitchFamily="34" charset="-122"/>
-                <a:cs typeface="Poppins" pitchFamily="34" charset="-120"/>
-              </a:rPr>
-              <a:t>Mick Teasdale</a:t>
-            </a:r>
-            <a:endParaRPr lang="en-US" sz="900" dirty="0"/>
-          </a:p>
-        </p:txBody>
-      </p:sp>
-      <p:sp>
-        <p:nvSpPr>
-          <p:cNvPr id="124" name="Text 122"/>
-          <p:cNvSpPr txBox="1"/>
-          <p:nvPr/>
-        </p:nvSpPr>
-        <p:spPr>
-          <a:xfrm>
-            <a:off x="2002536" y="4759452"/>
-            <a:ext cx="475488" cy="315468"/>
-          </a:xfrm>
-          <a:prstGeom prst="rect">
-            <a:avLst/>
-          </a:prstGeom>
-          <a:noFill/>
-          <a:ln/>
-        </p:spPr>
-        <p:txBody>
-          <a:bodyPr wrap="square" lIns="0" tIns="0" rIns="0" bIns="0" rtlCol="0" anchor="ctr"/>
-          <a:lstStyle/>
-          <a:p>
-            <a:pPr algn="r" indent="0" marL="0">
-              <a:buNone/>
-            </a:pPr>
-            <a:r>
-              <a:rPr lang="en-US" sz="850" dirty="0">
-                <a:solidFill>
-                  <a:srgbClr val="5E7280"/>
-                </a:solidFill>
-                <a:latin typeface="Poppins" pitchFamily="34" charset="0"/>
-                <a:ea typeface="Poppins" pitchFamily="34" charset="-122"/>
-                <a:cs typeface="Poppins" pitchFamily="34" charset="-120"/>
-              </a:rPr>
-              <a:t>$3k</a:t>
-            </a:r>
-            <a:endParaRPr lang="en-US" sz="850" dirty="0"/>
-          </a:p>
-        </p:txBody>
-      </p:sp>
-      <p:sp>
-        <p:nvSpPr>
-          <p:cNvPr id="125" name="Text 123"/>
-          <p:cNvSpPr txBox="1"/>
-          <p:nvPr/>
-        </p:nvSpPr>
-        <p:spPr>
-          <a:xfrm>
-            <a:off x="2514600" y="4759452"/>
-            <a:ext cx="475488" cy="315468"/>
-          </a:xfrm>
-          <a:prstGeom prst="rect">
-            <a:avLst/>
-          </a:prstGeom>
-          <a:noFill/>
-          <a:ln/>
-        </p:spPr>
-        <p:txBody>
-          <a:bodyPr wrap="square" lIns="0" tIns="0" rIns="0" bIns="0" rtlCol="0" anchor="ctr"/>
-          <a:lstStyle/>
-          <a:p>
-            <a:pPr algn="r" indent="0" marL="0">
-              <a:buNone/>
-            </a:pPr>
-            <a:r>
-              <a:rPr lang="en-US" sz="850" b="1" dirty="0">
-                <a:solidFill>
-                  <a:srgbClr val="B4552D"/>
-                </a:solidFill>
-                <a:latin typeface="Poppins" pitchFamily="34" charset="0"/>
-                <a:ea typeface="Poppins" pitchFamily="34" charset="-122"/>
-                <a:cs typeface="Poppins" pitchFamily="34" charset="-120"/>
-              </a:rPr>
-              <a:t>$0</a:t>
-            </a:r>
-            <a:endParaRPr lang="en-US" sz="850" dirty="0"/>
-          </a:p>
-        </p:txBody>
-      </p:sp>
-      <p:sp>
-        <p:nvSpPr>
-          <p:cNvPr id="126" name="Shape 124"/>
-          <p:cNvSpPr/>
-          <p:nvPr/>
-        </p:nvSpPr>
-        <p:spPr>
-          <a:xfrm>
-            <a:off x="3081528" y="4871466"/>
-            <a:ext cx="548640" cy="100584"/>
-          </a:xfrm>
-          <a:prstGeom prst="roundRect">
-            <a:avLst>
-              <a:gd name="adj" fmla="val 45455"/>
-            </a:avLst>
-          </a:prstGeom>
-          <a:solidFill>
-            <a:srgbClr val="E2EAEE"/>
-          </a:solidFill>
-          <a:ln/>
-        </p:spPr>
-      </p:sp>
-      <p:sp>
-        <p:nvSpPr>
-          <p:cNvPr id="127" name="Shape 125"/>
-          <p:cNvSpPr/>
-          <p:nvPr/>
-        </p:nvSpPr>
-        <p:spPr>
-          <a:xfrm>
-            <a:off x="3081528" y="4871466"/>
-            <a:ext cx="54864" cy="100584"/>
-          </a:xfrm>
-          <a:prstGeom prst="roundRect">
-            <a:avLst>
-              <a:gd name="adj" fmla="val 83333"/>
-            </a:avLst>
-          </a:prstGeom>
-          <a:solidFill>
-            <a:srgbClr val="B4552D"/>
-          </a:solidFill>
-          <a:ln/>
-        </p:spPr>
-      </p:sp>
-      <p:sp>
-        <p:nvSpPr>
-          <p:cNvPr id="128" name="Shape 126"/>
-          <p:cNvSpPr/>
-          <p:nvPr/>
-        </p:nvSpPr>
-        <p:spPr>
-          <a:xfrm>
-            <a:off x="3214116" y="4825746"/>
-            <a:ext cx="20117" cy="192024"/>
-          </a:xfrm>
-          <a:prstGeom prst="rect">
-            <a:avLst/>
-          </a:prstGeom>
-          <a:solidFill>
-            <a:srgbClr val="12293A"/>
-          </a:solidFill>
-          <a:ln/>
-        </p:spPr>
-      </p:sp>
-      <p:sp>
-        <p:nvSpPr>
-          <p:cNvPr id="129" name="Text 127"/>
-          <p:cNvSpPr txBox="1"/>
-          <p:nvPr/>
-        </p:nvSpPr>
-        <p:spPr>
-          <a:xfrm>
-            <a:off x="3630168" y="4759452"/>
-            <a:ext cx="329184" cy="315468"/>
-          </a:xfrm>
-          <a:prstGeom prst="rect">
-            <a:avLst/>
-          </a:prstGeom>
-          <a:noFill/>
-          <a:ln/>
-        </p:spPr>
-        <p:txBody>
-          <a:bodyPr wrap="square" lIns="0" tIns="0" rIns="0" bIns="0" rtlCol="0" anchor="ctr"/>
-          <a:lstStyle/>
-          <a:p>
-            <a:pPr algn="r" indent="0" marL="0">
-              <a:buNone/>
-            </a:pPr>
-            <a:r>
-              <a:rPr lang="en-US" sz="800" b="1" dirty="0">
-                <a:solidFill>
-                  <a:srgbClr val="B4552D"/>
-                </a:solidFill>
-                <a:latin typeface="Poppins" pitchFamily="34" charset="0"/>
-                <a:ea typeface="Poppins" pitchFamily="34" charset="-122"/>
-                <a:cs typeface="Poppins" pitchFamily="34" charset="-120"/>
-              </a:rPr>
-              <a:t>0%</a:t>
-            </a:r>
-            <a:endParaRPr lang="en-US" sz="800" dirty="0"/>
-          </a:p>
-        </p:txBody>
-      </p:sp>
-      <p:sp>
-        <p:nvSpPr>
-          <p:cNvPr id="130" name="Text 128"/>
-          <p:cNvSpPr txBox="1"/>
-          <p:nvPr/>
-        </p:nvSpPr>
-        <p:spPr>
-          <a:xfrm>
-            <a:off x="3904488" y="4759452"/>
-            <a:ext cx="640080" cy="315468"/>
-          </a:xfrm>
-          <a:prstGeom prst="rect">
-            <a:avLst/>
-          </a:prstGeom>
-          <a:noFill/>
-          <a:ln/>
-        </p:spPr>
-        <p:txBody>
-          <a:bodyPr wrap="square" lIns="0" tIns="0" rIns="0" bIns="0" rtlCol="0" anchor="ctr"/>
-          <a:lstStyle/>
-          <a:p>
-            <a:pPr algn="r" indent="0" marL="0">
-              <a:buNone/>
-            </a:pPr>
-            <a:r>
-              <a:rPr lang="en-US" sz="850" dirty="0">
-                <a:solidFill>
-                  <a:srgbClr val="8FA1AC"/>
-                </a:solidFill>
-                <a:latin typeface="Poppins" pitchFamily="34" charset="0"/>
-                <a:ea typeface="Poppins" pitchFamily="34" charset="-122"/>
-                <a:cs typeface="Poppins" pitchFamily="34" charset="-120"/>
-              </a:rPr>
-              <a:t>—</a:t>
-            </a:r>
-            <a:endParaRPr lang="en-US" sz="850" dirty="0"/>
-          </a:p>
-        </p:txBody>
-      </p:sp>
-      <p:sp>
-        <p:nvSpPr>
-          <p:cNvPr id="131" name="Text 129"/>
-          <p:cNvSpPr txBox="1"/>
-          <p:nvPr/>
-        </p:nvSpPr>
-        <p:spPr>
-          <a:xfrm>
-            <a:off x="4599432" y="4759452"/>
-            <a:ext cx="548640" cy="315468"/>
-          </a:xfrm>
-          <a:prstGeom prst="rect">
-            <a:avLst/>
-          </a:prstGeom>
-          <a:noFill/>
-          <a:ln/>
-        </p:spPr>
-        <p:txBody>
-          <a:bodyPr wrap="square" lIns="0" tIns="0" rIns="0" bIns="0" rtlCol="0" anchor="ctr"/>
-          <a:lstStyle/>
-          <a:p>
-            <a:pPr algn="r" indent="0" marL="0">
-              <a:buNone/>
-            </a:pPr>
-            <a:r>
-              <a:rPr lang="en-US" sz="850" dirty="0">
-                <a:solidFill>
-                  <a:srgbClr val="5E7280"/>
-                </a:solidFill>
-                <a:latin typeface="Poppins" pitchFamily="34" charset="0"/>
-                <a:ea typeface="Poppins" pitchFamily="34" charset="-122"/>
-                <a:cs typeface="Poppins" pitchFamily="34" charset="-120"/>
-              </a:rPr>
-              <a:t>$46k</a:t>
-            </a:r>
-            <a:endParaRPr lang="en-US" sz="850" dirty="0"/>
-          </a:p>
-        </p:txBody>
-      </p:sp>
-      <p:sp>
-        <p:nvSpPr>
-          <p:cNvPr id="132" name="Text 130"/>
-          <p:cNvSpPr txBox="1"/>
-          <p:nvPr/>
-        </p:nvSpPr>
-        <p:spPr>
-          <a:xfrm>
-            <a:off x="5184648" y="4759452"/>
-            <a:ext cx="603504" cy="315468"/>
-          </a:xfrm>
-          <a:prstGeom prst="rect">
-            <a:avLst/>
-          </a:prstGeom>
-          <a:noFill/>
-          <a:ln/>
-        </p:spPr>
-        <p:txBody>
-          <a:bodyPr wrap="square" lIns="0" tIns="0" rIns="0" bIns="0" rtlCol="0" anchor="ctr"/>
-          <a:lstStyle/>
-          <a:p>
-            <a:pPr algn="r" indent="0" marL="0">
-              <a:buNone/>
-            </a:pPr>
-            <a:r>
-              <a:rPr lang="en-US" sz="850" b="1" dirty="0">
-                <a:solidFill>
-                  <a:srgbClr val="B4552D"/>
-                </a:solidFill>
-                <a:latin typeface="Poppins" pitchFamily="34" charset="0"/>
-                <a:ea typeface="Poppins" pitchFamily="34" charset="-122"/>
-                <a:cs typeface="Poppins" pitchFamily="34" charset="-120"/>
-              </a:rPr>
-              <a:t>—</a:t>
-            </a:r>
-            <a:endParaRPr lang="en-US" sz="850" dirty="0"/>
-          </a:p>
-        </p:txBody>
-      </p:sp>
-      <p:sp>
-        <p:nvSpPr>
-          <p:cNvPr id="133" name="Text 131"/>
-          <p:cNvSpPr txBox="1"/>
-          <p:nvPr/>
-        </p:nvSpPr>
-        <p:spPr>
-          <a:xfrm>
-            <a:off x="5843016" y="4759452"/>
-            <a:ext cx="932688" cy="315468"/>
-          </a:xfrm>
-          <a:prstGeom prst="rect">
-            <a:avLst/>
-          </a:prstGeom>
-          <a:noFill/>
-          <a:ln/>
-        </p:spPr>
-        <p:txBody>
-          <a:bodyPr wrap="square" lIns="0" tIns="0" rIns="0" bIns="0" rtlCol="0" anchor="ctr"/>
-          <a:lstStyle/>
-          <a:p>
-            <a:pPr algn="ctr" indent="0" marL="0">
-              <a:buNone/>
-            </a:pPr>
-            <a:r>
-              <a:rPr lang="en-US" sz="800" dirty="0">
-                <a:solidFill>
-                  <a:srgbClr val="8FA1AC"/>
-                </a:solidFill>
-                <a:latin typeface="Poppins" pitchFamily="34" charset="0"/>
-                <a:ea typeface="Poppins" pitchFamily="34" charset="-122"/>
-                <a:cs typeface="Poppins" pitchFamily="34" charset="-120"/>
-              </a:rPr>
-              <a:t>—</a:t>
-            </a:r>
-            <a:endParaRPr lang="en-US" sz="800" dirty="0"/>
-          </a:p>
-        </p:txBody>
-      </p:sp>
-      <p:sp>
-        <p:nvSpPr>
-          <p:cNvPr id="134" name="Text 132"/>
-          <p:cNvSpPr txBox="1"/>
-          <p:nvPr/>
-        </p:nvSpPr>
-        <p:spPr>
-          <a:xfrm>
-            <a:off x="6830568" y="4759452"/>
-            <a:ext cx="987552" cy="315468"/>
-          </a:xfrm>
-          <a:prstGeom prst="rect">
-            <a:avLst/>
-          </a:prstGeom>
-          <a:noFill/>
-          <a:ln/>
-        </p:spPr>
-        <p:txBody>
-          <a:bodyPr wrap="square" lIns="0" tIns="0" rIns="0" bIns="0" rtlCol="0" anchor="ctr"/>
-          <a:lstStyle/>
-          <a:p>
-            <a:pPr algn="r" indent="0" marL="0">
-              <a:buNone/>
-            </a:pPr>
-            <a:r>
-              <a:rPr lang="en-US" sz="850" b="1" dirty="0">
-                <a:solidFill>
-                  <a:srgbClr val="8FA1AC"/>
-                </a:solidFill>
-                <a:latin typeface="Poppins" pitchFamily="34" charset="0"/>
-                <a:ea typeface="Poppins" pitchFamily="34" charset="-122"/>
-                <a:cs typeface="Poppins" pitchFamily="34" charset="-120"/>
-              </a:rPr>
-              <a:t>—</a:t>
-            </a:r>
-            <a:endParaRPr lang="en-US" sz="850" dirty="0"/>
-          </a:p>
-        </p:txBody>
-      </p:sp>
-      <p:sp>
-        <p:nvSpPr>
-          <p:cNvPr id="135" name="Shape 133"/>
-          <p:cNvSpPr/>
-          <p:nvPr/>
-        </p:nvSpPr>
-        <p:spPr>
-          <a:xfrm>
-            <a:off x="612648" y="5353812"/>
-            <a:ext cx="7232904" cy="6401"/>
-          </a:xfrm>
-          <a:prstGeom prst="rect">
-            <a:avLst/>
-          </a:prstGeom>
-          <a:solidFill>
-            <a:srgbClr val="E2EAEE"/>
-          </a:solidFill>
-          <a:ln/>
-        </p:spPr>
-      </p:sp>
-      <p:sp>
-        <p:nvSpPr>
-          <p:cNvPr id="136" name="Text 134"/>
-          <p:cNvSpPr txBox="1"/>
-          <p:nvPr/>
-        </p:nvSpPr>
-        <p:spPr>
-          <a:xfrm>
-            <a:off x="612648" y="5074920"/>
-            <a:ext cx="1371600" cy="315468"/>
-          </a:xfrm>
-          <a:prstGeom prst="rect">
-            <a:avLst/>
-          </a:prstGeom>
-          <a:noFill/>
-          <a:ln/>
-        </p:spPr>
-        <p:txBody>
-          <a:bodyPr wrap="square" lIns="0" tIns="0" rIns="0" bIns="0" rtlCol="0" anchor="ctr"/>
-          <a:lstStyle/>
-          <a:p>
-            <a:pPr indent="0" marL="0">
-              <a:buNone/>
-            </a:pPr>
-            <a:r>
-              <a:rPr lang="en-US" sz="900" dirty="0">
-                <a:solidFill>
-                  <a:srgbClr val="C88A2E"/>
-                </a:solidFill>
-                <a:latin typeface="Poppins" pitchFamily="34" charset="0"/>
-                <a:ea typeface="Poppins" pitchFamily="34" charset="-122"/>
-                <a:cs typeface="Poppins" pitchFamily="34" charset="-120"/>
-              </a:rPr>
-              <a:t>Unassigned</a:t>
-            </a:r>
-            <a:endParaRPr lang="en-US" sz="900" dirty="0"/>
-          </a:p>
-        </p:txBody>
-      </p:sp>
-      <p:sp>
-        <p:nvSpPr>
-          <p:cNvPr id="137" name="Text 135"/>
-          <p:cNvSpPr txBox="1"/>
-          <p:nvPr/>
-        </p:nvSpPr>
-        <p:spPr>
-          <a:xfrm>
-            <a:off x="2002536" y="5074920"/>
-            <a:ext cx="475488" cy="315468"/>
-          </a:xfrm>
-          <a:prstGeom prst="rect">
-            <a:avLst/>
-          </a:prstGeom>
-          <a:noFill/>
-          <a:ln/>
-        </p:spPr>
-        <p:txBody>
-          <a:bodyPr wrap="square" lIns="0" tIns="0" rIns="0" bIns="0" rtlCol="0" anchor="ctr"/>
-          <a:lstStyle/>
-          <a:p>
-            <a:pPr algn="r" indent="0" marL="0">
-              <a:buNone/>
-            </a:pPr>
-            <a:r>
-              <a:rPr lang="en-US" sz="850" dirty="0">
-                <a:solidFill>
-                  <a:srgbClr val="5E7280"/>
-                </a:solidFill>
-                <a:latin typeface="Poppins" pitchFamily="34" charset="0"/>
-                <a:ea typeface="Poppins" pitchFamily="34" charset="-122"/>
-                <a:cs typeface="Poppins" pitchFamily="34" charset="-120"/>
-              </a:rPr>
-              <a:t>$4k</a:t>
-            </a:r>
-            <a:endParaRPr lang="en-US" sz="850" dirty="0"/>
-          </a:p>
-        </p:txBody>
-      </p:sp>
-      <p:sp>
-        <p:nvSpPr>
-          <p:cNvPr id="138" name="Text 136"/>
-          <p:cNvSpPr txBox="1"/>
-          <p:nvPr/>
-        </p:nvSpPr>
-        <p:spPr>
-          <a:xfrm>
-            <a:off x="2514600" y="5074920"/>
-            <a:ext cx="475488" cy="315468"/>
-          </a:xfrm>
-          <a:prstGeom prst="rect">
-            <a:avLst/>
-          </a:prstGeom>
-          <a:noFill/>
-          <a:ln/>
-        </p:spPr>
-        <p:txBody>
-          <a:bodyPr wrap="square" lIns="0" tIns="0" rIns="0" bIns="0" rtlCol="0" anchor="ctr"/>
-          <a:lstStyle/>
-          <a:p>
-            <a:pPr algn="r" indent="0" marL="0">
-              <a:buNone/>
-            </a:pPr>
-            <a:r>
-              <a:rPr lang="en-US" sz="850" b="1" dirty="0">
-                <a:solidFill>
-                  <a:srgbClr val="B4552D"/>
-                </a:solidFill>
-                <a:latin typeface="Poppins" pitchFamily="34" charset="0"/>
-                <a:ea typeface="Poppins" pitchFamily="34" charset="-122"/>
-                <a:cs typeface="Poppins" pitchFamily="34" charset="-120"/>
-              </a:rPr>
-              <a:t>$294</a:t>
-            </a:r>
-            <a:endParaRPr lang="en-US" sz="850" dirty="0"/>
-          </a:p>
-        </p:txBody>
-      </p:sp>
-      <p:sp>
-        <p:nvSpPr>
-          <p:cNvPr id="139" name="Shape 137"/>
-          <p:cNvSpPr/>
-          <p:nvPr/>
-        </p:nvSpPr>
-        <p:spPr>
-          <a:xfrm>
-            <a:off x="3081528" y="5186934"/>
-            <a:ext cx="548640" cy="100584"/>
-          </a:xfrm>
-          <a:prstGeom prst="roundRect">
-            <a:avLst>
-              <a:gd name="adj" fmla="val 45455"/>
-            </a:avLst>
-          </a:prstGeom>
-          <a:solidFill>
-            <a:srgbClr val="E2EAEE"/>
-          </a:solidFill>
-          <a:ln/>
-        </p:spPr>
-      </p:sp>
-      <p:sp>
-        <p:nvSpPr>
-          <p:cNvPr id="140" name="Shape 138"/>
-          <p:cNvSpPr/>
-          <p:nvPr/>
-        </p:nvSpPr>
-        <p:spPr>
-          <a:xfrm>
-            <a:off x="3081528" y="5186934"/>
-            <a:ext cx="54864" cy="100584"/>
-          </a:xfrm>
-          <a:prstGeom prst="roundRect">
-            <a:avLst>
-              <a:gd name="adj" fmla="val 83333"/>
-            </a:avLst>
-          </a:prstGeom>
-          <a:solidFill>
-            <a:srgbClr val="B4552D"/>
-          </a:solidFill>
-          <a:ln/>
-        </p:spPr>
-      </p:sp>
-      <p:sp>
-        <p:nvSpPr>
           <p:cNvPr id="141" name="Shape 139"/>
           <p:cNvSpPr/>
           <p:nvPr/>
         </p:nvSpPr>
         <p:spPr>
           <a:xfrm>
-            <a:off x="3214116" y="5141214"/>
+            <a:off x="3219602" y="5141214"/>
             <a:ext cx="20117" cy="192024"/>
           </a:xfrm>
           <a:prstGeom prst="rect">
@@ -30987,13 +30987,13 @@
             <a:r>
               <a:rPr lang="en-US" sz="850" b="1" dirty="0">
                 <a:solidFill>
-                  <a:srgbClr val="3D8F5F"/>
-                </a:solidFill>
-                <a:latin typeface="Poppins" pitchFamily="34" charset="0"/>
-                <a:ea typeface="Poppins" pitchFamily="34" charset="-122"/>
-                <a:cs typeface="Poppins" pitchFamily="34" charset="-120"/>
-              </a:rPr>
-              <a:t>—</a:t>
+                  <a:srgbClr val="B4552D"/>
+                </a:solidFill>
+                <a:latin typeface="Poppins" pitchFamily="34" charset="0"/>
+                <a:ea typeface="Poppins" pitchFamily="34" charset="-122"/>
+                <a:cs typeface="Poppins" pitchFamily="34" charset="-120"/>
+              </a:rPr>
+              <a:t>−1,148</a:t>
             </a:r>
             <a:endParaRPr lang="en-US" sz="850" dirty="0"/>
           </a:p>
@@ -31071,7 +31071,7 @@
                 <a:ea typeface="Poppins" pitchFamily="34" charset="-122"/>
                 <a:cs typeface="Poppins" pitchFamily="34" charset="-120"/>
               </a:rPr>
-              <a:t>$99k</a:t>
+              <a:t>$111k</a:t>
             </a:r>
             <a:endParaRPr lang="en-US" sz="850" dirty="0"/>
           </a:p>
@@ -31110,7 +31110,7 @@
                 <a:ea typeface="Poppins" pitchFamily="34" charset="-122"/>
                 <a:cs typeface="Poppins" pitchFamily="34" charset="-120"/>
               </a:rPr>
-              <a:t>13%</a:t>
+              <a:t>15%</a:t>
             </a:r>
             <a:endParaRPr lang="en-US" sz="850" dirty="0"/>
           </a:p>
@@ -31149,7 +31149,7 @@
                 <a:ea typeface="Poppins" pitchFamily="34" charset="-122"/>
                 <a:cs typeface="Poppins" pitchFamily="34" charset="-120"/>
               </a:rPr>
-              <a:t>—</a:t>
+              <a:t>+12k</a:t>
             </a:r>
             <a:endParaRPr lang="en-US" sz="850" dirty="0"/>
           </a:p>
@@ -31188,7 +31188,7 @@
                 <a:ea typeface="Poppins" pitchFamily="34" charset="-122"/>
                 <a:cs typeface="Poppins" pitchFamily="34" charset="-120"/>
               </a:rPr>
-              <a:t>MRR = net new + expansion invoiced in Q4 (movement register, as at 18 Oct) · H&amp;L Pay net new $0/mo is tracked separately and never sits inside core MRR</a:t>
+              <a:t>MRR = net new + expansion invoiced in Q4 (movement register, live 25 Oct) · H&amp;L Pay net new $0/mo is tracked separately and never sits inside core MRR</a:t>
             </a:r>
             <a:endParaRPr lang="en-US" sz="700" dirty="0"/>
           </a:p>
@@ -31289,7 +31289,7 @@
             <a:r>
               <a:rPr lang="en-US" sz="900" b="1" dirty="0">
                 <a:solidFill>
-                  <a:srgbClr val="C88A2E"/>
+                  <a:srgbClr val="3D8F5F"/>
                 </a:solidFill>
                 <a:latin typeface="Poppins" pitchFamily="34" charset="0"/>
                 <a:ea typeface="Poppins" pitchFamily="34" charset="-122"/>
@@ -31309,7 +31309,7 @@
                 <a:ea typeface="Poppins" pitchFamily="34" charset="-122"/>
                 <a:cs typeface="Poppins" pitchFamily="34" charset="-120"/>
               </a:rPr>
-              <a:t>Held at 18 Oct — this week's Sysnet extract and register refresh land Monday. </a:t>
+              <a:t>Hardware added $12,048 — Bradford $10,265 of it. </a:t>
             </a:r>
             <a:pPr indent="0" marL="0">
               <a:spcAft>
@@ -31326,7 +31326,7 @@
                 <a:ea typeface="Poppins" pitchFamily="34" charset="-122"/>
                 <a:cs typeface="Poppins" pitchFamily="34" charset="-120"/>
               </a:rPr>
-              <a:t>Q4 hardware $98,973 (14% of the $715k OKR2) and new MRR $3,817 (14% of $28k) are last week's figures against this week's 26% pace mark, so the gap to pace reads wider than it will once the week is in.</a:t>
+              <a:t>The Royal Hotel's server, screen and POS came to $8,500. Q4 to date is $111,021, 16% of the $715k OKR2 against a 27% pace mark.</a:t>
             </a:r>
             <a:endParaRPr lang="en-US" sz="900" dirty="0"/>
           </a:p>
@@ -31337,7 +31337,7 @@
             <a:r>
               <a:rPr lang="en-US" sz="900" b="1" dirty="0">
                 <a:solidFill>
-                  <a:srgbClr val="2C8394"/>
+                  <a:srgbClr val="B4552D"/>
                 </a:solidFill>
                 <a:latin typeface="Poppins" pitchFamily="34" charset="0"/>
                 <a:ea typeface="Poppins" pitchFamily="34" charset="-122"/>
@@ -31357,7 +31357,7 @@
                 <a:ea typeface="Poppins" pitchFamily="34" charset="-122"/>
                 <a:cs typeface="Poppins" pitchFamily="34" charset="-120"/>
               </a:rPr>
-              <a:t>HubSpot shows the selling continued. </a:t>
+              <a:t>MRR went backwards again, by $1,148. </a:t>
             </a:r>
             <a:pPr indent="0" marL="0">
               <a:spcAft>
@@ -31374,7 +31374,7 @@
                 <a:ea typeface="Poppins" pitchFamily="34" charset="-122"/>
                 <a:cs typeface="Poppins" pitchFamily="34" charset="-120"/>
               </a:rPr>
-              <a:t>$2,552 of software MRR was won 19–24 Oct across 9 deals — the register will show how much of it invoiced.</a:t>
+              <a:t>No new MRR was invoiced and three of Brett's accounts churned. Q4 stands at $3,817 — 14% of the $28k OKR2 — and 22 expansion rows worth $2,159 are already on the register, dated 1 Nov.</a:t>
             </a:r>
             <a:endParaRPr lang="en-US" sz="900" dirty="0"/>
           </a:p>
@@ -31456,7 +31456,7 @@
                 <a:ea typeface="Poppins" pitchFamily="34" charset="-122"/>
                 <a:cs typeface="Poppins" pitchFamily="34" charset="-120"/>
               </a:rPr>
-              <a:t>HW = commissionable only, gross of discounts · attainment = invoiced, never closed-won · pace = Q4 (Oct–Dec) · 24 of 92 days elapsed.</a:t>
+              <a:t>HW = commissionable only, gross of discounts · attainment = invoiced, never closed-won · pace = Q4 (Oct–Dec) · 25 of 92 days elapsed.</a:t>
             </a:r>
             <a:endParaRPr lang="en-US" sz="900" dirty="0"/>
           </a:p>
@@ -31470,8 +31470,8 @@
         </p:nvSpPr>
         <p:spPr>
           <a:xfrm>
-            <a:off x="5925312" y="6510528"/>
-            <a:ext cx="5852160" cy="256032"/>
+            <a:off x="7088429" y="6510528"/>
+            <a:ext cx="4689043" cy="256032"/>
           </a:xfrm>
           <a:prstGeom prst="roundRect">
             <a:avLst>
@@ -31492,8 +31492,8 @@
         </p:nvSpPr>
         <p:spPr>
           <a:xfrm>
-            <a:off x="5925312" y="6510528"/>
-            <a:ext cx="5852160" cy="256032"/>
+            <a:off x="7088429" y="6510528"/>
+            <a:ext cx="4689043" cy="256032"/>
           </a:xfrm>
           <a:prstGeom prst="rect">
             <a:avLst/>
@@ -31517,7 +31517,7 @@
                 <a:ea typeface="Poppins" pitchFamily="34" charset="-122"/>
                 <a:cs typeface="Poppins" pitchFamily="34" charset="-120"/>
               </a:rPr>
-              <a:t>Source: Sysnet extract 12–18 Oct + MRR register (19 Oct) · held at 19 Oct, refresh pending</a:t>
+              <a:t>Source: Sysnet extract 19–25 Oct + MRR movement register (live, 26 Oct)</a:t>
             </a:r>
             <a:endParaRPr lang="en-US" sz="700" dirty="0"/>
           </a:p>
@@ -38654,7 +38654,7 @@
                 <a:ea typeface="Poppins" pitchFamily="34" charset="-122"/>
                 <a:cs typeface="Poppins" pitchFamily="34" charset="-120"/>
               </a:rPr>
-              <a:t>6 deals untagged — referral figures are a floor. Referrer = Account Manager on the deal. The 19 Oct workbook is byte-identical to the 6 and 12 Oct drops: no new identifications, referrals or wins for a fifth week.</a:t>
+              <a:t>6 deals untagged — referral figures are a floor. Referrer = Account Manager on the deal. The 26 Oct identification register is unchanged — 34 identified, 10 referred; won and GMV figures are held at the 19 Oct ValPay export.</a:t>
             </a:r>
             <a:endParaRPr lang="en-US" sz="580" dirty="0"/>
           </a:p>
@@ -38854,8 +38854,8 @@
         </p:nvSpPr>
         <p:spPr>
           <a:xfrm>
-            <a:off x="5925312" y="6510528"/>
-            <a:ext cx="5852160" cy="256032"/>
+            <a:off x="7461504" y="6510528"/>
+            <a:ext cx="4315968" cy="256032"/>
           </a:xfrm>
           <a:prstGeom prst="roundRect">
             <a:avLst>
@@ -38876,8 +38876,8 @@
         </p:nvSpPr>
         <p:spPr>
           <a:xfrm>
-            <a:off x="5925312" y="6510528"/>
-            <a:ext cx="5852160" cy="256032"/>
+            <a:off x="7461504" y="6510528"/>
+            <a:ext cx="4315968" cy="256032"/>
           </a:xfrm>
           <a:prstGeom prst="rect">
             <a:avLst/>
@@ -38901,7 +38901,7 @@
                 <a:ea typeface="Poppins" pitchFamily="34" charset="-122"/>
                 <a:cs typeface="Poppins" pitchFamily="34" charset="-120"/>
               </a:rPr>
-              <a:t>Source: H&amp;L identification register + ValPay export (19 Oct) · held at 19 Oct, refresh pending</a:t>
+              <a:t>Source: Identification register (26 Oct) + ValPay export (19 Oct)</a:t>
             </a:r>
             <a:endParaRPr lang="en-US" sz="700" dirty="0"/>
           </a:p>
@@ -46485,13 +46485,13 @@
             <a:r>
               <a:rPr lang="en-US" sz="680" dirty="0">
                 <a:solidFill>
-                  <a:srgbClr val="C88A2E"/>
-                </a:solidFill>
-                <a:latin typeface="Poppins" pitchFamily="34" charset="0"/>
-                <a:ea typeface="Poppins" pitchFamily="34" charset="-122"/>
-                <a:cs typeface="Poppins" pitchFamily="34" charset="-120"/>
-              </a:rPr>
-              <a:t>won live to 24 Oct · invoiced held at 18 Oct</a:t>
+                  <a:srgbClr val="3D8F5F"/>
+                </a:solidFill>
+                <a:latin typeface="Poppins" pitchFamily="34" charset="0"/>
+                <a:ea typeface="Poppins" pitchFamily="34" charset="-122"/>
+                <a:cs typeface="Poppins" pitchFamily="34" charset="-120"/>
+              </a:rPr>
+              <a:t>both series live</a:t>
             </a:r>
             <a:endParaRPr lang="en-US" sz="1150" dirty="0"/>
           </a:p>
@@ -46642,7 +46642,7 @@
                 <a:ea typeface="Poppins" pitchFamily="34" charset="-122"/>
                 <a:cs typeface="Poppins" pitchFamily="34" charset="-120"/>
               </a:rPr>
-              <a:t>$233k</a:t>
+              <a:t>$241k</a:t>
             </a:r>
             <a:endParaRPr lang="en-US" sz="2000" dirty="0"/>
           </a:p>
@@ -46681,7 +46681,7 @@
                 <a:ea typeface="Poppins" pitchFamily="34" charset="-122"/>
                 <a:cs typeface="Poppins" pitchFamily="34" charset="-120"/>
               </a:rPr>
-              <a:t>18 of the 78 deals won with software MRR in 2026 have no row on the register · Oscars Group is $155k of it</a:t>
+              <a:t>24 of the 86 deals won with software MRR in 2026 have no row on the register · Oscars Group is $155k of it</a:t>
             </a:r>
             <a:endParaRPr lang="en-US" sz="780" dirty="0"/>
           </a:p>
@@ -46788,7 +46788,7 @@
                 <a:ea typeface="Poppins" pitchFamily="34" charset="-122"/>
                 <a:cs typeface="Poppins" pitchFamily="34" charset="-120"/>
               </a:rPr>
-              <a:t>$1.28M</a:t>
+              <a:t>$1.31M</a:t>
             </a:r>
             <a:endParaRPr lang="en-US" sz="2000" dirty="0"/>
           </a:p>
@@ -46827,7 +46827,7 @@
                 <a:ea typeface="Poppins" pitchFamily="34" charset="-122"/>
                 <a:cs typeface="Poppins" pitchFamily="34" charset="-120"/>
               </a:rPr>
-              <a:t>271 logos · MRR movement register, as at 18 Oct · HubSpot churn object stopped being maintained after February</a:t>
+              <a:t>276 logos · MRR movement register, 26 Oct · HubSpot churn object stopped being maintained after February</a:t>
             </a:r>
             <a:endParaRPr lang="en-US" sz="780" dirty="0"/>
           </a:p>
@@ -46934,7 +46934,7 @@
                 <a:ea typeface="Poppins" pitchFamily="34" charset="-122"/>
                 <a:cs typeface="Poppins" pitchFamily="34" charset="-120"/>
               </a:rPr>
-              <a:t>-$7.7k</a:t>
+              <a:t>-$8.9k</a:t>
             </a:r>
             <a:endParaRPr lang="en-US" sz="2000" dirty="0"/>
           </a:p>
@@ -46973,7 +46973,7 @@
                 <a:ea typeface="Poppins" pitchFamily="34" charset="-122"/>
                 <a:cs typeface="Poppins" pitchFamily="34" charset="-120"/>
               </a:rPr>
-              <a:t>Q4 to 18 Oct · new $3.8k − churn $9.4k − contraction $2.1k − credits $0</a:t>
+              <a:t>Q4 to 25 Oct · new $3.8k − churn $10.5k − contraction $2.2k − credits $0</a:t>
             </a:r>
             <a:endParaRPr lang="en-US" sz="780" dirty="0"/>
           </a:p>
@@ -49601,7 +49601,7 @@
                 <a:ea typeface="Poppins" pitchFamily="34" charset="-122"/>
                 <a:cs typeface="Poppins" pitchFamily="34" charset="-120"/>
               </a:rPr>
-              <a:t>October's wins have pulled clear of invoicing. </a:t>
+              <a:t>October has won $6,441 and invoiced $3,817. </a:t>
             </a:r>
             <a:pPr indent="0" marL="0">
               <a:spcAft>
@@ -49618,7 +49618,7 @@
                 <a:ea typeface="Poppins" pitchFamily="34" charset="-122"/>
                 <a:cs typeface="Poppins" pitchFamily="34" charset="-120"/>
               </a:rPr>
-              <a:t>$6,441 won to 24 Oct — $2,552 of it this week across 9 deals, led by the Lucas Collective reports API ($793) and Pier Hotel Pt Lincoln ($648) — against $3,817 invoiced to 18 Oct. The register refresh lands Monday.</a:t>
+              <a:t>No new MRR was invoiced 19–25 Oct. 22 expansion rows worth $2,159 sit on the register dated 1 Nov — Lucas Collective's 13 sites, Warooka, Stokehouse, the Royal Hotel — so November opens with them.</a:t>
             </a:r>
             <a:endParaRPr lang="en-US" sz="850" dirty="0"/>
           </a:p>
@@ -49649,7 +49649,7 @@
                 <a:ea typeface="Poppins" pitchFamily="34" charset="-122"/>
                 <a:cs typeface="Poppins" pitchFamily="34" charset="-120"/>
               </a:rPr>
-              <a:t>September restated down $648 to $8,130. </a:t>
+              <a:t>Churn: three more logos, Q4 now −$8.9k net. </a:t>
             </a:r>
             <a:pPr indent="0" marL="0">
               <a:spcAft>
@@ -49666,7 +49666,7 @@
                 <a:ea typeface="Poppins" pitchFamily="34" charset="-122"/>
                 <a:cs typeface="Poppins" pitchFamily="34" charset="-120"/>
               </a:rPr>
-              <a:t>Pier Hotel – Pt Lincoln's close date moved from 30 Sep to 22 Oct in HubSpot, so it now counts as an October win.</a:t>
+              <a:t>At The Jetty Bribie ($345), Riverview Smithtown ($412) and Tattersalls ($332). Re-read on 26 Oct, the register's churn since Jan 2025 is $1.31M across 276 logos.</a:t>
             </a:r>
             <a:endParaRPr lang="en-US" sz="850" dirty="0"/>
           </a:p>
@@ -49697,7 +49697,7 @@
                 <a:ea typeface="Poppins" pitchFamily="34" charset="-122"/>
                 <a:cs typeface="Poppins" pitchFamily="34" charset="-120"/>
               </a:rPr>
-              <a:t>Churn and the awaiting-invoice list are held at 18 Oct. </a:t>
+              <a:t>$241k of ARR is won with no row on the register. </a:t>
             </a:r>
             <a:pPr indent="0" marL="0">
               <a:spcAft>
@@ -49714,7 +49714,7 @@
                 <a:ea typeface="Poppins" pitchFamily="34" charset="-122"/>
                 <a:cs typeface="Poppins" pitchFamily="34" charset="-120"/>
               </a:rPr>
-              <a:t>$1.28M of ARR across 271 logos since Jan 2025, Q4 net −$7.7k, and $233k of ARR won with no row on the register — all refresh with Monday's register.</a:t>
+              <a:t>24 of the 86 deals that carried software MRR in 2026 — six of this week's wins have no row yet. Oscars Group is $155k of it.</a:t>
             </a:r>
             <a:endParaRPr lang="en-US" sz="850" dirty="0"/>
           </a:p>
@@ -49831,7 +49831,7 @@
                 <a:ea typeface="Poppins" pitchFamily="34" charset="-122"/>
                 <a:cs typeface="Poppins" pitchFamily="34" charset="-120"/>
               </a:rPr>
-              <a:t>Source: HubSpot closed-won (live, 24 Oct, AVC excluded) + MRR register (19 Oct, refresh pending)</a:t>
+              <a:t>Source: HubSpot closed-won deals (total_software_cost, AVC excluded) + MRR movement register (live, 26 Oct)</a:t>
             </a:r>
             <a:endParaRPr lang="en-US" sz="700" dirty="0"/>
           </a:p>

--- a/exec-deck/output/H&L Weekly Update - WC 19 Oct 2026.pptx
+++ b/exec-deck/output/H&L Weekly Update - WC 19 Oct 2026.pptx
@@ -15649,7 +15649,7 @@
                 <a:ea typeface="Poppins" pitchFamily="34" charset="-122"/>
                 <a:cs typeface="Poppins" pitchFamily="34" charset="-120"/>
               </a:rPr>
-              <a:t>40 of 51</a:t>
+              <a:t>43 of 49</a:t>
             </a:r>
             <a:endParaRPr lang="en-US" sz="2600" dirty="0"/>
           </a:p>
@@ -15688,7 +15688,7 @@
                 <a:ea typeface="Poppins" pitchFamily="34" charset="-122"/>
                 <a:cs typeface="Poppins" pitchFamily="34" charset="-120"/>
               </a:rPr>
-              <a:t>weekly active · 14 daily · 45 monthly</a:t>
+              <a:t>weekly active (▲7.5% WoW) · 193 PRs in Code · $657 spend, 30d</a:t>
             </a:r>
             <a:endParaRPr lang="en-US" sz="780" dirty="0"/>
           </a:p>
@@ -15795,7 +15795,7 @@
                 <a:ea typeface="Poppins" pitchFamily="34" charset="-122"/>
                 <a:cs typeface="Poppins" pitchFamily="34" charset="-120"/>
               </a:rPr>
-              <a:t>329,436</a:t>
+              <a:t>1,234,279</a:t>
             </a:r>
             <a:endParaRPr lang="en-US" sz="2400" dirty="0"/>
           </a:p>
@@ -15834,7 +15834,7 @@
                 <a:ea typeface="Poppins" pitchFamily="34" charset="-122"/>
                 <a:cs typeface="Poppins" pitchFamily="34" charset="-120"/>
               </a:rPr>
-              <a:t>1–18 Oct · October month-to-date at the 19 Oct capture, up from 111,689 a week ago; the admin capture gives month totals only, so there is no weekly split</a:t>
+              <a:t>1–26 Oct · October to 26 Oct, up from 329,436 at the 19 Oct capture; month totals only</a:t>
             </a:r>
             <a:endParaRPr lang="en-US" sz="780" dirty="0"/>
           </a:p>
@@ -16668,7 +16668,7 @@
         <p:spPr>
           <a:xfrm>
             <a:off x="594360" y="2816352"/>
-            <a:ext cx="1417320" cy="150460"/>
+            <a:ext cx="1417320" cy="116259"/>
           </a:xfrm>
           <a:prstGeom prst="rect">
             <a:avLst/>
@@ -16707,7 +16707,419 @@
         <p:spPr>
           <a:xfrm>
             <a:off x="2084832" y="2823667"/>
-            <a:ext cx="996696" cy="136744"/>
+            <a:ext cx="996696" cy="102543"/>
+          </a:xfrm>
+          <a:prstGeom prst="rect">
+            <a:avLst/>
+          </a:prstGeom>
+          <a:solidFill>
+            <a:srgbClr val="EDF5F7"/>
+          </a:solidFill>
+          <a:ln/>
+        </p:spPr>
+      </p:sp>
+      <p:sp>
+        <p:nvSpPr>
+          <p:cNvPr id="48" name="Text 46"/>
+          <p:cNvSpPr txBox="1"/>
+          <p:nvPr/>
+        </p:nvSpPr>
+        <p:spPr>
+          <a:xfrm>
+            <a:off x="2057400" y="2816352"/>
+            <a:ext cx="1051560" cy="116259"/>
+          </a:xfrm>
+          <a:prstGeom prst="rect">
+            <a:avLst/>
+          </a:prstGeom>
+          <a:noFill/>
+          <a:ln/>
+        </p:spPr>
+        <p:txBody>
+          <a:bodyPr wrap="square" lIns="0" tIns="0" rIns="0" bIns="0" rtlCol="0" anchor="ctr"/>
+          <a:lstStyle/>
+          <a:p>
+            <a:pPr algn="ctr" indent="0" marL="0">
+              <a:buNone/>
+            </a:pPr>
+            <a:r>
+              <a:rPr lang="en-US" sz="680" dirty="0">
+                <a:solidFill>
+                  <a:srgbClr val="12293A"/>
+                </a:solidFill>
+                <a:latin typeface="Poppins" pitchFamily="34" charset="0"/>
+                <a:ea typeface="Poppins" pitchFamily="34" charset="-122"/>
+                <a:cs typeface="Poppins" pitchFamily="34" charset="-120"/>
+              </a:rPr>
+              <a:t>39,579</a:t>
+            </a:r>
+            <a:endParaRPr lang="en-US" sz="680" dirty="0"/>
+          </a:p>
+        </p:txBody>
+      </p:sp>
+      <p:sp>
+        <p:nvSpPr>
+          <p:cNvPr id="49" name="Shape 47"/>
+          <p:cNvSpPr/>
+          <p:nvPr/>
+        </p:nvSpPr>
+        <p:spPr>
+          <a:xfrm>
+            <a:off x="3163824" y="2823667"/>
+            <a:ext cx="996696" cy="102543"/>
+          </a:xfrm>
+          <a:prstGeom prst="rect">
+            <a:avLst/>
+          </a:prstGeom>
+          <a:solidFill>
+            <a:srgbClr val="EDF5F7"/>
+          </a:solidFill>
+          <a:ln/>
+        </p:spPr>
+      </p:sp>
+      <p:sp>
+        <p:nvSpPr>
+          <p:cNvPr id="50" name="Text 48"/>
+          <p:cNvSpPr txBox="1"/>
+          <p:nvPr/>
+        </p:nvSpPr>
+        <p:spPr>
+          <a:xfrm>
+            <a:off x="3136392" y="2816352"/>
+            <a:ext cx="1051560" cy="116259"/>
+          </a:xfrm>
+          <a:prstGeom prst="rect">
+            <a:avLst/>
+          </a:prstGeom>
+          <a:noFill/>
+          <a:ln/>
+        </p:spPr>
+        <p:txBody>
+          <a:bodyPr wrap="square" lIns="0" tIns="0" rIns="0" bIns="0" rtlCol="0" anchor="ctr"/>
+          <a:lstStyle/>
+          <a:p>
+            <a:pPr algn="ctr" indent="0" marL="0">
+              <a:buNone/>
+            </a:pPr>
+            <a:r>
+              <a:rPr lang="en-US" sz="680" dirty="0">
+                <a:solidFill>
+                  <a:srgbClr val="12293A"/>
+                </a:solidFill>
+                <a:latin typeface="Poppins" pitchFamily="34" charset="0"/>
+                <a:ea typeface="Poppins" pitchFamily="34" charset="-122"/>
+                <a:cs typeface="Poppins" pitchFamily="34" charset="-120"/>
+              </a:rPr>
+              <a:t>41,244</a:t>
+            </a:r>
+            <a:endParaRPr lang="en-US" sz="680" dirty="0"/>
+          </a:p>
+        </p:txBody>
+      </p:sp>
+      <p:sp>
+        <p:nvSpPr>
+          <p:cNvPr id="51" name="Shape 49"/>
+          <p:cNvSpPr/>
+          <p:nvPr/>
+        </p:nvSpPr>
+        <p:spPr>
+          <a:xfrm>
+            <a:off x="4242816" y="2823667"/>
+            <a:ext cx="996696" cy="102543"/>
+          </a:xfrm>
+          <a:prstGeom prst="rect">
+            <a:avLst/>
+          </a:prstGeom>
+          <a:solidFill>
+            <a:srgbClr val="EDF5F7"/>
+          </a:solidFill>
+          <a:ln/>
+        </p:spPr>
+      </p:sp>
+      <p:sp>
+        <p:nvSpPr>
+          <p:cNvPr id="52" name="Text 50"/>
+          <p:cNvSpPr txBox="1"/>
+          <p:nvPr/>
+        </p:nvSpPr>
+        <p:spPr>
+          <a:xfrm>
+            <a:off x="4215384" y="2816352"/>
+            <a:ext cx="1051560" cy="116259"/>
+          </a:xfrm>
+          <a:prstGeom prst="rect">
+            <a:avLst/>
+          </a:prstGeom>
+          <a:noFill/>
+          <a:ln/>
+        </p:spPr>
+        <p:txBody>
+          <a:bodyPr wrap="square" lIns="0" tIns="0" rIns="0" bIns="0" rtlCol="0" anchor="ctr"/>
+          <a:lstStyle/>
+          <a:p>
+            <a:pPr algn="ctr" indent="0" marL="0">
+              <a:buNone/>
+            </a:pPr>
+            <a:r>
+              <a:rPr lang="en-US" sz="680" dirty="0">
+                <a:solidFill>
+                  <a:srgbClr val="12293A"/>
+                </a:solidFill>
+                <a:latin typeface="Poppins" pitchFamily="34" charset="0"/>
+                <a:ea typeface="Poppins" pitchFamily="34" charset="-122"/>
+                <a:cs typeface="Poppins" pitchFamily="34" charset="-120"/>
+              </a:rPr>
+              <a:t>15,821</a:t>
+            </a:r>
+            <a:endParaRPr lang="en-US" sz="680" dirty="0"/>
+          </a:p>
+        </p:txBody>
+      </p:sp>
+      <p:sp>
+        <p:nvSpPr>
+          <p:cNvPr id="53" name="Text 51"/>
+          <p:cNvSpPr txBox="1"/>
+          <p:nvPr/>
+        </p:nvSpPr>
+        <p:spPr>
+          <a:xfrm>
+            <a:off x="5294376" y="2816352"/>
+            <a:ext cx="1051560" cy="116259"/>
+          </a:xfrm>
+          <a:prstGeom prst="rect">
+            <a:avLst/>
+          </a:prstGeom>
+          <a:noFill/>
+          <a:ln/>
+        </p:spPr>
+        <p:txBody>
+          <a:bodyPr wrap="square" lIns="0" tIns="0" rIns="0" bIns="0" rtlCol="0" anchor="ctr"/>
+          <a:lstStyle/>
+          <a:p>
+            <a:pPr algn="ctr" indent="0" marL="0">
+              <a:buNone/>
+            </a:pPr>
+            <a:r>
+              <a:rPr lang="en-US" sz="680" dirty="0">
+                <a:solidFill>
+                  <a:srgbClr val="8FA1AC"/>
+                </a:solidFill>
+                <a:latin typeface="Poppins" pitchFamily="34" charset="0"/>
+                <a:ea typeface="Poppins" pitchFamily="34" charset="-122"/>
+                <a:cs typeface="Poppins" pitchFamily="34" charset="-120"/>
+              </a:rPr>
+              <a:t>—</a:t>
+            </a:r>
+            <a:endParaRPr lang="en-US" sz="680" dirty="0"/>
+          </a:p>
+        </p:txBody>
+      </p:sp>
+      <p:sp>
+        <p:nvSpPr>
+          <p:cNvPr id="54" name="Text 52"/>
+          <p:cNvSpPr txBox="1"/>
+          <p:nvPr/>
+        </p:nvSpPr>
+        <p:spPr>
+          <a:xfrm>
+            <a:off x="6400800" y="2816352"/>
+            <a:ext cx="1280160" cy="116259"/>
+          </a:xfrm>
+          <a:prstGeom prst="rect">
+            <a:avLst/>
+          </a:prstGeom>
+          <a:noFill/>
+          <a:ln/>
+        </p:spPr>
+        <p:txBody>
+          <a:bodyPr wrap="square" lIns="0" tIns="0" rIns="0" bIns="0" rtlCol="0" anchor="ctr"/>
+          <a:lstStyle/>
+          <a:p>
+            <a:pPr algn="r" indent="0" marL="0">
+              <a:buNone/>
+            </a:pPr>
+            <a:r>
+              <a:rPr lang="en-US" sz="700" b="1" dirty="0">
+                <a:solidFill>
+                  <a:srgbClr val="5E7280"/>
+                </a:solidFill>
+                <a:latin typeface="Poppins" pitchFamily="34" charset="0"/>
+                <a:ea typeface="Poppins" pitchFamily="34" charset="-122"/>
+                <a:cs typeface="Poppins" pitchFamily="34" charset="-120"/>
+              </a:rPr>
+              <a:t>96,644</a:t>
+            </a:r>
+            <a:endParaRPr lang="en-US" sz="700" dirty="0"/>
+          </a:p>
+        </p:txBody>
+      </p:sp>
+      <p:sp>
+        <p:nvSpPr>
+          <p:cNvPr id="55" name="Text 53"/>
+          <p:cNvSpPr txBox="1"/>
+          <p:nvPr/>
+        </p:nvSpPr>
+        <p:spPr>
+          <a:xfrm>
+            <a:off x="594360" y="2941755"/>
+            <a:ext cx="1417320" cy="116259"/>
+          </a:xfrm>
+          <a:prstGeom prst="rect">
+            <a:avLst/>
+          </a:prstGeom>
+          <a:noFill/>
+          <a:ln/>
+        </p:spPr>
+        <p:txBody>
+          <a:bodyPr wrap="square" lIns="0" tIns="0" rIns="0" bIns="0" rtlCol="0" anchor="ctr"/>
+          <a:lstStyle/>
+          <a:p>
+            <a:pPr indent="0" marL="0">
+              <a:buNone/>
+            </a:pPr>
+            <a:r>
+              <a:rPr lang="en-US" sz="720" b="1" dirty="0">
+                <a:solidFill>
+                  <a:srgbClr val="12293A"/>
+                </a:solidFill>
+                <a:latin typeface="Poppins" pitchFamily="34" charset="0"/>
+                <a:ea typeface="Poppins" pitchFamily="34" charset="-122"/>
+                <a:cs typeface="Poppins" pitchFamily="34" charset="-120"/>
+              </a:rPr>
+              <a:t>Nicolas Ibrahim</a:t>
+            </a:r>
+            <a:endParaRPr lang="en-US" sz="720" dirty="0"/>
+          </a:p>
+        </p:txBody>
+      </p:sp>
+      <p:sp>
+        <p:nvSpPr>
+          <p:cNvPr id="56" name="Shape 54"/>
+          <p:cNvSpPr/>
+          <p:nvPr/>
+        </p:nvSpPr>
+        <p:spPr>
+          <a:xfrm>
+            <a:off x="2084832" y="2949071"/>
+            <a:ext cx="996696" cy="102543"/>
+          </a:xfrm>
+          <a:prstGeom prst="rect">
+            <a:avLst/>
+          </a:prstGeom>
+          <a:solidFill>
+            <a:srgbClr val="EDF5F7"/>
+          </a:solidFill>
+          <a:ln/>
+        </p:spPr>
+      </p:sp>
+      <p:sp>
+        <p:nvSpPr>
+          <p:cNvPr id="57" name="Text 55"/>
+          <p:cNvSpPr txBox="1"/>
+          <p:nvPr/>
+        </p:nvSpPr>
+        <p:spPr>
+          <a:xfrm>
+            <a:off x="2057400" y="2941755"/>
+            <a:ext cx="1051560" cy="116259"/>
+          </a:xfrm>
+          <a:prstGeom prst="rect">
+            <a:avLst/>
+          </a:prstGeom>
+          <a:noFill/>
+          <a:ln/>
+        </p:spPr>
+        <p:txBody>
+          <a:bodyPr wrap="square" lIns="0" tIns="0" rIns="0" bIns="0" rtlCol="0" anchor="ctr"/>
+          <a:lstStyle/>
+          <a:p>
+            <a:pPr algn="ctr" indent="0" marL="0">
+              <a:buNone/>
+            </a:pPr>
+            <a:r>
+              <a:rPr lang="en-US" sz="680" dirty="0">
+                <a:solidFill>
+                  <a:srgbClr val="12293A"/>
+                </a:solidFill>
+                <a:latin typeface="Poppins" pitchFamily="34" charset="0"/>
+                <a:ea typeface="Poppins" pitchFamily="34" charset="-122"/>
+                <a:cs typeface="Poppins" pitchFamily="34" charset="-120"/>
+              </a:rPr>
+              <a:t>15,834</a:t>
+            </a:r>
+            <a:endParaRPr lang="en-US" sz="680" dirty="0"/>
+          </a:p>
+        </p:txBody>
+      </p:sp>
+      <p:sp>
+        <p:nvSpPr>
+          <p:cNvPr id="58" name="Shape 56"/>
+          <p:cNvSpPr/>
+          <p:nvPr/>
+        </p:nvSpPr>
+        <p:spPr>
+          <a:xfrm>
+            <a:off x="3163824" y="2949071"/>
+            <a:ext cx="996696" cy="102543"/>
+          </a:xfrm>
+          <a:prstGeom prst="rect">
+            <a:avLst/>
+          </a:prstGeom>
+          <a:solidFill>
+            <a:srgbClr val="EDF5F7"/>
+          </a:solidFill>
+          <a:ln/>
+        </p:spPr>
+      </p:sp>
+      <p:sp>
+        <p:nvSpPr>
+          <p:cNvPr id="59" name="Text 57"/>
+          <p:cNvSpPr txBox="1"/>
+          <p:nvPr/>
+        </p:nvSpPr>
+        <p:spPr>
+          <a:xfrm>
+            <a:off x="3136392" y="2941755"/>
+            <a:ext cx="1051560" cy="116259"/>
+          </a:xfrm>
+          <a:prstGeom prst="rect">
+            <a:avLst/>
+          </a:prstGeom>
+          <a:noFill/>
+          <a:ln/>
+        </p:spPr>
+        <p:txBody>
+          <a:bodyPr wrap="square" lIns="0" tIns="0" rIns="0" bIns="0" rtlCol="0" anchor="ctr"/>
+          <a:lstStyle/>
+          <a:p>
+            <a:pPr algn="ctr" indent="0" marL="0">
+              <a:buNone/>
+            </a:pPr>
+            <a:r>
+              <a:rPr lang="en-US" sz="680" dirty="0">
+                <a:solidFill>
+                  <a:srgbClr val="12293A"/>
+                </a:solidFill>
+                <a:latin typeface="Poppins" pitchFamily="34" charset="0"/>
+                <a:ea typeface="Poppins" pitchFamily="34" charset="-122"/>
+                <a:cs typeface="Poppins" pitchFamily="34" charset="-120"/>
+              </a:rPr>
+              <a:t>38,142</a:t>
+            </a:r>
+            <a:endParaRPr lang="en-US" sz="680" dirty="0"/>
+          </a:p>
+        </p:txBody>
+      </p:sp>
+      <p:sp>
+        <p:nvSpPr>
+          <p:cNvPr id="60" name="Shape 58"/>
+          <p:cNvSpPr/>
+          <p:nvPr/>
+        </p:nvSpPr>
+        <p:spPr>
+          <a:xfrm>
+            <a:off x="4242816" y="2949071"/>
+            <a:ext cx="996696" cy="102543"/>
           </a:xfrm>
           <a:prstGeom prst="rect">
             <a:avLst/>
@@ -16720,14 +17132,14 @@
       </p:sp>
       <p:sp>
         <p:nvSpPr>
-          <p:cNvPr id="48" name="Text 46"/>
-          <p:cNvSpPr txBox="1"/>
-          <p:nvPr/>
-        </p:nvSpPr>
-        <p:spPr>
-          <a:xfrm>
-            <a:off x="2057400" y="2816352"/>
-            <a:ext cx="1051560" cy="150460"/>
+          <p:cNvPr id="61" name="Text 59"/>
+          <p:cNvSpPr txBox="1"/>
+          <p:nvPr/>
+        </p:nvSpPr>
+        <p:spPr>
+          <a:xfrm>
+            <a:off x="4215384" y="2941755"/>
+            <a:ext cx="1051560" cy="116259"/>
           </a:xfrm>
           <a:prstGeom prst="rect">
             <a:avLst/>
@@ -16751,7 +17163,7 @@
                 <a:ea typeface="Poppins" pitchFamily="34" charset="-122"/>
                 <a:cs typeface="Poppins" pitchFamily="34" charset="-120"/>
               </a:rPr>
-              <a:t>39,579</a:t>
+              <a:t>99,693</a:t>
             </a:r>
             <a:endParaRPr lang="en-US" sz="680" dirty="0"/>
           </a:p>
@@ -16759,14 +17171,522 @@
       </p:sp>
       <p:sp>
         <p:nvSpPr>
-          <p:cNvPr id="49" name="Shape 47"/>
-          <p:cNvSpPr/>
-          <p:nvPr/>
-        </p:nvSpPr>
-        <p:spPr>
-          <a:xfrm>
-            <a:off x="3163824" y="2823667"/>
-            <a:ext cx="996696" cy="136744"/>
+          <p:cNvPr id="62" name="Shape 60"/>
+          <p:cNvSpPr/>
+          <p:nvPr/>
+        </p:nvSpPr>
+        <p:spPr>
+          <a:xfrm>
+            <a:off x="5321808" y="2949071"/>
+            <a:ext cx="996696" cy="102543"/>
+          </a:xfrm>
+          <a:prstGeom prst="rect">
+            <a:avLst/>
+          </a:prstGeom>
+          <a:solidFill>
+            <a:srgbClr val="B5D9E0"/>
+          </a:solidFill>
+          <a:ln/>
+        </p:spPr>
+      </p:sp>
+      <p:sp>
+        <p:nvSpPr>
+          <p:cNvPr id="63" name="Text 61"/>
+          <p:cNvSpPr txBox="1"/>
+          <p:nvPr/>
+        </p:nvSpPr>
+        <p:spPr>
+          <a:xfrm>
+            <a:off x="5294376" y="2941755"/>
+            <a:ext cx="1051560" cy="116259"/>
+          </a:xfrm>
+          <a:prstGeom prst="rect">
+            <a:avLst/>
+          </a:prstGeom>
+          <a:noFill/>
+          <a:ln/>
+        </p:spPr>
+        <p:txBody>
+          <a:bodyPr wrap="square" lIns="0" tIns="0" rIns="0" bIns="0" rtlCol="0" anchor="ctr"/>
+          <a:lstStyle/>
+          <a:p>
+            <a:pPr algn="ctr" indent="0" marL="0">
+              <a:buNone/>
+            </a:pPr>
+            <a:r>
+              <a:rPr lang="en-US" sz="680" dirty="0">
+                <a:solidFill>
+                  <a:srgbClr val="12293A"/>
+                </a:solidFill>
+                <a:latin typeface="Poppins" pitchFamily="34" charset="0"/>
+                <a:ea typeface="Poppins" pitchFamily="34" charset="-122"/>
+                <a:cs typeface="Poppins" pitchFamily="34" charset="-120"/>
+              </a:rPr>
+              <a:t>255,985</a:t>
+            </a:r>
+            <a:endParaRPr lang="en-US" sz="680" dirty="0"/>
+          </a:p>
+        </p:txBody>
+      </p:sp>
+      <p:sp>
+        <p:nvSpPr>
+          <p:cNvPr id="64" name="Text 62"/>
+          <p:cNvSpPr txBox="1"/>
+          <p:nvPr/>
+        </p:nvSpPr>
+        <p:spPr>
+          <a:xfrm>
+            <a:off x="6400800" y="2941755"/>
+            <a:ext cx="1280160" cy="116259"/>
+          </a:xfrm>
+          <a:prstGeom prst="rect">
+            <a:avLst/>
+          </a:prstGeom>
+          <a:noFill/>
+          <a:ln/>
+        </p:spPr>
+        <p:txBody>
+          <a:bodyPr wrap="square" lIns="0" tIns="0" rIns="0" bIns="0" rtlCol="0" anchor="ctr"/>
+          <a:lstStyle/>
+          <a:p>
+            <a:pPr algn="r" indent="0" marL="0">
+              <a:buNone/>
+            </a:pPr>
+            <a:r>
+              <a:rPr lang="en-US" sz="700" b="1" dirty="0">
+                <a:solidFill>
+                  <a:srgbClr val="5E7280"/>
+                </a:solidFill>
+                <a:latin typeface="Poppins" pitchFamily="34" charset="0"/>
+                <a:ea typeface="Poppins" pitchFamily="34" charset="-122"/>
+                <a:cs typeface="Poppins" pitchFamily="34" charset="-120"/>
+              </a:rPr>
+              <a:t>409,654</a:t>
+            </a:r>
+            <a:endParaRPr lang="en-US" sz="700" dirty="0"/>
+          </a:p>
+        </p:txBody>
+      </p:sp>
+      <p:sp>
+        <p:nvSpPr>
+          <p:cNvPr id="65" name="Text 63"/>
+          <p:cNvSpPr txBox="1"/>
+          <p:nvPr/>
+        </p:nvSpPr>
+        <p:spPr>
+          <a:xfrm>
+            <a:off x="594360" y="3067159"/>
+            <a:ext cx="1417320" cy="116259"/>
+          </a:xfrm>
+          <a:prstGeom prst="rect">
+            <a:avLst/>
+          </a:prstGeom>
+          <a:noFill/>
+          <a:ln/>
+        </p:spPr>
+        <p:txBody>
+          <a:bodyPr wrap="square" lIns="0" tIns="0" rIns="0" bIns="0" rtlCol="0" anchor="ctr"/>
+          <a:lstStyle/>
+          <a:p>
+            <a:pPr indent="0" marL="0">
+              <a:buNone/>
+            </a:pPr>
+            <a:r>
+              <a:rPr lang="en-US" sz="720" b="1" dirty="0">
+                <a:solidFill>
+                  <a:srgbClr val="12293A"/>
+                </a:solidFill>
+                <a:latin typeface="Poppins" pitchFamily="34" charset="0"/>
+                <a:ea typeface="Poppins" pitchFamily="34" charset="-122"/>
+                <a:cs typeface="Poppins" pitchFamily="34" charset="-120"/>
+              </a:rPr>
+              <a:t>Daniel Maddern</a:t>
+            </a:r>
+            <a:endParaRPr lang="en-US" sz="720" dirty="0"/>
+          </a:p>
+        </p:txBody>
+      </p:sp>
+      <p:sp>
+        <p:nvSpPr>
+          <p:cNvPr id="66" name="Text 64"/>
+          <p:cNvSpPr txBox="1"/>
+          <p:nvPr/>
+        </p:nvSpPr>
+        <p:spPr>
+          <a:xfrm>
+            <a:off x="2057400" y="3067159"/>
+            <a:ext cx="1051560" cy="116259"/>
+          </a:xfrm>
+          <a:prstGeom prst="rect">
+            <a:avLst/>
+          </a:prstGeom>
+          <a:noFill/>
+          <a:ln/>
+        </p:spPr>
+        <p:txBody>
+          <a:bodyPr wrap="square" lIns="0" tIns="0" rIns="0" bIns="0" rtlCol="0" anchor="ctr"/>
+          <a:lstStyle/>
+          <a:p>
+            <a:pPr algn="ctr" indent="0" marL="0">
+              <a:buNone/>
+            </a:pPr>
+            <a:r>
+              <a:rPr lang="en-US" sz="680" dirty="0">
+                <a:solidFill>
+                  <a:srgbClr val="8FA1AC"/>
+                </a:solidFill>
+                <a:latin typeface="Poppins" pitchFamily="34" charset="0"/>
+                <a:ea typeface="Poppins" pitchFamily="34" charset="-122"/>
+                <a:cs typeface="Poppins" pitchFamily="34" charset="-120"/>
+              </a:rPr>
+              <a:t>—</a:t>
+            </a:r>
+            <a:endParaRPr lang="en-US" sz="680" dirty="0"/>
+          </a:p>
+        </p:txBody>
+      </p:sp>
+      <p:sp>
+        <p:nvSpPr>
+          <p:cNvPr id="67" name="Text 65"/>
+          <p:cNvSpPr txBox="1"/>
+          <p:nvPr/>
+        </p:nvSpPr>
+        <p:spPr>
+          <a:xfrm>
+            <a:off x="3136392" y="3067159"/>
+            <a:ext cx="1051560" cy="116259"/>
+          </a:xfrm>
+          <a:prstGeom prst="rect">
+            <a:avLst/>
+          </a:prstGeom>
+          <a:noFill/>
+          <a:ln/>
+        </p:spPr>
+        <p:txBody>
+          <a:bodyPr wrap="square" lIns="0" tIns="0" rIns="0" bIns="0" rtlCol="0" anchor="ctr"/>
+          <a:lstStyle/>
+          <a:p>
+            <a:pPr algn="ctr" indent="0" marL="0">
+              <a:buNone/>
+            </a:pPr>
+            <a:r>
+              <a:rPr lang="en-US" sz="680" dirty="0">
+                <a:solidFill>
+                  <a:srgbClr val="8FA1AC"/>
+                </a:solidFill>
+                <a:latin typeface="Poppins" pitchFamily="34" charset="0"/>
+                <a:ea typeface="Poppins" pitchFamily="34" charset="-122"/>
+                <a:cs typeface="Poppins" pitchFamily="34" charset="-120"/>
+              </a:rPr>
+              <a:t>—</a:t>
+            </a:r>
+            <a:endParaRPr lang="en-US" sz="680" dirty="0"/>
+          </a:p>
+        </p:txBody>
+      </p:sp>
+      <p:sp>
+        <p:nvSpPr>
+          <p:cNvPr id="68" name="Text 66"/>
+          <p:cNvSpPr txBox="1"/>
+          <p:nvPr/>
+        </p:nvSpPr>
+        <p:spPr>
+          <a:xfrm>
+            <a:off x="4215384" y="3067159"/>
+            <a:ext cx="1051560" cy="116259"/>
+          </a:xfrm>
+          <a:prstGeom prst="rect">
+            <a:avLst/>
+          </a:prstGeom>
+          <a:noFill/>
+          <a:ln/>
+        </p:spPr>
+        <p:txBody>
+          <a:bodyPr wrap="square" lIns="0" tIns="0" rIns="0" bIns="0" rtlCol="0" anchor="ctr"/>
+          <a:lstStyle/>
+          <a:p>
+            <a:pPr algn="ctr" indent="0" marL="0">
+              <a:buNone/>
+            </a:pPr>
+            <a:r>
+              <a:rPr lang="en-US" sz="680" dirty="0">
+                <a:solidFill>
+                  <a:srgbClr val="8FA1AC"/>
+                </a:solidFill>
+                <a:latin typeface="Poppins" pitchFamily="34" charset="0"/>
+                <a:ea typeface="Poppins" pitchFamily="34" charset="-122"/>
+                <a:cs typeface="Poppins" pitchFamily="34" charset="-120"/>
+              </a:rPr>
+              <a:t>—</a:t>
+            </a:r>
+            <a:endParaRPr lang="en-US" sz="680" dirty="0"/>
+          </a:p>
+        </p:txBody>
+      </p:sp>
+      <p:sp>
+        <p:nvSpPr>
+          <p:cNvPr id="69" name="Shape 67"/>
+          <p:cNvSpPr/>
+          <p:nvPr/>
+        </p:nvSpPr>
+        <p:spPr>
+          <a:xfrm>
+            <a:off x="5321808" y="3074474"/>
+            <a:ext cx="996696" cy="102543"/>
+          </a:xfrm>
+          <a:prstGeom prst="rect">
+            <a:avLst/>
+          </a:prstGeom>
+          <a:solidFill>
+            <a:srgbClr val="8FC3CC"/>
+          </a:solidFill>
+          <a:ln/>
+        </p:spPr>
+      </p:sp>
+      <p:sp>
+        <p:nvSpPr>
+          <p:cNvPr id="70" name="Text 68"/>
+          <p:cNvSpPr txBox="1"/>
+          <p:nvPr/>
+        </p:nvSpPr>
+        <p:spPr>
+          <a:xfrm>
+            <a:off x="5294376" y="3067159"/>
+            <a:ext cx="1051560" cy="116259"/>
+          </a:xfrm>
+          <a:prstGeom prst="rect">
+            <a:avLst/>
+          </a:prstGeom>
+          <a:noFill/>
+          <a:ln/>
+        </p:spPr>
+        <p:txBody>
+          <a:bodyPr wrap="square" lIns="0" tIns="0" rIns="0" bIns="0" rtlCol="0" anchor="ctr"/>
+          <a:lstStyle/>
+          <a:p>
+            <a:pPr algn="ctr" indent="0" marL="0">
+              <a:buNone/>
+            </a:pPr>
+            <a:r>
+              <a:rPr lang="en-US" sz="680" dirty="0">
+                <a:solidFill>
+                  <a:srgbClr val="12293A"/>
+                </a:solidFill>
+                <a:latin typeface="Poppins" pitchFamily="34" charset="0"/>
+                <a:ea typeface="Poppins" pitchFamily="34" charset="-122"/>
+                <a:cs typeface="Poppins" pitchFamily="34" charset="-120"/>
+              </a:rPr>
+              <a:t>486,570</a:t>
+            </a:r>
+            <a:endParaRPr lang="en-US" sz="680" dirty="0"/>
+          </a:p>
+        </p:txBody>
+      </p:sp>
+      <p:sp>
+        <p:nvSpPr>
+          <p:cNvPr id="71" name="Text 69"/>
+          <p:cNvSpPr txBox="1"/>
+          <p:nvPr/>
+        </p:nvSpPr>
+        <p:spPr>
+          <a:xfrm>
+            <a:off x="6400800" y="3067159"/>
+            <a:ext cx="1280160" cy="116259"/>
+          </a:xfrm>
+          <a:prstGeom prst="rect">
+            <a:avLst/>
+          </a:prstGeom>
+          <a:noFill/>
+          <a:ln/>
+        </p:spPr>
+        <p:txBody>
+          <a:bodyPr wrap="square" lIns="0" tIns="0" rIns="0" bIns="0" rtlCol="0" anchor="ctr"/>
+          <a:lstStyle/>
+          <a:p>
+            <a:pPr algn="r" indent="0" marL="0">
+              <a:buNone/>
+            </a:pPr>
+            <a:r>
+              <a:rPr lang="en-US" sz="700" b="1" dirty="0">
+                <a:solidFill>
+                  <a:srgbClr val="5E7280"/>
+                </a:solidFill>
+                <a:latin typeface="Poppins" pitchFamily="34" charset="0"/>
+                <a:ea typeface="Poppins" pitchFamily="34" charset="-122"/>
+                <a:cs typeface="Poppins" pitchFamily="34" charset="-120"/>
+              </a:rPr>
+              <a:t>486,570</a:t>
+            </a:r>
+            <a:endParaRPr lang="en-US" sz="700" dirty="0"/>
+          </a:p>
+        </p:txBody>
+      </p:sp>
+      <p:sp>
+        <p:nvSpPr>
+          <p:cNvPr id="72" name="Text 70"/>
+          <p:cNvSpPr txBox="1"/>
+          <p:nvPr/>
+        </p:nvSpPr>
+        <p:spPr>
+          <a:xfrm>
+            <a:off x="594360" y="3192562"/>
+            <a:ext cx="1417320" cy="116259"/>
+          </a:xfrm>
+          <a:prstGeom prst="rect">
+            <a:avLst/>
+          </a:prstGeom>
+          <a:noFill/>
+          <a:ln/>
+        </p:spPr>
+        <p:txBody>
+          <a:bodyPr wrap="square" lIns="0" tIns="0" rIns="0" bIns="0" rtlCol="0" anchor="ctr"/>
+          <a:lstStyle/>
+          <a:p>
+            <a:pPr indent="0" marL="0">
+              <a:buNone/>
+            </a:pPr>
+            <a:r>
+              <a:rPr lang="en-US" sz="720" b="1" dirty="0">
+                <a:solidFill>
+                  <a:srgbClr val="12293A"/>
+                </a:solidFill>
+                <a:latin typeface="Poppins" pitchFamily="34" charset="0"/>
+                <a:ea typeface="Poppins" pitchFamily="34" charset="-122"/>
+                <a:cs typeface="Poppins" pitchFamily="34" charset="-120"/>
+              </a:rPr>
+              <a:t>Mostafa Essa</a:t>
+            </a:r>
+            <a:endParaRPr lang="en-US" sz="720" dirty="0"/>
+          </a:p>
+        </p:txBody>
+      </p:sp>
+      <p:sp>
+        <p:nvSpPr>
+          <p:cNvPr id="73" name="Text 71"/>
+          <p:cNvSpPr txBox="1"/>
+          <p:nvPr/>
+        </p:nvSpPr>
+        <p:spPr>
+          <a:xfrm>
+            <a:off x="2057400" y="3192562"/>
+            <a:ext cx="1051560" cy="116259"/>
+          </a:xfrm>
+          <a:prstGeom prst="rect">
+            <a:avLst/>
+          </a:prstGeom>
+          <a:noFill/>
+          <a:ln/>
+        </p:spPr>
+        <p:txBody>
+          <a:bodyPr wrap="square" lIns="0" tIns="0" rIns="0" bIns="0" rtlCol="0" anchor="ctr"/>
+          <a:lstStyle/>
+          <a:p>
+            <a:pPr algn="ctr" indent="0" marL="0">
+              <a:buNone/>
+            </a:pPr>
+            <a:r>
+              <a:rPr lang="en-US" sz="680" dirty="0">
+                <a:solidFill>
+                  <a:srgbClr val="8FA1AC"/>
+                </a:solidFill>
+                <a:latin typeface="Poppins" pitchFamily="34" charset="0"/>
+                <a:ea typeface="Poppins" pitchFamily="34" charset="-122"/>
+                <a:cs typeface="Poppins" pitchFamily="34" charset="-120"/>
+              </a:rPr>
+              <a:t>—</a:t>
+            </a:r>
+            <a:endParaRPr lang="en-US" sz="680" dirty="0"/>
+          </a:p>
+        </p:txBody>
+      </p:sp>
+      <p:sp>
+        <p:nvSpPr>
+          <p:cNvPr id="74" name="Text 72"/>
+          <p:cNvSpPr txBox="1"/>
+          <p:nvPr/>
+        </p:nvSpPr>
+        <p:spPr>
+          <a:xfrm>
+            <a:off x="3136392" y="3192562"/>
+            <a:ext cx="1051560" cy="116259"/>
+          </a:xfrm>
+          <a:prstGeom prst="rect">
+            <a:avLst/>
+          </a:prstGeom>
+          <a:noFill/>
+          <a:ln/>
+        </p:spPr>
+        <p:txBody>
+          <a:bodyPr wrap="square" lIns="0" tIns="0" rIns="0" bIns="0" rtlCol="0" anchor="ctr"/>
+          <a:lstStyle/>
+          <a:p>
+            <a:pPr algn="ctr" indent="0" marL="0">
+              <a:buNone/>
+            </a:pPr>
+            <a:r>
+              <a:rPr lang="en-US" sz="680" dirty="0">
+                <a:solidFill>
+                  <a:srgbClr val="8FA1AC"/>
+                </a:solidFill>
+                <a:latin typeface="Poppins" pitchFamily="34" charset="0"/>
+                <a:ea typeface="Poppins" pitchFamily="34" charset="-122"/>
+                <a:cs typeface="Poppins" pitchFamily="34" charset="-120"/>
+              </a:rPr>
+              <a:t>—</a:t>
+            </a:r>
+            <a:endParaRPr lang="en-US" sz="680" dirty="0"/>
+          </a:p>
+        </p:txBody>
+      </p:sp>
+      <p:sp>
+        <p:nvSpPr>
+          <p:cNvPr id="75" name="Text 73"/>
+          <p:cNvSpPr txBox="1"/>
+          <p:nvPr/>
+        </p:nvSpPr>
+        <p:spPr>
+          <a:xfrm>
+            <a:off x="4215384" y="3192562"/>
+            <a:ext cx="1051560" cy="116259"/>
+          </a:xfrm>
+          <a:prstGeom prst="rect">
+            <a:avLst/>
+          </a:prstGeom>
+          <a:noFill/>
+          <a:ln/>
+        </p:spPr>
+        <p:txBody>
+          <a:bodyPr wrap="square" lIns="0" tIns="0" rIns="0" bIns="0" rtlCol="0" anchor="ctr"/>
+          <a:lstStyle/>
+          <a:p>
+            <a:pPr algn="ctr" indent="0" marL="0">
+              <a:buNone/>
+            </a:pPr>
+            <a:r>
+              <a:rPr lang="en-US" sz="680" dirty="0">
+                <a:solidFill>
+                  <a:srgbClr val="8FA1AC"/>
+                </a:solidFill>
+                <a:latin typeface="Poppins" pitchFamily="34" charset="0"/>
+                <a:ea typeface="Poppins" pitchFamily="34" charset="-122"/>
+                <a:cs typeface="Poppins" pitchFamily="34" charset="-120"/>
+              </a:rPr>
+              <a:t>—</a:t>
+            </a:r>
+            <a:endParaRPr lang="en-US" sz="680" dirty="0"/>
+          </a:p>
+        </p:txBody>
+      </p:sp>
+      <p:sp>
+        <p:nvSpPr>
+          <p:cNvPr id="76" name="Shape 74"/>
+          <p:cNvSpPr/>
+          <p:nvPr/>
+        </p:nvSpPr>
+        <p:spPr>
+          <a:xfrm>
+            <a:off x="5321808" y="3199877"/>
+            <a:ext cx="996696" cy="102543"/>
           </a:xfrm>
           <a:prstGeom prst="rect">
             <a:avLst/>
@@ -16779,14 +17699,14 @@
       </p:sp>
       <p:sp>
         <p:nvSpPr>
-          <p:cNvPr id="50" name="Text 48"/>
-          <p:cNvSpPr txBox="1"/>
-          <p:nvPr/>
-        </p:nvSpPr>
-        <p:spPr>
-          <a:xfrm>
-            <a:off x="3136392" y="2816352"/>
-            <a:ext cx="1051560" cy="150460"/>
+          <p:cNvPr id="77" name="Text 75"/>
+          <p:cNvSpPr txBox="1"/>
+          <p:nvPr/>
+        </p:nvSpPr>
+        <p:spPr>
+          <a:xfrm>
+            <a:off x="5294376" y="3192562"/>
+            <a:ext cx="1051560" cy="116259"/>
           </a:xfrm>
           <a:prstGeom prst="rect">
             <a:avLst/>
@@ -16810,7 +17730,7 @@
                 <a:ea typeface="Poppins" pitchFamily="34" charset="-122"/>
                 <a:cs typeface="Poppins" pitchFamily="34" charset="-120"/>
               </a:rPr>
-              <a:t>41,244</a:t>
+              <a:t>100,487</a:t>
             </a:r>
             <a:endParaRPr lang="en-US" sz="680" dirty="0"/>
           </a:p>
@@ -16818,14 +17738,463 @@
       </p:sp>
       <p:sp>
         <p:nvSpPr>
-          <p:cNvPr id="51" name="Shape 49"/>
-          <p:cNvSpPr/>
-          <p:nvPr/>
-        </p:nvSpPr>
-        <p:spPr>
-          <a:xfrm>
-            <a:off x="4242816" y="2823667"/>
-            <a:ext cx="996696" cy="136744"/>
+          <p:cNvPr id="78" name="Text 76"/>
+          <p:cNvSpPr txBox="1"/>
+          <p:nvPr/>
+        </p:nvSpPr>
+        <p:spPr>
+          <a:xfrm>
+            <a:off x="6400800" y="3192562"/>
+            <a:ext cx="1280160" cy="116259"/>
+          </a:xfrm>
+          <a:prstGeom prst="rect">
+            <a:avLst/>
+          </a:prstGeom>
+          <a:noFill/>
+          <a:ln/>
+        </p:spPr>
+        <p:txBody>
+          <a:bodyPr wrap="square" lIns="0" tIns="0" rIns="0" bIns="0" rtlCol="0" anchor="ctr"/>
+          <a:lstStyle/>
+          <a:p>
+            <a:pPr algn="r" indent="0" marL="0">
+              <a:buNone/>
+            </a:pPr>
+            <a:r>
+              <a:rPr lang="en-US" sz="700" b="1" dirty="0">
+                <a:solidFill>
+                  <a:srgbClr val="5E7280"/>
+                </a:solidFill>
+                <a:latin typeface="Poppins" pitchFamily="34" charset="0"/>
+                <a:ea typeface="Poppins" pitchFamily="34" charset="-122"/>
+                <a:cs typeface="Poppins" pitchFamily="34" charset="-120"/>
+              </a:rPr>
+              <a:t>100,487</a:t>
+            </a:r>
+            <a:endParaRPr lang="en-US" sz="700" dirty="0"/>
+          </a:p>
+        </p:txBody>
+      </p:sp>
+      <p:sp>
+        <p:nvSpPr>
+          <p:cNvPr id="79" name="Text 77"/>
+          <p:cNvSpPr txBox="1"/>
+          <p:nvPr/>
+        </p:nvSpPr>
+        <p:spPr>
+          <a:xfrm>
+            <a:off x="594360" y="3317966"/>
+            <a:ext cx="1417320" cy="116259"/>
+          </a:xfrm>
+          <a:prstGeom prst="rect">
+            <a:avLst/>
+          </a:prstGeom>
+          <a:noFill/>
+          <a:ln/>
+        </p:spPr>
+        <p:txBody>
+          <a:bodyPr wrap="square" lIns="0" tIns="0" rIns="0" bIns="0" rtlCol="0" anchor="ctr"/>
+          <a:lstStyle/>
+          <a:p>
+            <a:pPr indent="0" marL="0">
+              <a:buNone/>
+            </a:pPr>
+            <a:r>
+              <a:rPr lang="en-US" sz="720" b="1" dirty="0">
+                <a:solidFill>
+                  <a:srgbClr val="12293A"/>
+                </a:solidFill>
+                <a:latin typeface="Poppins" pitchFamily="34" charset="0"/>
+                <a:ea typeface="Poppins" pitchFamily="34" charset="-122"/>
+                <a:cs typeface="Poppins" pitchFamily="34" charset="-120"/>
+              </a:rPr>
+              <a:t>danm@ (unconfirmed)</a:t>
+            </a:r>
+            <a:endParaRPr lang="en-US" sz="720" dirty="0"/>
+          </a:p>
+        </p:txBody>
+      </p:sp>
+      <p:sp>
+        <p:nvSpPr>
+          <p:cNvPr id="80" name="Text 78"/>
+          <p:cNvSpPr txBox="1"/>
+          <p:nvPr/>
+        </p:nvSpPr>
+        <p:spPr>
+          <a:xfrm>
+            <a:off x="2057400" y="3317966"/>
+            <a:ext cx="1051560" cy="116259"/>
+          </a:xfrm>
+          <a:prstGeom prst="rect">
+            <a:avLst/>
+          </a:prstGeom>
+          <a:noFill/>
+          <a:ln/>
+        </p:spPr>
+        <p:txBody>
+          <a:bodyPr wrap="square" lIns="0" tIns="0" rIns="0" bIns="0" rtlCol="0" anchor="ctr"/>
+          <a:lstStyle/>
+          <a:p>
+            <a:pPr algn="ctr" indent="0" marL="0">
+              <a:buNone/>
+            </a:pPr>
+            <a:r>
+              <a:rPr lang="en-US" sz="680" dirty="0">
+                <a:solidFill>
+                  <a:srgbClr val="8FA1AC"/>
+                </a:solidFill>
+                <a:latin typeface="Poppins" pitchFamily="34" charset="0"/>
+                <a:ea typeface="Poppins" pitchFamily="34" charset="-122"/>
+                <a:cs typeface="Poppins" pitchFamily="34" charset="-120"/>
+              </a:rPr>
+              <a:t>—</a:t>
+            </a:r>
+            <a:endParaRPr lang="en-US" sz="680" dirty="0"/>
+          </a:p>
+        </p:txBody>
+      </p:sp>
+      <p:sp>
+        <p:nvSpPr>
+          <p:cNvPr id="81" name="Text 79"/>
+          <p:cNvSpPr txBox="1"/>
+          <p:nvPr/>
+        </p:nvSpPr>
+        <p:spPr>
+          <a:xfrm>
+            <a:off x="3136392" y="3317966"/>
+            <a:ext cx="1051560" cy="116259"/>
+          </a:xfrm>
+          <a:prstGeom prst="rect">
+            <a:avLst/>
+          </a:prstGeom>
+          <a:noFill/>
+          <a:ln/>
+        </p:spPr>
+        <p:txBody>
+          <a:bodyPr wrap="square" lIns="0" tIns="0" rIns="0" bIns="0" rtlCol="0" anchor="ctr"/>
+          <a:lstStyle/>
+          <a:p>
+            <a:pPr algn="ctr" indent="0" marL="0">
+              <a:buNone/>
+            </a:pPr>
+            <a:r>
+              <a:rPr lang="en-US" sz="680" dirty="0">
+                <a:solidFill>
+                  <a:srgbClr val="8FA1AC"/>
+                </a:solidFill>
+                <a:latin typeface="Poppins" pitchFamily="34" charset="0"/>
+                <a:ea typeface="Poppins" pitchFamily="34" charset="-122"/>
+                <a:cs typeface="Poppins" pitchFamily="34" charset="-120"/>
+              </a:rPr>
+              <a:t>—</a:t>
+            </a:r>
+            <a:endParaRPr lang="en-US" sz="680" dirty="0"/>
+          </a:p>
+        </p:txBody>
+      </p:sp>
+      <p:sp>
+        <p:nvSpPr>
+          <p:cNvPr id="82" name="Text 80"/>
+          <p:cNvSpPr txBox="1"/>
+          <p:nvPr/>
+        </p:nvSpPr>
+        <p:spPr>
+          <a:xfrm>
+            <a:off x="4215384" y="3317966"/>
+            <a:ext cx="1051560" cy="116259"/>
+          </a:xfrm>
+          <a:prstGeom prst="rect">
+            <a:avLst/>
+          </a:prstGeom>
+          <a:noFill/>
+          <a:ln/>
+        </p:spPr>
+        <p:txBody>
+          <a:bodyPr wrap="square" lIns="0" tIns="0" rIns="0" bIns="0" rtlCol="0" anchor="ctr"/>
+          <a:lstStyle/>
+          <a:p>
+            <a:pPr algn="ctr" indent="0" marL="0">
+              <a:buNone/>
+            </a:pPr>
+            <a:r>
+              <a:rPr lang="en-US" sz="680" dirty="0">
+                <a:solidFill>
+                  <a:srgbClr val="8FA1AC"/>
+                </a:solidFill>
+                <a:latin typeface="Poppins" pitchFamily="34" charset="0"/>
+                <a:ea typeface="Poppins" pitchFamily="34" charset="-122"/>
+                <a:cs typeface="Poppins" pitchFamily="34" charset="-120"/>
+              </a:rPr>
+              <a:t>—</a:t>
+            </a:r>
+            <a:endParaRPr lang="en-US" sz="680" dirty="0"/>
+          </a:p>
+        </p:txBody>
+      </p:sp>
+      <p:sp>
+        <p:nvSpPr>
+          <p:cNvPr id="83" name="Shape 81"/>
+          <p:cNvSpPr/>
+          <p:nvPr/>
+        </p:nvSpPr>
+        <p:spPr>
+          <a:xfrm>
+            <a:off x="5321808" y="3325281"/>
+            <a:ext cx="996696" cy="102543"/>
+          </a:xfrm>
+          <a:prstGeom prst="rect">
+            <a:avLst/>
+          </a:prstGeom>
+          <a:solidFill>
+            <a:srgbClr val="D4E9ED"/>
+          </a:solidFill>
+          <a:ln/>
+        </p:spPr>
+      </p:sp>
+      <p:sp>
+        <p:nvSpPr>
+          <p:cNvPr id="84" name="Text 82"/>
+          <p:cNvSpPr txBox="1"/>
+          <p:nvPr/>
+        </p:nvSpPr>
+        <p:spPr>
+          <a:xfrm>
+            <a:off x="5294376" y="3317966"/>
+            <a:ext cx="1051560" cy="116259"/>
+          </a:xfrm>
+          <a:prstGeom prst="rect">
+            <a:avLst/>
+          </a:prstGeom>
+          <a:noFill/>
+          <a:ln/>
+        </p:spPr>
+        <p:txBody>
+          <a:bodyPr wrap="square" lIns="0" tIns="0" rIns="0" bIns="0" rtlCol="0" anchor="ctr"/>
+          <a:lstStyle/>
+          <a:p>
+            <a:pPr algn="ctr" indent="0" marL="0">
+              <a:buNone/>
+            </a:pPr>
+            <a:r>
+              <a:rPr lang="en-US" sz="680" dirty="0">
+                <a:solidFill>
+                  <a:srgbClr val="12293A"/>
+                </a:solidFill>
+                <a:latin typeface="Poppins" pitchFamily="34" charset="0"/>
+                <a:ea typeface="Poppins" pitchFamily="34" charset="-122"/>
+                <a:cs typeface="Poppins" pitchFamily="34" charset="-120"/>
+              </a:rPr>
+              <a:t>151,122</a:t>
+            </a:r>
+            <a:endParaRPr lang="en-US" sz="680" dirty="0"/>
+          </a:p>
+        </p:txBody>
+      </p:sp>
+      <p:sp>
+        <p:nvSpPr>
+          <p:cNvPr id="85" name="Text 83"/>
+          <p:cNvSpPr txBox="1"/>
+          <p:nvPr/>
+        </p:nvSpPr>
+        <p:spPr>
+          <a:xfrm>
+            <a:off x="6400800" y="3317966"/>
+            <a:ext cx="1280160" cy="116259"/>
+          </a:xfrm>
+          <a:prstGeom prst="rect">
+            <a:avLst/>
+          </a:prstGeom>
+          <a:noFill/>
+          <a:ln/>
+        </p:spPr>
+        <p:txBody>
+          <a:bodyPr wrap="square" lIns="0" tIns="0" rIns="0" bIns="0" rtlCol="0" anchor="ctr"/>
+          <a:lstStyle/>
+          <a:p>
+            <a:pPr algn="r" indent="0" marL="0">
+              <a:buNone/>
+            </a:pPr>
+            <a:r>
+              <a:rPr lang="en-US" sz="700" b="1" dirty="0">
+                <a:solidFill>
+                  <a:srgbClr val="5E7280"/>
+                </a:solidFill>
+                <a:latin typeface="Poppins" pitchFamily="34" charset="0"/>
+                <a:ea typeface="Poppins" pitchFamily="34" charset="-122"/>
+                <a:cs typeface="Poppins" pitchFamily="34" charset="-120"/>
+              </a:rPr>
+              <a:t>151,122</a:t>
+            </a:r>
+            <a:endParaRPr lang="en-US" sz="700" dirty="0"/>
+          </a:p>
+        </p:txBody>
+      </p:sp>
+      <p:sp>
+        <p:nvSpPr>
+          <p:cNvPr id="86" name="Text 84"/>
+          <p:cNvSpPr txBox="1"/>
+          <p:nvPr/>
+        </p:nvSpPr>
+        <p:spPr>
+          <a:xfrm>
+            <a:off x="594360" y="3443369"/>
+            <a:ext cx="1417320" cy="116259"/>
+          </a:xfrm>
+          <a:prstGeom prst="rect">
+            <a:avLst/>
+          </a:prstGeom>
+          <a:noFill/>
+          <a:ln/>
+        </p:spPr>
+        <p:txBody>
+          <a:bodyPr wrap="square" lIns="0" tIns="0" rIns="0" bIns="0" rtlCol="0" anchor="ctr"/>
+          <a:lstStyle/>
+          <a:p>
+            <a:pPr indent="0" marL="0">
+              <a:buNone/>
+            </a:pPr>
+            <a:r>
+              <a:rPr lang="en-US" sz="720" b="1" dirty="0">
+                <a:solidFill>
+                  <a:srgbClr val="12293A"/>
+                </a:solidFill>
+                <a:latin typeface="Poppins" pitchFamily="34" charset="0"/>
+                <a:ea typeface="Poppins" pitchFamily="34" charset="-122"/>
+                <a:cs typeface="Poppins" pitchFamily="34" charset="-120"/>
+              </a:rPr>
+              <a:t>dan@ (unconfirmed)</a:t>
+            </a:r>
+            <a:endParaRPr lang="en-US" sz="720" dirty="0"/>
+          </a:p>
+        </p:txBody>
+      </p:sp>
+      <p:sp>
+        <p:nvSpPr>
+          <p:cNvPr id="87" name="Text 85"/>
+          <p:cNvSpPr txBox="1"/>
+          <p:nvPr/>
+        </p:nvSpPr>
+        <p:spPr>
+          <a:xfrm>
+            <a:off x="2057400" y="3443369"/>
+            <a:ext cx="1051560" cy="116259"/>
+          </a:xfrm>
+          <a:prstGeom prst="rect">
+            <a:avLst/>
+          </a:prstGeom>
+          <a:noFill/>
+          <a:ln/>
+        </p:spPr>
+        <p:txBody>
+          <a:bodyPr wrap="square" lIns="0" tIns="0" rIns="0" bIns="0" rtlCol="0" anchor="ctr"/>
+          <a:lstStyle/>
+          <a:p>
+            <a:pPr algn="ctr" indent="0" marL="0">
+              <a:buNone/>
+            </a:pPr>
+            <a:r>
+              <a:rPr lang="en-US" sz="680" dirty="0">
+                <a:solidFill>
+                  <a:srgbClr val="8FA1AC"/>
+                </a:solidFill>
+                <a:latin typeface="Poppins" pitchFamily="34" charset="0"/>
+                <a:ea typeface="Poppins" pitchFamily="34" charset="-122"/>
+                <a:cs typeface="Poppins" pitchFamily="34" charset="-120"/>
+              </a:rPr>
+              <a:t>—</a:t>
+            </a:r>
+            <a:endParaRPr lang="en-US" sz="680" dirty="0"/>
+          </a:p>
+        </p:txBody>
+      </p:sp>
+      <p:sp>
+        <p:nvSpPr>
+          <p:cNvPr id="88" name="Text 86"/>
+          <p:cNvSpPr txBox="1"/>
+          <p:nvPr/>
+        </p:nvSpPr>
+        <p:spPr>
+          <a:xfrm>
+            <a:off x="3136392" y="3443369"/>
+            <a:ext cx="1051560" cy="116259"/>
+          </a:xfrm>
+          <a:prstGeom prst="rect">
+            <a:avLst/>
+          </a:prstGeom>
+          <a:noFill/>
+          <a:ln/>
+        </p:spPr>
+        <p:txBody>
+          <a:bodyPr wrap="square" lIns="0" tIns="0" rIns="0" bIns="0" rtlCol="0" anchor="ctr"/>
+          <a:lstStyle/>
+          <a:p>
+            <a:pPr algn="ctr" indent="0" marL="0">
+              <a:buNone/>
+            </a:pPr>
+            <a:r>
+              <a:rPr lang="en-US" sz="680" dirty="0">
+                <a:solidFill>
+                  <a:srgbClr val="8FA1AC"/>
+                </a:solidFill>
+                <a:latin typeface="Poppins" pitchFamily="34" charset="0"/>
+                <a:ea typeface="Poppins" pitchFamily="34" charset="-122"/>
+                <a:cs typeface="Poppins" pitchFamily="34" charset="-120"/>
+              </a:rPr>
+              <a:t>—</a:t>
+            </a:r>
+            <a:endParaRPr lang="en-US" sz="680" dirty="0"/>
+          </a:p>
+        </p:txBody>
+      </p:sp>
+      <p:sp>
+        <p:nvSpPr>
+          <p:cNvPr id="89" name="Text 87"/>
+          <p:cNvSpPr txBox="1"/>
+          <p:nvPr/>
+        </p:nvSpPr>
+        <p:spPr>
+          <a:xfrm>
+            <a:off x="4215384" y="3443369"/>
+            <a:ext cx="1051560" cy="116259"/>
+          </a:xfrm>
+          <a:prstGeom prst="rect">
+            <a:avLst/>
+          </a:prstGeom>
+          <a:noFill/>
+          <a:ln/>
+        </p:spPr>
+        <p:txBody>
+          <a:bodyPr wrap="square" lIns="0" tIns="0" rIns="0" bIns="0" rtlCol="0" anchor="ctr"/>
+          <a:lstStyle/>
+          <a:p>
+            <a:pPr algn="ctr" indent="0" marL="0">
+              <a:buNone/>
+            </a:pPr>
+            <a:r>
+              <a:rPr lang="en-US" sz="680" dirty="0">
+                <a:solidFill>
+                  <a:srgbClr val="8FA1AC"/>
+                </a:solidFill>
+                <a:latin typeface="Poppins" pitchFamily="34" charset="0"/>
+                <a:ea typeface="Poppins" pitchFamily="34" charset="-122"/>
+                <a:cs typeface="Poppins" pitchFamily="34" charset="-120"/>
+              </a:rPr>
+              <a:t>—</a:t>
+            </a:r>
+            <a:endParaRPr lang="en-US" sz="680" dirty="0"/>
+          </a:p>
+        </p:txBody>
+      </p:sp>
+      <p:sp>
+        <p:nvSpPr>
+          <p:cNvPr id="90" name="Shape 88"/>
+          <p:cNvSpPr/>
+          <p:nvPr/>
+        </p:nvSpPr>
+        <p:spPr>
+          <a:xfrm>
+            <a:off x="5321808" y="3450684"/>
+            <a:ext cx="996696" cy="102543"/>
           </a:xfrm>
           <a:prstGeom prst="rect">
             <a:avLst/>
@@ -16838,14 +18207,14 @@
       </p:sp>
       <p:sp>
         <p:nvSpPr>
-          <p:cNvPr id="52" name="Text 50"/>
-          <p:cNvSpPr txBox="1"/>
-          <p:nvPr/>
-        </p:nvSpPr>
-        <p:spPr>
-          <a:xfrm>
-            <a:off x="4215384" y="2816352"/>
-            <a:ext cx="1051560" cy="150460"/>
+          <p:cNvPr id="91" name="Text 89"/>
+          <p:cNvSpPr txBox="1"/>
+          <p:nvPr/>
+        </p:nvSpPr>
+        <p:spPr>
+          <a:xfrm>
+            <a:off x="5294376" y="3443369"/>
+            <a:ext cx="1051560" cy="116259"/>
           </a:xfrm>
           <a:prstGeom prst="rect">
             <a:avLst/>
@@ -16869,7 +18238,7 @@
                 <a:ea typeface="Poppins" pitchFamily="34" charset="-122"/>
                 <a:cs typeface="Poppins" pitchFamily="34" charset="-120"/>
               </a:rPr>
-              <a:t>15,821</a:t>
+              <a:t>86,307</a:t>
             </a:r>
             <a:endParaRPr lang="en-US" sz="680" dirty="0"/>
           </a:p>
@@ -16877,14 +18246,112 @@
       </p:sp>
       <p:sp>
         <p:nvSpPr>
-          <p:cNvPr id="53" name="Text 51"/>
-          <p:cNvSpPr txBox="1"/>
-          <p:nvPr/>
-        </p:nvSpPr>
-        <p:spPr>
-          <a:xfrm>
-            <a:off x="5294376" y="2816352"/>
-            <a:ext cx="1051560" cy="150460"/>
+          <p:cNvPr id="92" name="Text 90"/>
+          <p:cNvSpPr txBox="1"/>
+          <p:nvPr/>
+        </p:nvSpPr>
+        <p:spPr>
+          <a:xfrm>
+            <a:off x="6400800" y="3443369"/>
+            <a:ext cx="1280160" cy="116259"/>
+          </a:xfrm>
+          <a:prstGeom prst="rect">
+            <a:avLst/>
+          </a:prstGeom>
+          <a:noFill/>
+          <a:ln/>
+        </p:spPr>
+        <p:txBody>
+          <a:bodyPr wrap="square" lIns="0" tIns="0" rIns="0" bIns="0" rtlCol="0" anchor="ctr"/>
+          <a:lstStyle/>
+          <a:p>
+            <a:pPr algn="r" indent="0" marL="0">
+              <a:buNone/>
+            </a:pPr>
+            <a:r>
+              <a:rPr lang="en-US" sz="700" b="1" dirty="0">
+                <a:solidFill>
+                  <a:srgbClr val="5E7280"/>
+                </a:solidFill>
+                <a:latin typeface="Poppins" pitchFamily="34" charset="0"/>
+                <a:ea typeface="Poppins" pitchFamily="34" charset="-122"/>
+                <a:cs typeface="Poppins" pitchFamily="34" charset="-120"/>
+              </a:rPr>
+              <a:t>86,307</a:t>
+            </a:r>
+            <a:endParaRPr lang="en-US" sz="700" dirty="0"/>
+          </a:p>
+        </p:txBody>
+      </p:sp>
+      <p:sp>
+        <p:nvSpPr>
+          <p:cNvPr id="93" name="Text 91"/>
+          <p:cNvSpPr txBox="1"/>
+          <p:nvPr/>
+        </p:nvSpPr>
+        <p:spPr>
+          <a:xfrm>
+            <a:off x="594360" y="3568773"/>
+            <a:ext cx="1417320" cy="116259"/>
+          </a:xfrm>
+          <a:prstGeom prst="rect">
+            <a:avLst/>
+          </a:prstGeom>
+          <a:noFill/>
+          <a:ln/>
+        </p:spPr>
+        <p:txBody>
+          <a:bodyPr wrap="square" lIns="0" tIns="0" rIns="0" bIns="0" rtlCol="0" anchor="ctr"/>
+          <a:lstStyle/>
+          <a:p>
+            <a:pPr indent="0" marL="0">
+              <a:buNone/>
+            </a:pPr>
+            <a:r>
+              <a:rPr lang="en-US" sz="720" b="1" dirty="0">
+                <a:solidFill>
+                  <a:srgbClr val="12293A"/>
+                </a:solidFill>
+                <a:latin typeface="Poppins" pitchFamily="34" charset="0"/>
+                <a:ea typeface="Poppins" pitchFamily="34" charset="-122"/>
+                <a:cs typeface="Poppins" pitchFamily="34" charset="-120"/>
+              </a:rPr>
+              <a:t>Hawraa Khalil</a:t>
+            </a:r>
+            <a:endParaRPr lang="en-US" sz="720" dirty="0"/>
+          </a:p>
+        </p:txBody>
+      </p:sp>
+      <p:sp>
+        <p:nvSpPr>
+          <p:cNvPr id="94" name="Shape 92"/>
+          <p:cNvSpPr/>
+          <p:nvPr/>
+        </p:nvSpPr>
+        <p:spPr>
+          <a:xfrm>
+            <a:off x="2084832" y="3576088"/>
+            <a:ext cx="996696" cy="102543"/>
+          </a:xfrm>
+          <a:prstGeom prst="rect">
+            <a:avLst/>
+          </a:prstGeom>
+          <a:solidFill>
+            <a:srgbClr val="EDF5F7"/>
+          </a:solidFill>
+          <a:ln/>
+        </p:spPr>
+      </p:sp>
+      <p:sp>
+        <p:nvSpPr>
+          <p:cNvPr id="95" name="Text 93"/>
+          <p:cNvSpPr txBox="1"/>
+          <p:nvPr/>
+        </p:nvSpPr>
+        <p:spPr>
+          <a:xfrm>
+            <a:off x="2057400" y="3568773"/>
+            <a:ext cx="1051560" cy="116259"/>
           </a:xfrm>
           <a:prstGeom prst="rect">
             <a:avLst/>
@@ -16902,6 +18369,163 @@
             <a:r>
               <a:rPr lang="en-US" sz="680" dirty="0">
                 <a:solidFill>
+                  <a:srgbClr val="12293A"/>
+                </a:solidFill>
+                <a:latin typeface="Poppins" pitchFamily="34" charset="0"/>
+                <a:ea typeface="Poppins" pitchFamily="34" charset="-122"/>
+                <a:cs typeface="Poppins" pitchFamily="34" charset="-120"/>
+              </a:rPr>
+              <a:t>28,536</a:t>
+            </a:r>
+            <a:endParaRPr lang="en-US" sz="680" dirty="0"/>
+          </a:p>
+        </p:txBody>
+      </p:sp>
+      <p:sp>
+        <p:nvSpPr>
+          <p:cNvPr id="96" name="Shape 94"/>
+          <p:cNvSpPr/>
+          <p:nvPr/>
+        </p:nvSpPr>
+        <p:spPr>
+          <a:xfrm>
+            <a:off x="3163824" y="3576088"/>
+            <a:ext cx="996696" cy="102543"/>
+          </a:xfrm>
+          <a:prstGeom prst="rect">
+            <a:avLst/>
+          </a:prstGeom>
+          <a:solidFill>
+            <a:srgbClr val="EDF5F7"/>
+          </a:solidFill>
+          <a:ln/>
+        </p:spPr>
+      </p:sp>
+      <p:sp>
+        <p:nvSpPr>
+          <p:cNvPr id="97" name="Text 95"/>
+          <p:cNvSpPr txBox="1"/>
+          <p:nvPr/>
+        </p:nvSpPr>
+        <p:spPr>
+          <a:xfrm>
+            <a:off x="3136392" y="3568773"/>
+            <a:ext cx="1051560" cy="116259"/>
+          </a:xfrm>
+          <a:prstGeom prst="rect">
+            <a:avLst/>
+          </a:prstGeom>
+          <a:noFill/>
+          <a:ln/>
+        </p:spPr>
+        <p:txBody>
+          <a:bodyPr wrap="square" lIns="0" tIns="0" rIns="0" bIns="0" rtlCol="0" anchor="ctr"/>
+          <a:lstStyle/>
+          <a:p>
+            <a:pPr algn="ctr" indent="0" marL="0">
+              <a:buNone/>
+            </a:pPr>
+            <a:r>
+              <a:rPr lang="en-US" sz="680" dirty="0">
+                <a:solidFill>
+                  <a:srgbClr val="12293A"/>
+                </a:solidFill>
+                <a:latin typeface="Poppins" pitchFamily="34" charset="0"/>
+                <a:ea typeface="Poppins" pitchFamily="34" charset="-122"/>
+                <a:cs typeface="Poppins" pitchFamily="34" charset="-120"/>
+              </a:rPr>
+              <a:t>23,285</a:t>
+            </a:r>
+            <a:endParaRPr lang="en-US" sz="680" dirty="0"/>
+          </a:p>
+        </p:txBody>
+      </p:sp>
+      <p:sp>
+        <p:nvSpPr>
+          <p:cNvPr id="98" name="Shape 96"/>
+          <p:cNvSpPr/>
+          <p:nvPr/>
+        </p:nvSpPr>
+        <p:spPr>
+          <a:xfrm>
+            <a:off x="4242816" y="3576088"/>
+            <a:ext cx="996696" cy="102543"/>
+          </a:xfrm>
+          <a:prstGeom prst="rect">
+            <a:avLst/>
+          </a:prstGeom>
+          <a:solidFill>
+            <a:srgbClr val="EDF5F7"/>
+          </a:solidFill>
+          <a:ln/>
+        </p:spPr>
+      </p:sp>
+      <p:sp>
+        <p:nvSpPr>
+          <p:cNvPr id="99" name="Text 97"/>
+          <p:cNvSpPr txBox="1"/>
+          <p:nvPr/>
+        </p:nvSpPr>
+        <p:spPr>
+          <a:xfrm>
+            <a:off x="4215384" y="3568773"/>
+            <a:ext cx="1051560" cy="116259"/>
+          </a:xfrm>
+          <a:prstGeom prst="rect">
+            <a:avLst/>
+          </a:prstGeom>
+          <a:noFill/>
+          <a:ln/>
+        </p:spPr>
+        <p:txBody>
+          <a:bodyPr wrap="square" lIns="0" tIns="0" rIns="0" bIns="0" rtlCol="0" anchor="ctr"/>
+          <a:lstStyle/>
+          <a:p>
+            <a:pPr algn="ctr" indent="0" marL="0">
+              <a:buNone/>
+            </a:pPr>
+            <a:r>
+              <a:rPr lang="en-US" sz="680" dirty="0">
+                <a:solidFill>
+                  <a:srgbClr val="12293A"/>
+                </a:solidFill>
+                <a:latin typeface="Poppins" pitchFamily="34" charset="0"/>
+                <a:ea typeface="Poppins" pitchFamily="34" charset="-122"/>
+                <a:cs typeface="Poppins" pitchFamily="34" charset="-120"/>
+              </a:rPr>
+              <a:t>19,047</a:t>
+            </a:r>
+            <a:endParaRPr lang="en-US" sz="680" dirty="0"/>
+          </a:p>
+        </p:txBody>
+      </p:sp>
+      <p:sp>
+        <p:nvSpPr>
+          <p:cNvPr id="100" name="Text 98"/>
+          <p:cNvSpPr txBox="1"/>
+          <p:nvPr/>
+        </p:nvSpPr>
+        <p:spPr>
+          <a:xfrm>
+            <a:off x="5294376" y="3568773"/>
+            <a:ext cx="1051560" cy="116259"/>
+          </a:xfrm>
+          <a:prstGeom prst="rect">
+            <a:avLst/>
+          </a:prstGeom>
+          <a:noFill/>
+          <a:ln/>
+        </p:spPr>
+        <p:txBody>
+          <a:bodyPr wrap="square" lIns="0" tIns="0" rIns="0" bIns="0" rtlCol="0" anchor="ctr"/>
+          <a:lstStyle/>
+          <a:p>
+            <a:pPr algn="ctr" indent="0" marL="0">
+              <a:buNone/>
+            </a:pPr>
+            <a:r>
+              <a:rPr lang="en-US" sz="680" dirty="0">
+                <a:solidFill>
                   <a:srgbClr val="8FA1AC"/>
                 </a:solidFill>
                 <a:latin typeface="Poppins" pitchFamily="34" charset="0"/>
@@ -16916,14 +18540,14 @@
       </p:sp>
       <p:sp>
         <p:nvSpPr>
-          <p:cNvPr id="54" name="Text 52"/>
-          <p:cNvSpPr txBox="1"/>
-          <p:nvPr/>
-        </p:nvSpPr>
-        <p:spPr>
-          <a:xfrm>
-            <a:off x="6400800" y="2816352"/>
-            <a:ext cx="1280160" cy="150460"/>
+          <p:cNvPr id="101" name="Text 99"/>
+          <p:cNvSpPr txBox="1"/>
+          <p:nvPr/>
+        </p:nvSpPr>
+        <p:spPr>
+          <a:xfrm>
+            <a:off x="6400800" y="3568773"/>
+            <a:ext cx="1280160" cy="116259"/>
           </a:xfrm>
           <a:prstGeom prst="rect">
             <a:avLst/>
@@ -16947,7 +18571,7 @@
                 <a:ea typeface="Poppins" pitchFamily="34" charset="-122"/>
                 <a:cs typeface="Poppins" pitchFamily="34" charset="-120"/>
               </a:rPr>
-              <a:t>96,644</a:t>
+              <a:t>70,868</a:t>
             </a:r>
             <a:endParaRPr lang="en-US" sz="700" dirty="0"/>
           </a:p>
@@ -16955,14 +18579,14 @@
       </p:sp>
       <p:sp>
         <p:nvSpPr>
-          <p:cNvPr id="55" name="Text 53"/>
-          <p:cNvSpPr txBox="1"/>
-          <p:nvPr/>
-        </p:nvSpPr>
-        <p:spPr>
-          <a:xfrm>
-            <a:off x="594360" y="2975956"/>
-            <a:ext cx="1417320" cy="150460"/>
+          <p:cNvPr id="102" name="Text 100"/>
+          <p:cNvSpPr txBox="1"/>
+          <p:nvPr/>
+        </p:nvSpPr>
+        <p:spPr>
+          <a:xfrm>
+            <a:off x="594360" y="3694176"/>
+            <a:ext cx="1417320" cy="116259"/>
           </a:xfrm>
           <a:prstGeom prst="rect">
             <a:avLst/>
@@ -16986,7 +18610,7 @@
                 <a:ea typeface="Poppins" pitchFamily="34" charset="-122"/>
                 <a:cs typeface="Poppins" pitchFamily="34" charset="-120"/>
               </a:rPr>
-              <a:t>Nicolas Ibrahim</a:t>
+              <a:t>Ciaran Dempsey</a:t>
             </a:r>
             <a:endParaRPr lang="en-US" sz="720" dirty="0"/>
           </a:p>
@@ -16994,14 +18618,14 @@
       </p:sp>
       <p:sp>
         <p:nvSpPr>
-          <p:cNvPr id="56" name="Shape 54"/>
-          <p:cNvSpPr/>
-          <p:nvPr/>
-        </p:nvSpPr>
-        <p:spPr>
-          <a:xfrm>
-            <a:off x="2084832" y="2983272"/>
-            <a:ext cx="996696" cy="136744"/>
+          <p:cNvPr id="103" name="Shape 101"/>
+          <p:cNvSpPr/>
+          <p:nvPr/>
+        </p:nvSpPr>
+        <p:spPr>
+          <a:xfrm>
+            <a:off x="2084832" y="3701491"/>
+            <a:ext cx="996696" cy="102543"/>
           </a:xfrm>
           <a:prstGeom prst="rect">
             <a:avLst/>
@@ -17014,14 +18638,14 @@
       </p:sp>
       <p:sp>
         <p:nvSpPr>
-          <p:cNvPr id="57" name="Text 55"/>
-          <p:cNvSpPr txBox="1"/>
-          <p:nvPr/>
-        </p:nvSpPr>
-        <p:spPr>
-          <a:xfrm>
-            <a:off x="2057400" y="2975956"/>
-            <a:ext cx="1051560" cy="150460"/>
+          <p:cNvPr id="104" name="Text 102"/>
+          <p:cNvSpPr txBox="1"/>
+          <p:nvPr/>
+        </p:nvSpPr>
+        <p:spPr>
+          <a:xfrm>
+            <a:off x="2057400" y="3694176"/>
+            <a:ext cx="1051560" cy="116259"/>
           </a:xfrm>
           <a:prstGeom prst="rect">
             <a:avLst/>
@@ -17045,7 +18669,7 @@
                 <a:ea typeface="Poppins" pitchFamily="34" charset="-122"/>
                 <a:cs typeface="Poppins" pitchFamily="34" charset="-120"/>
               </a:rPr>
-              <a:t>15,834</a:t>
+              <a:t>18,918</a:t>
             </a:r>
             <a:endParaRPr lang="en-US" sz="680" dirty="0"/>
           </a:p>
@@ -17053,34 +18677,34 @@
       </p:sp>
       <p:sp>
         <p:nvSpPr>
-          <p:cNvPr id="58" name="Shape 56"/>
-          <p:cNvSpPr/>
-          <p:nvPr/>
-        </p:nvSpPr>
-        <p:spPr>
-          <a:xfrm>
-            <a:off x="3163824" y="2983272"/>
-            <a:ext cx="996696" cy="136744"/>
-          </a:xfrm>
-          <a:prstGeom prst="rect">
-            <a:avLst/>
-          </a:prstGeom>
-          <a:solidFill>
-            <a:srgbClr val="D4E9ED"/>
-          </a:solidFill>
-          <a:ln/>
-        </p:spPr>
-      </p:sp>
-      <p:sp>
-        <p:nvSpPr>
-          <p:cNvPr id="59" name="Text 57"/>
-          <p:cNvSpPr txBox="1"/>
-          <p:nvPr/>
-        </p:nvSpPr>
-        <p:spPr>
-          <a:xfrm>
-            <a:off x="3136392" y="2975956"/>
-            <a:ext cx="1051560" cy="150460"/>
+          <p:cNvPr id="105" name="Shape 103"/>
+          <p:cNvSpPr/>
+          <p:nvPr/>
+        </p:nvSpPr>
+        <p:spPr>
+          <a:xfrm>
+            <a:off x="3163824" y="3701491"/>
+            <a:ext cx="996696" cy="102543"/>
+          </a:xfrm>
+          <a:prstGeom prst="rect">
+            <a:avLst/>
+          </a:prstGeom>
+          <a:solidFill>
+            <a:srgbClr val="EDF5F7"/>
+          </a:solidFill>
+          <a:ln/>
+        </p:spPr>
+      </p:sp>
+      <p:sp>
+        <p:nvSpPr>
+          <p:cNvPr id="106" name="Text 104"/>
+          <p:cNvSpPr txBox="1"/>
+          <p:nvPr/>
+        </p:nvSpPr>
+        <p:spPr>
+          <a:xfrm>
+            <a:off x="3136392" y="3694176"/>
+            <a:ext cx="1051560" cy="116259"/>
           </a:xfrm>
           <a:prstGeom prst="rect">
             <a:avLst/>
@@ -17104,7 +18728,7 @@
                 <a:ea typeface="Poppins" pitchFamily="34" charset="-122"/>
                 <a:cs typeface="Poppins" pitchFamily="34" charset="-120"/>
               </a:rPr>
-              <a:t>38,142</a:t>
+              <a:t>23,650</a:t>
             </a:r>
             <a:endParaRPr lang="en-US" sz="680" dirty="0"/>
           </a:p>
@@ -17112,34 +18736,34 @@
       </p:sp>
       <p:sp>
         <p:nvSpPr>
-          <p:cNvPr id="60" name="Shape 58"/>
-          <p:cNvSpPr/>
-          <p:nvPr/>
-        </p:nvSpPr>
-        <p:spPr>
-          <a:xfrm>
-            <a:off x="4242816" y="2983272"/>
-            <a:ext cx="996696" cy="136744"/>
-          </a:xfrm>
-          <a:prstGeom prst="rect">
-            <a:avLst/>
-          </a:prstGeom>
-          <a:solidFill>
-            <a:srgbClr val="B5D9E0"/>
-          </a:solidFill>
-          <a:ln/>
-        </p:spPr>
-      </p:sp>
-      <p:sp>
-        <p:nvSpPr>
-          <p:cNvPr id="61" name="Text 59"/>
-          <p:cNvSpPr txBox="1"/>
-          <p:nvPr/>
-        </p:nvSpPr>
-        <p:spPr>
-          <a:xfrm>
-            <a:off x="4215384" y="2975956"/>
-            <a:ext cx="1051560" cy="150460"/>
+          <p:cNvPr id="107" name="Shape 105"/>
+          <p:cNvSpPr/>
+          <p:nvPr/>
+        </p:nvSpPr>
+        <p:spPr>
+          <a:xfrm>
+            <a:off x="4242816" y="3701491"/>
+            <a:ext cx="996696" cy="102543"/>
+          </a:xfrm>
+          <a:prstGeom prst="rect">
+            <a:avLst/>
+          </a:prstGeom>
+          <a:solidFill>
+            <a:srgbClr val="EDF5F7"/>
+          </a:solidFill>
+          <a:ln/>
+        </p:spPr>
+      </p:sp>
+      <p:sp>
+        <p:nvSpPr>
+          <p:cNvPr id="108" name="Text 106"/>
+          <p:cNvSpPr txBox="1"/>
+          <p:nvPr/>
+        </p:nvSpPr>
+        <p:spPr>
+          <a:xfrm>
+            <a:off x="4215384" y="3694176"/>
+            <a:ext cx="1051560" cy="116259"/>
           </a:xfrm>
           <a:prstGeom prst="rect">
             <a:avLst/>
@@ -17163,7 +18787,7 @@
                 <a:ea typeface="Poppins" pitchFamily="34" charset="-122"/>
                 <a:cs typeface="Poppins" pitchFamily="34" charset="-120"/>
               </a:rPr>
-              <a:t>99,693</a:t>
+              <a:t>24,443</a:t>
             </a:r>
             <a:endParaRPr lang="en-US" sz="680" dirty="0"/>
           </a:p>
@@ -17171,34 +18795,34 @@
       </p:sp>
       <p:sp>
         <p:nvSpPr>
-          <p:cNvPr id="62" name="Shape 60"/>
-          <p:cNvSpPr/>
-          <p:nvPr/>
-        </p:nvSpPr>
-        <p:spPr>
-          <a:xfrm>
-            <a:off x="5321808" y="2983272"/>
-            <a:ext cx="996696" cy="136744"/>
-          </a:xfrm>
-          <a:prstGeom prst="rect">
-            <a:avLst/>
-          </a:prstGeom>
-          <a:solidFill>
-            <a:srgbClr val="8FC3CC"/>
-          </a:solidFill>
-          <a:ln/>
-        </p:spPr>
-      </p:sp>
-      <p:sp>
-        <p:nvSpPr>
-          <p:cNvPr id="63" name="Text 61"/>
-          <p:cNvSpPr txBox="1"/>
-          <p:nvPr/>
-        </p:nvSpPr>
-        <p:spPr>
-          <a:xfrm>
-            <a:off x="5294376" y="2975956"/>
-            <a:ext cx="1051560" cy="150460"/>
+          <p:cNvPr id="109" name="Shape 107"/>
+          <p:cNvSpPr/>
+          <p:nvPr/>
+        </p:nvSpPr>
+        <p:spPr>
+          <a:xfrm>
+            <a:off x="5321808" y="3701491"/>
+            <a:ext cx="996696" cy="102543"/>
+          </a:xfrm>
+          <a:prstGeom prst="rect">
+            <a:avLst/>
+          </a:prstGeom>
+          <a:solidFill>
+            <a:srgbClr val="EDF5F7"/>
+          </a:solidFill>
+          <a:ln/>
+        </p:spPr>
+      </p:sp>
+      <p:sp>
+        <p:nvSpPr>
+          <p:cNvPr id="110" name="Text 108"/>
+          <p:cNvSpPr txBox="1"/>
+          <p:nvPr/>
+        </p:nvSpPr>
+        <p:spPr>
+          <a:xfrm>
+            <a:off x="5294376" y="3694176"/>
+            <a:ext cx="1051560" cy="116259"/>
           </a:xfrm>
           <a:prstGeom prst="rect">
             <a:avLst/>
@@ -17222,7 +18846,7 @@
                 <a:ea typeface="Poppins" pitchFamily="34" charset="-122"/>
                 <a:cs typeface="Poppins" pitchFamily="34" charset="-120"/>
               </a:rPr>
-              <a:t>170,962</a:t>
+              <a:t>5,382</a:t>
             </a:r>
             <a:endParaRPr lang="en-US" sz="680" dirty="0"/>
           </a:p>
@@ -17230,14 +18854,14 @@
       </p:sp>
       <p:sp>
         <p:nvSpPr>
-          <p:cNvPr id="64" name="Text 62"/>
-          <p:cNvSpPr txBox="1"/>
-          <p:nvPr/>
-        </p:nvSpPr>
-        <p:spPr>
-          <a:xfrm>
-            <a:off x="6400800" y="2975956"/>
-            <a:ext cx="1280160" cy="150460"/>
+          <p:cNvPr id="111" name="Text 109"/>
+          <p:cNvSpPr txBox="1"/>
+          <p:nvPr/>
+        </p:nvSpPr>
+        <p:spPr>
+          <a:xfrm>
+            <a:off x="6400800" y="3694176"/>
+            <a:ext cx="1280160" cy="116259"/>
           </a:xfrm>
           <a:prstGeom prst="rect">
             <a:avLst/>
@@ -17261,7 +18885,7 @@
                 <a:ea typeface="Poppins" pitchFamily="34" charset="-122"/>
                 <a:cs typeface="Poppins" pitchFamily="34" charset="-120"/>
               </a:rPr>
-              <a:t>324,631</a:t>
+              <a:t>72,393</a:t>
             </a:r>
             <a:endParaRPr lang="en-US" sz="700" dirty="0"/>
           </a:p>
@@ -17269,14 +18893,14 @@
       </p:sp>
       <p:sp>
         <p:nvSpPr>
-          <p:cNvPr id="65" name="Text 63"/>
-          <p:cNvSpPr txBox="1"/>
-          <p:nvPr/>
-        </p:nvSpPr>
-        <p:spPr>
-          <a:xfrm>
-            <a:off x="594360" y="3135561"/>
-            <a:ext cx="1417320" cy="150460"/>
+          <p:cNvPr id="112" name="Text 110"/>
+          <p:cNvSpPr txBox="1"/>
+          <p:nvPr/>
+        </p:nvSpPr>
+        <p:spPr>
+          <a:xfrm>
+            <a:off x="594360" y="3819579"/>
+            <a:ext cx="1417320" cy="116259"/>
           </a:xfrm>
           <a:prstGeom prst="rect">
             <a:avLst/>
@@ -17300,7 +18924,7 @@
                 <a:ea typeface="Poppins" pitchFamily="34" charset="-122"/>
                 <a:cs typeface="Poppins" pitchFamily="34" charset="-120"/>
               </a:rPr>
-              <a:t>Daniel Maddern</a:t>
+              <a:t>David Corbett</a:t>
             </a:r>
             <a:endParaRPr lang="en-US" sz="720" dirty="0"/>
           </a:p>
@@ -17308,14 +18932,34 @@
       </p:sp>
       <p:sp>
         <p:nvSpPr>
-          <p:cNvPr id="66" name="Text 64"/>
-          <p:cNvSpPr txBox="1"/>
-          <p:nvPr/>
-        </p:nvSpPr>
-        <p:spPr>
-          <a:xfrm>
-            <a:off x="2057400" y="3135561"/>
-            <a:ext cx="1051560" cy="150460"/>
+          <p:cNvPr id="113" name="Shape 111"/>
+          <p:cNvSpPr/>
+          <p:nvPr/>
+        </p:nvSpPr>
+        <p:spPr>
+          <a:xfrm>
+            <a:off x="2084832" y="3826895"/>
+            <a:ext cx="996696" cy="102543"/>
+          </a:xfrm>
+          <a:prstGeom prst="rect">
+            <a:avLst/>
+          </a:prstGeom>
+          <a:solidFill>
+            <a:srgbClr val="EDF5F7"/>
+          </a:solidFill>
+          <a:ln/>
+        </p:spPr>
+      </p:sp>
+      <p:sp>
+        <p:nvSpPr>
+          <p:cNvPr id="114" name="Text 112"/>
+          <p:cNvSpPr txBox="1"/>
+          <p:nvPr/>
+        </p:nvSpPr>
+        <p:spPr>
+          <a:xfrm>
+            <a:off x="2057400" y="3819579"/>
+            <a:ext cx="1051560" cy="116259"/>
           </a:xfrm>
           <a:prstGeom prst="rect">
             <a:avLst/>
@@ -17333,6 +18977,614 @@
             <a:r>
               <a:rPr lang="en-US" sz="680" dirty="0">
                 <a:solidFill>
+                  <a:srgbClr val="12293A"/>
+                </a:solidFill>
+                <a:latin typeface="Poppins" pitchFamily="34" charset="0"/>
+                <a:ea typeface="Poppins" pitchFamily="34" charset="-122"/>
+                <a:cs typeface="Poppins" pitchFamily="34" charset="-120"/>
+              </a:rPr>
+              <a:t>27,031</a:t>
+            </a:r>
+            <a:endParaRPr lang="en-US" sz="680" dirty="0"/>
+          </a:p>
+        </p:txBody>
+      </p:sp>
+      <p:sp>
+        <p:nvSpPr>
+          <p:cNvPr id="115" name="Shape 113"/>
+          <p:cNvSpPr/>
+          <p:nvPr/>
+        </p:nvSpPr>
+        <p:spPr>
+          <a:xfrm>
+            <a:off x="3163824" y="3826895"/>
+            <a:ext cx="996696" cy="102543"/>
+          </a:xfrm>
+          <a:prstGeom prst="rect">
+            <a:avLst/>
+          </a:prstGeom>
+          <a:solidFill>
+            <a:srgbClr val="EDF5F7"/>
+          </a:solidFill>
+          <a:ln/>
+        </p:spPr>
+      </p:sp>
+      <p:sp>
+        <p:nvSpPr>
+          <p:cNvPr id="116" name="Text 114"/>
+          <p:cNvSpPr txBox="1"/>
+          <p:nvPr/>
+        </p:nvSpPr>
+        <p:spPr>
+          <a:xfrm>
+            <a:off x="3136392" y="3819579"/>
+            <a:ext cx="1051560" cy="116259"/>
+          </a:xfrm>
+          <a:prstGeom prst="rect">
+            <a:avLst/>
+          </a:prstGeom>
+          <a:noFill/>
+          <a:ln/>
+        </p:spPr>
+        <p:txBody>
+          <a:bodyPr wrap="square" lIns="0" tIns="0" rIns="0" bIns="0" rtlCol="0" anchor="ctr"/>
+          <a:lstStyle/>
+          <a:p>
+            <a:pPr algn="ctr" indent="0" marL="0">
+              <a:buNone/>
+            </a:pPr>
+            <a:r>
+              <a:rPr lang="en-US" sz="680" dirty="0">
+                <a:solidFill>
+                  <a:srgbClr val="12293A"/>
+                </a:solidFill>
+                <a:latin typeface="Poppins" pitchFamily="34" charset="0"/>
+                <a:ea typeface="Poppins" pitchFamily="34" charset="-122"/>
+                <a:cs typeface="Poppins" pitchFamily="34" charset="-120"/>
+              </a:rPr>
+              <a:t>10,145</a:t>
+            </a:r>
+            <a:endParaRPr lang="en-US" sz="680" dirty="0"/>
+          </a:p>
+        </p:txBody>
+      </p:sp>
+      <p:sp>
+        <p:nvSpPr>
+          <p:cNvPr id="117" name="Shape 115"/>
+          <p:cNvSpPr/>
+          <p:nvPr/>
+        </p:nvSpPr>
+        <p:spPr>
+          <a:xfrm>
+            <a:off x="4242816" y="3826895"/>
+            <a:ext cx="996696" cy="102543"/>
+          </a:xfrm>
+          <a:prstGeom prst="rect">
+            <a:avLst/>
+          </a:prstGeom>
+          <a:solidFill>
+            <a:srgbClr val="EDF5F7"/>
+          </a:solidFill>
+          <a:ln/>
+        </p:spPr>
+      </p:sp>
+      <p:sp>
+        <p:nvSpPr>
+          <p:cNvPr id="118" name="Text 116"/>
+          <p:cNvSpPr txBox="1"/>
+          <p:nvPr/>
+        </p:nvSpPr>
+        <p:spPr>
+          <a:xfrm>
+            <a:off x="4215384" y="3819579"/>
+            <a:ext cx="1051560" cy="116259"/>
+          </a:xfrm>
+          <a:prstGeom prst="rect">
+            <a:avLst/>
+          </a:prstGeom>
+          <a:noFill/>
+          <a:ln/>
+        </p:spPr>
+        <p:txBody>
+          <a:bodyPr wrap="square" lIns="0" tIns="0" rIns="0" bIns="0" rtlCol="0" anchor="ctr"/>
+          <a:lstStyle/>
+          <a:p>
+            <a:pPr algn="ctr" indent="0" marL="0">
+              <a:buNone/>
+            </a:pPr>
+            <a:r>
+              <a:rPr lang="en-US" sz="680" dirty="0">
+                <a:solidFill>
+                  <a:srgbClr val="12293A"/>
+                </a:solidFill>
+                <a:latin typeface="Poppins" pitchFamily="34" charset="0"/>
+                <a:ea typeface="Poppins" pitchFamily="34" charset="-122"/>
+                <a:cs typeface="Poppins" pitchFamily="34" charset="-120"/>
+              </a:rPr>
+              <a:t>30,828</a:t>
+            </a:r>
+            <a:endParaRPr lang="en-US" sz="680" dirty="0"/>
+          </a:p>
+        </p:txBody>
+      </p:sp>
+      <p:sp>
+        <p:nvSpPr>
+          <p:cNvPr id="119" name="Shape 117"/>
+          <p:cNvSpPr/>
+          <p:nvPr/>
+        </p:nvSpPr>
+        <p:spPr>
+          <a:xfrm>
+            <a:off x="5321808" y="3826895"/>
+            <a:ext cx="996696" cy="102543"/>
+          </a:xfrm>
+          <a:prstGeom prst="rect">
+            <a:avLst/>
+          </a:prstGeom>
+          <a:solidFill>
+            <a:srgbClr val="EDF5F7"/>
+          </a:solidFill>
+          <a:ln/>
+        </p:spPr>
+      </p:sp>
+      <p:sp>
+        <p:nvSpPr>
+          <p:cNvPr id="120" name="Text 118"/>
+          <p:cNvSpPr txBox="1"/>
+          <p:nvPr/>
+        </p:nvSpPr>
+        <p:spPr>
+          <a:xfrm>
+            <a:off x="5294376" y="3819579"/>
+            <a:ext cx="1051560" cy="116259"/>
+          </a:xfrm>
+          <a:prstGeom prst="rect">
+            <a:avLst/>
+          </a:prstGeom>
+          <a:noFill/>
+          <a:ln/>
+        </p:spPr>
+        <p:txBody>
+          <a:bodyPr wrap="square" lIns="0" tIns="0" rIns="0" bIns="0" rtlCol="0" anchor="ctr"/>
+          <a:lstStyle/>
+          <a:p>
+            <a:pPr algn="ctr" indent="0" marL="0">
+              <a:buNone/>
+            </a:pPr>
+            <a:r>
+              <a:rPr lang="en-US" sz="680" dirty="0">
+                <a:solidFill>
+                  <a:srgbClr val="12293A"/>
+                </a:solidFill>
+                <a:latin typeface="Poppins" pitchFamily="34" charset="0"/>
+                <a:ea typeface="Poppins" pitchFamily="34" charset="-122"/>
+                <a:cs typeface="Poppins" pitchFamily="34" charset="-120"/>
+              </a:rPr>
+              <a:t>43,988</a:t>
+            </a:r>
+            <a:endParaRPr lang="en-US" sz="680" dirty="0"/>
+          </a:p>
+        </p:txBody>
+      </p:sp>
+      <p:sp>
+        <p:nvSpPr>
+          <p:cNvPr id="121" name="Text 119"/>
+          <p:cNvSpPr txBox="1"/>
+          <p:nvPr/>
+        </p:nvSpPr>
+        <p:spPr>
+          <a:xfrm>
+            <a:off x="6400800" y="3819579"/>
+            <a:ext cx="1280160" cy="116259"/>
+          </a:xfrm>
+          <a:prstGeom prst="rect">
+            <a:avLst/>
+          </a:prstGeom>
+          <a:noFill/>
+          <a:ln/>
+        </p:spPr>
+        <p:txBody>
+          <a:bodyPr wrap="square" lIns="0" tIns="0" rIns="0" bIns="0" rtlCol="0" anchor="ctr"/>
+          <a:lstStyle/>
+          <a:p>
+            <a:pPr algn="r" indent="0" marL="0">
+              <a:buNone/>
+            </a:pPr>
+            <a:r>
+              <a:rPr lang="en-US" sz="700" b="1" dirty="0">
+                <a:solidFill>
+                  <a:srgbClr val="5E7280"/>
+                </a:solidFill>
+                <a:latin typeface="Poppins" pitchFamily="34" charset="0"/>
+                <a:ea typeface="Poppins" pitchFamily="34" charset="-122"/>
+                <a:cs typeface="Poppins" pitchFamily="34" charset="-120"/>
+              </a:rPr>
+              <a:t>111,992</a:t>
+            </a:r>
+            <a:endParaRPr lang="en-US" sz="700" dirty="0"/>
+          </a:p>
+        </p:txBody>
+      </p:sp>
+      <p:sp>
+        <p:nvSpPr>
+          <p:cNvPr id="122" name="Text 120"/>
+          <p:cNvSpPr txBox="1"/>
+          <p:nvPr/>
+        </p:nvSpPr>
+        <p:spPr>
+          <a:xfrm>
+            <a:off x="594360" y="3944983"/>
+            <a:ext cx="1417320" cy="116259"/>
+          </a:xfrm>
+          <a:prstGeom prst="rect">
+            <a:avLst/>
+          </a:prstGeom>
+          <a:noFill/>
+          <a:ln/>
+        </p:spPr>
+        <p:txBody>
+          <a:bodyPr wrap="square" lIns="0" tIns="0" rIns="0" bIns="0" rtlCol="0" anchor="ctr"/>
+          <a:lstStyle/>
+          <a:p>
+            <a:pPr indent="0" marL="0">
+              <a:buNone/>
+            </a:pPr>
+            <a:r>
+              <a:rPr lang="en-US" sz="720" b="1" dirty="0">
+                <a:solidFill>
+                  <a:srgbClr val="12293A"/>
+                </a:solidFill>
+                <a:latin typeface="Poppins" pitchFamily="34" charset="0"/>
+                <a:ea typeface="Poppins" pitchFamily="34" charset="-122"/>
+                <a:cs typeface="Poppins" pitchFamily="34" charset="-120"/>
+              </a:rPr>
+              <a:t>Chris Huang</a:t>
+            </a:r>
+            <a:endParaRPr lang="en-US" sz="720" dirty="0"/>
+          </a:p>
+        </p:txBody>
+      </p:sp>
+      <p:sp>
+        <p:nvSpPr>
+          <p:cNvPr id="123" name="Shape 121"/>
+          <p:cNvSpPr/>
+          <p:nvPr/>
+        </p:nvSpPr>
+        <p:spPr>
+          <a:xfrm>
+            <a:off x="2084832" y="3952298"/>
+            <a:ext cx="996696" cy="102543"/>
+          </a:xfrm>
+          <a:prstGeom prst="rect">
+            <a:avLst/>
+          </a:prstGeom>
+          <a:solidFill>
+            <a:srgbClr val="EDF5F7"/>
+          </a:solidFill>
+          <a:ln/>
+        </p:spPr>
+      </p:sp>
+      <p:sp>
+        <p:nvSpPr>
+          <p:cNvPr id="124" name="Text 122"/>
+          <p:cNvSpPr txBox="1"/>
+          <p:nvPr/>
+        </p:nvSpPr>
+        <p:spPr>
+          <a:xfrm>
+            <a:off x="2057400" y="3944983"/>
+            <a:ext cx="1051560" cy="116259"/>
+          </a:xfrm>
+          <a:prstGeom prst="rect">
+            <a:avLst/>
+          </a:prstGeom>
+          <a:noFill/>
+          <a:ln/>
+        </p:spPr>
+        <p:txBody>
+          <a:bodyPr wrap="square" lIns="0" tIns="0" rIns="0" bIns="0" rtlCol="0" anchor="ctr"/>
+          <a:lstStyle/>
+          <a:p>
+            <a:pPr algn="ctr" indent="0" marL="0">
+              <a:buNone/>
+            </a:pPr>
+            <a:r>
+              <a:rPr lang="en-US" sz="680" dirty="0">
+                <a:solidFill>
+                  <a:srgbClr val="12293A"/>
+                </a:solidFill>
+                <a:latin typeface="Poppins" pitchFamily="34" charset="0"/>
+                <a:ea typeface="Poppins" pitchFamily="34" charset="-122"/>
+                <a:cs typeface="Poppins" pitchFamily="34" charset="-120"/>
+              </a:rPr>
+              <a:t>19,535</a:t>
+            </a:r>
+            <a:endParaRPr lang="en-US" sz="680" dirty="0"/>
+          </a:p>
+        </p:txBody>
+      </p:sp>
+      <p:sp>
+        <p:nvSpPr>
+          <p:cNvPr id="125" name="Shape 123"/>
+          <p:cNvSpPr/>
+          <p:nvPr/>
+        </p:nvSpPr>
+        <p:spPr>
+          <a:xfrm>
+            <a:off x="3163824" y="3952298"/>
+            <a:ext cx="996696" cy="102543"/>
+          </a:xfrm>
+          <a:prstGeom prst="rect">
+            <a:avLst/>
+          </a:prstGeom>
+          <a:solidFill>
+            <a:srgbClr val="EDF5F7"/>
+          </a:solidFill>
+          <a:ln/>
+        </p:spPr>
+      </p:sp>
+      <p:sp>
+        <p:nvSpPr>
+          <p:cNvPr id="126" name="Text 124"/>
+          <p:cNvSpPr txBox="1"/>
+          <p:nvPr/>
+        </p:nvSpPr>
+        <p:spPr>
+          <a:xfrm>
+            <a:off x="3136392" y="3944983"/>
+            <a:ext cx="1051560" cy="116259"/>
+          </a:xfrm>
+          <a:prstGeom prst="rect">
+            <a:avLst/>
+          </a:prstGeom>
+          <a:noFill/>
+          <a:ln/>
+        </p:spPr>
+        <p:txBody>
+          <a:bodyPr wrap="square" lIns="0" tIns="0" rIns="0" bIns="0" rtlCol="0" anchor="ctr"/>
+          <a:lstStyle/>
+          <a:p>
+            <a:pPr algn="ctr" indent="0" marL="0">
+              <a:buNone/>
+            </a:pPr>
+            <a:r>
+              <a:rPr lang="en-US" sz="680" dirty="0">
+                <a:solidFill>
+                  <a:srgbClr val="12293A"/>
+                </a:solidFill>
+                <a:latin typeface="Poppins" pitchFamily="34" charset="0"/>
+                <a:ea typeface="Poppins" pitchFamily="34" charset="-122"/>
+                <a:cs typeface="Poppins" pitchFamily="34" charset="-120"/>
+              </a:rPr>
+              <a:t>12,856</a:t>
+            </a:r>
+            <a:endParaRPr lang="en-US" sz="680" dirty="0"/>
+          </a:p>
+        </p:txBody>
+      </p:sp>
+      <p:sp>
+        <p:nvSpPr>
+          <p:cNvPr id="127" name="Shape 125"/>
+          <p:cNvSpPr/>
+          <p:nvPr/>
+        </p:nvSpPr>
+        <p:spPr>
+          <a:xfrm>
+            <a:off x="4242816" y="3952298"/>
+            <a:ext cx="996696" cy="102543"/>
+          </a:xfrm>
+          <a:prstGeom prst="rect">
+            <a:avLst/>
+          </a:prstGeom>
+          <a:solidFill>
+            <a:srgbClr val="EDF5F7"/>
+          </a:solidFill>
+          <a:ln/>
+        </p:spPr>
+      </p:sp>
+      <p:sp>
+        <p:nvSpPr>
+          <p:cNvPr id="128" name="Text 126"/>
+          <p:cNvSpPr txBox="1"/>
+          <p:nvPr/>
+        </p:nvSpPr>
+        <p:spPr>
+          <a:xfrm>
+            <a:off x="4215384" y="3944983"/>
+            <a:ext cx="1051560" cy="116259"/>
+          </a:xfrm>
+          <a:prstGeom prst="rect">
+            <a:avLst/>
+          </a:prstGeom>
+          <a:noFill/>
+          <a:ln/>
+        </p:spPr>
+        <p:txBody>
+          <a:bodyPr wrap="square" lIns="0" tIns="0" rIns="0" bIns="0" rtlCol="0" anchor="ctr"/>
+          <a:lstStyle/>
+          <a:p>
+            <a:pPr algn="ctr" indent="0" marL="0">
+              <a:buNone/>
+            </a:pPr>
+            <a:r>
+              <a:rPr lang="en-US" sz="680" dirty="0">
+                <a:solidFill>
+                  <a:srgbClr val="12293A"/>
+                </a:solidFill>
+                <a:latin typeface="Poppins" pitchFamily="34" charset="0"/>
+                <a:ea typeface="Poppins" pitchFamily="34" charset="-122"/>
+                <a:cs typeface="Poppins" pitchFamily="34" charset="-120"/>
+              </a:rPr>
+              <a:t>17,516</a:t>
+            </a:r>
+            <a:endParaRPr lang="en-US" sz="680" dirty="0"/>
+          </a:p>
+        </p:txBody>
+      </p:sp>
+      <p:sp>
+        <p:nvSpPr>
+          <p:cNvPr id="129" name="Shape 127"/>
+          <p:cNvSpPr/>
+          <p:nvPr/>
+        </p:nvSpPr>
+        <p:spPr>
+          <a:xfrm>
+            <a:off x="5321808" y="3952298"/>
+            <a:ext cx="996696" cy="102543"/>
+          </a:xfrm>
+          <a:prstGeom prst="rect">
+            <a:avLst/>
+          </a:prstGeom>
+          <a:solidFill>
+            <a:srgbClr val="EDF5F7"/>
+          </a:solidFill>
+          <a:ln/>
+        </p:spPr>
+      </p:sp>
+      <p:sp>
+        <p:nvSpPr>
+          <p:cNvPr id="130" name="Text 128"/>
+          <p:cNvSpPr txBox="1"/>
+          <p:nvPr/>
+        </p:nvSpPr>
+        <p:spPr>
+          <a:xfrm>
+            <a:off x="5294376" y="3944983"/>
+            <a:ext cx="1051560" cy="116259"/>
+          </a:xfrm>
+          <a:prstGeom prst="rect">
+            <a:avLst/>
+          </a:prstGeom>
+          <a:noFill/>
+          <a:ln/>
+        </p:spPr>
+        <p:txBody>
+          <a:bodyPr wrap="square" lIns="0" tIns="0" rIns="0" bIns="0" rtlCol="0" anchor="ctr"/>
+          <a:lstStyle/>
+          <a:p>
+            <a:pPr algn="ctr" indent="0" marL="0">
+              <a:buNone/>
+            </a:pPr>
+            <a:r>
+              <a:rPr lang="en-US" sz="680" dirty="0">
+                <a:solidFill>
+                  <a:srgbClr val="12293A"/>
+                </a:solidFill>
+                <a:latin typeface="Poppins" pitchFamily="34" charset="0"/>
+                <a:ea typeface="Poppins" pitchFamily="34" charset="-122"/>
+                <a:cs typeface="Poppins" pitchFamily="34" charset="-120"/>
+              </a:rPr>
+              <a:t>8,154</a:t>
+            </a:r>
+            <a:endParaRPr lang="en-US" sz="680" dirty="0"/>
+          </a:p>
+        </p:txBody>
+      </p:sp>
+      <p:sp>
+        <p:nvSpPr>
+          <p:cNvPr id="131" name="Text 129"/>
+          <p:cNvSpPr txBox="1"/>
+          <p:nvPr/>
+        </p:nvSpPr>
+        <p:spPr>
+          <a:xfrm>
+            <a:off x="6400800" y="3944983"/>
+            <a:ext cx="1280160" cy="116259"/>
+          </a:xfrm>
+          <a:prstGeom prst="rect">
+            <a:avLst/>
+          </a:prstGeom>
+          <a:noFill/>
+          <a:ln/>
+        </p:spPr>
+        <p:txBody>
+          <a:bodyPr wrap="square" lIns="0" tIns="0" rIns="0" bIns="0" rtlCol="0" anchor="ctr"/>
+          <a:lstStyle/>
+          <a:p>
+            <a:pPr algn="r" indent="0" marL="0">
+              <a:buNone/>
+            </a:pPr>
+            <a:r>
+              <a:rPr lang="en-US" sz="700" b="1" dirty="0">
+                <a:solidFill>
+                  <a:srgbClr val="5E7280"/>
+                </a:solidFill>
+                <a:latin typeface="Poppins" pitchFamily="34" charset="0"/>
+                <a:ea typeface="Poppins" pitchFamily="34" charset="-122"/>
+                <a:cs typeface="Poppins" pitchFamily="34" charset="-120"/>
+              </a:rPr>
+              <a:t>58,061</a:t>
+            </a:r>
+            <a:endParaRPr lang="en-US" sz="700" dirty="0"/>
+          </a:p>
+        </p:txBody>
+      </p:sp>
+      <p:sp>
+        <p:nvSpPr>
+          <p:cNvPr id="132" name="Text 130"/>
+          <p:cNvSpPr txBox="1"/>
+          <p:nvPr/>
+        </p:nvSpPr>
+        <p:spPr>
+          <a:xfrm>
+            <a:off x="594360" y="4070386"/>
+            <a:ext cx="1417320" cy="116259"/>
+          </a:xfrm>
+          <a:prstGeom prst="rect">
+            <a:avLst/>
+          </a:prstGeom>
+          <a:noFill/>
+          <a:ln/>
+        </p:spPr>
+        <p:txBody>
+          <a:bodyPr wrap="square" lIns="0" tIns="0" rIns="0" bIns="0" rtlCol="0" anchor="ctr"/>
+          <a:lstStyle/>
+          <a:p>
+            <a:pPr indent="0" marL="0">
+              <a:buNone/>
+            </a:pPr>
+            <a:r>
+              <a:rPr lang="en-US" sz="720" b="1" dirty="0">
+                <a:solidFill>
+                  <a:srgbClr val="12293A"/>
+                </a:solidFill>
+                <a:latin typeface="Poppins" pitchFamily="34" charset="0"/>
+                <a:ea typeface="Poppins" pitchFamily="34" charset="-122"/>
+                <a:cs typeface="Poppins" pitchFamily="34" charset="-120"/>
+              </a:rPr>
+              <a:t>Rahul Kumar</a:t>
+            </a:r>
+            <a:endParaRPr lang="en-US" sz="720" dirty="0"/>
+          </a:p>
+        </p:txBody>
+      </p:sp>
+      <p:sp>
+        <p:nvSpPr>
+          <p:cNvPr id="133" name="Text 131"/>
+          <p:cNvSpPr txBox="1"/>
+          <p:nvPr/>
+        </p:nvSpPr>
+        <p:spPr>
+          <a:xfrm>
+            <a:off x="2057400" y="4070386"/>
+            <a:ext cx="1051560" cy="116259"/>
+          </a:xfrm>
+          <a:prstGeom prst="rect">
+            <a:avLst/>
+          </a:prstGeom>
+          <a:noFill/>
+          <a:ln/>
+        </p:spPr>
+        <p:txBody>
+          <a:bodyPr wrap="square" lIns="0" tIns="0" rIns="0" bIns="0" rtlCol="0" anchor="ctr"/>
+          <a:lstStyle/>
+          <a:p>
+            <a:pPr algn="ctr" indent="0" marL="0">
+              <a:buNone/>
+            </a:pPr>
+            <a:r>
+              <a:rPr lang="en-US" sz="680" dirty="0">
+                <a:solidFill>
                   <a:srgbClr val="8FA1AC"/>
                 </a:solidFill>
                 <a:latin typeface="Poppins" pitchFamily="34" charset="0"/>
@@ -17347,14 +19599,34 @@
       </p:sp>
       <p:sp>
         <p:nvSpPr>
-          <p:cNvPr id="67" name="Text 65"/>
-          <p:cNvSpPr txBox="1"/>
-          <p:nvPr/>
-        </p:nvSpPr>
-        <p:spPr>
-          <a:xfrm>
-            <a:off x="3136392" y="3135561"/>
-            <a:ext cx="1051560" cy="150460"/>
+          <p:cNvPr id="134" name="Shape 132"/>
+          <p:cNvSpPr/>
+          <p:nvPr/>
+        </p:nvSpPr>
+        <p:spPr>
+          <a:xfrm>
+            <a:off x="3163824" y="4077701"/>
+            <a:ext cx="996696" cy="102543"/>
+          </a:xfrm>
+          <a:prstGeom prst="rect">
+            <a:avLst/>
+          </a:prstGeom>
+          <a:solidFill>
+            <a:srgbClr val="EDF5F7"/>
+          </a:solidFill>
+          <a:ln/>
+        </p:spPr>
+      </p:sp>
+      <p:sp>
+        <p:nvSpPr>
+          <p:cNvPr id="135" name="Text 133"/>
+          <p:cNvSpPr txBox="1"/>
+          <p:nvPr/>
+        </p:nvSpPr>
+        <p:spPr>
+          <a:xfrm>
+            <a:off x="3136392" y="4070386"/>
+            <a:ext cx="1051560" cy="116259"/>
           </a:xfrm>
           <a:prstGeom prst="rect">
             <a:avLst/>
@@ -17372,13 +19644,13 @@
             <a:r>
               <a:rPr lang="en-US" sz="680" dirty="0">
                 <a:solidFill>
-                  <a:srgbClr val="8FA1AC"/>
-                </a:solidFill>
-                <a:latin typeface="Poppins" pitchFamily="34" charset="0"/>
-                <a:ea typeface="Poppins" pitchFamily="34" charset="-122"/>
-                <a:cs typeface="Poppins" pitchFamily="34" charset="-120"/>
-              </a:rPr>
-              <a:t>—</a:t>
+                  <a:srgbClr val="12293A"/>
+                </a:solidFill>
+                <a:latin typeface="Poppins" pitchFamily="34" charset="0"/>
+                <a:ea typeface="Poppins" pitchFamily="34" charset="-122"/>
+                <a:cs typeface="Poppins" pitchFamily="34" charset="-120"/>
+              </a:rPr>
+              <a:t>42,859</a:t>
             </a:r>
             <a:endParaRPr lang="en-US" sz="680" dirty="0"/>
           </a:p>
@@ -17386,14 +19658,34 @@
       </p:sp>
       <p:sp>
         <p:nvSpPr>
-          <p:cNvPr id="68" name="Text 66"/>
-          <p:cNvSpPr txBox="1"/>
-          <p:nvPr/>
-        </p:nvSpPr>
-        <p:spPr>
-          <a:xfrm>
-            <a:off x="4215384" y="3135561"/>
-            <a:ext cx="1051560" cy="150460"/>
+          <p:cNvPr id="136" name="Shape 134"/>
+          <p:cNvSpPr/>
+          <p:nvPr/>
+        </p:nvSpPr>
+        <p:spPr>
+          <a:xfrm>
+            <a:off x="4242816" y="4077701"/>
+            <a:ext cx="996696" cy="102543"/>
+          </a:xfrm>
+          <a:prstGeom prst="rect">
+            <a:avLst/>
+          </a:prstGeom>
+          <a:solidFill>
+            <a:srgbClr val="EDF5F7"/>
+          </a:solidFill>
+          <a:ln/>
+        </p:spPr>
+      </p:sp>
+      <p:sp>
+        <p:nvSpPr>
+          <p:cNvPr id="137" name="Text 135"/>
+          <p:cNvSpPr txBox="1"/>
+          <p:nvPr/>
+        </p:nvSpPr>
+        <p:spPr>
+          <a:xfrm>
+            <a:off x="4215384" y="4070386"/>
+            <a:ext cx="1051560" cy="116259"/>
           </a:xfrm>
           <a:prstGeom prst="rect">
             <a:avLst/>
@@ -17411,13 +19703,13 @@
             <a:r>
               <a:rPr lang="en-US" sz="680" dirty="0">
                 <a:solidFill>
-                  <a:srgbClr val="8FA1AC"/>
-                </a:solidFill>
-                <a:latin typeface="Poppins" pitchFamily="34" charset="0"/>
-                <a:ea typeface="Poppins" pitchFamily="34" charset="-122"/>
-                <a:cs typeface="Poppins" pitchFamily="34" charset="-120"/>
-              </a:rPr>
-              <a:t>—</a:t>
+                  <a:srgbClr val="12293A"/>
+                </a:solidFill>
+                <a:latin typeface="Poppins" pitchFamily="34" charset="0"/>
+                <a:ea typeface="Poppins" pitchFamily="34" charset="-122"/>
+                <a:cs typeface="Poppins" pitchFamily="34" charset="-120"/>
+              </a:rPr>
+              <a:t>23,286</a:t>
             </a:r>
             <a:endParaRPr lang="en-US" sz="680" dirty="0"/>
           </a:p>
@@ -17425,34 +19717,34 @@
       </p:sp>
       <p:sp>
         <p:nvSpPr>
-          <p:cNvPr id="69" name="Shape 67"/>
-          <p:cNvSpPr/>
-          <p:nvPr/>
-        </p:nvSpPr>
-        <p:spPr>
-          <a:xfrm>
-            <a:off x="5321808" y="3142876"/>
-            <a:ext cx="996696" cy="136744"/>
-          </a:xfrm>
-          <a:prstGeom prst="rect">
-            <a:avLst/>
-          </a:prstGeom>
-          <a:solidFill>
-            <a:srgbClr val="D4E9ED"/>
-          </a:solidFill>
-          <a:ln/>
-        </p:spPr>
-      </p:sp>
-      <p:sp>
-        <p:nvSpPr>
-          <p:cNvPr id="70" name="Text 68"/>
-          <p:cNvSpPr txBox="1"/>
-          <p:nvPr/>
-        </p:nvSpPr>
-        <p:spPr>
-          <a:xfrm>
-            <a:off x="5294376" y="3135561"/>
-            <a:ext cx="1051560" cy="150460"/>
+          <p:cNvPr id="138" name="Shape 136"/>
+          <p:cNvSpPr/>
+          <p:nvPr/>
+        </p:nvSpPr>
+        <p:spPr>
+          <a:xfrm>
+            <a:off x="5321808" y="4077701"/>
+            <a:ext cx="996696" cy="102543"/>
+          </a:xfrm>
+          <a:prstGeom prst="rect">
+            <a:avLst/>
+          </a:prstGeom>
+          <a:solidFill>
+            <a:srgbClr val="EDF5F7"/>
+          </a:solidFill>
+          <a:ln/>
+        </p:spPr>
+      </p:sp>
+      <p:sp>
+        <p:nvSpPr>
+          <p:cNvPr id="139" name="Text 137"/>
+          <p:cNvSpPr txBox="1"/>
+          <p:nvPr/>
+        </p:nvSpPr>
+        <p:spPr>
+          <a:xfrm>
+            <a:off x="5294376" y="4070386"/>
+            <a:ext cx="1051560" cy="116259"/>
           </a:xfrm>
           <a:prstGeom prst="rect">
             <a:avLst/>
@@ -17476,7 +19768,7 @@
                 <a:ea typeface="Poppins" pitchFamily="34" charset="-122"/>
                 <a:cs typeface="Poppins" pitchFamily="34" charset="-120"/>
               </a:rPr>
-              <a:t>43,288</a:t>
+              <a:t>17,747</a:t>
             </a:r>
             <a:endParaRPr lang="en-US" sz="680" dirty="0"/>
           </a:p>
@@ -17484,14 +19776,14 @@
       </p:sp>
       <p:sp>
         <p:nvSpPr>
-          <p:cNvPr id="71" name="Text 69"/>
-          <p:cNvSpPr txBox="1"/>
-          <p:nvPr/>
-        </p:nvSpPr>
-        <p:spPr>
-          <a:xfrm>
-            <a:off x="6400800" y="3135561"/>
-            <a:ext cx="1280160" cy="150460"/>
+          <p:cNvPr id="140" name="Text 138"/>
+          <p:cNvSpPr txBox="1"/>
+          <p:nvPr/>
+        </p:nvSpPr>
+        <p:spPr>
+          <a:xfrm>
+            <a:off x="6400800" y="4070386"/>
+            <a:ext cx="1280160" cy="116259"/>
           </a:xfrm>
           <a:prstGeom prst="rect">
             <a:avLst/>
@@ -17515,7 +19807,7 @@
                 <a:ea typeface="Poppins" pitchFamily="34" charset="-122"/>
                 <a:cs typeface="Poppins" pitchFamily="34" charset="-120"/>
               </a:rPr>
-              <a:t>43,288</a:t>
+              <a:t>83,892</a:t>
             </a:r>
             <a:endParaRPr lang="en-US" sz="700" dirty="0"/>
           </a:p>
@@ -17523,14 +19815,14 @@
       </p:sp>
       <p:sp>
         <p:nvSpPr>
-          <p:cNvPr id="72" name="Text 70"/>
-          <p:cNvSpPr txBox="1"/>
-          <p:nvPr/>
-        </p:nvSpPr>
-        <p:spPr>
-          <a:xfrm>
-            <a:off x="594360" y="3295165"/>
-            <a:ext cx="1417320" cy="150460"/>
+          <p:cNvPr id="141" name="Text 139"/>
+          <p:cNvSpPr txBox="1"/>
+          <p:nvPr/>
+        </p:nvSpPr>
+        <p:spPr>
+          <a:xfrm>
+            <a:off x="594360" y="4195790"/>
+            <a:ext cx="1417320" cy="116259"/>
           </a:xfrm>
           <a:prstGeom prst="rect">
             <a:avLst/>
@@ -17554,7 +19846,7 @@
                 <a:ea typeface="Poppins" pitchFamily="34" charset="-122"/>
                 <a:cs typeface="Poppins" pitchFamily="34" charset="-120"/>
               </a:rPr>
-              <a:t>Hawraa Khalil</a:t>
+              <a:t>Mohamed Ammar</a:t>
             </a:r>
             <a:endParaRPr lang="en-US" sz="720" dirty="0"/>
           </a:p>
@@ -17562,14 +19854,14 @@
       </p:sp>
       <p:sp>
         <p:nvSpPr>
-          <p:cNvPr id="73" name="Shape 71"/>
-          <p:cNvSpPr/>
-          <p:nvPr/>
-        </p:nvSpPr>
-        <p:spPr>
-          <a:xfrm>
-            <a:off x="2084832" y="3302480"/>
-            <a:ext cx="996696" cy="136744"/>
+          <p:cNvPr id="142" name="Shape 140"/>
+          <p:cNvSpPr/>
+          <p:nvPr/>
+        </p:nvSpPr>
+        <p:spPr>
+          <a:xfrm>
+            <a:off x="2084832" y="4203105"/>
+            <a:ext cx="996696" cy="102543"/>
           </a:xfrm>
           <a:prstGeom prst="rect">
             <a:avLst/>
@@ -17582,14 +19874,14 @@
       </p:sp>
       <p:sp>
         <p:nvSpPr>
-          <p:cNvPr id="74" name="Text 72"/>
-          <p:cNvSpPr txBox="1"/>
-          <p:nvPr/>
-        </p:nvSpPr>
-        <p:spPr>
-          <a:xfrm>
-            <a:off x="2057400" y="3295165"/>
-            <a:ext cx="1051560" cy="150460"/>
+          <p:cNvPr id="143" name="Text 141"/>
+          <p:cNvSpPr txBox="1"/>
+          <p:nvPr/>
+        </p:nvSpPr>
+        <p:spPr>
+          <a:xfrm>
+            <a:off x="2057400" y="4195790"/>
+            <a:ext cx="1051560" cy="116259"/>
           </a:xfrm>
           <a:prstGeom prst="rect">
             <a:avLst/>
@@ -17613,7 +19905,7 @@
                 <a:ea typeface="Poppins" pitchFamily="34" charset="-122"/>
                 <a:cs typeface="Poppins" pitchFamily="34" charset="-120"/>
               </a:rPr>
-              <a:t>28,536</a:t>
+              <a:t>6,582</a:t>
             </a:r>
             <a:endParaRPr lang="en-US" sz="680" dirty="0"/>
           </a:p>
@@ -17621,14 +19913,14 @@
       </p:sp>
       <p:sp>
         <p:nvSpPr>
-          <p:cNvPr id="75" name="Shape 73"/>
-          <p:cNvSpPr/>
-          <p:nvPr/>
-        </p:nvSpPr>
-        <p:spPr>
-          <a:xfrm>
-            <a:off x="3163824" y="3302480"/>
-            <a:ext cx="996696" cy="136744"/>
+          <p:cNvPr id="144" name="Shape 142"/>
+          <p:cNvSpPr/>
+          <p:nvPr/>
+        </p:nvSpPr>
+        <p:spPr>
+          <a:xfrm>
+            <a:off x="3163824" y="4203105"/>
+            <a:ext cx="996696" cy="102543"/>
           </a:xfrm>
           <a:prstGeom prst="rect">
             <a:avLst/>
@@ -17641,14 +19933,14 @@
       </p:sp>
       <p:sp>
         <p:nvSpPr>
-          <p:cNvPr id="76" name="Text 74"/>
-          <p:cNvSpPr txBox="1"/>
-          <p:nvPr/>
-        </p:nvSpPr>
-        <p:spPr>
-          <a:xfrm>
-            <a:off x="3136392" y="3295165"/>
-            <a:ext cx="1051560" cy="150460"/>
+          <p:cNvPr id="145" name="Text 143"/>
+          <p:cNvSpPr txBox="1"/>
+          <p:nvPr/>
+        </p:nvSpPr>
+        <p:spPr>
+          <a:xfrm>
+            <a:off x="3136392" y="4195790"/>
+            <a:ext cx="1051560" cy="116259"/>
           </a:xfrm>
           <a:prstGeom prst="rect">
             <a:avLst/>
@@ -17672,7 +19964,7 @@
                 <a:ea typeface="Poppins" pitchFamily="34" charset="-122"/>
                 <a:cs typeface="Poppins" pitchFamily="34" charset="-120"/>
               </a:rPr>
-              <a:t>23,285</a:t>
+              <a:t>23,266</a:t>
             </a:r>
             <a:endParaRPr lang="en-US" sz="680" dirty="0"/>
           </a:p>
@@ -17680,14 +19972,14 @@
       </p:sp>
       <p:sp>
         <p:nvSpPr>
-          <p:cNvPr id="77" name="Shape 75"/>
-          <p:cNvSpPr/>
-          <p:nvPr/>
-        </p:nvSpPr>
-        <p:spPr>
-          <a:xfrm>
-            <a:off x="4242816" y="3302480"/>
-            <a:ext cx="996696" cy="136744"/>
+          <p:cNvPr id="146" name="Shape 144"/>
+          <p:cNvSpPr/>
+          <p:nvPr/>
+        </p:nvSpPr>
+        <p:spPr>
+          <a:xfrm>
+            <a:off x="4242816" y="4203105"/>
+            <a:ext cx="996696" cy="102543"/>
           </a:xfrm>
           <a:prstGeom prst="rect">
             <a:avLst/>
@@ -17700,14 +19992,14 @@
       </p:sp>
       <p:sp>
         <p:nvSpPr>
-          <p:cNvPr id="78" name="Text 76"/>
-          <p:cNvSpPr txBox="1"/>
-          <p:nvPr/>
-        </p:nvSpPr>
-        <p:spPr>
-          <a:xfrm>
-            <a:off x="4215384" y="3295165"/>
-            <a:ext cx="1051560" cy="150460"/>
+          <p:cNvPr id="147" name="Text 145"/>
+          <p:cNvSpPr txBox="1"/>
+          <p:nvPr/>
+        </p:nvSpPr>
+        <p:spPr>
+          <a:xfrm>
+            <a:off x="4215384" y="4195790"/>
+            <a:ext cx="1051560" cy="116259"/>
           </a:xfrm>
           <a:prstGeom prst="rect">
             <a:avLst/>
@@ -17731,7 +20023,7 @@
                 <a:ea typeface="Poppins" pitchFamily="34" charset="-122"/>
                 <a:cs typeface="Poppins" pitchFamily="34" charset="-120"/>
               </a:rPr>
-              <a:t>19,047</a:t>
+              <a:t>4,322</a:t>
             </a:r>
             <a:endParaRPr lang="en-US" sz="680" dirty="0"/>
           </a:p>
@@ -17739,14 +20031,34 @@
       </p:sp>
       <p:sp>
         <p:nvSpPr>
-          <p:cNvPr id="79" name="Text 77"/>
-          <p:cNvSpPr txBox="1"/>
-          <p:nvPr/>
-        </p:nvSpPr>
-        <p:spPr>
-          <a:xfrm>
-            <a:off x="5294376" y="3295165"/>
-            <a:ext cx="1051560" cy="150460"/>
+          <p:cNvPr id="148" name="Shape 146"/>
+          <p:cNvSpPr/>
+          <p:nvPr/>
+        </p:nvSpPr>
+        <p:spPr>
+          <a:xfrm>
+            <a:off x="5321808" y="4203105"/>
+            <a:ext cx="996696" cy="102543"/>
+          </a:xfrm>
+          <a:prstGeom prst="rect">
+            <a:avLst/>
+          </a:prstGeom>
+          <a:solidFill>
+            <a:srgbClr val="EDF5F7"/>
+          </a:solidFill>
+          <a:ln/>
+        </p:spPr>
+      </p:sp>
+      <p:sp>
+        <p:nvSpPr>
+          <p:cNvPr id="149" name="Text 147"/>
+          <p:cNvSpPr txBox="1"/>
+          <p:nvPr/>
+        </p:nvSpPr>
+        <p:spPr>
+          <a:xfrm>
+            <a:off x="5294376" y="4195790"/>
+            <a:ext cx="1051560" cy="116259"/>
           </a:xfrm>
           <a:prstGeom prst="rect">
             <a:avLst/>
@@ -17764,13 +20076,13 @@
             <a:r>
               <a:rPr lang="en-US" sz="680" dirty="0">
                 <a:solidFill>
-                  <a:srgbClr val="8FA1AC"/>
-                </a:solidFill>
-                <a:latin typeface="Poppins" pitchFamily="34" charset="0"/>
-                <a:ea typeface="Poppins" pitchFamily="34" charset="-122"/>
-                <a:cs typeface="Poppins" pitchFamily="34" charset="-120"/>
-              </a:rPr>
-              <a:t>—</a:t>
+                  <a:srgbClr val="12293A"/>
+                </a:solidFill>
+                <a:latin typeface="Poppins" pitchFamily="34" charset="0"/>
+                <a:ea typeface="Poppins" pitchFamily="34" charset="-122"/>
+                <a:cs typeface="Poppins" pitchFamily="34" charset="-120"/>
+              </a:rPr>
+              <a:t>8,922</a:t>
             </a:r>
             <a:endParaRPr lang="en-US" sz="680" dirty="0"/>
           </a:p>
@@ -17778,14 +20090,14 @@
       </p:sp>
       <p:sp>
         <p:nvSpPr>
-          <p:cNvPr id="80" name="Text 78"/>
-          <p:cNvSpPr txBox="1"/>
-          <p:nvPr/>
-        </p:nvSpPr>
-        <p:spPr>
-          <a:xfrm>
-            <a:off x="6400800" y="3295165"/>
-            <a:ext cx="1280160" cy="150460"/>
+          <p:cNvPr id="150" name="Text 148"/>
+          <p:cNvSpPr txBox="1"/>
+          <p:nvPr/>
+        </p:nvSpPr>
+        <p:spPr>
+          <a:xfrm>
+            <a:off x="6400800" y="4195790"/>
+            <a:ext cx="1280160" cy="116259"/>
           </a:xfrm>
           <a:prstGeom prst="rect">
             <a:avLst/>
@@ -17809,7 +20121,7 @@
                 <a:ea typeface="Poppins" pitchFamily="34" charset="-122"/>
                 <a:cs typeface="Poppins" pitchFamily="34" charset="-120"/>
               </a:rPr>
-              <a:t>70,868</a:t>
+              <a:t>43,092</a:t>
             </a:r>
             <a:endParaRPr lang="en-US" sz="700" dirty="0"/>
           </a:p>
@@ -17817,14 +20129,14 @@
       </p:sp>
       <p:sp>
         <p:nvSpPr>
-          <p:cNvPr id="81" name="Text 79"/>
-          <p:cNvSpPr txBox="1"/>
-          <p:nvPr/>
-        </p:nvSpPr>
-        <p:spPr>
-          <a:xfrm>
-            <a:off x="594360" y="3454769"/>
-            <a:ext cx="1417320" cy="150460"/>
+          <p:cNvPr id="151" name="Text 149"/>
+          <p:cNvSpPr txBox="1"/>
+          <p:nvPr/>
+        </p:nvSpPr>
+        <p:spPr>
+          <a:xfrm>
+            <a:off x="594360" y="4321193"/>
+            <a:ext cx="1417320" cy="116259"/>
           </a:xfrm>
           <a:prstGeom prst="rect">
             <a:avLst/>
@@ -17848,7 +20160,7 @@
                 <a:ea typeface="Poppins" pitchFamily="34" charset="-122"/>
                 <a:cs typeface="Poppins" pitchFamily="34" charset="-120"/>
               </a:rPr>
-              <a:t>Ciaran Dempsey</a:t>
+              <a:t>Tony Ghoussein</a:t>
             </a:r>
             <a:endParaRPr lang="en-US" sz="720" dirty="0"/>
           </a:p>
@@ -17856,14 +20168,14 @@
       </p:sp>
       <p:sp>
         <p:nvSpPr>
-          <p:cNvPr id="82" name="Shape 80"/>
-          <p:cNvSpPr/>
-          <p:nvPr/>
-        </p:nvSpPr>
-        <p:spPr>
-          <a:xfrm>
-            <a:off x="2084832" y="3462085"/>
-            <a:ext cx="996696" cy="136744"/>
+          <p:cNvPr id="152" name="Shape 150"/>
+          <p:cNvSpPr/>
+          <p:nvPr/>
+        </p:nvSpPr>
+        <p:spPr>
+          <a:xfrm>
+            <a:off x="2084832" y="4328508"/>
+            <a:ext cx="996696" cy="102543"/>
           </a:xfrm>
           <a:prstGeom prst="rect">
             <a:avLst/>
@@ -17876,14 +20188,14 @@
       </p:sp>
       <p:sp>
         <p:nvSpPr>
-          <p:cNvPr id="83" name="Text 81"/>
-          <p:cNvSpPr txBox="1"/>
-          <p:nvPr/>
-        </p:nvSpPr>
-        <p:spPr>
-          <a:xfrm>
-            <a:off x="2057400" y="3454769"/>
-            <a:ext cx="1051560" cy="150460"/>
+          <p:cNvPr id="153" name="Text 151"/>
+          <p:cNvSpPr txBox="1"/>
+          <p:nvPr/>
+        </p:nvSpPr>
+        <p:spPr>
+          <a:xfrm>
+            <a:off x="2057400" y="4321193"/>
+            <a:ext cx="1051560" cy="116259"/>
           </a:xfrm>
           <a:prstGeom prst="rect">
             <a:avLst/>
@@ -17907,7 +20219,7 @@
                 <a:ea typeface="Poppins" pitchFamily="34" charset="-122"/>
                 <a:cs typeface="Poppins" pitchFamily="34" charset="-120"/>
               </a:rPr>
-              <a:t>18,918</a:t>
+              <a:t>6,208</a:t>
             </a:r>
             <a:endParaRPr lang="en-US" sz="680" dirty="0"/>
           </a:p>
@@ -17915,14 +20227,14 @@
       </p:sp>
       <p:sp>
         <p:nvSpPr>
-          <p:cNvPr id="84" name="Shape 82"/>
-          <p:cNvSpPr/>
-          <p:nvPr/>
-        </p:nvSpPr>
-        <p:spPr>
-          <a:xfrm>
-            <a:off x="3163824" y="3462085"/>
-            <a:ext cx="996696" cy="136744"/>
+          <p:cNvPr id="154" name="Shape 152"/>
+          <p:cNvSpPr/>
+          <p:nvPr/>
+        </p:nvSpPr>
+        <p:spPr>
+          <a:xfrm>
+            <a:off x="3163824" y="4328508"/>
+            <a:ext cx="996696" cy="102543"/>
           </a:xfrm>
           <a:prstGeom prst="rect">
             <a:avLst/>
@@ -17935,14 +20247,14 @@
       </p:sp>
       <p:sp>
         <p:nvSpPr>
-          <p:cNvPr id="85" name="Text 83"/>
-          <p:cNvSpPr txBox="1"/>
-          <p:nvPr/>
-        </p:nvSpPr>
-        <p:spPr>
-          <a:xfrm>
-            <a:off x="3136392" y="3454769"/>
-            <a:ext cx="1051560" cy="150460"/>
+          <p:cNvPr id="155" name="Text 153"/>
+          <p:cNvSpPr txBox="1"/>
+          <p:nvPr/>
+        </p:nvSpPr>
+        <p:spPr>
+          <a:xfrm>
+            <a:off x="3136392" y="4321193"/>
+            <a:ext cx="1051560" cy="116259"/>
           </a:xfrm>
           <a:prstGeom prst="rect">
             <a:avLst/>
@@ -17966,7 +20278,7 @@
                 <a:ea typeface="Poppins" pitchFamily="34" charset="-122"/>
                 <a:cs typeface="Poppins" pitchFamily="34" charset="-120"/>
               </a:rPr>
-              <a:t>23,650</a:t>
+              <a:t>10,369</a:t>
             </a:r>
             <a:endParaRPr lang="en-US" sz="680" dirty="0"/>
           </a:p>
@@ -17974,14 +20286,14 @@
       </p:sp>
       <p:sp>
         <p:nvSpPr>
-          <p:cNvPr id="86" name="Shape 84"/>
-          <p:cNvSpPr/>
-          <p:nvPr/>
-        </p:nvSpPr>
-        <p:spPr>
-          <a:xfrm>
-            <a:off x="4242816" y="3462085"/>
-            <a:ext cx="996696" cy="136744"/>
+          <p:cNvPr id="156" name="Shape 154"/>
+          <p:cNvSpPr/>
+          <p:nvPr/>
+        </p:nvSpPr>
+        <p:spPr>
+          <a:xfrm>
+            <a:off x="4242816" y="4328508"/>
+            <a:ext cx="996696" cy="102543"/>
           </a:xfrm>
           <a:prstGeom prst="rect">
             <a:avLst/>
@@ -17994,14 +20306,14 @@
       </p:sp>
       <p:sp>
         <p:nvSpPr>
-          <p:cNvPr id="87" name="Text 85"/>
-          <p:cNvSpPr txBox="1"/>
-          <p:nvPr/>
-        </p:nvSpPr>
-        <p:spPr>
-          <a:xfrm>
-            <a:off x="4215384" y="3454769"/>
-            <a:ext cx="1051560" cy="150460"/>
+          <p:cNvPr id="157" name="Text 155"/>
+          <p:cNvSpPr txBox="1"/>
+          <p:nvPr/>
+        </p:nvSpPr>
+        <p:spPr>
+          <a:xfrm>
+            <a:off x="4215384" y="4321193"/>
+            <a:ext cx="1051560" cy="116259"/>
           </a:xfrm>
           <a:prstGeom prst="rect">
             <a:avLst/>
@@ -18025,7 +20337,7 @@
                 <a:ea typeface="Poppins" pitchFamily="34" charset="-122"/>
                 <a:cs typeface="Poppins" pitchFamily="34" charset="-120"/>
               </a:rPr>
-              <a:t>24,443</a:t>
+              <a:t>11,891</a:t>
             </a:r>
             <a:endParaRPr lang="en-US" sz="680" dirty="0"/>
           </a:p>
@@ -18033,14 +20345,14 @@
       </p:sp>
       <p:sp>
         <p:nvSpPr>
-          <p:cNvPr id="88" name="Shape 86"/>
-          <p:cNvSpPr/>
-          <p:nvPr/>
-        </p:nvSpPr>
-        <p:spPr>
-          <a:xfrm>
-            <a:off x="5321808" y="3462085"/>
-            <a:ext cx="996696" cy="136744"/>
+          <p:cNvPr id="158" name="Shape 156"/>
+          <p:cNvSpPr/>
+          <p:nvPr/>
+        </p:nvSpPr>
+        <p:spPr>
+          <a:xfrm>
+            <a:off x="5321808" y="4328508"/>
+            <a:ext cx="996696" cy="102543"/>
           </a:xfrm>
           <a:prstGeom prst="rect">
             <a:avLst/>
@@ -18053,14 +20365,14 @@
       </p:sp>
       <p:sp>
         <p:nvSpPr>
-          <p:cNvPr id="89" name="Text 87"/>
-          <p:cNvSpPr txBox="1"/>
-          <p:nvPr/>
-        </p:nvSpPr>
-        <p:spPr>
-          <a:xfrm>
-            <a:off x="5294376" y="3454769"/>
-            <a:ext cx="1051560" cy="150460"/>
+          <p:cNvPr id="159" name="Text 157"/>
+          <p:cNvSpPr txBox="1"/>
+          <p:nvPr/>
+        </p:nvSpPr>
+        <p:spPr>
+          <a:xfrm>
+            <a:off x="5294376" y="4321193"/>
+            <a:ext cx="1051560" cy="116259"/>
           </a:xfrm>
           <a:prstGeom prst="rect">
             <a:avLst/>
@@ -18084,7 +20396,7 @@
                 <a:ea typeface="Poppins" pitchFamily="34" charset="-122"/>
                 <a:cs typeface="Poppins" pitchFamily="34" charset="-120"/>
               </a:rPr>
-              <a:t>2,971</a:t>
+              <a:t>30,083</a:t>
             </a:r>
             <a:endParaRPr lang="en-US" sz="680" dirty="0"/>
           </a:p>
@@ -18092,14 +20404,14 @@
       </p:sp>
       <p:sp>
         <p:nvSpPr>
-          <p:cNvPr id="90" name="Text 88"/>
-          <p:cNvSpPr txBox="1"/>
-          <p:nvPr/>
-        </p:nvSpPr>
-        <p:spPr>
-          <a:xfrm>
-            <a:off x="6400800" y="3454769"/>
-            <a:ext cx="1280160" cy="150460"/>
+          <p:cNvPr id="160" name="Text 158"/>
+          <p:cNvSpPr txBox="1"/>
+          <p:nvPr/>
+        </p:nvSpPr>
+        <p:spPr>
+          <a:xfrm>
+            <a:off x="6400800" y="4321193"/>
+            <a:ext cx="1280160" cy="116259"/>
           </a:xfrm>
           <a:prstGeom prst="rect">
             <a:avLst/>
@@ -18123,7 +20435,7 @@
                 <a:ea typeface="Poppins" pitchFamily="34" charset="-122"/>
                 <a:cs typeface="Poppins" pitchFamily="34" charset="-120"/>
               </a:rPr>
-              <a:t>69,982</a:t>
+              <a:t>58,551</a:t>
             </a:r>
             <a:endParaRPr lang="en-US" sz="700" dirty="0"/>
           </a:p>
@@ -18131,14 +20443,14 @@
       </p:sp>
       <p:sp>
         <p:nvSpPr>
-          <p:cNvPr id="91" name="Text 89"/>
-          <p:cNvSpPr txBox="1"/>
-          <p:nvPr/>
-        </p:nvSpPr>
-        <p:spPr>
-          <a:xfrm>
-            <a:off x="594360" y="3614374"/>
-            <a:ext cx="1417320" cy="150460"/>
+          <p:cNvPr id="161" name="Text 159"/>
+          <p:cNvSpPr txBox="1"/>
+          <p:nvPr/>
+        </p:nvSpPr>
+        <p:spPr>
+          <a:xfrm>
+            <a:off x="594360" y="4446597"/>
+            <a:ext cx="1417320" cy="116259"/>
           </a:xfrm>
           <a:prstGeom prst="rect">
             <a:avLst/>
@@ -18162,7 +20474,7 @@
                 <a:ea typeface="Poppins" pitchFamily="34" charset="-122"/>
                 <a:cs typeface="Poppins" pitchFamily="34" charset="-120"/>
               </a:rPr>
-              <a:t>David Corbett</a:t>
+              <a:t>Eric Cruz</a:t>
             </a:r>
             <a:endParaRPr lang="en-US" sz="720" dirty="0"/>
           </a:p>
@@ -18170,14 +20482,14 @@
       </p:sp>
       <p:sp>
         <p:nvSpPr>
-          <p:cNvPr id="92" name="Shape 90"/>
-          <p:cNvSpPr/>
-          <p:nvPr/>
-        </p:nvSpPr>
-        <p:spPr>
-          <a:xfrm>
-            <a:off x="2084832" y="3621689"/>
-            <a:ext cx="996696" cy="136744"/>
+          <p:cNvPr id="162" name="Shape 160"/>
+          <p:cNvSpPr/>
+          <p:nvPr/>
+        </p:nvSpPr>
+        <p:spPr>
+          <a:xfrm>
+            <a:off x="2084832" y="4453912"/>
+            <a:ext cx="996696" cy="102543"/>
           </a:xfrm>
           <a:prstGeom prst="rect">
             <a:avLst/>
@@ -18190,14 +20502,14 @@
       </p:sp>
       <p:sp>
         <p:nvSpPr>
-          <p:cNvPr id="93" name="Text 91"/>
-          <p:cNvSpPr txBox="1"/>
-          <p:nvPr/>
-        </p:nvSpPr>
-        <p:spPr>
-          <a:xfrm>
-            <a:off x="2057400" y="3614374"/>
-            <a:ext cx="1051560" cy="150460"/>
+          <p:cNvPr id="163" name="Text 161"/>
+          <p:cNvSpPr txBox="1"/>
+          <p:nvPr/>
+        </p:nvSpPr>
+        <p:spPr>
+          <a:xfrm>
+            <a:off x="2057400" y="4446597"/>
+            <a:ext cx="1051560" cy="116259"/>
           </a:xfrm>
           <a:prstGeom prst="rect">
             <a:avLst/>
@@ -18221,7 +20533,7 @@
                 <a:ea typeface="Poppins" pitchFamily="34" charset="-122"/>
                 <a:cs typeface="Poppins" pitchFamily="34" charset="-120"/>
               </a:rPr>
-              <a:t>27,031</a:t>
+              <a:t>2,970</a:t>
             </a:r>
             <a:endParaRPr lang="en-US" sz="680" dirty="0"/>
           </a:p>
@@ -18229,14 +20541,14 @@
       </p:sp>
       <p:sp>
         <p:nvSpPr>
-          <p:cNvPr id="94" name="Shape 92"/>
-          <p:cNvSpPr/>
-          <p:nvPr/>
-        </p:nvSpPr>
-        <p:spPr>
-          <a:xfrm>
-            <a:off x="3163824" y="3621689"/>
-            <a:ext cx="996696" cy="136744"/>
+          <p:cNvPr id="164" name="Shape 162"/>
+          <p:cNvSpPr/>
+          <p:nvPr/>
+        </p:nvSpPr>
+        <p:spPr>
+          <a:xfrm>
+            <a:off x="3163824" y="4453912"/>
+            <a:ext cx="996696" cy="102543"/>
           </a:xfrm>
           <a:prstGeom prst="rect">
             <a:avLst/>
@@ -18249,14 +20561,14 @@
       </p:sp>
       <p:sp>
         <p:nvSpPr>
-          <p:cNvPr id="95" name="Text 93"/>
-          <p:cNvSpPr txBox="1"/>
-          <p:nvPr/>
-        </p:nvSpPr>
-        <p:spPr>
-          <a:xfrm>
-            <a:off x="3136392" y="3614374"/>
-            <a:ext cx="1051560" cy="150460"/>
+          <p:cNvPr id="165" name="Text 163"/>
+          <p:cNvSpPr txBox="1"/>
+          <p:nvPr/>
+        </p:nvSpPr>
+        <p:spPr>
+          <a:xfrm>
+            <a:off x="3136392" y="4446597"/>
+            <a:ext cx="1051560" cy="116259"/>
           </a:xfrm>
           <a:prstGeom prst="rect">
             <a:avLst/>
@@ -18280,7 +20592,7 @@
                 <a:ea typeface="Poppins" pitchFamily="34" charset="-122"/>
                 <a:cs typeface="Poppins" pitchFamily="34" charset="-120"/>
               </a:rPr>
-              <a:t>10,145</a:t>
+              <a:t>7,237</a:t>
             </a:r>
             <a:endParaRPr lang="en-US" sz="680" dirty="0"/>
           </a:p>
@@ -18288,14 +20600,14 @@
       </p:sp>
       <p:sp>
         <p:nvSpPr>
-          <p:cNvPr id="96" name="Shape 94"/>
-          <p:cNvSpPr/>
-          <p:nvPr/>
-        </p:nvSpPr>
-        <p:spPr>
-          <a:xfrm>
-            <a:off x="4242816" y="3621689"/>
-            <a:ext cx="996696" cy="136744"/>
+          <p:cNvPr id="166" name="Shape 164"/>
+          <p:cNvSpPr/>
+          <p:nvPr/>
+        </p:nvSpPr>
+        <p:spPr>
+          <a:xfrm>
+            <a:off x="4242816" y="4453912"/>
+            <a:ext cx="996696" cy="102543"/>
           </a:xfrm>
           <a:prstGeom prst="rect">
             <a:avLst/>
@@ -18308,14 +20620,14 @@
       </p:sp>
       <p:sp>
         <p:nvSpPr>
-          <p:cNvPr id="97" name="Text 95"/>
-          <p:cNvSpPr txBox="1"/>
-          <p:nvPr/>
-        </p:nvSpPr>
-        <p:spPr>
-          <a:xfrm>
-            <a:off x="4215384" y="3614374"/>
-            <a:ext cx="1051560" cy="150460"/>
+          <p:cNvPr id="167" name="Text 165"/>
+          <p:cNvSpPr txBox="1"/>
+          <p:nvPr/>
+        </p:nvSpPr>
+        <p:spPr>
+          <a:xfrm>
+            <a:off x="4215384" y="4446597"/>
+            <a:ext cx="1051560" cy="116259"/>
           </a:xfrm>
           <a:prstGeom prst="rect">
             <a:avLst/>
@@ -18339,7 +20651,7 @@
                 <a:ea typeface="Poppins" pitchFamily="34" charset="-122"/>
                 <a:cs typeface="Poppins" pitchFamily="34" charset="-120"/>
               </a:rPr>
-              <a:t>30,828</a:t>
+              <a:t>19,289</a:t>
             </a:r>
             <a:endParaRPr lang="en-US" sz="680" dirty="0"/>
           </a:p>
@@ -18347,14 +20659,14 @@
       </p:sp>
       <p:sp>
         <p:nvSpPr>
-          <p:cNvPr id="98" name="Shape 96"/>
-          <p:cNvSpPr/>
-          <p:nvPr/>
-        </p:nvSpPr>
-        <p:spPr>
-          <a:xfrm>
-            <a:off x="5321808" y="3621689"/>
-            <a:ext cx="996696" cy="136744"/>
+          <p:cNvPr id="168" name="Shape 166"/>
+          <p:cNvSpPr/>
+          <p:nvPr/>
+        </p:nvSpPr>
+        <p:spPr>
+          <a:xfrm>
+            <a:off x="5321808" y="4453912"/>
+            <a:ext cx="996696" cy="102543"/>
           </a:xfrm>
           <a:prstGeom prst="rect">
             <a:avLst/>
@@ -18367,14 +20679,14 @@
       </p:sp>
       <p:sp>
         <p:nvSpPr>
-          <p:cNvPr id="99" name="Text 97"/>
-          <p:cNvSpPr txBox="1"/>
-          <p:nvPr/>
-        </p:nvSpPr>
-        <p:spPr>
-          <a:xfrm>
-            <a:off x="5294376" y="3614374"/>
-            <a:ext cx="1051560" cy="150460"/>
+          <p:cNvPr id="169" name="Text 167"/>
+          <p:cNvSpPr txBox="1"/>
+          <p:nvPr/>
+        </p:nvSpPr>
+        <p:spPr>
+          <a:xfrm>
+            <a:off x="5294376" y="4446597"/>
+            <a:ext cx="1051560" cy="116259"/>
           </a:xfrm>
           <a:prstGeom prst="rect">
             <a:avLst/>
@@ -18398,7 +20710,7 @@
                 <a:ea typeface="Poppins" pitchFamily="34" charset="-122"/>
                 <a:cs typeface="Poppins" pitchFamily="34" charset="-120"/>
               </a:rPr>
-              <a:t>21,999</a:t>
+              <a:t>6,155</a:t>
             </a:r>
             <a:endParaRPr lang="en-US" sz="680" dirty="0"/>
           </a:p>
@@ -18406,14 +20718,14 @@
       </p:sp>
       <p:sp>
         <p:nvSpPr>
-          <p:cNvPr id="100" name="Text 98"/>
-          <p:cNvSpPr txBox="1"/>
-          <p:nvPr/>
-        </p:nvSpPr>
-        <p:spPr>
-          <a:xfrm>
-            <a:off x="6400800" y="3614374"/>
-            <a:ext cx="1280160" cy="150460"/>
+          <p:cNvPr id="170" name="Text 168"/>
+          <p:cNvSpPr txBox="1"/>
+          <p:nvPr/>
+        </p:nvSpPr>
+        <p:spPr>
+          <a:xfrm>
+            <a:off x="6400800" y="4446597"/>
+            <a:ext cx="1280160" cy="116259"/>
           </a:xfrm>
           <a:prstGeom prst="rect">
             <a:avLst/>
@@ -18437,7 +20749,7 @@
                 <a:ea typeface="Poppins" pitchFamily="34" charset="-122"/>
                 <a:cs typeface="Poppins" pitchFamily="34" charset="-120"/>
               </a:rPr>
-              <a:t>90,003</a:t>
+              <a:t>35,651</a:t>
             </a:r>
             <a:endParaRPr lang="en-US" sz="700" dirty="0"/>
           </a:p>
@@ -18445,1557 +20757,7 @@
       </p:sp>
       <p:sp>
         <p:nvSpPr>
-          <p:cNvPr id="101" name="Text 99"/>
-          <p:cNvSpPr txBox="1"/>
-          <p:nvPr/>
-        </p:nvSpPr>
-        <p:spPr>
-          <a:xfrm>
-            <a:off x="594360" y="3773978"/>
-            <a:ext cx="1417320" cy="150460"/>
-          </a:xfrm>
-          <a:prstGeom prst="rect">
-            <a:avLst/>
-          </a:prstGeom>
-          <a:noFill/>
-          <a:ln/>
-        </p:spPr>
-        <p:txBody>
-          <a:bodyPr wrap="square" lIns="0" tIns="0" rIns="0" bIns="0" rtlCol="0" anchor="ctr"/>
-          <a:lstStyle/>
-          <a:p>
-            <a:pPr indent="0" marL="0">
-              <a:buNone/>
-            </a:pPr>
-            <a:r>
-              <a:rPr lang="en-US" sz="720" b="1" dirty="0">
-                <a:solidFill>
-                  <a:srgbClr val="12293A"/>
-                </a:solidFill>
-                <a:latin typeface="Poppins" pitchFamily="34" charset="0"/>
-                <a:ea typeface="Poppins" pitchFamily="34" charset="-122"/>
-                <a:cs typeface="Poppins" pitchFamily="34" charset="-120"/>
-              </a:rPr>
-              <a:t>Chris Huang</a:t>
-            </a:r>
-            <a:endParaRPr lang="en-US" sz="720" dirty="0"/>
-          </a:p>
-        </p:txBody>
-      </p:sp>
-      <p:sp>
-        <p:nvSpPr>
-          <p:cNvPr id="102" name="Shape 100"/>
-          <p:cNvSpPr/>
-          <p:nvPr/>
-        </p:nvSpPr>
-        <p:spPr>
-          <a:xfrm>
-            <a:off x="2084832" y="3781293"/>
-            <a:ext cx="996696" cy="136744"/>
-          </a:xfrm>
-          <a:prstGeom prst="rect">
-            <a:avLst/>
-          </a:prstGeom>
-          <a:solidFill>
-            <a:srgbClr val="EDF5F7"/>
-          </a:solidFill>
-          <a:ln/>
-        </p:spPr>
-      </p:sp>
-      <p:sp>
-        <p:nvSpPr>
-          <p:cNvPr id="103" name="Text 101"/>
-          <p:cNvSpPr txBox="1"/>
-          <p:nvPr/>
-        </p:nvSpPr>
-        <p:spPr>
-          <a:xfrm>
-            <a:off x="2057400" y="3773978"/>
-            <a:ext cx="1051560" cy="150460"/>
-          </a:xfrm>
-          <a:prstGeom prst="rect">
-            <a:avLst/>
-          </a:prstGeom>
-          <a:noFill/>
-          <a:ln/>
-        </p:spPr>
-        <p:txBody>
-          <a:bodyPr wrap="square" lIns="0" tIns="0" rIns="0" bIns="0" rtlCol="0" anchor="ctr"/>
-          <a:lstStyle/>
-          <a:p>
-            <a:pPr algn="ctr" indent="0" marL="0">
-              <a:buNone/>
-            </a:pPr>
-            <a:r>
-              <a:rPr lang="en-US" sz="680" dirty="0">
-                <a:solidFill>
-                  <a:srgbClr val="12293A"/>
-                </a:solidFill>
-                <a:latin typeface="Poppins" pitchFamily="34" charset="0"/>
-                <a:ea typeface="Poppins" pitchFamily="34" charset="-122"/>
-                <a:cs typeface="Poppins" pitchFamily="34" charset="-120"/>
-              </a:rPr>
-              <a:t>19,535</a:t>
-            </a:r>
-            <a:endParaRPr lang="en-US" sz="680" dirty="0"/>
-          </a:p>
-        </p:txBody>
-      </p:sp>
-      <p:sp>
-        <p:nvSpPr>
-          <p:cNvPr id="104" name="Shape 102"/>
-          <p:cNvSpPr/>
-          <p:nvPr/>
-        </p:nvSpPr>
-        <p:spPr>
-          <a:xfrm>
-            <a:off x="3163824" y="3781293"/>
-            <a:ext cx="996696" cy="136744"/>
-          </a:xfrm>
-          <a:prstGeom prst="rect">
-            <a:avLst/>
-          </a:prstGeom>
-          <a:solidFill>
-            <a:srgbClr val="EDF5F7"/>
-          </a:solidFill>
-          <a:ln/>
-        </p:spPr>
-      </p:sp>
-      <p:sp>
-        <p:nvSpPr>
-          <p:cNvPr id="105" name="Text 103"/>
-          <p:cNvSpPr txBox="1"/>
-          <p:nvPr/>
-        </p:nvSpPr>
-        <p:spPr>
-          <a:xfrm>
-            <a:off x="3136392" y="3773978"/>
-            <a:ext cx="1051560" cy="150460"/>
-          </a:xfrm>
-          <a:prstGeom prst="rect">
-            <a:avLst/>
-          </a:prstGeom>
-          <a:noFill/>
-          <a:ln/>
-        </p:spPr>
-        <p:txBody>
-          <a:bodyPr wrap="square" lIns="0" tIns="0" rIns="0" bIns="0" rtlCol="0" anchor="ctr"/>
-          <a:lstStyle/>
-          <a:p>
-            <a:pPr algn="ctr" indent="0" marL="0">
-              <a:buNone/>
-            </a:pPr>
-            <a:r>
-              <a:rPr lang="en-US" sz="680" dirty="0">
-                <a:solidFill>
-                  <a:srgbClr val="12293A"/>
-                </a:solidFill>
-                <a:latin typeface="Poppins" pitchFamily="34" charset="0"/>
-                <a:ea typeface="Poppins" pitchFamily="34" charset="-122"/>
-                <a:cs typeface="Poppins" pitchFamily="34" charset="-120"/>
-              </a:rPr>
-              <a:t>12,856</a:t>
-            </a:r>
-            <a:endParaRPr lang="en-US" sz="680" dirty="0"/>
-          </a:p>
-        </p:txBody>
-      </p:sp>
-      <p:sp>
-        <p:nvSpPr>
-          <p:cNvPr id="106" name="Shape 104"/>
-          <p:cNvSpPr/>
-          <p:nvPr/>
-        </p:nvSpPr>
-        <p:spPr>
-          <a:xfrm>
-            <a:off x="4242816" y="3781293"/>
-            <a:ext cx="996696" cy="136744"/>
-          </a:xfrm>
-          <a:prstGeom prst="rect">
-            <a:avLst/>
-          </a:prstGeom>
-          <a:solidFill>
-            <a:srgbClr val="EDF5F7"/>
-          </a:solidFill>
-          <a:ln/>
-        </p:spPr>
-      </p:sp>
-      <p:sp>
-        <p:nvSpPr>
-          <p:cNvPr id="107" name="Text 105"/>
-          <p:cNvSpPr txBox="1"/>
-          <p:nvPr/>
-        </p:nvSpPr>
-        <p:spPr>
-          <a:xfrm>
-            <a:off x="4215384" y="3773978"/>
-            <a:ext cx="1051560" cy="150460"/>
-          </a:xfrm>
-          <a:prstGeom prst="rect">
-            <a:avLst/>
-          </a:prstGeom>
-          <a:noFill/>
-          <a:ln/>
-        </p:spPr>
-        <p:txBody>
-          <a:bodyPr wrap="square" lIns="0" tIns="0" rIns="0" bIns="0" rtlCol="0" anchor="ctr"/>
-          <a:lstStyle/>
-          <a:p>
-            <a:pPr algn="ctr" indent="0" marL="0">
-              <a:buNone/>
-            </a:pPr>
-            <a:r>
-              <a:rPr lang="en-US" sz="680" dirty="0">
-                <a:solidFill>
-                  <a:srgbClr val="12293A"/>
-                </a:solidFill>
-                <a:latin typeface="Poppins" pitchFamily="34" charset="0"/>
-                <a:ea typeface="Poppins" pitchFamily="34" charset="-122"/>
-                <a:cs typeface="Poppins" pitchFamily="34" charset="-120"/>
-              </a:rPr>
-              <a:t>17,516</a:t>
-            </a:r>
-            <a:endParaRPr lang="en-US" sz="680" dirty="0"/>
-          </a:p>
-        </p:txBody>
-      </p:sp>
-      <p:sp>
-        <p:nvSpPr>
-          <p:cNvPr id="108" name="Shape 106"/>
-          <p:cNvSpPr/>
-          <p:nvPr/>
-        </p:nvSpPr>
-        <p:spPr>
-          <a:xfrm>
-            <a:off x="5321808" y="3781293"/>
-            <a:ext cx="996696" cy="136744"/>
-          </a:xfrm>
-          <a:prstGeom prst="rect">
-            <a:avLst/>
-          </a:prstGeom>
-          <a:solidFill>
-            <a:srgbClr val="EDF5F7"/>
-          </a:solidFill>
-          <a:ln/>
-        </p:spPr>
-      </p:sp>
-      <p:sp>
-        <p:nvSpPr>
-          <p:cNvPr id="109" name="Text 107"/>
-          <p:cNvSpPr txBox="1"/>
-          <p:nvPr/>
-        </p:nvSpPr>
-        <p:spPr>
-          <a:xfrm>
-            <a:off x="5294376" y="3773978"/>
-            <a:ext cx="1051560" cy="150460"/>
-          </a:xfrm>
-          <a:prstGeom prst="rect">
-            <a:avLst/>
-          </a:prstGeom>
-          <a:noFill/>
-          <a:ln/>
-        </p:spPr>
-        <p:txBody>
-          <a:bodyPr wrap="square" lIns="0" tIns="0" rIns="0" bIns="0" rtlCol="0" anchor="ctr"/>
-          <a:lstStyle/>
-          <a:p>
-            <a:pPr algn="ctr" indent="0" marL="0">
-              <a:buNone/>
-            </a:pPr>
-            <a:r>
-              <a:rPr lang="en-US" sz="680" dirty="0">
-                <a:solidFill>
-                  <a:srgbClr val="12293A"/>
-                </a:solidFill>
-                <a:latin typeface="Poppins" pitchFamily="34" charset="0"/>
-                <a:ea typeface="Poppins" pitchFamily="34" charset="-122"/>
-                <a:cs typeface="Poppins" pitchFamily="34" charset="-120"/>
-              </a:rPr>
-              <a:t>5,907</a:t>
-            </a:r>
-            <a:endParaRPr lang="en-US" sz="680" dirty="0"/>
-          </a:p>
-        </p:txBody>
-      </p:sp>
-      <p:sp>
-        <p:nvSpPr>
-          <p:cNvPr id="110" name="Text 108"/>
-          <p:cNvSpPr txBox="1"/>
-          <p:nvPr/>
-        </p:nvSpPr>
-        <p:spPr>
-          <a:xfrm>
-            <a:off x="6400800" y="3773978"/>
-            <a:ext cx="1280160" cy="150460"/>
-          </a:xfrm>
-          <a:prstGeom prst="rect">
-            <a:avLst/>
-          </a:prstGeom>
-          <a:noFill/>
-          <a:ln/>
-        </p:spPr>
-        <p:txBody>
-          <a:bodyPr wrap="square" lIns="0" tIns="0" rIns="0" bIns="0" rtlCol="0" anchor="ctr"/>
-          <a:lstStyle/>
-          <a:p>
-            <a:pPr algn="r" indent="0" marL="0">
-              <a:buNone/>
-            </a:pPr>
-            <a:r>
-              <a:rPr lang="en-US" sz="700" b="1" dirty="0">
-                <a:solidFill>
-                  <a:srgbClr val="5E7280"/>
-                </a:solidFill>
-                <a:latin typeface="Poppins" pitchFamily="34" charset="0"/>
-                <a:ea typeface="Poppins" pitchFamily="34" charset="-122"/>
-                <a:cs typeface="Poppins" pitchFamily="34" charset="-120"/>
-              </a:rPr>
-              <a:t>55,814</a:t>
-            </a:r>
-            <a:endParaRPr lang="en-US" sz="700" dirty="0"/>
-          </a:p>
-        </p:txBody>
-      </p:sp>
-      <p:sp>
-        <p:nvSpPr>
-          <p:cNvPr id="111" name="Text 109"/>
-          <p:cNvSpPr txBox="1"/>
-          <p:nvPr/>
-        </p:nvSpPr>
-        <p:spPr>
-          <a:xfrm>
-            <a:off x="594360" y="3933583"/>
-            <a:ext cx="1417320" cy="150460"/>
-          </a:xfrm>
-          <a:prstGeom prst="rect">
-            <a:avLst/>
-          </a:prstGeom>
-          <a:noFill/>
-          <a:ln/>
-        </p:spPr>
-        <p:txBody>
-          <a:bodyPr wrap="square" lIns="0" tIns="0" rIns="0" bIns="0" rtlCol="0" anchor="ctr"/>
-          <a:lstStyle/>
-          <a:p>
-            <a:pPr indent="0" marL="0">
-              <a:buNone/>
-            </a:pPr>
-            <a:r>
-              <a:rPr lang="en-US" sz="720" b="1" dirty="0">
-                <a:solidFill>
-                  <a:srgbClr val="12293A"/>
-                </a:solidFill>
-                <a:latin typeface="Poppins" pitchFamily="34" charset="0"/>
-                <a:ea typeface="Poppins" pitchFamily="34" charset="-122"/>
-                <a:cs typeface="Poppins" pitchFamily="34" charset="-120"/>
-              </a:rPr>
-              <a:t>Rahul Kumar</a:t>
-            </a:r>
-            <a:endParaRPr lang="en-US" sz="720" dirty="0"/>
-          </a:p>
-        </p:txBody>
-      </p:sp>
-      <p:sp>
-        <p:nvSpPr>
-          <p:cNvPr id="112" name="Text 110"/>
-          <p:cNvSpPr txBox="1"/>
-          <p:nvPr/>
-        </p:nvSpPr>
-        <p:spPr>
-          <a:xfrm>
-            <a:off x="2057400" y="3933583"/>
-            <a:ext cx="1051560" cy="150460"/>
-          </a:xfrm>
-          <a:prstGeom prst="rect">
-            <a:avLst/>
-          </a:prstGeom>
-          <a:noFill/>
-          <a:ln/>
-        </p:spPr>
-        <p:txBody>
-          <a:bodyPr wrap="square" lIns="0" tIns="0" rIns="0" bIns="0" rtlCol="0" anchor="ctr"/>
-          <a:lstStyle/>
-          <a:p>
-            <a:pPr algn="ctr" indent="0" marL="0">
-              <a:buNone/>
-            </a:pPr>
-            <a:r>
-              <a:rPr lang="en-US" sz="680" dirty="0">
-                <a:solidFill>
-                  <a:srgbClr val="8FA1AC"/>
-                </a:solidFill>
-                <a:latin typeface="Poppins" pitchFamily="34" charset="0"/>
-                <a:ea typeface="Poppins" pitchFamily="34" charset="-122"/>
-                <a:cs typeface="Poppins" pitchFamily="34" charset="-120"/>
-              </a:rPr>
-              <a:t>—</a:t>
-            </a:r>
-            <a:endParaRPr lang="en-US" sz="680" dirty="0"/>
-          </a:p>
-        </p:txBody>
-      </p:sp>
-      <p:sp>
-        <p:nvSpPr>
-          <p:cNvPr id="113" name="Shape 111"/>
-          <p:cNvSpPr/>
-          <p:nvPr/>
-        </p:nvSpPr>
-        <p:spPr>
-          <a:xfrm>
-            <a:off x="3163824" y="3940898"/>
-            <a:ext cx="996696" cy="136744"/>
-          </a:xfrm>
-          <a:prstGeom prst="rect">
-            <a:avLst/>
-          </a:prstGeom>
-          <a:solidFill>
-            <a:srgbClr val="D4E9ED"/>
-          </a:solidFill>
-          <a:ln/>
-        </p:spPr>
-      </p:sp>
-      <p:sp>
-        <p:nvSpPr>
-          <p:cNvPr id="114" name="Text 112"/>
-          <p:cNvSpPr txBox="1"/>
-          <p:nvPr/>
-        </p:nvSpPr>
-        <p:spPr>
-          <a:xfrm>
-            <a:off x="3136392" y="3933583"/>
-            <a:ext cx="1051560" cy="150460"/>
-          </a:xfrm>
-          <a:prstGeom prst="rect">
-            <a:avLst/>
-          </a:prstGeom>
-          <a:noFill/>
-          <a:ln/>
-        </p:spPr>
-        <p:txBody>
-          <a:bodyPr wrap="square" lIns="0" tIns="0" rIns="0" bIns="0" rtlCol="0" anchor="ctr"/>
-          <a:lstStyle/>
-          <a:p>
-            <a:pPr algn="ctr" indent="0" marL="0">
-              <a:buNone/>
-            </a:pPr>
-            <a:r>
-              <a:rPr lang="en-US" sz="680" dirty="0">
-                <a:solidFill>
-                  <a:srgbClr val="12293A"/>
-                </a:solidFill>
-                <a:latin typeface="Poppins" pitchFamily="34" charset="0"/>
-                <a:ea typeface="Poppins" pitchFamily="34" charset="-122"/>
-                <a:cs typeface="Poppins" pitchFamily="34" charset="-120"/>
-              </a:rPr>
-              <a:t>42,859</a:t>
-            </a:r>
-            <a:endParaRPr lang="en-US" sz="680" dirty="0"/>
-          </a:p>
-        </p:txBody>
-      </p:sp>
-      <p:sp>
-        <p:nvSpPr>
-          <p:cNvPr id="115" name="Shape 113"/>
-          <p:cNvSpPr/>
-          <p:nvPr/>
-        </p:nvSpPr>
-        <p:spPr>
-          <a:xfrm>
-            <a:off x="4242816" y="3940898"/>
-            <a:ext cx="996696" cy="136744"/>
-          </a:xfrm>
-          <a:prstGeom prst="rect">
-            <a:avLst/>
-          </a:prstGeom>
-          <a:solidFill>
-            <a:srgbClr val="EDF5F7"/>
-          </a:solidFill>
-          <a:ln/>
-        </p:spPr>
-      </p:sp>
-      <p:sp>
-        <p:nvSpPr>
-          <p:cNvPr id="116" name="Text 114"/>
-          <p:cNvSpPr txBox="1"/>
-          <p:nvPr/>
-        </p:nvSpPr>
-        <p:spPr>
-          <a:xfrm>
-            <a:off x="4215384" y="3933583"/>
-            <a:ext cx="1051560" cy="150460"/>
-          </a:xfrm>
-          <a:prstGeom prst="rect">
-            <a:avLst/>
-          </a:prstGeom>
-          <a:noFill/>
-          <a:ln/>
-        </p:spPr>
-        <p:txBody>
-          <a:bodyPr wrap="square" lIns="0" tIns="0" rIns="0" bIns="0" rtlCol="0" anchor="ctr"/>
-          <a:lstStyle/>
-          <a:p>
-            <a:pPr algn="ctr" indent="0" marL="0">
-              <a:buNone/>
-            </a:pPr>
-            <a:r>
-              <a:rPr lang="en-US" sz="680" dirty="0">
-                <a:solidFill>
-                  <a:srgbClr val="12293A"/>
-                </a:solidFill>
-                <a:latin typeface="Poppins" pitchFamily="34" charset="0"/>
-                <a:ea typeface="Poppins" pitchFamily="34" charset="-122"/>
-                <a:cs typeface="Poppins" pitchFamily="34" charset="-120"/>
-              </a:rPr>
-              <a:t>23,286</a:t>
-            </a:r>
-            <a:endParaRPr lang="en-US" sz="680" dirty="0"/>
-          </a:p>
-        </p:txBody>
-      </p:sp>
-      <p:sp>
-        <p:nvSpPr>
-          <p:cNvPr id="117" name="Shape 115"/>
-          <p:cNvSpPr/>
-          <p:nvPr/>
-        </p:nvSpPr>
-        <p:spPr>
-          <a:xfrm>
-            <a:off x="5321808" y="3940898"/>
-            <a:ext cx="996696" cy="136744"/>
-          </a:xfrm>
-          <a:prstGeom prst="rect">
-            <a:avLst/>
-          </a:prstGeom>
-          <a:solidFill>
-            <a:srgbClr val="EDF5F7"/>
-          </a:solidFill>
-          <a:ln/>
-        </p:spPr>
-      </p:sp>
-      <p:sp>
-        <p:nvSpPr>
-          <p:cNvPr id="118" name="Text 116"/>
-          <p:cNvSpPr txBox="1"/>
-          <p:nvPr/>
-        </p:nvSpPr>
-        <p:spPr>
-          <a:xfrm>
-            <a:off x="5294376" y="3933583"/>
-            <a:ext cx="1051560" cy="150460"/>
-          </a:xfrm>
-          <a:prstGeom prst="rect">
-            <a:avLst/>
-          </a:prstGeom>
-          <a:noFill/>
-          <a:ln/>
-        </p:spPr>
-        <p:txBody>
-          <a:bodyPr wrap="square" lIns="0" tIns="0" rIns="0" bIns="0" rtlCol="0" anchor="ctr"/>
-          <a:lstStyle/>
-          <a:p>
-            <a:pPr algn="ctr" indent="0" marL="0">
-              <a:buNone/>
-            </a:pPr>
-            <a:r>
-              <a:rPr lang="en-US" sz="680" dirty="0">
-                <a:solidFill>
-                  <a:srgbClr val="12293A"/>
-                </a:solidFill>
-                <a:latin typeface="Poppins" pitchFamily="34" charset="0"/>
-                <a:ea typeface="Poppins" pitchFamily="34" charset="-122"/>
-                <a:cs typeface="Poppins" pitchFamily="34" charset="-120"/>
-              </a:rPr>
-              <a:t>17,140</a:t>
-            </a:r>
-            <a:endParaRPr lang="en-US" sz="680" dirty="0"/>
-          </a:p>
-        </p:txBody>
-      </p:sp>
-      <p:sp>
-        <p:nvSpPr>
-          <p:cNvPr id="119" name="Text 117"/>
-          <p:cNvSpPr txBox="1"/>
-          <p:nvPr/>
-        </p:nvSpPr>
-        <p:spPr>
-          <a:xfrm>
-            <a:off x="6400800" y="3933583"/>
-            <a:ext cx="1280160" cy="150460"/>
-          </a:xfrm>
-          <a:prstGeom prst="rect">
-            <a:avLst/>
-          </a:prstGeom>
-          <a:noFill/>
-          <a:ln/>
-        </p:spPr>
-        <p:txBody>
-          <a:bodyPr wrap="square" lIns="0" tIns="0" rIns="0" bIns="0" rtlCol="0" anchor="ctr"/>
-          <a:lstStyle/>
-          <a:p>
-            <a:pPr algn="r" indent="0" marL="0">
-              <a:buNone/>
-            </a:pPr>
-            <a:r>
-              <a:rPr lang="en-US" sz="700" b="1" dirty="0">
-                <a:solidFill>
-                  <a:srgbClr val="5E7280"/>
-                </a:solidFill>
-                <a:latin typeface="Poppins" pitchFamily="34" charset="0"/>
-                <a:ea typeface="Poppins" pitchFamily="34" charset="-122"/>
-                <a:cs typeface="Poppins" pitchFamily="34" charset="-120"/>
-              </a:rPr>
-              <a:t>83,285</a:t>
-            </a:r>
-            <a:endParaRPr lang="en-US" sz="700" dirty="0"/>
-          </a:p>
-        </p:txBody>
-      </p:sp>
-      <p:sp>
-        <p:nvSpPr>
-          <p:cNvPr id="120" name="Text 118"/>
-          <p:cNvSpPr txBox="1"/>
-          <p:nvPr/>
-        </p:nvSpPr>
-        <p:spPr>
-          <a:xfrm>
-            <a:off x="594360" y="4093187"/>
-            <a:ext cx="1417320" cy="150460"/>
-          </a:xfrm>
-          <a:prstGeom prst="rect">
-            <a:avLst/>
-          </a:prstGeom>
-          <a:noFill/>
-          <a:ln/>
-        </p:spPr>
-        <p:txBody>
-          <a:bodyPr wrap="square" lIns="0" tIns="0" rIns="0" bIns="0" rtlCol="0" anchor="ctr"/>
-          <a:lstStyle/>
-          <a:p>
-            <a:pPr indent="0" marL="0">
-              <a:buNone/>
-            </a:pPr>
-            <a:r>
-              <a:rPr lang="en-US" sz="720" b="1" dirty="0">
-                <a:solidFill>
-                  <a:srgbClr val="12293A"/>
-                </a:solidFill>
-                <a:latin typeface="Poppins" pitchFamily="34" charset="0"/>
-                <a:ea typeface="Poppins" pitchFamily="34" charset="-122"/>
-                <a:cs typeface="Poppins" pitchFamily="34" charset="-120"/>
-              </a:rPr>
-              <a:t>Mohamed Ammar</a:t>
-            </a:r>
-            <a:endParaRPr lang="en-US" sz="720" dirty="0"/>
-          </a:p>
-        </p:txBody>
-      </p:sp>
-      <p:sp>
-        <p:nvSpPr>
-          <p:cNvPr id="121" name="Shape 119"/>
-          <p:cNvSpPr/>
-          <p:nvPr/>
-        </p:nvSpPr>
-        <p:spPr>
-          <a:xfrm>
-            <a:off x="2084832" y="4100502"/>
-            <a:ext cx="996696" cy="136744"/>
-          </a:xfrm>
-          <a:prstGeom prst="rect">
-            <a:avLst/>
-          </a:prstGeom>
-          <a:solidFill>
-            <a:srgbClr val="EDF5F7"/>
-          </a:solidFill>
-          <a:ln/>
-        </p:spPr>
-      </p:sp>
-      <p:sp>
-        <p:nvSpPr>
-          <p:cNvPr id="122" name="Text 120"/>
-          <p:cNvSpPr txBox="1"/>
-          <p:nvPr/>
-        </p:nvSpPr>
-        <p:spPr>
-          <a:xfrm>
-            <a:off x="2057400" y="4093187"/>
-            <a:ext cx="1051560" cy="150460"/>
-          </a:xfrm>
-          <a:prstGeom prst="rect">
-            <a:avLst/>
-          </a:prstGeom>
-          <a:noFill/>
-          <a:ln/>
-        </p:spPr>
-        <p:txBody>
-          <a:bodyPr wrap="square" lIns="0" tIns="0" rIns="0" bIns="0" rtlCol="0" anchor="ctr"/>
-          <a:lstStyle/>
-          <a:p>
-            <a:pPr algn="ctr" indent="0" marL="0">
-              <a:buNone/>
-            </a:pPr>
-            <a:r>
-              <a:rPr lang="en-US" sz="680" dirty="0">
-                <a:solidFill>
-                  <a:srgbClr val="12293A"/>
-                </a:solidFill>
-                <a:latin typeface="Poppins" pitchFamily="34" charset="0"/>
-                <a:ea typeface="Poppins" pitchFamily="34" charset="-122"/>
-                <a:cs typeface="Poppins" pitchFamily="34" charset="-120"/>
-              </a:rPr>
-              <a:t>6,582</a:t>
-            </a:r>
-            <a:endParaRPr lang="en-US" sz="680" dirty="0"/>
-          </a:p>
-        </p:txBody>
-      </p:sp>
-      <p:sp>
-        <p:nvSpPr>
-          <p:cNvPr id="123" name="Shape 121"/>
-          <p:cNvSpPr/>
-          <p:nvPr/>
-        </p:nvSpPr>
-        <p:spPr>
-          <a:xfrm>
-            <a:off x="3163824" y="4100502"/>
-            <a:ext cx="996696" cy="136744"/>
-          </a:xfrm>
-          <a:prstGeom prst="rect">
-            <a:avLst/>
-          </a:prstGeom>
-          <a:solidFill>
-            <a:srgbClr val="EDF5F7"/>
-          </a:solidFill>
-          <a:ln/>
-        </p:spPr>
-      </p:sp>
-      <p:sp>
-        <p:nvSpPr>
-          <p:cNvPr id="124" name="Text 122"/>
-          <p:cNvSpPr txBox="1"/>
-          <p:nvPr/>
-        </p:nvSpPr>
-        <p:spPr>
-          <a:xfrm>
-            <a:off x="3136392" y="4093187"/>
-            <a:ext cx="1051560" cy="150460"/>
-          </a:xfrm>
-          <a:prstGeom prst="rect">
-            <a:avLst/>
-          </a:prstGeom>
-          <a:noFill/>
-          <a:ln/>
-        </p:spPr>
-        <p:txBody>
-          <a:bodyPr wrap="square" lIns="0" tIns="0" rIns="0" bIns="0" rtlCol="0" anchor="ctr"/>
-          <a:lstStyle/>
-          <a:p>
-            <a:pPr algn="ctr" indent="0" marL="0">
-              <a:buNone/>
-            </a:pPr>
-            <a:r>
-              <a:rPr lang="en-US" sz="680" dirty="0">
-                <a:solidFill>
-                  <a:srgbClr val="12293A"/>
-                </a:solidFill>
-                <a:latin typeface="Poppins" pitchFamily="34" charset="0"/>
-                <a:ea typeface="Poppins" pitchFamily="34" charset="-122"/>
-                <a:cs typeface="Poppins" pitchFamily="34" charset="-120"/>
-              </a:rPr>
-              <a:t>23,266</a:t>
-            </a:r>
-            <a:endParaRPr lang="en-US" sz="680" dirty="0"/>
-          </a:p>
-        </p:txBody>
-      </p:sp>
-      <p:sp>
-        <p:nvSpPr>
-          <p:cNvPr id="125" name="Shape 123"/>
-          <p:cNvSpPr/>
-          <p:nvPr/>
-        </p:nvSpPr>
-        <p:spPr>
-          <a:xfrm>
-            <a:off x="4242816" y="4100502"/>
-            <a:ext cx="996696" cy="136744"/>
-          </a:xfrm>
-          <a:prstGeom prst="rect">
-            <a:avLst/>
-          </a:prstGeom>
-          <a:solidFill>
-            <a:srgbClr val="EDF5F7"/>
-          </a:solidFill>
-          <a:ln/>
-        </p:spPr>
-      </p:sp>
-      <p:sp>
-        <p:nvSpPr>
-          <p:cNvPr id="126" name="Text 124"/>
-          <p:cNvSpPr txBox="1"/>
-          <p:nvPr/>
-        </p:nvSpPr>
-        <p:spPr>
-          <a:xfrm>
-            <a:off x="4215384" y="4093187"/>
-            <a:ext cx="1051560" cy="150460"/>
-          </a:xfrm>
-          <a:prstGeom prst="rect">
-            <a:avLst/>
-          </a:prstGeom>
-          <a:noFill/>
-          <a:ln/>
-        </p:spPr>
-        <p:txBody>
-          <a:bodyPr wrap="square" lIns="0" tIns="0" rIns="0" bIns="0" rtlCol="0" anchor="ctr"/>
-          <a:lstStyle/>
-          <a:p>
-            <a:pPr algn="ctr" indent="0" marL="0">
-              <a:buNone/>
-            </a:pPr>
-            <a:r>
-              <a:rPr lang="en-US" sz="680" dirty="0">
-                <a:solidFill>
-                  <a:srgbClr val="12293A"/>
-                </a:solidFill>
-                <a:latin typeface="Poppins" pitchFamily="34" charset="0"/>
-                <a:ea typeface="Poppins" pitchFamily="34" charset="-122"/>
-                <a:cs typeface="Poppins" pitchFamily="34" charset="-120"/>
-              </a:rPr>
-              <a:t>4,322</a:t>
-            </a:r>
-            <a:endParaRPr lang="en-US" sz="680" dirty="0"/>
-          </a:p>
-        </p:txBody>
-      </p:sp>
-      <p:sp>
-        <p:nvSpPr>
-          <p:cNvPr id="127" name="Shape 125"/>
-          <p:cNvSpPr/>
-          <p:nvPr/>
-        </p:nvSpPr>
-        <p:spPr>
-          <a:xfrm>
-            <a:off x="5321808" y="4100502"/>
-            <a:ext cx="996696" cy="136744"/>
-          </a:xfrm>
-          <a:prstGeom prst="rect">
-            <a:avLst/>
-          </a:prstGeom>
-          <a:solidFill>
-            <a:srgbClr val="EDF5F7"/>
-          </a:solidFill>
-          <a:ln/>
-        </p:spPr>
-      </p:sp>
-      <p:sp>
-        <p:nvSpPr>
-          <p:cNvPr id="128" name="Text 126"/>
-          <p:cNvSpPr txBox="1"/>
-          <p:nvPr/>
-        </p:nvSpPr>
-        <p:spPr>
-          <a:xfrm>
-            <a:off x="5294376" y="4093187"/>
-            <a:ext cx="1051560" cy="150460"/>
-          </a:xfrm>
-          <a:prstGeom prst="rect">
-            <a:avLst/>
-          </a:prstGeom>
-          <a:noFill/>
-          <a:ln/>
-        </p:spPr>
-        <p:txBody>
-          <a:bodyPr wrap="square" lIns="0" tIns="0" rIns="0" bIns="0" rtlCol="0" anchor="ctr"/>
-          <a:lstStyle/>
-          <a:p>
-            <a:pPr algn="ctr" indent="0" marL="0">
-              <a:buNone/>
-            </a:pPr>
-            <a:r>
-              <a:rPr lang="en-US" sz="680" dirty="0">
-                <a:solidFill>
-                  <a:srgbClr val="12293A"/>
-                </a:solidFill>
-                <a:latin typeface="Poppins" pitchFamily="34" charset="0"/>
-                <a:ea typeface="Poppins" pitchFamily="34" charset="-122"/>
-                <a:cs typeface="Poppins" pitchFamily="34" charset="-120"/>
-              </a:rPr>
-              <a:t>5,548</a:t>
-            </a:r>
-            <a:endParaRPr lang="en-US" sz="680" dirty="0"/>
-          </a:p>
-        </p:txBody>
-      </p:sp>
-      <p:sp>
-        <p:nvSpPr>
-          <p:cNvPr id="129" name="Text 127"/>
-          <p:cNvSpPr txBox="1"/>
-          <p:nvPr/>
-        </p:nvSpPr>
-        <p:spPr>
-          <a:xfrm>
-            <a:off x="6400800" y="4093187"/>
-            <a:ext cx="1280160" cy="150460"/>
-          </a:xfrm>
-          <a:prstGeom prst="rect">
-            <a:avLst/>
-          </a:prstGeom>
-          <a:noFill/>
-          <a:ln/>
-        </p:spPr>
-        <p:txBody>
-          <a:bodyPr wrap="square" lIns="0" tIns="0" rIns="0" bIns="0" rtlCol="0" anchor="ctr"/>
-          <a:lstStyle/>
-          <a:p>
-            <a:pPr algn="r" indent="0" marL="0">
-              <a:buNone/>
-            </a:pPr>
-            <a:r>
-              <a:rPr lang="en-US" sz="700" b="1" dirty="0">
-                <a:solidFill>
-                  <a:srgbClr val="5E7280"/>
-                </a:solidFill>
-                <a:latin typeface="Poppins" pitchFamily="34" charset="0"/>
-                <a:ea typeface="Poppins" pitchFamily="34" charset="-122"/>
-                <a:cs typeface="Poppins" pitchFamily="34" charset="-120"/>
-              </a:rPr>
-              <a:t>39,718</a:t>
-            </a:r>
-            <a:endParaRPr lang="en-US" sz="700" dirty="0"/>
-          </a:p>
-        </p:txBody>
-      </p:sp>
-      <p:sp>
-        <p:nvSpPr>
-          <p:cNvPr id="130" name="Text 128"/>
-          <p:cNvSpPr txBox="1"/>
-          <p:nvPr/>
-        </p:nvSpPr>
-        <p:spPr>
-          <a:xfrm>
-            <a:off x="594360" y="4252791"/>
-            <a:ext cx="1417320" cy="150460"/>
-          </a:xfrm>
-          <a:prstGeom prst="rect">
-            <a:avLst/>
-          </a:prstGeom>
-          <a:noFill/>
-          <a:ln/>
-        </p:spPr>
-        <p:txBody>
-          <a:bodyPr wrap="square" lIns="0" tIns="0" rIns="0" bIns="0" rtlCol="0" anchor="ctr"/>
-          <a:lstStyle/>
-          <a:p>
-            <a:pPr indent="0" marL="0">
-              <a:buNone/>
-            </a:pPr>
-            <a:r>
-              <a:rPr lang="en-US" sz="720" b="1" dirty="0">
-                <a:solidFill>
-                  <a:srgbClr val="12293A"/>
-                </a:solidFill>
-                <a:latin typeface="Poppins" pitchFamily="34" charset="0"/>
-                <a:ea typeface="Poppins" pitchFamily="34" charset="-122"/>
-                <a:cs typeface="Poppins" pitchFamily="34" charset="-120"/>
-              </a:rPr>
-              <a:t>Tony Ghoussein</a:t>
-            </a:r>
-            <a:endParaRPr lang="en-US" sz="720" dirty="0"/>
-          </a:p>
-        </p:txBody>
-      </p:sp>
-      <p:sp>
-        <p:nvSpPr>
-          <p:cNvPr id="131" name="Shape 129"/>
-          <p:cNvSpPr/>
-          <p:nvPr/>
-        </p:nvSpPr>
-        <p:spPr>
-          <a:xfrm>
-            <a:off x="2084832" y="4260106"/>
-            <a:ext cx="996696" cy="136744"/>
-          </a:xfrm>
-          <a:prstGeom prst="rect">
-            <a:avLst/>
-          </a:prstGeom>
-          <a:solidFill>
-            <a:srgbClr val="EDF5F7"/>
-          </a:solidFill>
-          <a:ln/>
-        </p:spPr>
-      </p:sp>
-      <p:sp>
-        <p:nvSpPr>
-          <p:cNvPr id="132" name="Text 130"/>
-          <p:cNvSpPr txBox="1"/>
-          <p:nvPr/>
-        </p:nvSpPr>
-        <p:spPr>
-          <a:xfrm>
-            <a:off x="2057400" y="4252791"/>
-            <a:ext cx="1051560" cy="150460"/>
-          </a:xfrm>
-          <a:prstGeom prst="rect">
-            <a:avLst/>
-          </a:prstGeom>
-          <a:noFill/>
-          <a:ln/>
-        </p:spPr>
-        <p:txBody>
-          <a:bodyPr wrap="square" lIns="0" tIns="0" rIns="0" bIns="0" rtlCol="0" anchor="ctr"/>
-          <a:lstStyle/>
-          <a:p>
-            <a:pPr algn="ctr" indent="0" marL="0">
-              <a:buNone/>
-            </a:pPr>
-            <a:r>
-              <a:rPr lang="en-US" sz="680" dirty="0">
-                <a:solidFill>
-                  <a:srgbClr val="12293A"/>
-                </a:solidFill>
-                <a:latin typeface="Poppins" pitchFamily="34" charset="0"/>
-                <a:ea typeface="Poppins" pitchFamily="34" charset="-122"/>
-                <a:cs typeface="Poppins" pitchFamily="34" charset="-120"/>
-              </a:rPr>
-              <a:t>6,208</a:t>
-            </a:r>
-            <a:endParaRPr lang="en-US" sz="680" dirty="0"/>
-          </a:p>
-        </p:txBody>
-      </p:sp>
-      <p:sp>
-        <p:nvSpPr>
-          <p:cNvPr id="133" name="Shape 131"/>
-          <p:cNvSpPr/>
-          <p:nvPr/>
-        </p:nvSpPr>
-        <p:spPr>
-          <a:xfrm>
-            <a:off x="3163824" y="4260106"/>
-            <a:ext cx="996696" cy="136744"/>
-          </a:xfrm>
-          <a:prstGeom prst="rect">
-            <a:avLst/>
-          </a:prstGeom>
-          <a:solidFill>
-            <a:srgbClr val="EDF5F7"/>
-          </a:solidFill>
-          <a:ln/>
-        </p:spPr>
-      </p:sp>
-      <p:sp>
-        <p:nvSpPr>
-          <p:cNvPr id="134" name="Text 132"/>
-          <p:cNvSpPr txBox="1"/>
-          <p:nvPr/>
-        </p:nvSpPr>
-        <p:spPr>
-          <a:xfrm>
-            <a:off x="3136392" y="4252791"/>
-            <a:ext cx="1051560" cy="150460"/>
-          </a:xfrm>
-          <a:prstGeom prst="rect">
-            <a:avLst/>
-          </a:prstGeom>
-          <a:noFill/>
-          <a:ln/>
-        </p:spPr>
-        <p:txBody>
-          <a:bodyPr wrap="square" lIns="0" tIns="0" rIns="0" bIns="0" rtlCol="0" anchor="ctr"/>
-          <a:lstStyle/>
-          <a:p>
-            <a:pPr algn="ctr" indent="0" marL="0">
-              <a:buNone/>
-            </a:pPr>
-            <a:r>
-              <a:rPr lang="en-US" sz="680" dirty="0">
-                <a:solidFill>
-                  <a:srgbClr val="12293A"/>
-                </a:solidFill>
-                <a:latin typeface="Poppins" pitchFamily="34" charset="0"/>
-                <a:ea typeface="Poppins" pitchFamily="34" charset="-122"/>
-                <a:cs typeface="Poppins" pitchFamily="34" charset="-120"/>
-              </a:rPr>
-              <a:t>10,369</a:t>
-            </a:r>
-            <a:endParaRPr lang="en-US" sz="680" dirty="0"/>
-          </a:p>
-        </p:txBody>
-      </p:sp>
-      <p:sp>
-        <p:nvSpPr>
-          <p:cNvPr id="135" name="Shape 133"/>
-          <p:cNvSpPr/>
-          <p:nvPr/>
-        </p:nvSpPr>
-        <p:spPr>
-          <a:xfrm>
-            <a:off x="4242816" y="4260106"/>
-            <a:ext cx="996696" cy="136744"/>
-          </a:xfrm>
-          <a:prstGeom prst="rect">
-            <a:avLst/>
-          </a:prstGeom>
-          <a:solidFill>
-            <a:srgbClr val="EDF5F7"/>
-          </a:solidFill>
-          <a:ln/>
-        </p:spPr>
-      </p:sp>
-      <p:sp>
-        <p:nvSpPr>
-          <p:cNvPr id="136" name="Text 134"/>
-          <p:cNvSpPr txBox="1"/>
-          <p:nvPr/>
-        </p:nvSpPr>
-        <p:spPr>
-          <a:xfrm>
-            <a:off x="4215384" y="4252791"/>
-            <a:ext cx="1051560" cy="150460"/>
-          </a:xfrm>
-          <a:prstGeom prst="rect">
-            <a:avLst/>
-          </a:prstGeom>
-          <a:noFill/>
-          <a:ln/>
-        </p:spPr>
-        <p:txBody>
-          <a:bodyPr wrap="square" lIns="0" tIns="0" rIns="0" bIns="0" rtlCol="0" anchor="ctr"/>
-          <a:lstStyle/>
-          <a:p>
-            <a:pPr algn="ctr" indent="0" marL="0">
-              <a:buNone/>
-            </a:pPr>
-            <a:r>
-              <a:rPr lang="en-US" sz="680" dirty="0">
-                <a:solidFill>
-                  <a:srgbClr val="12293A"/>
-                </a:solidFill>
-                <a:latin typeface="Poppins" pitchFamily="34" charset="0"/>
-                <a:ea typeface="Poppins" pitchFamily="34" charset="-122"/>
-                <a:cs typeface="Poppins" pitchFamily="34" charset="-120"/>
-              </a:rPr>
-              <a:t>11,891</a:t>
-            </a:r>
-            <a:endParaRPr lang="en-US" sz="680" dirty="0"/>
-          </a:p>
-        </p:txBody>
-      </p:sp>
-      <p:sp>
-        <p:nvSpPr>
-          <p:cNvPr id="137" name="Shape 135"/>
-          <p:cNvSpPr/>
-          <p:nvPr/>
-        </p:nvSpPr>
-        <p:spPr>
-          <a:xfrm>
-            <a:off x="5321808" y="4260106"/>
-            <a:ext cx="996696" cy="136744"/>
-          </a:xfrm>
-          <a:prstGeom prst="rect">
-            <a:avLst/>
-          </a:prstGeom>
-          <a:solidFill>
-            <a:srgbClr val="EDF5F7"/>
-          </a:solidFill>
-          <a:ln/>
-        </p:spPr>
-      </p:sp>
-      <p:sp>
-        <p:nvSpPr>
-          <p:cNvPr id="138" name="Text 136"/>
-          <p:cNvSpPr txBox="1"/>
-          <p:nvPr/>
-        </p:nvSpPr>
-        <p:spPr>
-          <a:xfrm>
-            <a:off x="5294376" y="4252791"/>
-            <a:ext cx="1051560" cy="150460"/>
-          </a:xfrm>
-          <a:prstGeom prst="rect">
-            <a:avLst/>
-          </a:prstGeom>
-          <a:noFill/>
-          <a:ln/>
-        </p:spPr>
-        <p:txBody>
-          <a:bodyPr wrap="square" lIns="0" tIns="0" rIns="0" bIns="0" rtlCol="0" anchor="ctr"/>
-          <a:lstStyle/>
-          <a:p>
-            <a:pPr algn="ctr" indent="0" marL="0">
-              <a:buNone/>
-            </a:pPr>
-            <a:r>
-              <a:rPr lang="en-US" sz="680" dirty="0">
-                <a:solidFill>
-                  <a:srgbClr val="12293A"/>
-                </a:solidFill>
-                <a:latin typeface="Poppins" pitchFamily="34" charset="0"/>
-                <a:ea typeface="Poppins" pitchFamily="34" charset="-122"/>
-                <a:cs typeface="Poppins" pitchFamily="34" charset="-120"/>
-              </a:rPr>
-              <a:t>26,261</a:t>
-            </a:r>
-            <a:endParaRPr lang="en-US" sz="680" dirty="0"/>
-          </a:p>
-        </p:txBody>
-      </p:sp>
-      <p:sp>
-        <p:nvSpPr>
-          <p:cNvPr id="139" name="Text 137"/>
-          <p:cNvSpPr txBox="1"/>
-          <p:nvPr/>
-        </p:nvSpPr>
-        <p:spPr>
-          <a:xfrm>
-            <a:off x="6400800" y="4252791"/>
-            <a:ext cx="1280160" cy="150460"/>
-          </a:xfrm>
-          <a:prstGeom prst="rect">
-            <a:avLst/>
-          </a:prstGeom>
-          <a:noFill/>
-          <a:ln/>
-        </p:spPr>
-        <p:txBody>
-          <a:bodyPr wrap="square" lIns="0" tIns="0" rIns="0" bIns="0" rtlCol="0" anchor="ctr"/>
-          <a:lstStyle/>
-          <a:p>
-            <a:pPr algn="r" indent="0" marL="0">
-              <a:buNone/>
-            </a:pPr>
-            <a:r>
-              <a:rPr lang="en-US" sz="700" b="1" dirty="0">
-                <a:solidFill>
-                  <a:srgbClr val="5E7280"/>
-                </a:solidFill>
-                <a:latin typeface="Poppins" pitchFamily="34" charset="0"/>
-                <a:ea typeface="Poppins" pitchFamily="34" charset="-122"/>
-                <a:cs typeface="Poppins" pitchFamily="34" charset="-120"/>
-              </a:rPr>
-              <a:t>54,729</a:t>
-            </a:r>
-            <a:endParaRPr lang="en-US" sz="700" dirty="0"/>
-          </a:p>
-        </p:txBody>
-      </p:sp>
-      <p:sp>
-        <p:nvSpPr>
-          <p:cNvPr id="140" name="Text 138"/>
-          <p:cNvSpPr txBox="1"/>
-          <p:nvPr/>
-        </p:nvSpPr>
-        <p:spPr>
-          <a:xfrm>
-            <a:off x="594360" y="4412396"/>
-            <a:ext cx="1417320" cy="150460"/>
-          </a:xfrm>
-          <a:prstGeom prst="rect">
-            <a:avLst/>
-          </a:prstGeom>
-          <a:noFill/>
-          <a:ln/>
-        </p:spPr>
-        <p:txBody>
-          <a:bodyPr wrap="square" lIns="0" tIns="0" rIns="0" bIns="0" rtlCol="0" anchor="ctr"/>
-          <a:lstStyle/>
-          <a:p>
-            <a:pPr indent="0" marL="0">
-              <a:buNone/>
-            </a:pPr>
-            <a:r>
-              <a:rPr lang="en-US" sz="720" b="1" dirty="0">
-                <a:solidFill>
-                  <a:srgbClr val="12293A"/>
-                </a:solidFill>
-                <a:latin typeface="Poppins" pitchFamily="34" charset="0"/>
-                <a:ea typeface="Poppins" pitchFamily="34" charset="-122"/>
-                <a:cs typeface="Poppins" pitchFamily="34" charset="-120"/>
-              </a:rPr>
-              <a:t>Eric Cruz</a:t>
-            </a:r>
-            <a:endParaRPr lang="en-US" sz="720" dirty="0"/>
-          </a:p>
-        </p:txBody>
-      </p:sp>
-      <p:sp>
-        <p:nvSpPr>
-          <p:cNvPr id="141" name="Shape 139"/>
-          <p:cNvSpPr/>
-          <p:nvPr/>
-        </p:nvSpPr>
-        <p:spPr>
-          <a:xfrm>
-            <a:off x="2084832" y="4419711"/>
-            <a:ext cx="996696" cy="136744"/>
-          </a:xfrm>
-          <a:prstGeom prst="rect">
-            <a:avLst/>
-          </a:prstGeom>
-          <a:solidFill>
-            <a:srgbClr val="EDF5F7"/>
-          </a:solidFill>
-          <a:ln/>
-        </p:spPr>
-      </p:sp>
-      <p:sp>
-        <p:nvSpPr>
-          <p:cNvPr id="142" name="Text 140"/>
-          <p:cNvSpPr txBox="1"/>
-          <p:nvPr/>
-        </p:nvSpPr>
-        <p:spPr>
-          <a:xfrm>
-            <a:off x="2057400" y="4412396"/>
-            <a:ext cx="1051560" cy="150460"/>
-          </a:xfrm>
-          <a:prstGeom prst="rect">
-            <a:avLst/>
-          </a:prstGeom>
-          <a:noFill/>
-          <a:ln/>
-        </p:spPr>
-        <p:txBody>
-          <a:bodyPr wrap="square" lIns="0" tIns="0" rIns="0" bIns="0" rtlCol="0" anchor="ctr"/>
-          <a:lstStyle/>
-          <a:p>
-            <a:pPr algn="ctr" indent="0" marL="0">
-              <a:buNone/>
-            </a:pPr>
-            <a:r>
-              <a:rPr lang="en-US" sz="680" dirty="0">
-                <a:solidFill>
-                  <a:srgbClr val="12293A"/>
-                </a:solidFill>
-                <a:latin typeface="Poppins" pitchFamily="34" charset="0"/>
-                <a:ea typeface="Poppins" pitchFamily="34" charset="-122"/>
-                <a:cs typeface="Poppins" pitchFamily="34" charset="-120"/>
-              </a:rPr>
-              <a:t>2,970</a:t>
-            </a:r>
-            <a:endParaRPr lang="en-US" sz="680" dirty="0"/>
-          </a:p>
-        </p:txBody>
-      </p:sp>
-      <p:sp>
-        <p:nvSpPr>
-          <p:cNvPr id="143" name="Shape 141"/>
-          <p:cNvSpPr/>
-          <p:nvPr/>
-        </p:nvSpPr>
-        <p:spPr>
-          <a:xfrm>
-            <a:off x="3163824" y="4419711"/>
-            <a:ext cx="996696" cy="136744"/>
-          </a:xfrm>
-          <a:prstGeom prst="rect">
-            <a:avLst/>
-          </a:prstGeom>
-          <a:solidFill>
-            <a:srgbClr val="EDF5F7"/>
-          </a:solidFill>
-          <a:ln/>
-        </p:spPr>
-      </p:sp>
-      <p:sp>
-        <p:nvSpPr>
-          <p:cNvPr id="144" name="Text 142"/>
-          <p:cNvSpPr txBox="1"/>
-          <p:nvPr/>
-        </p:nvSpPr>
-        <p:spPr>
-          <a:xfrm>
-            <a:off x="3136392" y="4412396"/>
-            <a:ext cx="1051560" cy="150460"/>
-          </a:xfrm>
-          <a:prstGeom prst="rect">
-            <a:avLst/>
-          </a:prstGeom>
-          <a:noFill/>
-          <a:ln/>
-        </p:spPr>
-        <p:txBody>
-          <a:bodyPr wrap="square" lIns="0" tIns="0" rIns="0" bIns="0" rtlCol="0" anchor="ctr"/>
-          <a:lstStyle/>
-          <a:p>
-            <a:pPr algn="ctr" indent="0" marL="0">
-              <a:buNone/>
-            </a:pPr>
-            <a:r>
-              <a:rPr lang="en-US" sz="680" dirty="0">
-                <a:solidFill>
-                  <a:srgbClr val="12293A"/>
-                </a:solidFill>
-                <a:latin typeface="Poppins" pitchFamily="34" charset="0"/>
-                <a:ea typeface="Poppins" pitchFamily="34" charset="-122"/>
-                <a:cs typeface="Poppins" pitchFamily="34" charset="-120"/>
-              </a:rPr>
-              <a:t>7,237</a:t>
-            </a:r>
-            <a:endParaRPr lang="en-US" sz="680" dirty="0"/>
-          </a:p>
-        </p:txBody>
-      </p:sp>
-      <p:sp>
-        <p:nvSpPr>
-          <p:cNvPr id="145" name="Shape 143"/>
-          <p:cNvSpPr/>
-          <p:nvPr/>
-        </p:nvSpPr>
-        <p:spPr>
-          <a:xfrm>
-            <a:off x="4242816" y="4419711"/>
-            <a:ext cx="996696" cy="136744"/>
-          </a:xfrm>
-          <a:prstGeom prst="rect">
-            <a:avLst/>
-          </a:prstGeom>
-          <a:solidFill>
-            <a:srgbClr val="EDF5F7"/>
-          </a:solidFill>
-          <a:ln/>
-        </p:spPr>
-      </p:sp>
-      <p:sp>
-        <p:nvSpPr>
-          <p:cNvPr id="146" name="Text 144"/>
-          <p:cNvSpPr txBox="1"/>
-          <p:nvPr/>
-        </p:nvSpPr>
-        <p:spPr>
-          <a:xfrm>
-            <a:off x="4215384" y="4412396"/>
-            <a:ext cx="1051560" cy="150460"/>
-          </a:xfrm>
-          <a:prstGeom prst="rect">
-            <a:avLst/>
-          </a:prstGeom>
-          <a:noFill/>
-          <a:ln/>
-        </p:spPr>
-        <p:txBody>
-          <a:bodyPr wrap="square" lIns="0" tIns="0" rIns="0" bIns="0" rtlCol="0" anchor="ctr"/>
-          <a:lstStyle/>
-          <a:p>
-            <a:pPr algn="ctr" indent="0" marL="0">
-              <a:buNone/>
-            </a:pPr>
-            <a:r>
-              <a:rPr lang="en-US" sz="680" dirty="0">
-                <a:solidFill>
-                  <a:srgbClr val="12293A"/>
-                </a:solidFill>
-                <a:latin typeface="Poppins" pitchFamily="34" charset="0"/>
-                <a:ea typeface="Poppins" pitchFamily="34" charset="-122"/>
-                <a:cs typeface="Poppins" pitchFamily="34" charset="-120"/>
-              </a:rPr>
-              <a:t>19,289</a:t>
-            </a:r>
-            <a:endParaRPr lang="en-US" sz="680" dirty="0"/>
-          </a:p>
-        </p:txBody>
-      </p:sp>
-      <p:sp>
-        <p:nvSpPr>
-          <p:cNvPr id="147" name="Shape 145"/>
-          <p:cNvSpPr/>
-          <p:nvPr/>
-        </p:nvSpPr>
-        <p:spPr>
-          <a:xfrm>
-            <a:off x="5321808" y="4419711"/>
-            <a:ext cx="996696" cy="136744"/>
-          </a:xfrm>
-          <a:prstGeom prst="rect">
-            <a:avLst/>
-          </a:prstGeom>
-          <a:solidFill>
-            <a:srgbClr val="EDF5F7"/>
-          </a:solidFill>
-          <a:ln/>
-        </p:spPr>
-      </p:sp>
-      <p:sp>
-        <p:nvSpPr>
-          <p:cNvPr id="148" name="Text 146"/>
-          <p:cNvSpPr txBox="1"/>
-          <p:nvPr/>
-        </p:nvSpPr>
-        <p:spPr>
-          <a:xfrm>
-            <a:off x="5294376" y="4412396"/>
-            <a:ext cx="1051560" cy="150460"/>
-          </a:xfrm>
-          <a:prstGeom prst="rect">
-            <a:avLst/>
-          </a:prstGeom>
-          <a:noFill/>
-          <a:ln/>
-        </p:spPr>
-        <p:txBody>
-          <a:bodyPr wrap="square" lIns="0" tIns="0" rIns="0" bIns="0" rtlCol="0" anchor="ctr"/>
-          <a:lstStyle/>
-          <a:p>
-            <a:pPr algn="ctr" indent="0" marL="0">
-              <a:buNone/>
-            </a:pPr>
-            <a:r>
-              <a:rPr lang="en-US" sz="680" dirty="0">
-                <a:solidFill>
-                  <a:srgbClr val="12293A"/>
-                </a:solidFill>
-                <a:latin typeface="Poppins" pitchFamily="34" charset="0"/>
-                <a:ea typeface="Poppins" pitchFamily="34" charset="-122"/>
-                <a:cs typeface="Poppins" pitchFamily="34" charset="-120"/>
-              </a:rPr>
-              <a:t>3,890</a:t>
-            </a:r>
-            <a:endParaRPr lang="en-US" sz="680" dirty="0"/>
-          </a:p>
-        </p:txBody>
-      </p:sp>
-      <p:sp>
-        <p:nvSpPr>
-          <p:cNvPr id="149" name="Text 147"/>
-          <p:cNvSpPr txBox="1"/>
-          <p:nvPr/>
-        </p:nvSpPr>
-        <p:spPr>
-          <a:xfrm>
-            <a:off x="6400800" y="4412396"/>
-            <a:ext cx="1280160" cy="150460"/>
-          </a:xfrm>
-          <a:prstGeom prst="rect">
-            <a:avLst/>
-          </a:prstGeom>
-          <a:noFill/>
-          <a:ln/>
-        </p:spPr>
-        <p:txBody>
-          <a:bodyPr wrap="square" lIns="0" tIns="0" rIns="0" bIns="0" rtlCol="0" anchor="ctr"/>
-          <a:lstStyle/>
-          <a:p>
-            <a:pPr algn="r" indent="0" marL="0">
-              <a:buNone/>
-            </a:pPr>
-            <a:r>
-              <a:rPr lang="en-US" sz="700" b="1" dirty="0">
-                <a:solidFill>
-                  <a:srgbClr val="5E7280"/>
-                </a:solidFill>
-                <a:latin typeface="Poppins" pitchFamily="34" charset="0"/>
-                <a:ea typeface="Poppins" pitchFamily="34" charset="-122"/>
-                <a:cs typeface="Poppins" pitchFamily="34" charset="-120"/>
-              </a:rPr>
-              <a:t>33,386</a:t>
-            </a:r>
-            <a:endParaRPr lang="en-US" sz="700" dirty="0"/>
-          </a:p>
-        </p:txBody>
-      </p:sp>
-      <p:sp>
-        <p:nvSpPr>
-          <p:cNvPr id="150" name="Shape 148"/>
+          <p:cNvPr id="171" name="Shape 169"/>
           <p:cNvSpPr/>
           <p:nvPr/>
         </p:nvSpPr>
@@ -20015,7 +20777,7 @@
       </p:sp>
       <p:sp>
         <p:nvSpPr>
-          <p:cNvPr id="151" name="Text 149"/>
+          <p:cNvPr id="172" name="Text 170"/>
           <p:cNvSpPr txBox="1"/>
           <p:nvPr/>
         </p:nvSpPr>
@@ -20054,7 +20816,7 @@
       </p:sp>
       <p:sp>
         <p:nvSpPr>
-          <p:cNvPr id="152" name="Text 150"/>
+          <p:cNvPr id="173" name="Text 171"/>
           <p:cNvSpPr txBox="1"/>
           <p:nvPr/>
         </p:nvSpPr>
@@ -20093,7 +20855,7 @@
       </p:sp>
       <p:sp>
         <p:nvSpPr>
-          <p:cNvPr id="153" name="Text 151"/>
+          <p:cNvPr id="174" name="Text 172"/>
           <p:cNvSpPr txBox="1"/>
           <p:nvPr/>
         </p:nvSpPr>
@@ -20132,7 +20894,7 @@
       </p:sp>
       <p:sp>
         <p:nvSpPr>
-          <p:cNvPr id="154" name="Text 152"/>
+          <p:cNvPr id="175" name="Text 173"/>
           <p:cNvSpPr txBox="1"/>
           <p:nvPr/>
         </p:nvSpPr>
@@ -20171,7 +20933,7 @@
       </p:sp>
       <p:sp>
         <p:nvSpPr>
-          <p:cNvPr id="155" name="Text 153"/>
+          <p:cNvPr id="176" name="Text 174"/>
           <p:cNvSpPr txBox="1"/>
           <p:nvPr/>
         </p:nvSpPr>
@@ -20202,7 +20964,7 @@
                 <a:ea typeface="Poppins" pitchFamily="34" charset="-122"/>
                 <a:cs typeface="Poppins" pitchFamily="34" charset="-120"/>
               </a:rPr>
-              <a:t>329,436</a:t>
+              <a:t>1,234,279</a:t>
             </a:r>
             <a:endParaRPr lang="en-US" sz="750" dirty="0"/>
           </a:p>
@@ -20210,7 +20972,7 @@
       </p:sp>
       <p:sp>
         <p:nvSpPr>
-          <p:cNvPr id="156" name="Text 154"/>
+          <p:cNvPr id="177" name="Text 175"/>
           <p:cNvSpPr txBox="1"/>
           <p:nvPr/>
         </p:nvSpPr>
@@ -20241,7 +21003,7 @@
                 <a:ea typeface="Poppins" pitchFamily="34" charset="-122"/>
                 <a:cs typeface="Poppins" pitchFamily="34" charset="-120"/>
               </a:rPr>
-              <a:t>1,128,248</a:t>
+              <a:t>2,033,091</a:t>
             </a:r>
             <a:endParaRPr lang="en-US" sz="750" dirty="0"/>
           </a:p>
@@ -20249,7 +21011,7 @@
       </p:sp>
       <p:sp>
         <p:nvSpPr>
-          <p:cNvPr id="157" name="Text 155"/>
+          <p:cNvPr id="178" name="Text 176"/>
           <p:cNvSpPr txBox="1"/>
           <p:nvPr/>
         </p:nvSpPr>
@@ -20302,7 +21064,7 @@
       </p:sp>
       <p:sp>
         <p:nvSpPr>
-          <p:cNvPr id="158" name="Shape 156"/>
+          <p:cNvPr id="179" name="Shape 177"/>
           <p:cNvSpPr/>
           <p:nvPr/>
         </p:nvSpPr>
@@ -20322,7 +21084,7 @@
       </p:sp>
       <p:sp>
         <p:nvSpPr>
-          <p:cNvPr id="159" name="Text 157"/>
+          <p:cNvPr id="180" name="Text 178"/>
           <p:cNvSpPr txBox="1"/>
           <p:nvPr/>
         </p:nvSpPr>
@@ -20361,7 +21123,7 @@
       </p:sp>
       <p:sp>
         <p:nvSpPr>
-          <p:cNvPr id="160" name="Text 158"/>
+          <p:cNvPr id="181" name="Text 179"/>
           <p:cNvSpPr txBox="1"/>
           <p:nvPr/>
         </p:nvSpPr>
@@ -20400,7 +21162,7 @@
       </p:sp>
       <p:sp>
         <p:nvSpPr>
-          <p:cNvPr id="161" name="Shape 159"/>
+          <p:cNvPr id="182" name="Shape 180"/>
           <p:cNvSpPr/>
           <p:nvPr/>
         </p:nvSpPr>
@@ -20420,7 +21182,7 @@
       </p:sp>
       <p:sp>
         <p:nvSpPr>
-          <p:cNvPr id="162" name="Text 160"/>
+          <p:cNvPr id="183" name="Text 181"/>
           <p:cNvSpPr txBox="1"/>
           <p:nvPr/>
         </p:nvSpPr>
@@ -20459,7 +21221,7 @@
       </p:sp>
       <p:sp>
         <p:nvSpPr>
-          <p:cNvPr id="163" name="Text 161"/>
+          <p:cNvPr id="184" name="Text 182"/>
           <p:cNvSpPr txBox="1"/>
           <p:nvPr/>
         </p:nvSpPr>
@@ -20498,7 +21260,7 @@
       </p:sp>
       <p:sp>
         <p:nvSpPr>
-          <p:cNvPr id="164" name="Shape 162"/>
+          <p:cNvPr id="185" name="Shape 183"/>
           <p:cNvSpPr/>
           <p:nvPr/>
         </p:nvSpPr>
@@ -20518,7 +21280,7 @@
       </p:sp>
       <p:sp>
         <p:nvSpPr>
-          <p:cNvPr id="165" name="Text 163"/>
+          <p:cNvPr id="186" name="Text 184"/>
           <p:cNvSpPr txBox="1"/>
           <p:nvPr/>
         </p:nvSpPr>
@@ -20557,7 +21319,7 @@
       </p:sp>
       <p:sp>
         <p:nvSpPr>
-          <p:cNvPr id="166" name="Text 164"/>
+          <p:cNvPr id="187" name="Text 185"/>
           <p:cNvSpPr txBox="1"/>
           <p:nvPr/>
         </p:nvSpPr>
@@ -20596,7 +21358,7 @@
       </p:sp>
       <p:sp>
         <p:nvSpPr>
-          <p:cNvPr id="167" name="Shape 165"/>
+          <p:cNvPr id="188" name="Shape 186"/>
           <p:cNvSpPr/>
           <p:nvPr/>
         </p:nvSpPr>
@@ -20616,7 +21378,7 @@
       </p:sp>
       <p:sp>
         <p:nvSpPr>
-          <p:cNvPr id="168" name="Text 166"/>
+          <p:cNvPr id="189" name="Text 187"/>
           <p:cNvSpPr txBox="1"/>
           <p:nvPr/>
         </p:nvSpPr>
@@ -20655,7 +21417,7 @@
       </p:sp>
       <p:sp>
         <p:nvSpPr>
-          <p:cNvPr id="169" name="Text 167"/>
+          <p:cNvPr id="190" name="Text 188"/>
           <p:cNvSpPr txBox="1"/>
           <p:nvPr/>
         </p:nvSpPr>
@@ -20694,7 +21456,7 @@
       </p:sp>
       <p:sp>
         <p:nvSpPr>
-          <p:cNvPr id="170" name="Shape 168"/>
+          <p:cNvPr id="191" name="Shape 189"/>
           <p:cNvSpPr/>
           <p:nvPr/>
         </p:nvSpPr>
@@ -20714,7 +21476,7 @@
       </p:sp>
       <p:sp>
         <p:nvSpPr>
-          <p:cNvPr id="171" name="Text 169"/>
+          <p:cNvPr id="192" name="Text 190"/>
           <p:cNvSpPr txBox="1"/>
           <p:nvPr/>
         </p:nvSpPr>
@@ -20753,7 +21515,7 @@
       </p:sp>
       <p:sp>
         <p:nvSpPr>
-          <p:cNvPr id="172" name="Text 170"/>
+          <p:cNvPr id="193" name="Text 191"/>
           <p:cNvSpPr txBox="1"/>
           <p:nvPr/>
         </p:nvSpPr>
@@ -20792,7 +21554,7 @@
       </p:sp>
       <p:sp>
         <p:nvSpPr>
-          <p:cNvPr id="173" name="Shape 171"/>
+          <p:cNvPr id="194" name="Shape 192"/>
           <p:cNvSpPr/>
           <p:nvPr/>
         </p:nvSpPr>
@@ -20812,7 +21574,7 @@
       </p:sp>
       <p:sp>
         <p:nvSpPr>
-          <p:cNvPr id="174" name="Text 172"/>
+          <p:cNvPr id="195" name="Text 193"/>
           <p:cNvSpPr txBox="1"/>
           <p:nvPr/>
         </p:nvSpPr>
@@ -20851,7 +21613,7 @@
       </p:sp>
       <p:sp>
         <p:nvSpPr>
-          <p:cNvPr id="175" name="Text 173"/>
+          <p:cNvPr id="196" name="Text 194"/>
           <p:cNvSpPr txBox="1"/>
           <p:nvPr/>
         </p:nvSpPr>
@@ -20890,7 +21652,7 @@
       </p:sp>
       <p:sp>
         <p:nvSpPr>
-          <p:cNvPr id="176" name="Shape 174"/>
+          <p:cNvPr id="197" name="Shape 195"/>
           <p:cNvSpPr/>
           <p:nvPr/>
         </p:nvSpPr>
@@ -20910,7 +21672,7 @@
       </p:sp>
       <p:sp>
         <p:nvSpPr>
-          <p:cNvPr id="177" name="Text 175"/>
+          <p:cNvPr id="198" name="Text 196"/>
           <p:cNvSpPr txBox="1"/>
           <p:nvPr/>
         </p:nvSpPr>
@@ -20949,7 +21711,7 @@
       </p:sp>
       <p:sp>
         <p:nvSpPr>
-          <p:cNvPr id="178" name="Text 176"/>
+          <p:cNvPr id="199" name="Text 197"/>
           <p:cNvSpPr txBox="1"/>
           <p:nvPr/>
         </p:nvSpPr>
@@ -20988,7 +21750,7 @@
       </p:sp>
       <p:sp>
         <p:nvSpPr>
-          <p:cNvPr id="179" name="Shape 177"/>
+          <p:cNvPr id="200" name="Shape 198"/>
           <p:cNvSpPr/>
           <p:nvPr/>
         </p:nvSpPr>
@@ -21008,7 +21770,7 @@
       </p:sp>
       <p:sp>
         <p:nvSpPr>
-          <p:cNvPr id="180" name="Text 178"/>
+          <p:cNvPr id="201" name="Text 199"/>
           <p:cNvSpPr txBox="1"/>
           <p:nvPr/>
         </p:nvSpPr>
@@ -21047,7 +21809,7 @@
       </p:sp>
       <p:sp>
         <p:nvSpPr>
-          <p:cNvPr id="181" name="Text 179"/>
+          <p:cNvPr id="202" name="Text 200"/>
           <p:cNvSpPr txBox="1"/>
           <p:nvPr/>
         </p:nvSpPr>
@@ -21086,7 +21848,7 @@
       </p:sp>
       <p:sp>
         <p:nvSpPr>
-          <p:cNvPr id="182" name="Shape 180"/>
+          <p:cNvPr id="203" name="Shape 201"/>
           <p:cNvSpPr/>
           <p:nvPr/>
         </p:nvSpPr>
@@ -21106,7 +21868,7 @@
       </p:sp>
       <p:sp>
         <p:nvSpPr>
-          <p:cNvPr id="183" name="Text 181"/>
+          <p:cNvPr id="204" name="Text 202"/>
           <p:cNvSpPr txBox="1"/>
           <p:nvPr/>
         </p:nvSpPr>
@@ -21145,7 +21907,7 @@
       </p:sp>
       <p:sp>
         <p:nvSpPr>
-          <p:cNvPr id="184" name="Text 182"/>
+          <p:cNvPr id="205" name="Text 203"/>
           <p:cNvSpPr txBox="1"/>
           <p:nvPr/>
         </p:nvSpPr>
@@ -21184,7 +21946,7 @@
       </p:sp>
       <p:sp>
         <p:nvSpPr>
-          <p:cNvPr id="185" name="Shape 183"/>
+          <p:cNvPr id="206" name="Shape 204"/>
           <p:cNvSpPr/>
           <p:nvPr/>
         </p:nvSpPr>
@@ -21204,7 +21966,7 @@
       </p:sp>
       <p:sp>
         <p:nvSpPr>
-          <p:cNvPr id="186" name="Text 184"/>
+          <p:cNvPr id="207" name="Text 205"/>
           <p:cNvSpPr txBox="1"/>
           <p:nvPr/>
         </p:nvSpPr>
@@ -21243,7 +22005,7 @@
       </p:sp>
       <p:sp>
         <p:nvSpPr>
-          <p:cNvPr id="187" name="Text 185"/>
+          <p:cNvPr id="208" name="Text 206"/>
           <p:cNvSpPr txBox="1"/>
           <p:nvPr/>
         </p:nvSpPr>
@@ -21282,7 +22044,7 @@
       </p:sp>
       <p:sp>
         <p:nvSpPr>
-          <p:cNvPr id="188" name="Shape 186"/>
+          <p:cNvPr id="209" name="Shape 207"/>
           <p:cNvSpPr/>
           <p:nvPr/>
         </p:nvSpPr>
@@ -21302,7 +22064,7 @@
       </p:sp>
       <p:sp>
         <p:nvSpPr>
-          <p:cNvPr id="189" name="Text 187"/>
+          <p:cNvPr id="210" name="Text 208"/>
           <p:cNvSpPr txBox="1"/>
           <p:nvPr/>
         </p:nvSpPr>
@@ -21341,7 +22103,7 @@
       </p:sp>
       <p:sp>
         <p:nvSpPr>
-          <p:cNvPr id="190" name="Text 188"/>
+          <p:cNvPr id="211" name="Text 209"/>
           <p:cNvSpPr txBox="1"/>
           <p:nvPr/>
         </p:nvSpPr>
@@ -21380,7 +22142,7 @@
       </p:sp>
       <p:sp>
         <p:nvSpPr>
-          <p:cNvPr id="191" name="Shape 189"/>
+          <p:cNvPr id="212" name="Shape 210"/>
           <p:cNvSpPr/>
           <p:nvPr/>
         </p:nvSpPr>
@@ -21400,7 +22162,7 @@
       </p:sp>
       <p:sp>
         <p:nvSpPr>
-          <p:cNvPr id="192" name="Text 190"/>
+          <p:cNvPr id="213" name="Text 211"/>
           <p:cNvSpPr txBox="1"/>
           <p:nvPr/>
         </p:nvSpPr>
@@ -21439,7 +22201,7 @@
       </p:sp>
       <p:sp>
         <p:nvSpPr>
-          <p:cNvPr id="193" name="Text 191"/>
+          <p:cNvPr id="214" name="Text 212"/>
           <p:cNvSpPr txBox="1"/>
           <p:nvPr/>
         </p:nvSpPr>
@@ -21478,7 +22240,7 @@
       </p:sp>
       <p:sp>
         <p:nvSpPr>
-          <p:cNvPr id="194" name="Shape 192"/>
+          <p:cNvPr id="215" name="Shape 213"/>
           <p:cNvSpPr/>
           <p:nvPr/>
         </p:nvSpPr>
@@ -21498,7 +22260,7 @@
       </p:sp>
       <p:sp>
         <p:nvSpPr>
-          <p:cNvPr id="195" name="Text 193"/>
+          <p:cNvPr id="216" name="Text 214"/>
           <p:cNvSpPr txBox="1"/>
           <p:nvPr/>
         </p:nvSpPr>
@@ -21537,7 +22299,7 @@
       </p:sp>
       <p:sp>
         <p:nvSpPr>
-          <p:cNvPr id="196" name="Text 194"/>
+          <p:cNvPr id="217" name="Text 215"/>
           <p:cNvSpPr txBox="1"/>
           <p:nvPr/>
         </p:nvSpPr>
@@ -21576,7 +22338,7 @@
       </p:sp>
       <p:sp>
         <p:nvSpPr>
-          <p:cNvPr id="197" name="Shape 195"/>
+          <p:cNvPr id="218" name="Shape 216"/>
           <p:cNvSpPr/>
           <p:nvPr/>
         </p:nvSpPr>
@@ -21596,7 +22358,7 @@
       </p:sp>
       <p:sp>
         <p:nvSpPr>
-          <p:cNvPr id="198" name="Text 196"/>
+          <p:cNvPr id="219" name="Text 217"/>
           <p:cNvSpPr txBox="1"/>
           <p:nvPr/>
         </p:nvSpPr>
@@ -21635,7 +22397,7 @@
       </p:sp>
       <p:sp>
         <p:nvSpPr>
-          <p:cNvPr id="199" name="Text 197"/>
+          <p:cNvPr id="220" name="Text 218"/>
           <p:cNvSpPr txBox="1"/>
           <p:nvPr/>
         </p:nvSpPr>
@@ -21674,7 +22436,7 @@
       </p:sp>
       <p:sp>
         <p:nvSpPr>
-          <p:cNvPr id="200" name="Text 198"/>
+          <p:cNvPr id="221" name="Text 219"/>
           <p:cNvSpPr txBox="1"/>
           <p:nvPr/>
         </p:nvSpPr>
@@ -21713,7 +22475,7 @@
       </p:sp>
       <p:sp>
         <p:nvSpPr>
-          <p:cNvPr id="201" name="Shape 199"/>
+          <p:cNvPr id="222" name="Shape 220"/>
           <p:cNvSpPr/>
           <p:nvPr/>
         </p:nvSpPr>
@@ -21742,7 +22504,7 @@
       </p:sp>
       <p:sp>
         <p:nvSpPr>
-          <p:cNvPr id="202" name="Text 200"/>
+          <p:cNvPr id="223" name="Text 221"/>
           <p:cNvSpPr txBox="1"/>
           <p:nvPr/>
         </p:nvSpPr>
@@ -21781,7 +22543,7 @@
       </p:sp>
       <p:sp>
         <p:nvSpPr>
-          <p:cNvPr id="203" name="Text 201"/>
+          <p:cNvPr id="224" name="Text 222"/>
           <p:cNvSpPr txBox="1"/>
           <p:nvPr/>
         </p:nvSpPr>
@@ -21812,7 +22574,7 @@
                 <a:ea typeface="Poppins" pitchFamily="34" charset="-122"/>
                 <a:cs typeface="Poppins" pitchFamily="34" charset="-120"/>
               </a:rPr>
-              <a:t>~1070</a:t>
+              <a:t>~1140</a:t>
             </a:r>
             <a:endParaRPr lang="en-US" sz="2600" dirty="0"/>
           </a:p>
@@ -21820,7 +22582,7 @@
       </p:sp>
       <p:sp>
         <p:nvSpPr>
-          <p:cNvPr id="204" name="Text 202"/>
+          <p:cNvPr id="225" name="Text 223"/>
           <p:cNvSpPr txBox="1"/>
           <p:nvPr/>
         </p:nvSpPr>
@@ -21874,7 +22636,7 @@
       </p:sp>
       <p:sp>
         <p:nvSpPr>
-          <p:cNvPr id="205" name="Text 203"/>
+          <p:cNvPr id="226" name="Text 224"/>
           <p:cNvSpPr txBox="1"/>
           <p:nvPr/>
         </p:nvSpPr>
@@ -21913,7 +22675,7 @@
       </p:sp>
       <p:sp>
         <p:nvSpPr>
-          <p:cNvPr id="206" name="Text 204"/>
+          <p:cNvPr id="227" name="Text 225"/>
           <p:cNvSpPr txBox="1"/>
           <p:nvPr/>
         </p:nvSpPr>
@@ -21944,7 +22706,7 @@
                 <a:ea typeface="Poppins" pitchFamily="34" charset="-122"/>
                 <a:cs typeface="Poppins" pitchFamily="34" charset="-120"/>
               </a:rPr>
-              <a:t>▲ +69</a:t>
+              <a:t>▲ +65</a:t>
             </a:r>
             <a:endParaRPr lang="en-US" sz="680" dirty="0"/>
           </a:p>
@@ -21952,7 +22714,7 @@
       </p:sp>
       <p:sp>
         <p:nvSpPr>
-          <p:cNvPr id="207" name="Text 205"/>
+          <p:cNvPr id="228" name="Text 226"/>
           <p:cNvSpPr txBox="1"/>
           <p:nvPr/>
         </p:nvSpPr>
@@ -21983,7 +22745,7 @@
                 <a:ea typeface="Poppins" pitchFamily="34" charset="-122"/>
                 <a:cs typeface="Poppins" pitchFamily="34" charset="-120"/>
               </a:rPr>
-              <a:t>~765/wk</a:t>
+              <a:t>~830/wk</a:t>
             </a:r>
             <a:endParaRPr lang="en-US" sz="750" dirty="0"/>
           </a:p>
@@ -21991,7 +22753,7 @@
       </p:sp>
       <p:sp>
         <p:nvSpPr>
-          <p:cNvPr id="208" name="Text 206"/>
+          <p:cNvPr id="229" name="Text 227"/>
           <p:cNvSpPr txBox="1"/>
           <p:nvPr/>
         </p:nvSpPr>
@@ -22030,7 +22792,7 @@
       </p:sp>
       <p:sp>
         <p:nvSpPr>
-          <p:cNvPr id="209" name="Text 207"/>
+          <p:cNvPr id="230" name="Text 228"/>
           <p:cNvSpPr txBox="1"/>
           <p:nvPr/>
         </p:nvSpPr>
@@ -22055,13 +22817,13 @@
             <a:r>
               <a:rPr lang="en-US" sz="680" b="1" dirty="0">
                 <a:solidFill>
-                  <a:srgbClr val="B4552D"/>
-                </a:solidFill>
-                <a:latin typeface="Poppins" pitchFamily="34" charset="0"/>
-                <a:ea typeface="Poppins" pitchFamily="34" charset="-122"/>
-                <a:cs typeface="Poppins" pitchFamily="34" charset="-120"/>
-              </a:rPr>
-              <a:t>▼ -5</a:t>
+                  <a:srgbClr val="3D8F5F"/>
+                </a:solidFill>
+                <a:latin typeface="Poppins" pitchFamily="34" charset="0"/>
+                <a:ea typeface="Poppins" pitchFamily="34" charset="-122"/>
+                <a:cs typeface="Poppins" pitchFamily="34" charset="-120"/>
+              </a:rPr>
+              <a:t>▲ +5</a:t>
             </a:r>
             <a:endParaRPr lang="en-US" sz="680" dirty="0"/>
           </a:p>
@@ -22069,7 +22831,7 @@
       </p:sp>
       <p:sp>
         <p:nvSpPr>
-          <p:cNvPr id="210" name="Text 208"/>
+          <p:cNvPr id="231" name="Text 229"/>
           <p:cNvSpPr txBox="1"/>
           <p:nvPr/>
         </p:nvSpPr>
@@ -22100,7 +22862,7 @@
                 <a:ea typeface="Poppins" pitchFamily="34" charset="-122"/>
                 <a:cs typeface="Poppins" pitchFamily="34" charset="-120"/>
               </a:rPr>
-              <a:t>~163/wk</a:t>
+              <a:t>~168/wk</a:t>
             </a:r>
             <a:endParaRPr lang="en-US" sz="750" dirty="0"/>
           </a:p>
@@ -22108,7 +22870,7 @@
       </p:sp>
       <p:sp>
         <p:nvSpPr>
-          <p:cNvPr id="211" name="Text 209"/>
+          <p:cNvPr id="232" name="Text 230"/>
           <p:cNvSpPr txBox="1"/>
           <p:nvPr/>
         </p:nvSpPr>
@@ -22147,7 +22909,7 @@
       </p:sp>
       <p:sp>
         <p:nvSpPr>
-          <p:cNvPr id="212" name="Text 210"/>
+          <p:cNvPr id="233" name="Text 231"/>
           <p:cNvSpPr txBox="1"/>
           <p:nvPr/>
         </p:nvSpPr>
@@ -22172,13 +22934,13 @@
             <a:r>
               <a:rPr lang="en-US" sz="680" b="1" dirty="0">
                 <a:solidFill>
-                  <a:srgbClr val="3D8F5F"/>
-                </a:solidFill>
-                <a:latin typeface="Poppins" pitchFamily="34" charset="0"/>
-                <a:ea typeface="Poppins" pitchFamily="34" charset="-122"/>
-                <a:cs typeface="Poppins" pitchFamily="34" charset="-120"/>
-              </a:rPr>
-              <a:t>▲ +2</a:t>
+                  <a:srgbClr val="8FA1AC"/>
+                </a:solidFill>
+                <a:latin typeface="Poppins" pitchFamily="34" charset="0"/>
+                <a:ea typeface="Poppins" pitchFamily="34" charset="-122"/>
+                <a:cs typeface="Poppins" pitchFamily="34" charset="-120"/>
+              </a:rPr>
+              <a:t>—</a:t>
             </a:r>
             <a:endParaRPr lang="en-US" sz="680" dirty="0"/>
           </a:p>
@@ -22186,7 +22948,7 @@
       </p:sp>
       <p:sp>
         <p:nvSpPr>
-          <p:cNvPr id="213" name="Text 211"/>
+          <p:cNvPr id="234" name="Text 232"/>
           <p:cNvSpPr txBox="1"/>
           <p:nvPr/>
         </p:nvSpPr>
@@ -22225,7 +22987,7 @@
       </p:sp>
       <p:sp>
         <p:nvSpPr>
-          <p:cNvPr id="214" name="Text 212"/>
+          <p:cNvPr id="235" name="Text 233"/>
           <p:cNvSpPr txBox="1"/>
           <p:nvPr/>
         </p:nvSpPr>
@@ -22264,7 +23026,7 @@
       </p:sp>
       <p:sp>
         <p:nvSpPr>
-          <p:cNvPr id="215" name="Text 213"/>
+          <p:cNvPr id="236" name="Text 234"/>
           <p:cNvSpPr txBox="1"/>
           <p:nvPr/>
         </p:nvSpPr>
@@ -22289,13 +23051,13 @@
             <a:r>
               <a:rPr lang="en-US" sz="680" b="1" dirty="0">
                 <a:solidFill>
-                  <a:srgbClr val="3D8F5F"/>
-                </a:solidFill>
-                <a:latin typeface="Poppins" pitchFamily="34" charset="0"/>
-                <a:ea typeface="Poppins" pitchFamily="34" charset="-122"/>
-                <a:cs typeface="Poppins" pitchFamily="34" charset="-120"/>
-              </a:rPr>
-              <a:t>▲ +1</a:t>
+                  <a:srgbClr val="8FA1AC"/>
+                </a:solidFill>
+                <a:latin typeface="Poppins" pitchFamily="34" charset="0"/>
+                <a:ea typeface="Poppins" pitchFamily="34" charset="-122"/>
+                <a:cs typeface="Poppins" pitchFamily="34" charset="-120"/>
+              </a:rPr>
+              <a:t>—</a:t>
             </a:r>
             <a:endParaRPr lang="en-US" sz="680" dirty="0"/>
           </a:p>
@@ -22303,7 +23065,7 @@
       </p:sp>
       <p:sp>
         <p:nvSpPr>
-          <p:cNvPr id="216" name="Text 214"/>
+          <p:cNvPr id="237" name="Text 235"/>
           <p:cNvSpPr txBox="1"/>
           <p:nvPr/>
         </p:nvSpPr>
@@ -22342,7 +23104,7 @@
       </p:sp>
       <p:sp>
         <p:nvSpPr>
-          <p:cNvPr id="217" name="Text 215"/>
+          <p:cNvPr id="238" name="Text 236"/>
           <p:cNvSpPr txBox="1"/>
           <p:nvPr/>
         </p:nvSpPr>
@@ -22381,7 +23143,7 @@
       </p:sp>
       <p:sp>
         <p:nvSpPr>
-          <p:cNvPr id="218" name="Text 216"/>
+          <p:cNvPr id="239" name="Text 237"/>
           <p:cNvSpPr txBox="1"/>
           <p:nvPr/>
         </p:nvSpPr>
@@ -22412,7 +23174,7 @@
                 <a:ea typeface="Poppins" pitchFamily="34" charset="-122"/>
                 <a:cs typeface="Poppins" pitchFamily="34" charset="-120"/>
               </a:rPr>
-              <a:t>▲ +1</a:t>
+              <a:t>▲ +2</a:t>
             </a:r>
             <a:endParaRPr lang="en-US" sz="680" dirty="0"/>
           </a:p>
@@ -22420,7 +23182,7 @@
       </p:sp>
       <p:sp>
         <p:nvSpPr>
-          <p:cNvPr id="219" name="Text 217"/>
+          <p:cNvPr id="240" name="Text 238"/>
           <p:cNvSpPr txBox="1"/>
           <p:nvPr/>
         </p:nvSpPr>
@@ -22451,7 +23213,7 @@
                 <a:ea typeface="Poppins" pitchFamily="34" charset="-122"/>
                 <a:cs typeface="Poppins" pitchFamily="34" charset="-120"/>
               </a:rPr>
-              <a:t>~16/wk</a:t>
+              <a:t>~18/wk</a:t>
             </a:r>
             <a:endParaRPr lang="en-US" sz="750" dirty="0"/>
           </a:p>
@@ -22459,7 +23221,7 @@
       </p:sp>
       <p:sp>
         <p:nvSpPr>
-          <p:cNvPr id="220" name="Text 218"/>
+          <p:cNvPr id="241" name="Text 239"/>
           <p:cNvSpPr txBox="1"/>
           <p:nvPr/>
         </p:nvSpPr>
@@ -22498,7 +23260,7 @@
       </p:sp>
       <p:sp>
         <p:nvSpPr>
-          <p:cNvPr id="221" name="Text 219"/>
+          <p:cNvPr id="242" name="Text 240"/>
           <p:cNvSpPr txBox="1"/>
           <p:nvPr/>
         </p:nvSpPr>
@@ -22523,13 +23285,13 @@
             <a:r>
               <a:rPr lang="en-US" sz="680" b="1" dirty="0">
                 <a:solidFill>
-                  <a:srgbClr val="3D8F5F"/>
-                </a:solidFill>
-                <a:latin typeface="Poppins" pitchFamily="34" charset="0"/>
-                <a:ea typeface="Poppins" pitchFamily="34" charset="-122"/>
-                <a:cs typeface="Poppins" pitchFamily="34" charset="-120"/>
-              </a:rPr>
-              <a:t>▲ +1</a:t>
+                  <a:srgbClr val="8FA1AC"/>
+                </a:solidFill>
+                <a:latin typeface="Poppins" pitchFamily="34" charset="0"/>
+                <a:ea typeface="Poppins" pitchFamily="34" charset="-122"/>
+                <a:cs typeface="Poppins" pitchFamily="34" charset="-120"/>
+              </a:rPr>
+              <a:t>—</a:t>
             </a:r>
             <a:endParaRPr lang="en-US" sz="680" dirty="0"/>
           </a:p>
@@ -22537,7 +23299,7 @@
       </p:sp>
       <p:sp>
         <p:nvSpPr>
-          <p:cNvPr id="222" name="Text 220"/>
+          <p:cNvPr id="243" name="Text 241"/>
           <p:cNvSpPr txBox="1"/>
           <p:nvPr/>
         </p:nvSpPr>
@@ -22576,7 +23338,7 @@
       </p:sp>
       <p:sp>
         <p:nvSpPr>
-          <p:cNvPr id="223" name="Text 221"/>
+          <p:cNvPr id="244" name="Text 242"/>
           <p:cNvSpPr txBox="1"/>
           <p:nvPr/>
         </p:nvSpPr>
@@ -22615,7 +23377,7 @@
       </p:sp>
       <p:sp>
         <p:nvSpPr>
-          <p:cNvPr id="224" name="Text 222"/>
+          <p:cNvPr id="245" name="Text 243"/>
           <p:cNvSpPr txBox="1"/>
           <p:nvPr/>
         </p:nvSpPr>
@@ -22646,7 +23408,7 @@
                 <a:ea typeface="Poppins" pitchFamily="34" charset="-122"/>
                 <a:cs typeface="Poppins" pitchFamily="34" charset="-120"/>
               </a:rPr>
-              <a:t>▼ -2</a:t>
+              <a:t>▼ -1</a:t>
             </a:r>
             <a:endParaRPr lang="en-US" sz="680" dirty="0"/>
           </a:p>
@@ -22654,7 +23416,7 @@
       </p:sp>
       <p:sp>
         <p:nvSpPr>
-          <p:cNvPr id="225" name="Text 223"/>
+          <p:cNvPr id="246" name="Text 244"/>
           <p:cNvSpPr txBox="1"/>
           <p:nvPr/>
         </p:nvSpPr>
@@ -22685,7 +23447,7 @@
                 <a:ea typeface="Poppins" pitchFamily="34" charset="-122"/>
                 <a:cs typeface="Poppins" pitchFamily="34" charset="-120"/>
               </a:rPr>
-              <a:t>~11/wk</a:t>
+              <a:t>~10/wk</a:t>
             </a:r>
             <a:endParaRPr lang="en-US" sz="750" dirty="0"/>
           </a:p>
@@ -22693,7 +23455,7 @@
       </p:sp>
       <p:sp>
         <p:nvSpPr>
-          <p:cNvPr id="226" name="Text 224"/>
+          <p:cNvPr id="247" name="Text 245"/>
           <p:cNvSpPr txBox="1"/>
           <p:nvPr/>
         </p:nvSpPr>
@@ -22724,7 +23486,7 @@
                 <a:ea typeface="Poppins" pitchFamily="34" charset="-122"/>
                 <a:cs typeface="Poppins" pitchFamily="34" charset="-120"/>
               </a:rPr>
-              <a:t>Glynn Johnson</a:t>
+              <a:t>Youssef Medhat</a:t>
             </a:r>
             <a:endParaRPr lang="en-US" sz="750" dirty="0"/>
           </a:p>
@@ -22732,7 +23494,7 @@
       </p:sp>
       <p:sp>
         <p:nvSpPr>
-          <p:cNvPr id="227" name="Text 225"/>
+          <p:cNvPr id="248" name="Text 246"/>
           <p:cNvSpPr txBox="1"/>
           <p:nvPr/>
         </p:nvSpPr>
@@ -22757,13 +23519,13 @@
             <a:r>
               <a:rPr lang="en-US" sz="680" b="1" dirty="0">
                 <a:solidFill>
-                  <a:srgbClr val="B4552D"/>
-                </a:solidFill>
-                <a:latin typeface="Poppins" pitchFamily="34" charset="0"/>
-                <a:ea typeface="Poppins" pitchFamily="34" charset="-122"/>
-                <a:cs typeface="Poppins" pitchFamily="34" charset="-120"/>
-              </a:rPr>
-              <a:t>▼ -1</a:t>
+                  <a:srgbClr val="8FA1AC"/>
+                </a:solidFill>
+                <a:latin typeface="Poppins" pitchFamily="34" charset="0"/>
+                <a:ea typeface="Poppins" pitchFamily="34" charset="-122"/>
+                <a:cs typeface="Poppins" pitchFamily="34" charset="-120"/>
+              </a:rPr>
+              <a:t>new</a:t>
             </a:r>
             <a:endParaRPr lang="en-US" sz="680" dirty="0"/>
           </a:p>
@@ -22771,7 +23533,7 @@
       </p:sp>
       <p:sp>
         <p:nvSpPr>
-          <p:cNvPr id="228" name="Text 226"/>
+          <p:cNvPr id="249" name="Text 247"/>
           <p:cNvSpPr txBox="1"/>
           <p:nvPr/>
         </p:nvSpPr>
@@ -22802,7 +23564,7 @@
                 <a:ea typeface="Poppins" pitchFamily="34" charset="-122"/>
                 <a:cs typeface="Poppins" pitchFamily="34" charset="-120"/>
               </a:rPr>
-              <a:t>~10/wk</a:t>
+              <a:t>~8/wk</a:t>
             </a:r>
             <a:endParaRPr lang="en-US" sz="750" dirty="0"/>
           </a:p>
@@ -22810,7 +23572,7 @@
       </p:sp>
       <p:sp>
         <p:nvSpPr>
-          <p:cNvPr id="229" name="Text 227"/>
+          <p:cNvPr id="250" name="Text 248"/>
           <p:cNvSpPr txBox="1"/>
           <p:nvPr/>
         </p:nvSpPr>
@@ -22849,7 +23611,7 @@
       </p:sp>
       <p:sp>
         <p:nvSpPr>
-          <p:cNvPr id="230" name="Text 228"/>
+          <p:cNvPr id="251" name="Text 249"/>
           <p:cNvSpPr txBox="1"/>
           <p:nvPr/>
         </p:nvSpPr>
@@ -22874,13 +23636,13 @@
             <a:r>
               <a:rPr lang="en-US" sz="680" b="1" dirty="0">
                 <a:solidFill>
-                  <a:srgbClr val="B4552D"/>
-                </a:solidFill>
-                <a:latin typeface="Poppins" pitchFamily="34" charset="0"/>
-                <a:ea typeface="Poppins" pitchFamily="34" charset="-122"/>
-                <a:cs typeface="Poppins" pitchFamily="34" charset="-120"/>
-              </a:rPr>
-              <a:t>▼ -1</a:t>
+                  <a:srgbClr val="3D8F5F"/>
+                </a:solidFill>
+                <a:latin typeface="Poppins" pitchFamily="34" charset="0"/>
+                <a:ea typeface="Poppins" pitchFamily="34" charset="-122"/>
+                <a:cs typeface="Poppins" pitchFamily="34" charset="-120"/>
+              </a:rPr>
+              <a:t>▲ +1</a:t>
             </a:r>
             <a:endParaRPr lang="en-US" sz="680" dirty="0"/>
           </a:p>
@@ -22888,7 +23650,7 @@
       </p:sp>
       <p:sp>
         <p:nvSpPr>
-          <p:cNvPr id="231" name="Text 229"/>
+          <p:cNvPr id="252" name="Text 250"/>
           <p:cNvSpPr txBox="1"/>
           <p:nvPr/>
         </p:nvSpPr>
@@ -22919,7 +23681,7 @@
                 <a:ea typeface="Poppins" pitchFamily="34" charset="-122"/>
                 <a:cs typeface="Poppins" pitchFamily="34" charset="-120"/>
               </a:rPr>
-              <a:t>~7/wk</a:t>
+              <a:t>~8/wk</a:t>
             </a:r>
             <a:endParaRPr lang="en-US" sz="750" dirty="0"/>
           </a:p>
@@ -22927,7 +23689,7 @@
       </p:sp>
       <p:sp>
         <p:nvSpPr>
-          <p:cNvPr id="232" name="Text 230"/>
+          <p:cNvPr id="253" name="Text 251"/>
           <p:cNvSpPr txBox="1"/>
           <p:nvPr/>
         </p:nvSpPr>
@@ -22958,7 +23720,7 @@
                 <a:ea typeface="Poppins" pitchFamily="34" charset="-122"/>
                 <a:cs typeface="Poppins" pitchFamily="34" charset="-120"/>
               </a:rPr>
-              <a:t>Isayah Kuhlmann</a:t>
+              <a:t>Mostafa Essa</a:t>
             </a:r>
             <a:endParaRPr lang="en-US" sz="750" dirty="0"/>
           </a:p>
@@ -22966,7 +23728,7 @@
       </p:sp>
       <p:sp>
         <p:nvSpPr>
-          <p:cNvPr id="233" name="Text 231"/>
+          <p:cNvPr id="254" name="Text 252"/>
           <p:cNvSpPr txBox="1"/>
           <p:nvPr/>
         </p:nvSpPr>
@@ -22991,13 +23753,13 @@
             <a:r>
               <a:rPr lang="en-US" sz="680" b="1" dirty="0">
                 <a:solidFill>
-                  <a:srgbClr val="B4552D"/>
-                </a:solidFill>
-                <a:latin typeface="Poppins" pitchFamily="34" charset="0"/>
-                <a:ea typeface="Poppins" pitchFamily="34" charset="-122"/>
-                <a:cs typeface="Poppins" pitchFamily="34" charset="-120"/>
-              </a:rPr>
-              <a:t>▼ -1</a:t>
+                  <a:srgbClr val="8FA1AC"/>
+                </a:solidFill>
+                <a:latin typeface="Poppins" pitchFamily="34" charset="0"/>
+                <a:ea typeface="Poppins" pitchFamily="34" charset="-122"/>
+                <a:cs typeface="Poppins" pitchFamily="34" charset="-120"/>
+              </a:rPr>
+              <a:t>new</a:t>
             </a:r>
             <a:endParaRPr lang="en-US" sz="680" dirty="0"/>
           </a:p>
@@ -23005,7 +23767,7 @@
       </p:sp>
       <p:sp>
         <p:nvSpPr>
-          <p:cNvPr id="234" name="Text 232"/>
+          <p:cNvPr id="255" name="Text 253"/>
           <p:cNvSpPr txBox="1"/>
           <p:nvPr/>
         </p:nvSpPr>
@@ -23044,7 +23806,7 @@
       </p:sp>
       <p:sp>
         <p:nvSpPr>
-          <p:cNvPr id="235" name="Text 233"/>
+          <p:cNvPr id="256" name="Text 254"/>
           <p:cNvSpPr txBox="1"/>
           <p:nvPr/>
         </p:nvSpPr>
@@ -23075,7 +23837,7 @@
                 <a:ea typeface="Poppins" pitchFamily="34" charset="-122"/>
                 <a:cs typeface="Poppins" pitchFamily="34" charset="-120"/>
               </a:rPr>
-              <a:t>rate = 30-day sessions ÷ 4.3 · arrow = change vs the 12 Oct capture</a:t>
+              <a:t>rate = 30-day sessions ÷ 4.3 · arrow = change vs the 19 Oct capture · 4.9K sessions in 30 days, ▲149%</a:t>
             </a:r>
             <a:endParaRPr lang="en-US" sz="600" dirty="0"/>
           </a:p>
@@ -23083,7 +23845,7 @@
       </p:sp>
       <p:sp>
         <p:nvSpPr>
-          <p:cNvPr id="236" name="Shape 234"/>
+          <p:cNvPr id="257" name="Shape 255"/>
           <p:cNvSpPr/>
           <p:nvPr/>
         </p:nvSpPr>
@@ -23112,7 +23874,7 @@
       </p:sp>
       <p:sp>
         <p:nvSpPr>
-          <p:cNvPr id="237" name="Text 235"/>
+          <p:cNvPr id="258" name="Text 256"/>
           <p:cNvSpPr txBox="1"/>
           <p:nvPr/>
         </p:nvSpPr>
@@ -23151,7 +23913,7 @@
       </p:sp>
       <p:sp>
         <p:nvSpPr>
-          <p:cNvPr id="238" name="Text 236"/>
+          <p:cNvPr id="259" name="Text 257"/>
           <p:cNvSpPr txBox="1"/>
           <p:nvPr/>
         </p:nvSpPr>
@@ -23196,7 +23958,7 @@
                 <a:ea typeface="Poppins" pitchFamily="34" charset="-122"/>
                 <a:cs typeface="Poppins" pitchFamily="34" charset="-120"/>
               </a:rPr>
-              <a:t>40 of 51 active weekly, 14 daily — breadth and depth both back up </a:t>
+              <a:t>43 of 49 active weekly — up 7.5% on last week </a:t>
             </a:r>
             <a:pPr indent="0" marL="0">
               <a:spcAft>
@@ -23213,7 +23975,7 @@
                 <a:ea typeface="Poppins" pitchFamily="34" charset="-122"/>
                 <a:cs typeface="Poppins" pitchFamily="34" charset="-120"/>
               </a:rPr>
-              <a:t>after last week's dip. Claude.ai stickiness recovered 7% → 17% DAU/MAU and Claude Code rose to 28%; Cowork eased 24% → 23% and Office Agents are still at nil. The code number is the headline: 329,436 lines in October to date against 111,689 a week ago, already above any full month this year. Nicolas Ibrahim is 170,962 of it — 52% — and Daniel Maddern enters at 43,288.</a:t>
+              <a:t>October code output has reached 1,234,279 lines to 26 Oct, nearly four times last week's 329,436 capture. Daniel Maddern's two accounts are 486,570 of it and Nicolas Ibrahim's 255,985; two further 'dan' accounts (danm@ 151,122, dan@ 86,307) are shown separately until confirmed. Mostafa Essa enters at 100,487. 193 PRs in Code over 30 days, ▲60%; spend $657, ▼37%.</a:t>
             </a:r>
             <a:endParaRPr lang="en-US" sz="900" dirty="0"/>
           </a:p>
@@ -23221,14 +23983,14 @@
       </p:sp>
       <p:sp>
         <p:nvSpPr>
-          <p:cNvPr id="239" name="Shape 237"/>
-          <p:cNvSpPr/>
-          <p:nvPr/>
-        </p:nvSpPr>
-        <p:spPr>
-          <a:xfrm>
-            <a:off x="6653174" y="6510528"/>
-            <a:ext cx="5124298" cy="256032"/>
+          <p:cNvPr id="260" name="Shape 258"/>
+          <p:cNvSpPr/>
+          <p:nvPr/>
+        </p:nvSpPr>
+        <p:spPr>
+          <a:xfrm>
+            <a:off x="5925312" y="6510528"/>
+            <a:ext cx="5852160" cy="256032"/>
           </a:xfrm>
           <a:prstGeom prst="roundRect">
             <a:avLst>
@@ -23243,14 +24005,14 @@
       </p:sp>
       <p:sp>
         <p:nvSpPr>
-          <p:cNvPr id="240" name="Text 238"/>
-          <p:cNvSpPr txBox="1"/>
-          <p:nvPr/>
-        </p:nvSpPr>
-        <p:spPr>
-          <a:xfrm>
-            <a:off x="6653174" y="6510528"/>
-            <a:ext cx="5124298" cy="256032"/>
+          <p:cNvPr id="261" name="Text 259"/>
+          <p:cNvSpPr txBox="1"/>
+          <p:nvPr/>
+        </p:nvSpPr>
+        <p:spPr>
+          <a:xfrm>
+            <a:off x="5925312" y="6510528"/>
+            <a:ext cx="5852160" cy="256032"/>
           </a:xfrm>
           <a:prstGeom prst="rect">
             <a:avLst/>
@@ -23274,7 +24036,7 @@
                 <a:ea typeface="Poppins" pitchFamily="34" charset="-122"/>
                 <a:cs typeface="Poppins" pitchFamily="34" charset="-120"/>
               </a:rPr>
-              <a:t>Source: Claude Admin capture (30d to 19 Oct) · held at 19 Oct, refresh pending</a:t>
+              <a:t>Source: Claude Admin console, 30d to 26 Oct (shared by Glynn Johnson) · daily/monthly actives and stickiness held at 19 Oct</a:t>
             </a:r>
             <a:endParaRPr lang="en-US" sz="700" dirty="0"/>
           </a:p>
@@ -25944,7 +26706,7 @@
                 <a:ea typeface="Poppins" pitchFamily="34" charset="-122"/>
                 <a:cs typeface="Poppins" pitchFamily="34" charset="-120"/>
               </a:rPr>
-              <a:t>held at the 19 Oct capture — 40 of 51 active weekly, 14 daily; October code output 329,436 lines to 19 Oct; refresh pending</a:t>
+              <a:t>43 of 49 active weekly (▲7.5% WoW); October code output 1.23M lines to 26 Oct, 193 PRs in Code over 30 days; daily actives held at 19 Oct</a:t>
             </a:r>
             <a:endParaRPr lang="en-US" sz="900" dirty="0"/>
           </a:p>

--- a/exec-deck/output/H&L Weekly Update - WC 19 Oct 2026.pptx
+++ b/exec-deck/output/H&L Weekly Update - WC 19 Oct 2026.pptx
@@ -16668,7 +16668,7 @@
         <p:spPr>
           <a:xfrm>
             <a:off x="594360" y="2816352"/>
-            <a:ext cx="1417320" cy="116259"/>
+            <a:ext cx="1417320" cy="137160"/>
           </a:xfrm>
           <a:prstGeom prst="rect">
             <a:avLst/>
@@ -16707,7 +16707,7 @@
         <p:spPr>
           <a:xfrm>
             <a:off x="2084832" y="2823667"/>
-            <a:ext cx="996696" cy="102543"/>
+            <a:ext cx="996696" cy="123444"/>
           </a:xfrm>
           <a:prstGeom prst="rect">
             <a:avLst/>
@@ -16727,7 +16727,7 @@
         <p:spPr>
           <a:xfrm>
             <a:off x="2057400" y="2816352"/>
-            <a:ext cx="1051560" cy="116259"/>
+            <a:ext cx="1051560" cy="137160"/>
           </a:xfrm>
           <a:prstGeom prst="rect">
             <a:avLst/>
@@ -16766,7 +16766,7 @@
         <p:spPr>
           <a:xfrm>
             <a:off x="3163824" y="2823667"/>
-            <a:ext cx="996696" cy="102543"/>
+            <a:ext cx="996696" cy="123444"/>
           </a:xfrm>
           <a:prstGeom prst="rect">
             <a:avLst/>
@@ -16786,7 +16786,7 @@
         <p:spPr>
           <a:xfrm>
             <a:off x="3136392" y="2816352"/>
-            <a:ext cx="1051560" cy="116259"/>
+            <a:ext cx="1051560" cy="137160"/>
           </a:xfrm>
           <a:prstGeom prst="rect">
             <a:avLst/>
@@ -16825,7 +16825,7 @@
         <p:spPr>
           <a:xfrm>
             <a:off x="4242816" y="2823667"/>
-            <a:ext cx="996696" cy="102543"/>
+            <a:ext cx="996696" cy="123444"/>
           </a:xfrm>
           <a:prstGeom prst="rect">
             <a:avLst/>
@@ -16845,7 +16845,7 @@
         <p:spPr>
           <a:xfrm>
             <a:off x="4215384" y="2816352"/>
-            <a:ext cx="1051560" cy="116259"/>
+            <a:ext cx="1051560" cy="137160"/>
           </a:xfrm>
           <a:prstGeom prst="rect">
             <a:avLst/>
@@ -16884,7 +16884,7 @@
         <p:spPr>
           <a:xfrm>
             <a:off x="5294376" y="2816352"/>
-            <a:ext cx="1051560" cy="116259"/>
+            <a:ext cx="1051560" cy="137160"/>
           </a:xfrm>
           <a:prstGeom prst="rect">
             <a:avLst/>
@@ -16923,7 +16923,7 @@
         <p:spPr>
           <a:xfrm>
             <a:off x="6400800" y="2816352"/>
-            <a:ext cx="1280160" cy="116259"/>
+            <a:ext cx="1280160" cy="137160"/>
           </a:xfrm>
           <a:prstGeom prst="rect">
             <a:avLst/>
@@ -16961,8 +16961,8 @@
         </p:nvSpPr>
         <p:spPr>
           <a:xfrm>
-            <a:off x="594360" y="2941755"/>
-            <a:ext cx="1417320" cy="116259"/>
+            <a:off x="594360" y="2962656"/>
+            <a:ext cx="1417320" cy="137160"/>
           </a:xfrm>
           <a:prstGeom prst="rect">
             <a:avLst/>
@@ -17000,8 +17000,8 @@
         </p:nvSpPr>
         <p:spPr>
           <a:xfrm>
-            <a:off x="2084832" y="2949071"/>
-            <a:ext cx="996696" cy="102543"/>
+            <a:off x="2084832" y="2969971"/>
+            <a:ext cx="996696" cy="123444"/>
           </a:xfrm>
           <a:prstGeom prst="rect">
             <a:avLst/>
@@ -17020,8 +17020,8 @@
         </p:nvSpPr>
         <p:spPr>
           <a:xfrm>
-            <a:off x="2057400" y="2941755"/>
-            <a:ext cx="1051560" cy="116259"/>
+            <a:off x="2057400" y="2962656"/>
+            <a:ext cx="1051560" cy="137160"/>
           </a:xfrm>
           <a:prstGeom prst="rect">
             <a:avLst/>
@@ -17059,8 +17059,8 @@
         </p:nvSpPr>
         <p:spPr>
           <a:xfrm>
-            <a:off x="3163824" y="2949071"/>
-            <a:ext cx="996696" cy="102543"/>
+            <a:off x="3163824" y="2969971"/>
+            <a:ext cx="996696" cy="123444"/>
           </a:xfrm>
           <a:prstGeom prst="rect">
             <a:avLst/>
@@ -17079,8 +17079,8 @@
         </p:nvSpPr>
         <p:spPr>
           <a:xfrm>
-            <a:off x="3136392" y="2941755"/>
-            <a:ext cx="1051560" cy="116259"/>
+            <a:off x="3136392" y="2962656"/>
+            <a:ext cx="1051560" cy="137160"/>
           </a:xfrm>
           <a:prstGeom prst="rect">
             <a:avLst/>
@@ -17118,8 +17118,67 @@
         </p:nvSpPr>
         <p:spPr>
           <a:xfrm>
-            <a:off x="4242816" y="2949071"/>
-            <a:ext cx="996696" cy="102543"/>
+            <a:off x="4242816" y="2969971"/>
+            <a:ext cx="996696" cy="123444"/>
+          </a:xfrm>
+          <a:prstGeom prst="rect">
+            <a:avLst/>
+          </a:prstGeom>
+          <a:solidFill>
+            <a:srgbClr val="EDF5F7"/>
+          </a:solidFill>
+          <a:ln/>
+        </p:spPr>
+      </p:sp>
+      <p:sp>
+        <p:nvSpPr>
+          <p:cNvPr id="61" name="Text 59"/>
+          <p:cNvSpPr txBox="1"/>
+          <p:nvPr/>
+        </p:nvSpPr>
+        <p:spPr>
+          <a:xfrm>
+            <a:off x="4215384" y="2962656"/>
+            <a:ext cx="1051560" cy="137160"/>
+          </a:xfrm>
+          <a:prstGeom prst="rect">
+            <a:avLst/>
+          </a:prstGeom>
+          <a:noFill/>
+          <a:ln/>
+        </p:spPr>
+        <p:txBody>
+          <a:bodyPr wrap="square" lIns="0" tIns="0" rIns="0" bIns="0" rtlCol="0" anchor="ctr"/>
+          <a:lstStyle/>
+          <a:p>
+            <a:pPr algn="ctr" indent="0" marL="0">
+              <a:buNone/>
+            </a:pPr>
+            <a:r>
+              <a:rPr lang="en-US" sz="680" dirty="0">
+                <a:solidFill>
+                  <a:srgbClr val="12293A"/>
+                </a:solidFill>
+                <a:latin typeface="Poppins" pitchFamily="34" charset="0"/>
+                <a:ea typeface="Poppins" pitchFamily="34" charset="-122"/>
+                <a:cs typeface="Poppins" pitchFamily="34" charset="-120"/>
+              </a:rPr>
+              <a:t>99,693</a:t>
+            </a:r>
+            <a:endParaRPr lang="en-US" sz="680" dirty="0"/>
+          </a:p>
+        </p:txBody>
+      </p:sp>
+      <p:sp>
+        <p:nvSpPr>
+          <p:cNvPr id="62" name="Shape 60"/>
+          <p:cNvSpPr/>
+          <p:nvPr/>
+        </p:nvSpPr>
+        <p:spPr>
+          <a:xfrm>
+            <a:off x="5321808" y="2969971"/>
+            <a:ext cx="996696" cy="123444"/>
           </a:xfrm>
           <a:prstGeom prst="rect">
             <a:avLst/>
@@ -17132,14 +17191,14 @@
       </p:sp>
       <p:sp>
         <p:nvSpPr>
-          <p:cNvPr id="61" name="Text 59"/>
-          <p:cNvSpPr txBox="1"/>
-          <p:nvPr/>
-        </p:nvSpPr>
-        <p:spPr>
-          <a:xfrm>
-            <a:off x="4215384" y="2941755"/>
-            <a:ext cx="1051560" cy="116259"/>
+          <p:cNvPr id="63" name="Text 61"/>
+          <p:cNvSpPr txBox="1"/>
+          <p:nvPr/>
+        </p:nvSpPr>
+        <p:spPr>
+          <a:xfrm>
+            <a:off x="5294376" y="2962656"/>
+            <a:ext cx="1051560" cy="137160"/>
           </a:xfrm>
           <a:prstGeom prst="rect">
             <a:avLst/>
@@ -17163,7 +17222,7 @@
                 <a:ea typeface="Poppins" pitchFamily="34" charset="-122"/>
                 <a:cs typeface="Poppins" pitchFamily="34" charset="-120"/>
               </a:rPr>
-              <a:t>99,693</a:t>
+              <a:t>255,985</a:t>
             </a:r>
             <a:endParaRPr lang="en-US" sz="680" dirty="0"/>
           </a:p>
@@ -17171,34 +17230,92 @@
       </p:sp>
       <p:sp>
         <p:nvSpPr>
-          <p:cNvPr id="62" name="Shape 60"/>
-          <p:cNvSpPr/>
-          <p:nvPr/>
-        </p:nvSpPr>
-        <p:spPr>
-          <a:xfrm>
-            <a:off x="5321808" y="2949071"/>
-            <a:ext cx="996696" cy="102543"/>
-          </a:xfrm>
-          <a:prstGeom prst="rect">
-            <a:avLst/>
-          </a:prstGeom>
-          <a:solidFill>
-            <a:srgbClr val="B5D9E0"/>
-          </a:solidFill>
-          <a:ln/>
-        </p:spPr>
-      </p:sp>
-      <p:sp>
-        <p:nvSpPr>
-          <p:cNvPr id="63" name="Text 61"/>
-          <p:cNvSpPr txBox="1"/>
-          <p:nvPr/>
-        </p:nvSpPr>
-        <p:spPr>
-          <a:xfrm>
-            <a:off x="5294376" y="2941755"/>
-            <a:ext cx="1051560" cy="116259"/>
+          <p:cNvPr id="64" name="Text 62"/>
+          <p:cNvSpPr txBox="1"/>
+          <p:nvPr/>
+        </p:nvSpPr>
+        <p:spPr>
+          <a:xfrm>
+            <a:off x="6400800" y="2962656"/>
+            <a:ext cx="1280160" cy="137160"/>
+          </a:xfrm>
+          <a:prstGeom prst="rect">
+            <a:avLst/>
+          </a:prstGeom>
+          <a:noFill/>
+          <a:ln/>
+        </p:spPr>
+        <p:txBody>
+          <a:bodyPr wrap="square" lIns="0" tIns="0" rIns="0" bIns="0" rtlCol="0" anchor="ctr"/>
+          <a:lstStyle/>
+          <a:p>
+            <a:pPr algn="r" indent="0" marL="0">
+              <a:buNone/>
+            </a:pPr>
+            <a:r>
+              <a:rPr lang="en-US" sz="700" b="1" dirty="0">
+                <a:solidFill>
+                  <a:srgbClr val="5E7280"/>
+                </a:solidFill>
+                <a:latin typeface="Poppins" pitchFamily="34" charset="0"/>
+                <a:ea typeface="Poppins" pitchFamily="34" charset="-122"/>
+                <a:cs typeface="Poppins" pitchFamily="34" charset="-120"/>
+              </a:rPr>
+              <a:t>409,654</a:t>
+            </a:r>
+            <a:endParaRPr lang="en-US" sz="700" dirty="0"/>
+          </a:p>
+        </p:txBody>
+      </p:sp>
+      <p:sp>
+        <p:nvSpPr>
+          <p:cNvPr id="65" name="Text 63"/>
+          <p:cNvSpPr txBox="1"/>
+          <p:nvPr/>
+        </p:nvSpPr>
+        <p:spPr>
+          <a:xfrm>
+            <a:off x="594360" y="3108960"/>
+            <a:ext cx="1417320" cy="137160"/>
+          </a:xfrm>
+          <a:prstGeom prst="rect">
+            <a:avLst/>
+          </a:prstGeom>
+          <a:noFill/>
+          <a:ln/>
+        </p:spPr>
+        <p:txBody>
+          <a:bodyPr wrap="square" lIns="0" tIns="0" rIns="0" bIns="0" rtlCol="0" anchor="ctr"/>
+          <a:lstStyle/>
+          <a:p>
+            <a:pPr indent="0" marL="0">
+              <a:buNone/>
+            </a:pPr>
+            <a:r>
+              <a:rPr lang="en-US" sz="720" b="1" dirty="0">
+                <a:solidFill>
+                  <a:srgbClr val="12293A"/>
+                </a:solidFill>
+                <a:latin typeface="Poppins" pitchFamily="34" charset="0"/>
+                <a:ea typeface="Poppins" pitchFamily="34" charset="-122"/>
+                <a:cs typeface="Poppins" pitchFamily="34" charset="-120"/>
+              </a:rPr>
+              <a:t>Daniel Maddern</a:t>
+            </a:r>
+            <a:endParaRPr lang="en-US" sz="720" dirty="0"/>
+          </a:p>
+        </p:txBody>
+      </p:sp>
+      <p:sp>
+        <p:nvSpPr>
+          <p:cNvPr id="66" name="Text 64"/>
+          <p:cNvSpPr txBox="1"/>
+          <p:nvPr/>
+        </p:nvSpPr>
+        <p:spPr>
+          <a:xfrm>
+            <a:off x="2057400" y="3108960"/>
+            <a:ext cx="1051560" cy="137160"/>
           </a:xfrm>
           <a:prstGeom prst="rect">
             <a:avLst/>
@@ -17216,13 +17333,150 @@
             <a:r>
               <a:rPr lang="en-US" sz="680" dirty="0">
                 <a:solidFill>
+                  <a:srgbClr val="8FA1AC"/>
+                </a:solidFill>
+                <a:latin typeface="Poppins" pitchFamily="34" charset="0"/>
+                <a:ea typeface="Poppins" pitchFamily="34" charset="-122"/>
+                <a:cs typeface="Poppins" pitchFamily="34" charset="-120"/>
+              </a:rPr>
+              <a:t>—</a:t>
+            </a:r>
+            <a:endParaRPr lang="en-US" sz="680" dirty="0"/>
+          </a:p>
+        </p:txBody>
+      </p:sp>
+      <p:sp>
+        <p:nvSpPr>
+          <p:cNvPr id="67" name="Text 65"/>
+          <p:cNvSpPr txBox="1"/>
+          <p:nvPr/>
+        </p:nvSpPr>
+        <p:spPr>
+          <a:xfrm>
+            <a:off x="3136392" y="3108960"/>
+            <a:ext cx="1051560" cy="137160"/>
+          </a:xfrm>
+          <a:prstGeom prst="rect">
+            <a:avLst/>
+          </a:prstGeom>
+          <a:noFill/>
+          <a:ln/>
+        </p:spPr>
+        <p:txBody>
+          <a:bodyPr wrap="square" lIns="0" tIns="0" rIns="0" bIns="0" rtlCol="0" anchor="ctr"/>
+          <a:lstStyle/>
+          <a:p>
+            <a:pPr algn="ctr" indent="0" marL="0">
+              <a:buNone/>
+            </a:pPr>
+            <a:r>
+              <a:rPr lang="en-US" sz="680" dirty="0">
+                <a:solidFill>
+                  <a:srgbClr val="8FA1AC"/>
+                </a:solidFill>
+                <a:latin typeface="Poppins" pitchFamily="34" charset="0"/>
+                <a:ea typeface="Poppins" pitchFamily="34" charset="-122"/>
+                <a:cs typeface="Poppins" pitchFamily="34" charset="-120"/>
+              </a:rPr>
+              <a:t>—</a:t>
+            </a:r>
+            <a:endParaRPr lang="en-US" sz="680" dirty="0"/>
+          </a:p>
+        </p:txBody>
+      </p:sp>
+      <p:sp>
+        <p:nvSpPr>
+          <p:cNvPr id="68" name="Text 66"/>
+          <p:cNvSpPr txBox="1"/>
+          <p:nvPr/>
+        </p:nvSpPr>
+        <p:spPr>
+          <a:xfrm>
+            <a:off x="4215384" y="3108960"/>
+            <a:ext cx="1051560" cy="137160"/>
+          </a:xfrm>
+          <a:prstGeom prst="rect">
+            <a:avLst/>
+          </a:prstGeom>
+          <a:noFill/>
+          <a:ln/>
+        </p:spPr>
+        <p:txBody>
+          <a:bodyPr wrap="square" lIns="0" tIns="0" rIns="0" bIns="0" rtlCol="0" anchor="ctr"/>
+          <a:lstStyle/>
+          <a:p>
+            <a:pPr algn="ctr" indent="0" marL="0">
+              <a:buNone/>
+            </a:pPr>
+            <a:r>
+              <a:rPr lang="en-US" sz="680" dirty="0">
+                <a:solidFill>
+                  <a:srgbClr val="8FA1AC"/>
+                </a:solidFill>
+                <a:latin typeface="Poppins" pitchFamily="34" charset="0"/>
+                <a:ea typeface="Poppins" pitchFamily="34" charset="-122"/>
+                <a:cs typeface="Poppins" pitchFamily="34" charset="-120"/>
+              </a:rPr>
+              <a:t>—</a:t>
+            </a:r>
+            <a:endParaRPr lang="en-US" sz="680" dirty="0"/>
+          </a:p>
+        </p:txBody>
+      </p:sp>
+      <p:sp>
+        <p:nvSpPr>
+          <p:cNvPr id="69" name="Shape 67"/>
+          <p:cNvSpPr/>
+          <p:nvPr/>
+        </p:nvSpPr>
+        <p:spPr>
+          <a:xfrm>
+            <a:off x="5321808" y="3116275"/>
+            <a:ext cx="996696" cy="123444"/>
+          </a:xfrm>
+          <a:prstGeom prst="rect">
+            <a:avLst/>
+          </a:prstGeom>
+          <a:solidFill>
+            <a:srgbClr val="8FC3CC"/>
+          </a:solidFill>
+          <a:ln/>
+        </p:spPr>
+      </p:sp>
+      <p:sp>
+        <p:nvSpPr>
+          <p:cNvPr id="70" name="Text 68"/>
+          <p:cNvSpPr txBox="1"/>
+          <p:nvPr/>
+        </p:nvSpPr>
+        <p:spPr>
+          <a:xfrm>
+            <a:off x="5294376" y="3108960"/>
+            <a:ext cx="1051560" cy="137160"/>
+          </a:xfrm>
+          <a:prstGeom prst="rect">
+            <a:avLst/>
+          </a:prstGeom>
+          <a:noFill/>
+          <a:ln/>
+        </p:spPr>
+        <p:txBody>
+          <a:bodyPr wrap="square" lIns="0" tIns="0" rIns="0" bIns="0" rtlCol="0" anchor="ctr"/>
+          <a:lstStyle/>
+          <a:p>
+            <a:pPr algn="ctr" indent="0" marL="0">
+              <a:buNone/>
+            </a:pPr>
+            <a:r>
+              <a:rPr lang="en-US" sz="680" dirty="0">
+                <a:solidFill>
                   <a:srgbClr val="12293A"/>
                 </a:solidFill>
                 <a:latin typeface="Poppins" pitchFamily="34" charset="0"/>
                 <a:ea typeface="Poppins" pitchFamily="34" charset="-122"/>
                 <a:cs typeface="Poppins" pitchFamily="34" charset="-120"/>
               </a:rPr>
-              <a:t>255,985</a:t>
+              <a:t>723,999</a:t>
             </a:r>
             <a:endParaRPr lang="en-US" sz="680" dirty="0"/>
           </a:p>
@@ -17230,14 +17484,14 @@
       </p:sp>
       <p:sp>
         <p:nvSpPr>
-          <p:cNvPr id="64" name="Text 62"/>
-          <p:cNvSpPr txBox="1"/>
-          <p:nvPr/>
-        </p:nvSpPr>
-        <p:spPr>
-          <a:xfrm>
-            <a:off x="6400800" y="2941755"/>
-            <a:ext cx="1280160" cy="116259"/>
+          <p:cNvPr id="71" name="Text 69"/>
+          <p:cNvSpPr txBox="1"/>
+          <p:nvPr/>
+        </p:nvSpPr>
+        <p:spPr>
+          <a:xfrm>
+            <a:off x="6400800" y="3108960"/>
+            <a:ext cx="1280160" cy="137160"/>
           </a:xfrm>
           <a:prstGeom prst="rect">
             <a:avLst/>
@@ -17261,7 +17515,7 @@
                 <a:ea typeface="Poppins" pitchFamily="34" charset="-122"/>
                 <a:cs typeface="Poppins" pitchFamily="34" charset="-120"/>
               </a:rPr>
-              <a:t>409,654</a:t>
+              <a:t>723,999</a:t>
             </a:r>
             <a:endParaRPr lang="en-US" sz="700" dirty="0"/>
           </a:p>
@@ -17269,14 +17523,14 @@
       </p:sp>
       <p:sp>
         <p:nvSpPr>
-          <p:cNvPr id="65" name="Text 63"/>
-          <p:cNvSpPr txBox="1"/>
-          <p:nvPr/>
-        </p:nvSpPr>
-        <p:spPr>
-          <a:xfrm>
-            <a:off x="594360" y="3067159"/>
-            <a:ext cx="1417320" cy="116259"/>
+          <p:cNvPr id="72" name="Text 70"/>
+          <p:cNvSpPr txBox="1"/>
+          <p:nvPr/>
+        </p:nvSpPr>
+        <p:spPr>
+          <a:xfrm>
+            <a:off x="594360" y="3255264"/>
+            <a:ext cx="1417320" cy="137160"/>
           </a:xfrm>
           <a:prstGeom prst="rect">
             <a:avLst/>
@@ -17300,7 +17554,7 @@
                 <a:ea typeface="Poppins" pitchFamily="34" charset="-122"/>
                 <a:cs typeface="Poppins" pitchFamily="34" charset="-120"/>
               </a:rPr>
-              <a:t>Daniel Maddern</a:t>
+              <a:t>Mostafa Essa</a:t>
             </a:r>
             <a:endParaRPr lang="en-US" sz="720" dirty="0"/>
           </a:p>
@@ -17308,14 +17562,14 @@
       </p:sp>
       <p:sp>
         <p:nvSpPr>
-          <p:cNvPr id="66" name="Text 64"/>
-          <p:cNvSpPr txBox="1"/>
-          <p:nvPr/>
-        </p:nvSpPr>
-        <p:spPr>
-          <a:xfrm>
-            <a:off x="2057400" y="3067159"/>
-            <a:ext cx="1051560" cy="116259"/>
+          <p:cNvPr id="73" name="Text 71"/>
+          <p:cNvSpPr txBox="1"/>
+          <p:nvPr/>
+        </p:nvSpPr>
+        <p:spPr>
+          <a:xfrm>
+            <a:off x="2057400" y="3255264"/>
+            <a:ext cx="1051560" cy="137160"/>
           </a:xfrm>
           <a:prstGeom prst="rect">
             <a:avLst/>
@@ -17347,14 +17601,14 @@
       </p:sp>
       <p:sp>
         <p:nvSpPr>
-          <p:cNvPr id="67" name="Text 65"/>
-          <p:cNvSpPr txBox="1"/>
-          <p:nvPr/>
-        </p:nvSpPr>
-        <p:spPr>
-          <a:xfrm>
-            <a:off x="3136392" y="3067159"/>
-            <a:ext cx="1051560" cy="116259"/>
+          <p:cNvPr id="74" name="Text 72"/>
+          <p:cNvSpPr txBox="1"/>
+          <p:nvPr/>
+        </p:nvSpPr>
+        <p:spPr>
+          <a:xfrm>
+            <a:off x="3136392" y="3255264"/>
+            <a:ext cx="1051560" cy="137160"/>
           </a:xfrm>
           <a:prstGeom prst="rect">
             <a:avLst/>
@@ -17386,14 +17640,14 @@
       </p:sp>
       <p:sp>
         <p:nvSpPr>
-          <p:cNvPr id="68" name="Text 66"/>
-          <p:cNvSpPr txBox="1"/>
-          <p:nvPr/>
-        </p:nvSpPr>
-        <p:spPr>
-          <a:xfrm>
-            <a:off x="4215384" y="3067159"/>
-            <a:ext cx="1051560" cy="116259"/>
+          <p:cNvPr id="75" name="Text 73"/>
+          <p:cNvSpPr txBox="1"/>
+          <p:nvPr/>
+        </p:nvSpPr>
+        <p:spPr>
+          <a:xfrm>
+            <a:off x="4215384" y="3255264"/>
+            <a:ext cx="1051560" cy="137160"/>
           </a:xfrm>
           <a:prstGeom prst="rect">
             <a:avLst/>
@@ -17425,34 +17679,34 @@
       </p:sp>
       <p:sp>
         <p:nvSpPr>
-          <p:cNvPr id="69" name="Shape 67"/>
-          <p:cNvSpPr/>
-          <p:nvPr/>
-        </p:nvSpPr>
-        <p:spPr>
-          <a:xfrm>
-            <a:off x="5321808" y="3074474"/>
-            <a:ext cx="996696" cy="102543"/>
-          </a:xfrm>
-          <a:prstGeom prst="rect">
-            <a:avLst/>
-          </a:prstGeom>
-          <a:solidFill>
-            <a:srgbClr val="8FC3CC"/>
-          </a:solidFill>
-          <a:ln/>
-        </p:spPr>
-      </p:sp>
-      <p:sp>
-        <p:nvSpPr>
-          <p:cNvPr id="70" name="Text 68"/>
-          <p:cNvSpPr txBox="1"/>
-          <p:nvPr/>
-        </p:nvSpPr>
-        <p:spPr>
-          <a:xfrm>
-            <a:off x="5294376" y="3067159"/>
-            <a:ext cx="1051560" cy="116259"/>
+          <p:cNvPr id="76" name="Shape 74"/>
+          <p:cNvSpPr/>
+          <p:nvPr/>
+        </p:nvSpPr>
+        <p:spPr>
+          <a:xfrm>
+            <a:off x="5321808" y="3262579"/>
+            <a:ext cx="996696" cy="123444"/>
+          </a:xfrm>
+          <a:prstGeom prst="rect">
+            <a:avLst/>
+          </a:prstGeom>
+          <a:solidFill>
+            <a:srgbClr val="EDF5F7"/>
+          </a:solidFill>
+          <a:ln/>
+        </p:spPr>
+      </p:sp>
+      <p:sp>
+        <p:nvSpPr>
+          <p:cNvPr id="77" name="Text 75"/>
+          <p:cNvSpPr txBox="1"/>
+          <p:nvPr/>
+        </p:nvSpPr>
+        <p:spPr>
+          <a:xfrm>
+            <a:off x="5294376" y="3255264"/>
+            <a:ext cx="1051560" cy="137160"/>
           </a:xfrm>
           <a:prstGeom prst="rect">
             <a:avLst/>
@@ -17476,7 +17730,7 @@
                 <a:ea typeface="Poppins" pitchFamily="34" charset="-122"/>
                 <a:cs typeface="Poppins" pitchFamily="34" charset="-120"/>
               </a:rPr>
-              <a:t>486,570</a:t>
+              <a:t>100,487</a:t>
             </a:r>
             <a:endParaRPr lang="en-US" sz="680" dirty="0"/>
           </a:p>
@@ -17484,14 +17738,14 @@
       </p:sp>
       <p:sp>
         <p:nvSpPr>
-          <p:cNvPr id="71" name="Text 69"/>
-          <p:cNvSpPr txBox="1"/>
-          <p:nvPr/>
-        </p:nvSpPr>
-        <p:spPr>
-          <a:xfrm>
-            <a:off x="6400800" y="3067159"/>
-            <a:ext cx="1280160" cy="116259"/>
+          <p:cNvPr id="78" name="Text 76"/>
+          <p:cNvSpPr txBox="1"/>
+          <p:nvPr/>
+        </p:nvSpPr>
+        <p:spPr>
+          <a:xfrm>
+            <a:off x="6400800" y="3255264"/>
+            <a:ext cx="1280160" cy="137160"/>
           </a:xfrm>
           <a:prstGeom prst="rect">
             <a:avLst/>
@@ -17515,7 +17769,7 @@
                 <a:ea typeface="Poppins" pitchFamily="34" charset="-122"/>
                 <a:cs typeface="Poppins" pitchFamily="34" charset="-120"/>
               </a:rPr>
-              <a:t>486,570</a:t>
+              <a:t>100,487</a:t>
             </a:r>
             <a:endParaRPr lang="en-US" sz="700" dirty="0"/>
           </a:p>
@@ -17523,14 +17777,14 @@
       </p:sp>
       <p:sp>
         <p:nvSpPr>
-          <p:cNvPr id="72" name="Text 70"/>
-          <p:cNvSpPr txBox="1"/>
-          <p:nvPr/>
-        </p:nvSpPr>
-        <p:spPr>
-          <a:xfrm>
-            <a:off x="594360" y="3192562"/>
-            <a:ext cx="1417320" cy="116259"/>
+          <p:cNvPr id="79" name="Text 77"/>
+          <p:cNvSpPr txBox="1"/>
+          <p:nvPr/>
+        </p:nvSpPr>
+        <p:spPr>
+          <a:xfrm>
+            <a:off x="594360" y="3401568"/>
+            <a:ext cx="1417320" cy="137160"/>
           </a:xfrm>
           <a:prstGeom prst="rect">
             <a:avLst/>
@@ -17554,7 +17808,7 @@
                 <a:ea typeface="Poppins" pitchFamily="34" charset="-122"/>
                 <a:cs typeface="Poppins" pitchFamily="34" charset="-120"/>
               </a:rPr>
-              <a:t>Mostafa Essa</a:t>
+              <a:t>Hawraa Khalil</a:t>
             </a:r>
             <a:endParaRPr lang="en-US" sz="720" dirty="0"/>
           </a:p>
@@ -17562,14 +17816,34 @@
       </p:sp>
       <p:sp>
         <p:nvSpPr>
-          <p:cNvPr id="73" name="Text 71"/>
-          <p:cNvSpPr txBox="1"/>
-          <p:nvPr/>
-        </p:nvSpPr>
-        <p:spPr>
-          <a:xfrm>
-            <a:off x="2057400" y="3192562"/>
-            <a:ext cx="1051560" cy="116259"/>
+          <p:cNvPr id="80" name="Shape 78"/>
+          <p:cNvSpPr/>
+          <p:nvPr/>
+        </p:nvSpPr>
+        <p:spPr>
+          <a:xfrm>
+            <a:off x="2084832" y="3408883"/>
+            <a:ext cx="996696" cy="123444"/>
+          </a:xfrm>
+          <a:prstGeom prst="rect">
+            <a:avLst/>
+          </a:prstGeom>
+          <a:solidFill>
+            <a:srgbClr val="EDF5F7"/>
+          </a:solidFill>
+          <a:ln/>
+        </p:spPr>
+      </p:sp>
+      <p:sp>
+        <p:nvSpPr>
+          <p:cNvPr id="81" name="Text 79"/>
+          <p:cNvSpPr txBox="1"/>
+          <p:nvPr/>
+        </p:nvSpPr>
+        <p:spPr>
+          <a:xfrm>
+            <a:off x="2057400" y="3401568"/>
+            <a:ext cx="1051560" cy="137160"/>
           </a:xfrm>
           <a:prstGeom prst="rect">
             <a:avLst/>
@@ -17587,6 +17861,163 @@
             <a:r>
               <a:rPr lang="en-US" sz="680" dirty="0">
                 <a:solidFill>
+                  <a:srgbClr val="12293A"/>
+                </a:solidFill>
+                <a:latin typeface="Poppins" pitchFamily="34" charset="0"/>
+                <a:ea typeface="Poppins" pitchFamily="34" charset="-122"/>
+                <a:cs typeface="Poppins" pitchFamily="34" charset="-120"/>
+              </a:rPr>
+              <a:t>28,536</a:t>
+            </a:r>
+            <a:endParaRPr lang="en-US" sz="680" dirty="0"/>
+          </a:p>
+        </p:txBody>
+      </p:sp>
+      <p:sp>
+        <p:nvSpPr>
+          <p:cNvPr id="82" name="Shape 80"/>
+          <p:cNvSpPr/>
+          <p:nvPr/>
+        </p:nvSpPr>
+        <p:spPr>
+          <a:xfrm>
+            <a:off x="3163824" y="3408883"/>
+            <a:ext cx="996696" cy="123444"/>
+          </a:xfrm>
+          <a:prstGeom prst="rect">
+            <a:avLst/>
+          </a:prstGeom>
+          <a:solidFill>
+            <a:srgbClr val="EDF5F7"/>
+          </a:solidFill>
+          <a:ln/>
+        </p:spPr>
+      </p:sp>
+      <p:sp>
+        <p:nvSpPr>
+          <p:cNvPr id="83" name="Text 81"/>
+          <p:cNvSpPr txBox="1"/>
+          <p:nvPr/>
+        </p:nvSpPr>
+        <p:spPr>
+          <a:xfrm>
+            <a:off x="3136392" y="3401568"/>
+            <a:ext cx="1051560" cy="137160"/>
+          </a:xfrm>
+          <a:prstGeom prst="rect">
+            <a:avLst/>
+          </a:prstGeom>
+          <a:noFill/>
+          <a:ln/>
+        </p:spPr>
+        <p:txBody>
+          <a:bodyPr wrap="square" lIns="0" tIns="0" rIns="0" bIns="0" rtlCol="0" anchor="ctr"/>
+          <a:lstStyle/>
+          <a:p>
+            <a:pPr algn="ctr" indent="0" marL="0">
+              <a:buNone/>
+            </a:pPr>
+            <a:r>
+              <a:rPr lang="en-US" sz="680" dirty="0">
+                <a:solidFill>
+                  <a:srgbClr val="12293A"/>
+                </a:solidFill>
+                <a:latin typeface="Poppins" pitchFamily="34" charset="0"/>
+                <a:ea typeface="Poppins" pitchFamily="34" charset="-122"/>
+                <a:cs typeface="Poppins" pitchFamily="34" charset="-120"/>
+              </a:rPr>
+              <a:t>23,285</a:t>
+            </a:r>
+            <a:endParaRPr lang="en-US" sz="680" dirty="0"/>
+          </a:p>
+        </p:txBody>
+      </p:sp>
+      <p:sp>
+        <p:nvSpPr>
+          <p:cNvPr id="84" name="Shape 82"/>
+          <p:cNvSpPr/>
+          <p:nvPr/>
+        </p:nvSpPr>
+        <p:spPr>
+          <a:xfrm>
+            <a:off x="4242816" y="3408883"/>
+            <a:ext cx="996696" cy="123444"/>
+          </a:xfrm>
+          <a:prstGeom prst="rect">
+            <a:avLst/>
+          </a:prstGeom>
+          <a:solidFill>
+            <a:srgbClr val="EDF5F7"/>
+          </a:solidFill>
+          <a:ln/>
+        </p:spPr>
+      </p:sp>
+      <p:sp>
+        <p:nvSpPr>
+          <p:cNvPr id="85" name="Text 83"/>
+          <p:cNvSpPr txBox="1"/>
+          <p:nvPr/>
+        </p:nvSpPr>
+        <p:spPr>
+          <a:xfrm>
+            <a:off x="4215384" y="3401568"/>
+            <a:ext cx="1051560" cy="137160"/>
+          </a:xfrm>
+          <a:prstGeom prst="rect">
+            <a:avLst/>
+          </a:prstGeom>
+          <a:noFill/>
+          <a:ln/>
+        </p:spPr>
+        <p:txBody>
+          <a:bodyPr wrap="square" lIns="0" tIns="0" rIns="0" bIns="0" rtlCol="0" anchor="ctr"/>
+          <a:lstStyle/>
+          <a:p>
+            <a:pPr algn="ctr" indent="0" marL="0">
+              <a:buNone/>
+            </a:pPr>
+            <a:r>
+              <a:rPr lang="en-US" sz="680" dirty="0">
+                <a:solidFill>
+                  <a:srgbClr val="12293A"/>
+                </a:solidFill>
+                <a:latin typeface="Poppins" pitchFamily="34" charset="0"/>
+                <a:ea typeface="Poppins" pitchFamily="34" charset="-122"/>
+                <a:cs typeface="Poppins" pitchFamily="34" charset="-120"/>
+              </a:rPr>
+              <a:t>19,047</a:t>
+            </a:r>
+            <a:endParaRPr lang="en-US" sz="680" dirty="0"/>
+          </a:p>
+        </p:txBody>
+      </p:sp>
+      <p:sp>
+        <p:nvSpPr>
+          <p:cNvPr id="86" name="Text 84"/>
+          <p:cNvSpPr txBox="1"/>
+          <p:nvPr/>
+        </p:nvSpPr>
+        <p:spPr>
+          <a:xfrm>
+            <a:off x="5294376" y="3401568"/>
+            <a:ext cx="1051560" cy="137160"/>
+          </a:xfrm>
+          <a:prstGeom prst="rect">
+            <a:avLst/>
+          </a:prstGeom>
+          <a:noFill/>
+          <a:ln/>
+        </p:spPr>
+        <p:txBody>
+          <a:bodyPr wrap="square" lIns="0" tIns="0" rIns="0" bIns="0" rtlCol="0" anchor="ctr"/>
+          <a:lstStyle/>
+          <a:p>
+            <a:pPr algn="ctr" indent="0" marL="0">
+              <a:buNone/>
+            </a:pPr>
+            <a:r>
+              <a:rPr lang="en-US" sz="680" dirty="0">
+                <a:solidFill>
                   <a:srgbClr val="8FA1AC"/>
                 </a:solidFill>
                 <a:latin typeface="Poppins" pitchFamily="34" charset="0"/>
@@ -17601,14 +18032,112 @@
       </p:sp>
       <p:sp>
         <p:nvSpPr>
-          <p:cNvPr id="74" name="Text 72"/>
-          <p:cNvSpPr txBox="1"/>
-          <p:nvPr/>
-        </p:nvSpPr>
-        <p:spPr>
-          <a:xfrm>
-            <a:off x="3136392" y="3192562"/>
-            <a:ext cx="1051560" cy="116259"/>
+          <p:cNvPr id="87" name="Text 85"/>
+          <p:cNvSpPr txBox="1"/>
+          <p:nvPr/>
+        </p:nvSpPr>
+        <p:spPr>
+          <a:xfrm>
+            <a:off x="6400800" y="3401568"/>
+            <a:ext cx="1280160" cy="137160"/>
+          </a:xfrm>
+          <a:prstGeom prst="rect">
+            <a:avLst/>
+          </a:prstGeom>
+          <a:noFill/>
+          <a:ln/>
+        </p:spPr>
+        <p:txBody>
+          <a:bodyPr wrap="square" lIns="0" tIns="0" rIns="0" bIns="0" rtlCol="0" anchor="ctr"/>
+          <a:lstStyle/>
+          <a:p>
+            <a:pPr algn="r" indent="0" marL="0">
+              <a:buNone/>
+            </a:pPr>
+            <a:r>
+              <a:rPr lang="en-US" sz="700" b="1" dirty="0">
+                <a:solidFill>
+                  <a:srgbClr val="5E7280"/>
+                </a:solidFill>
+                <a:latin typeface="Poppins" pitchFamily="34" charset="0"/>
+                <a:ea typeface="Poppins" pitchFamily="34" charset="-122"/>
+                <a:cs typeface="Poppins" pitchFamily="34" charset="-120"/>
+              </a:rPr>
+              <a:t>70,868</a:t>
+            </a:r>
+            <a:endParaRPr lang="en-US" sz="700" dirty="0"/>
+          </a:p>
+        </p:txBody>
+      </p:sp>
+      <p:sp>
+        <p:nvSpPr>
+          <p:cNvPr id="88" name="Text 86"/>
+          <p:cNvSpPr txBox="1"/>
+          <p:nvPr/>
+        </p:nvSpPr>
+        <p:spPr>
+          <a:xfrm>
+            <a:off x="594360" y="3547872"/>
+            <a:ext cx="1417320" cy="137160"/>
+          </a:xfrm>
+          <a:prstGeom prst="rect">
+            <a:avLst/>
+          </a:prstGeom>
+          <a:noFill/>
+          <a:ln/>
+        </p:spPr>
+        <p:txBody>
+          <a:bodyPr wrap="square" lIns="0" tIns="0" rIns="0" bIns="0" rtlCol="0" anchor="ctr"/>
+          <a:lstStyle/>
+          <a:p>
+            <a:pPr indent="0" marL="0">
+              <a:buNone/>
+            </a:pPr>
+            <a:r>
+              <a:rPr lang="en-US" sz="720" b="1" dirty="0">
+                <a:solidFill>
+                  <a:srgbClr val="12293A"/>
+                </a:solidFill>
+                <a:latin typeface="Poppins" pitchFamily="34" charset="0"/>
+                <a:ea typeface="Poppins" pitchFamily="34" charset="-122"/>
+                <a:cs typeface="Poppins" pitchFamily="34" charset="-120"/>
+              </a:rPr>
+              <a:t>Ciaran Dempsey</a:t>
+            </a:r>
+            <a:endParaRPr lang="en-US" sz="720" dirty="0"/>
+          </a:p>
+        </p:txBody>
+      </p:sp>
+      <p:sp>
+        <p:nvSpPr>
+          <p:cNvPr id="89" name="Shape 87"/>
+          <p:cNvSpPr/>
+          <p:nvPr/>
+        </p:nvSpPr>
+        <p:spPr>
+          <a:xfrm>
+            <a:off x="2084832" y="3555187"/>
+            <a:ext cx="996696" cy="123444"/>
+          </a:xfrm>
+          <a:prstGeom prst="rect">
+            <a:avLst/>
+          </a:prstGeom>
+          <a:solidFill>
+            <a:srgbClr val="EDF5F7"/>
+          </a:solidFill>
+          <a:ln/>
+        </p:spPr>
+      </p:sp>
+      <p:sp>
+        <p:nvSpPr>
+          <p:cNvPr id="90" name="Text 88"/>
+          <p:cNvSpPr txBox="1"/>
+          <p:nvPr/>
+        </p:nvSpPr>
+        <p:spPr>
+          <a:xfrm>
+            <a:off x="2057400" y="3547872"/>
+            <a:ext cx="1051560" cy="137160"/>
           </a:xfrm>
           <a:prstGeom prst="rect">
             <a:avLst/>
@@ -17626,6 +18155,928 @@
             <a:r>
               <a:rPr lang="en-US" sz="680" dirty="0">
                 <a:solidFill>
+                  <a:srgbClr val="12293A"/>
+                </a:solidFill>
+                <a:latin typeface="Poppins" pitchFamily="34" charset="0"/>
+                <a:ea typeface="Poppins" pitchFamily="34" charset="-122"/>
+                <a:cs typeface="Poppins" pitchFamily="34" charset="-120"/>
+              </a:rPr>
+              <a:t>18,918</a:t>
+            </a:r>
+            <a:endParaRPr lang="en-US" sz="680" dirty="0"/>
+          </a:p>
+        </p:txBody>
+      </p:sp>
+      <p:sp>
+        <p:nvSpPr>
+          <p:cNvPr id="91" name="Shape 89"/>
+          <p:cNvSpPr/>
+          <p:nvPr/>
+        </p:nvSpPr>
+        <p:spPr>
+          <a:xfrm>
+            <a:off x="3163824" y="3555187"/>
+            <a:ext cx="996696" cy="123444"/>
+          </a:xfrm>
+          <a:prstGeom prst="rect">
+            <a:avLst/>
+          </a:prstGeom>
+          <a:solidFill>
+            <a:srgbClr val="EDF5F7"/>
+          </a:solidFill>
+          <a:ln/>
+        </p:spPr>
+      </p:sp>
+      <p:sp>
+        <p:nvSpPr>
+          <p:cNvPr id="92" name="Text 90"/>
+          <p:cNvSpPr txBox="1"/>
+          <p:nvPr/>
+        </p:nvSpPr>
+        <p:spPr>
+          <a:xfrm>
+            <a:off x="3136392" y="3547872"/>
+            <a:ext cx="1051560" cy="137160"/>
+          </a:xfrm>
+          <a:prstGeom prst="rect">
+            <a:avLst/>
+          </a:prstGeom>
+          <a:noFill/>
+          <a:ln/>
+        </p:spPr>
+        <p:txBody>
+          <a:bodyPr wrap="square" lIns="0" tIns="0" rIns="0" bIns="0" rtlCol="0" anchor="ctr"/>
+          <a:lstStyle/>
+          <a:p>
+            <a:pPr algn="ctr" indent="0" marL="0">
+              <a:buNone/>
+            </a:pPr>
+            <a:r>
+              <a:rPr lang="en-US" sz="680" dirty="0">
+                <a:solidFill>
+                  <a:srgbClr val="12293A"/>
+                </a:solidFill>
+                <a:latin typeface="Poppins" pitchFamily="34" charset="0"/>
+                <a:ea typeface="Poppins" pitchFamily="34" charset="-122"/>
+                <a:cs typeface="Poppins" pitchFamily="34" charset="-120"/>
+              </a:rPr>
+              <a:t>23,650</a:t>
+            </a:r>
+            <a:endParaRPr lang="en-US" sz="680" dirty="0"/>
+          </a:p>
+        </p:txBody>
+      </p:sp>
+      <p:sp>
+        <p:nvSpPr>
+          <p:cNvPr id="93" name="Shape 91"/>
+          <p:cNvSpPr/>
+          <p:nvPr/>
+        </p:nvSpPr>
+        <p:spPr>
+          <a:xfrm>
+            <a:off x="4242816" y="3555187"/>
+            <a:ext cx="996696" cy="123444"/>
+          </a:xfrm>
+          <a:prstGeom prst="rect">
+            <a:avLst/>
+          </a:prstGeom>
+          <a:solidFill>
+            <a:srgbClr val="EDF5F7"/>
+          </a:solidFill>
+          <a:ln/>
+        </p:spPr>
+      </p:sp>
+      <p:sp>
+        <p:nvSpPr>
+          <p:cNvPr id="94" name="Text 92"/>
+          <p:cNvSpPr txBox="1"/>
+          <p:nvPr/>
+        </p:nvSpPr>
+        <p:spPr>
+          <a:xfrm>
+            <a:off x="4215384" y="3547872"/>
+            <a:ext cx="1051560" cy="137160"/>
+          </a:xfrm>
+          <a:prstGeom prst="rect">
+            <a:avLst/>
+          </a:prstGeom>
+          <a:noFill/>
+          <a:ln/>
+        </p:spPr>
+        <p:txBody>
+          <a:bodyPr wrap="square" lIns="0" tIns="0" rIns="0" bIns="0" rtlCol="0" anchor="ctr"/>
+          <a:lstStyle/>
+          <a:p>
+            <a:pPr algn="ctr" indent="0" marL="0">
+              <a:buNone/>
+            </a:pPr>
+            <a:r>
+              <a:rPr lang="en-US" sz="680" dirty="0">
+                <a:solidFill>
+                  <a:srgbClr val="12293A"/>
+                </a:solidFill>
+                <a:latin typeface="Poppins" pitchFamily="34" charset="0"/>
+                <a:ea typeface="Poppins" pitchFamily="34" charset="-122"/>
+                <a:cs typeface="Poppins" pitchFamily="34" charset="-120"/>
+              </a:rPr>
+              <a:t>24,443</a:t>
+            </a:r>
+            <a:endParaRPr lang="en-US" sz="680" dirty="0"/>
+          </a:p>
+        </p:txBody>
+      </p:sp>
+      <p:sp>
+        <p:nvSpPr>
+          <p:cNvPr id="95" name="Shape 93"/>
+          <p:cNvSpPr/>
+          <p:nvPr/>
+        </p:nvSpPr>
+        <p:spPr>
+          <a:xfrm>
+            <a:off x="5321808" y="3555187"/>
+            <a:ext cx="996696" cy="123444"/>
+          </a:xfrm>
+          <a:prstGeom prst="rect">
+            <a:avLst/>
+          </a:prstGeom>
+          <a:solidFill>
+            <a:srgbClr val="EDF5F7"/>
+          </a:solidFill>
+          <a:ln/>
+        </p:spPr>
+      </p:sp>
+      <p:sp>
+        <p:nvSpPr>
+          <p:cNvPr id="96" name="Text 94"/>
+          <p:cNvSpPr txBox="1"/>
+          <p:nvPr/>
+        </p:nvSpPr>
+        <p:spPr>
+          <a:xfrm>
+            <a:off x="5294376" y="3547872"/>
+            <a:ext cx="1051560" cy="137160"/>
+          </a:xfrm>
+          <a:prstGeom prst="rect">
+            <a:avLst/>
+          </a:prstGeom>
+          <a:noFill/>
+          <a:ln/>
+        </p:spPr>
+        <p:txBody>
+          <a:bodyPr wrap="square" lIns="0" tIns="0" rIns="0" bIns="0" rtlCol="0" anchor="ctr"/>
+          <a:lstStyle/>
+          <a:p>
+            <a:pPr algn="ctr" indent="0" marL="0">
+              <a:buNone/>
+            </a:pPr>
+            <a:r>
+              <a:rPr lang="en-US" sz="680" dirty="0">
+                <a:solidFill>
+                  <a:srgbClr val="12293A"/>
+                </a:solidFill>
+                <a:latin typeface="Poppins" pitchFamily="34" charset="0"/>
+                <a:ea typeface="Poppins" pitchFamily="34" charset="-122"/>
+                <a:cs typeface="Poppins" pitchFamily="34" charset="-120"/>
+              </a:rPr>
+              <a:t>5,382</a:t>
+            </a:r>
+            <a:endParaRPr lang="en-US" sz="680" dirty="0"/>
+          </a:p>
+        </p:txBody>
+      </p:sp>
+      <p:sp>
+        <p:nvSpPr>
+          <p:cNvPr id="97" name="Text 95"/>
+          <p:cNvSpPr txBox="1"/>
+          <p:nvPr/>
+        </p:nvSpPr>
+        <p:spPr>
+          <a:xfrm>
+            <a:off x="6400800" y="3547872"/>
+            <a:ext cx="1280160" cy="137160"/>
+          </a:xfrm>
+          <a:prstGeom prst="rect">
+            <a:avLst/>
+          </a:prstGeom>
+          <a:noFill/>
+          <a:ln/>
+        </p:spPr>
+        <p:txBody>
+          <a:bodyPr wrap="square" lIns="0" tIns="0" rIns="0" bIns="0" rtlCol="0" anchor="ctr"/>
+          <a:lstStyle/>
+          <a:p>
+            <a:pPr algn="r" indent="0" marL="0">
+              <a:buNone/>
+            </a:pPr>
+            <a:r>
+              <a:rPr lang="en-US" sz="700" b="1" dirty="0">
+                <a:solidFill>
+                  <a:srgbClr val="5E7280"/>
+                </a:solidFill>
+                <a:latin typeface="Poppins" pitchFamily="34" charset="0"/>
+                <a:ea typeface="Poppins" pitchFamily="34" charset="-122"/>
+                <a:cs typeface="Poppins" pitchFamily="34" charset="-120"/>
+              </a:rPr>
+              <a:t>72,393</a:t>
+            </a:r>
+            <a:endParaRPr lang="en-US" sz="700" dirty="0"/>
+          </a:p>
+        </p:txBody>
+      </p:sp>
+      <p:sp>
+        <p:nvSpPr>
+          <p:cNvPr id="98" name="Text 96"/>
+          <p:cNvSpPr txBox="1"/>
+          <p:nvPr/>
+        </p:nvSpPr>
+        <p:spPr>
+          <a:xfrm>
+            <a:off x="594360" y="3694176"/>
+            <a:ext cx="1417320" cy="137160"/>
+          </a:xfrm>
+          <a:prstGeom prst="rect">
+            <a:avLst/>
+          </a:prstGeom>
+          <a:noFill/>
+          <a:ln/>
+        </p:spPr>
+        <p:txBody>
+          <a:bodyPr wrap="square" lIns="0" tIns="0" rIns="0" bIns="0" rtlCol="0" anchor="ctr"/>
+          <a:lstStyle/>
+          <a:p>
+            <a:pPr indent="0" marL="0">
+              <a:buNone/>
+            </a:pPr>
+            <a:r>
+              <a:rPr lang="en-US" sz="720" b="1" dirty="0">
+                <a:solidFill>
+                  <a:srgbClr val="12293A"/>
+                </a:solidFill>
+                <a:latin typeface="Poppins" pitchFamily="34" charset="0"/>
+                <a:ea typeface="Poppins" pitchFamily="34" charset="-122"/>
+                <a:cs typeface="Poppins" pitchFamily="34" charset="-120"/>
+              </a:rPr>
+              <a:t>David Corbett</a:t>
+            </a:r>
+            <a:endParaRPr lang="en-US" sz="720" dirty="0"/>
+          </a:p>
+        </p:txBody>
+      </p:sp>
+      <p:sp>
+        <p:nvSpPr>
+          <p:cNvPr id="99" name="Shape 97"/>
+          <p:cNvSpPr/>
+          <p:nvPr/>
+        </p:nvSpPr>
+        <p:spPr>
+          <a:xfrm>
+            <a:off x="2084832" y="3701491"/>
+            <a:ext cx="996696" cy="123444"/>
+          </a:xfrm>
+          <a:prstGeom prst="rect">
+            <a:avLst/>
+          </a:prstGeom>
+          <a:solidFill>
+            <a:srgbClr val="EDF5F7"/>
+          </a:solidFill>
+          <a:ln/>
+        </p:spPr>
+      </p:sp>
+      <p:sp>
+        <p:nvSpPr>
+          <p:cNvPr id="100" name="Text 98"/>
+          <p:cNvSpPr txBox="1"/>
+          <p:nvPr/>
+        </p:nvSpPr>
+        <p:spPr>
+          <a:xfrm>
+            <a:off x="2057400" y="3694176"/>
+            <a:ext cx="1051560" cy="137160"/>
+          </a:xfrm>
+          <a:prstGeom prst="rect">
+            <a:avLst/>
+          </a:prstGeom>
+          <a:noFill/>
+          <a:ln/>
+        </p:spPr>
+        <p:txBody>
+          <a:bodyPr wrap="square" lIns="0" tIns="0" rIns="0" bIns="0" rtlCol="0" anchor="ctr"/>
+          <a:lstStyle/>
+          <a:p>
+            <a:pPr algn="ctr" indent="0" marL="0">
+              <a:buNone/>
+            </a:pPr>
+            <a:r>
+              <a:rPr lang="en-US" sz="680" dirty="0">
+                <a:solidFill>
+                  <a:srgbClr val="12293A"/>
+                </a:solidFill>
+                <a:latin typeface="Poppins" pitchFamily="34" charset="0"/>
+                <a:ea typeface="Poppins" pitchFamily="34" charset="-122"/>
+                <a:cs typeface="Poppins" pitchFamily="34" charset="-120"/>
+              </a:rPr>
+              <a:t>27,031</a:t>
+            </a:r>
+            <a:endParaRPr lang="en-US" sz="680" dirty="0"/>
+          </a:p>
+        </p:txBody>
+      </p:sp>
+      <p:sp>
+        <p:nvSpPr>
+          <p:cNvPr id="101" name="Shape 99"/>
+          <p:cNvSpPr/>
+          <p:nvPr/>
+        </p:nvSpPr>
+        <p:spPr>
+          <a:xfrm>
+            <a:off x="3163824" y="3701491"/>
+            <a:ext cx="996696" cy="123444"/>
+          </a:xfrm>
+          <a:prstGeom prst="rect">
+            <a:avLst/>
+          </a:prstGeom>
+          <a:solidFill>
+            <a:srgbClr val="EDF5F7"/>
+          </a:solidFill>
+          <a:ln/>
+        </p:spPr>
+      </p:sp>
+      <p:sp>
+        <p:nvSpPr>
+          <p:cNvPr id="102" name="Text 100"/>
+          <p:cNvSpPr txBox="1"/>
+          <p:nvPr/>
+        </p:nvSpPr>
+        <p:spPr>
+          <a:xfrm>
+            <a:off x="3136392" y="3694176"/>
+            <a:ext cx="1051560" cy="137160"/>
+          </a:xfrm>
+          <a:prstGeom prst="rect">
+            <a:avLst/>
+          </a:prstGeom>
+          <a:noFill/>
+          <a:ln/>
+        </p:spPr>
+        <p:txBody>
+          <a:bodyPr wrap="square" lIns="0" tIns="0" rIns="0" bIns="0" rtlCol="0" anchor="ctr"/>
+          <a:lstStyle/>
+          <a:p>
+            <a:pPr algn="ctr" indent="0" marL="0">
+              <a:buNone/>
+            </a:pPr>
+            <a:r>
+              <a:rPr lang="en-US" sz="680" dirty="0">
+                <a:solidFill>
+                  <a:srgbClr val="12293A"/>
+                </a:solidFill>
+                <a:latin typeface="Poppins" pitchFamily="34" charset="0"/>
+                <a:ea typeface="Poppins" pitchFamily="34" charset="-122"/>
+                <a:cs typeface="Poppins" pitchFamily="34" charset="-120"/>
+              </a:rPr>
+              <a:t>10,145</a:t>
+            </a:r>
+            <a:endParaRPr lang="en-US" sz="680" dirty="0"/>
+          </a:p>
+        </p:txBody>
+      </p:sp>
+      <p:sp>
+        <p:nvSpPr>
+          <p:cNvPr id="103" name="Shape 101"/>
+          <p:cNvSpPr/>
+          <p:nvPr/>
+        </p:nvSpPr>
+        <p:spPr>
+          <a:xfrm>
+            <a:off x="4242816" y="3701491"/>
+            <a:ext cx="996696" cy="123444"/>
+          </a:xfrm>
+          <a:prstGeom prst="rect">
+            <a:avLst/>
+          </a:prstGeom>
+          <a:solidFill>
+            <a:srgbClr val="EDF5F7"/>
+          </a:solidFill>
+          <a:ln/>
+        </p:spPr>
+      </p:sp>
+      <p:sp>
+        <p:nvSpPr>
+          <p:cNvPr id="104" name="Text 102"/>
+          <p:cNvSpPr txBox="1"/>
+          <p:nvPr/>
+        </p:nvSpPr>
+        <p:spPr>
+          <a:xfrm>
+            <a:off x="4215384" y="3694176"/>
+            <a:ext cx="1051560" cy="137160"/>
+          </a:xfrm>
+          <a:prstGeom prst="rect">
+            <a:avLst/>
+          </a:prstGeom>
+          <a:noFill/>
+          <a:ln/>
+        </p:spPr>
+        <p:txBody>
+          <a:bodyPr wrap="square" lIns="0" tIns="0" rIns="0" bIns="0" rtlCol="0" anchor="ctr"/>
+          <a:lstStyle/>
+          <a:p>
+            <a:pPr algn="ctr" indent="0" marL="0">
+              <a:buNone/>
+            </a:pPr>
+            <a:r>
+              <a:rPr lang="en-US" sz="680" dirty="0">
+                <a:solidFill>
+                  <a:srgbClr val="12293A"/>
+                </a:solidFill>
+                <a:latin typeface="Poppins" pitchFamily="34" charset="0"/>
+                <a:ea typeface="Poppins" pitchFamily="34" charset="-122"/>
+                <a:cs typeface="Poppins" pitchFamily="34" charset="-120"/>
+              </a:rPr>
+              <a:t>30,828</a:t>
+            </a:r>
+            <a:endParaRPr lang="en-US" sz="680" dirty="0"/>
+          </a:p>
+        </p:txBody>
+      </p:sp>
+      <p:sp>
+        <p:nvSpPr>
+          <p:cNvPr id="105" name="Shape 103"/>
+          <p:cNvSpPr/>
+          <p:nvPr/>
+        </p:nvSpPr>
+        <p:spPr>
+          <a:xfrm>
+            <a:off x="5321808" y="3701491"/>
+            <a:ext cx="996696" cy="123444"/>
+          </a:xfrm>
+          <a:prstGeom prst="rect">
+            <a:avLst/>
+          </a:prstGeom>
+          <a:solidFill>
+            <a:srgbClr val="EDF5F7"/>
+          </a:solidFill>
+          <a:ln/>
+        </p:spPr>
+      </p:sp>
+      <p:sp>
+        <p:nvSpPr>
+          <p:cNvPr id="106" name="Text 104"/>
+          <p:cNvSpPr txBox="1"/>
+          <p:nvPr/>
+        </p:nvSpPr>
+        <p:spPr>
+          <a:xfrm>
+            <a:off x="5294376" y="3694176"/>
+            <a:ext cx="1051560" cy="137160"/>
+          </a:xfrm>
+          <a:prstGeom prst="rect">
+            <a:avLst/>
+          </a:prstGeom>
+          <a:noFill/>
+          <a:ln/>
+        </p:spPr>
+        <p:txBody>
+          <a:bodyPr wrap="square" lIns="0" tIns="0" rIns="0" bIns="0" rtlCol="0" anchor="ctr"/>
+          <a:lstStyle/>
+          <a:p>
+            <a:pPr algn="ctr" indent="0" marL="0">
+              <a:buNone/>
+            </a:pPr>
+            <a:r>
+              <a:rPr lang="en-US" sz="680" dirty="0">
+                <a:solidFill>
+                  <a:srgbClr val="12293A"/>
+                </a:solidFill>
+                <a:latin typeface="Poppins" pitchFamily="34" charset="0"/>
+                <a:ea typeface="Poppins" pitchFamily="34" charset="-122"/>
+                <a:cs typeface="Poppins" pitchFamily="34" charset="-120"/>
+              </a:rPr>
+              <a:t>43,988</a:t>
+            </a:r>
+            <a:endParaRPr lang="en-US" sz="680" dirty="0"/>
+          </a:p>
+        </p:txBody>
+      </p:sp>
+      <p:sp>
+        <p:nvSpPr>
+          <p:cNvPr id="107" name="Text 105"/>
+          <p:cNvSpPr txBox="1"/>
+          <p:nvPr/>
+        </p:nvSpPr>
+        <p:spPr>
+          <a:xfrm>
+            <a:off x="6400800" y="3694176"/>
+            <a:ext cx="1280160" cy="137160"/>
+          </a:xfrm>
+          <a:prstGeom prst="rect">
+            <a:avLst/>
+          </a:prstGeom>
+          <a:noFill/>
+          <a:ln/>
+        </p:spPr>
+        <p:txBody>
+          <a:bodyPr wrap="square" lIns="0" tIns="0" rIns="0" bIns="0" rtlCol="0" anchor="ctr"/>
+          <a:lstStyle/>
+          <a:p>
+            <a:pPr algn="r" indent="0" marL="0">
+              <a:buNone/>
+            </a:pPr>
+            <a:r>
+              <a:rPr lang="en-US" sz="700" b="1" dirty="0">
+                <a:solidFill>
+                  <a:srgbClr val="5E7280"/>
+                </a:solidFill>
+                <a:latin typeface="Poppins" pitchFamily="34" charset="0"/>
+                <a:ea typeface="Poppins" pitchFamily="34" charset="-122"/>
+                <a:cs typeface="Poppins" pitchFamily="34" charset="-120"/>
+              </a:rPr>
+              <a:t>111,992</a:t>
+            </a:r>
+            <a:endParaRPr lang="en-US" sz="700" dirty="0"/>
+          </a:p>
+        </p:txBody>
+      </p:sp>
+      <p:sp>
+        <p:nvSpPr>
+          <p:cNvPr id="108" name="Text 106"/>
+          <p:cNvSpPr txBox="1"/>
+          <p:nvPr/>
+        </p:nvSpPr>
+        <p:spPr>
+          <a:xfrm>
+            <a:off x="594360" y="3840480"/>
+            <a:ext cx="1417320" cy="137160"/>
+          </a:xfrm>
+          <a:prstGeom prst="rect">
+            <a:avLst/>
+          </a:prstGeom>
+          <a:noFill/>
+          <a:ln/>
+        </p:spPr>
+        <p:txBody>
+          <a:bodyPr wrap="square" lIns="0" tIns="0" rIns="0" bIns="0" rtlCol="0" anchor="ctr"/>
+          <a:lstStyle/>
+          <a:p>
+            <a:pPr indent="0" marL="0">
+              <a:buNone/>
+            </a:pPr>
+            <a:r>
+              <a:rPr lang="en-US" sz="720" b="1" dirty="0">
+                <a:solidFill>
+                  <a:srgbClr val="12293A"/>
+                </a:solidFill>
+                <a:latin typeface="Poppins" pitchFamily="34" charset="0"/>
+                <a:ea typeface="Poppins" pitchFamily="34" charset="-122"/>
+                <a:cs typeface="Poppins" pitchFamily="34" charset="-120"/>
+              </a:rPr>
+              <a:t>Chris Huang</a:t>
+            </a:r>
+            <a:endParaRPr lang="en-US" sz="720" dirty="0"/>
+          </a:p>
+        </p:txBody>
+      </p:sp>
+      <p:sp>
+        <p:nvSpPr>
+          <p:cNvPr id="109" name="Shape 107"/>
+          <p:cNvSpPr/>
+          <p:nvPr/>
+        </p:nvSpPr>
+        <p:spPr>
+          <a:xfrm>
+            <a:off x="2084832" y="3847795"/>
+            <a:ext cx="996696" cy="123444"/>
+          </a:xfrm>
+          <a:prstGeom prst="rect">
+            <a:avLst/>
+          </a:prstGeom>
+          <a:solidFill>
+            <a:srgbClr val="EDF5F7"/>
+          </a:solidFill>
+          <a:ln/>
+        </p:spPr>
+      </p:sp>
+      <p:sp>
+        <p:nvSpPr>
+          <p:cNvPr id="110" name="Text 108"/>
+          <p:cNvSpPr txBox="1"/>
+          <p:nvPr/>
+        </p:nvSpPr>
+        <p:spPr>
+          <a:xfrm>
+            <a:off x="2057400" y="3840480"/>
+            <a:ext cx="1051560" cy="137160"/>
+          </a:xfrm>
+          <a:prstGeom prst="rect">
+            <a:avLst/>
+          </a:prstGeom>
+          <a:noFill/>
+          <a:ln/>
+        </p:spPr>
+        <p:txBody>
+          <a:bodyPr wrap="square" lIns="0" tIns="0" rIns="0" bIns="0" rtlCol="0" anchor="ctr"/>
+          <a:lstStyle/>
+          <a:p>
+            <a:pPr algn="ctr" indent="0" marL="0">
+              <a:buNone/>
+            </a:pPr>
+            <a:r>
+              <a:rPr lang="en-US" sz="680" dirty="0">
+                <a:solidFill>
+                  <a:srgbClr val="12293A"/>
+                </a:solidFill>
+                <a:latin typeface="Poppins" pitchFamily="34" charset="0"/>
+                <a:ea typeface="Poppins" pitchFamily="34" charset="-122"/>
+                <a:cs typeface="Poppins" pitchFamily="34" charset="-120"/>
+              </a:rPr>
+              <a:t>19,535</a:t>
+            </a:r>
+            <a:endParaRPr lang="en-US" sz="680" dirty="0"/>
+          </a:p>
+        </p:txBody>
+      </p:sp>
+      <p:sp>
+        <p:nvSpPr>
+          <p:cNvPr id="111" name="Shape 109"/>
+          <p:cNvSpPr/>
+          <p:nvPr/>
+        </p:nvSpPr>
+        <p:spPr>
+          <a:xfrm>
+            <a:off x="3163824" y="3847795"/>
+            <a:ext cx="996696" cy="123444"/>
+          </a:xfrm>
+          <a:prstGeom prst="rect">
+            <a:avLst/>
+          </a:prstGeom>
+          <a:solidFill>
+            <a:srgbClr val="EDF5F7"/>
+          </a:solidFill>
+          <a:ln/>
+        </p:spPr>
+      </p:sp>
+      <p:sp>
+        <p:nvSpPr>
+          <p:cNvPr id="112" name="Text 110"/>
+          <p:cNvSpPr txBox="1"/>
+          <p:nvPr/>
+        </p:nvSpPr>
+        <p:spPr>
+          <a:xfrm>
+            <a:off x="3136392" y="3840480"/>
+            <a:ext cx="1051560" cy="137160"/>
+          </a:xfrm>
+          <a:prstGeom prst="rect">
+            <a:avLst/>
+          </a:prstGeom>
+          <a:noFill/>
+          <a:ln/>
+        </p:spPr>
+        <p:txBody>
+          <a:bodyPr wrap="square" lIns="0" tIns="0" rIns="0" bIns="0" rtlCol="0" anchor="ctr"/>
+          <a:lstStyle/>
+          <a:p>
+            <a:pPr algn="ctr" indent="0" marL="0">
+              <a:buNone/>
+            </a:pPr>
+            <a:r>
+              <a:rPr lang="en-US" sz="680" dirty="0">
+                <a:solidFill>
+                  <a:srgbClr val="12293A"/>
+                </a:solidFill>
+                <a:latin typeface="Poppins" pitchFamily="34" charset="0"/>
+                <a:ea typeface="Poppins" pitchFamily="34" charset="-122"/>
+                <a:cs typeface="Poppins" pitchFamily="34" charset="-120"/>
+              </a:rPr>
+              <a:t>12,856</a:t>
+            </a:r>
+            <a:endParaRPr lang="en-US" sz="680" dirty="0"/>
+          </a:p>
+        </p:txBody>
+      </p:sp>
+      <p:sp>
+        <p:nvSpPr>
+          <p:cNvPr id="113" name="Shape 111"/>
+          <p:cNvSpPr/>
+          <p:nvPr/>
+        </p:nvSpPr>
+        <p:spPr>
+          <a:xfrm>
+            <a:off x="4242816" y="3847795"/>
+            <a:ext cx="996696" cy="123444"/>
+          </a:xfrm>
+          <a:prstGeom prst="rect">
+            <a:avLst/>
+          </a:prstGeom>
+          <a:solidFill>
+            <a:srgbClr val="EDF5F7"/>
+          </a:solidFill>
+          <a:ln/>
+        </p:spPr>
+      </p:sp>
+      <p:sp>
+        <p:nvSpPr>
+          <p:cNvPr id="114" name="Text 112"/>
+          <p:cNvSpPr txBox="1"/>
+          <p:nvPr/>
+        </p:nvSpPr>
+        <p:spPr>
+          <a:xfrm>
+            <a:off x="4215384" y="3840480"/>
+            <a:ext cx="1051560" cy="137160"/>
+          </a:xfrm>
+          <a:prstGeom prst="rect">
+            <a:avLst/>
+          </a:prstGeom>
+          <a:noFill/>
+          <a:ln/>
+        </p:spPr>
+        <p:txBody>
+          <a:bodyPr wrap="square" lIns="0" tIns="0" rIns="0" bIns="0" rtlCol="0" anchor="ctr"/>
+          <a:lstStyle/>
+          <a:p>
+            <a:pPr algn="ctr" indent="0" marL="0">
+              <a:buNone/>
+            </a:pPr>
+            <a:r>
+              <a:rPr lang="en-US" sz="680" dirty="0">
+                <a:solidFill>
+                  <a:srgbClr val="12293A"/>
+                </a:solidFill>
+                <a:latin typeface="Poppins" pitchFamily="34" charset="0"/>
+                <a:ea typeface="Poppins" pitchFamily="34" charset="-122"/>
+                <a:cs typeface="Poppins" pitchFamily="34" charset="-120"/>
+              </a:rPr>
+              <a:t>17,516</a:t>
+            </a:r>
+            <a:endParaRPr lang="en-US" sz="680" dirty="0"/>
+          </a:p>
+        </p:txBody>
+      </p:sp>
+      <p:sp>
+        <p:nvSpPr>
+          <p:cNvPr id="115" name="Shape 113"/>
+          <p:cNvSpPr/>
+          <p:nvPr/>
+        </p:nvSpPr>
+        <p:spPr>
+          <a:xfrm>
+            <a:off x="5321808" y="3847795"/>
+            <a:ext cx="996696" cy="123444"/>
+          </a:xfrm>
+          <a:prstGeom prst="rect">
+            <a:avLst/>
+          </a:prstGeom>
+          <a:solidFill>
+            <a:srgbClr val="EDF5F7"/>
+          </a:solidFill>
+          <a:ln/>
+        </p:spPr>
+      </p:sp>
+      <p:sp>
+        <p:nvSpPr>
+          <p:cNvPr id="116" name="Text 114"/>
+          <p:cNvSpPr txBox="1"/>
+          <p:nvPr/>
+        </p:nvSpPr>
+        <p:spPr>
+          <a:xfrm>
+            <a:off x="5294376" y="3840480"/>
+            <a:ext cx="1051560" cy="137160"/>
+          </a:xfrm>
+          <a:prstGeom prst="rect">
+            <a:avLst/>
+          </a:prstGeom>
+          <a:noFill/>
+          <a:ln/>
+        </p:spPr>
+        <p:txBody>
+          <a:bodyPr wrap="square" lIns="0" tIns="0" rIns="0" bIns="0" rtlCol="0" anchor="ctr"/>
+          <a:lstStyle/>
+          <a:p>
+            <a:pPr algn="ctr" indent="0" marL="0">
+              <a:buNone/>
+            </a:pPr>
+            <a:r>
+              <a:rPr lang="en-US" sz="680" dirty="0">
+                <a:solidFill>
+                  <a:srgbClr val="12293A"/>
+                </a:solidFill>
+                <a:latin typeface="Poppins" pitchFamily="34" charset="0"/>
+                <a:ea typeface="Poppins" pitchFamily="34" charset="-122"/>
+                <a:cs typeface="Poppins" pitchFamily="34" charset="-120"/>
+              </a:rPr>
+              <a:t>8,154</a:t>
+            </a:r>
+            <a:endParaRPr lang="en-US" sz="680" dirty="0"/>
+          </a:p>
+        </p:txBody>
+      </p:sp>
+      <p:sp>
+        <p:nvSpPr>
+          <p:cNvPr id="117" name="Text 115"/>
+          <p:cNvSpPr txBox="1"/>
+          <p:nvPr/>
+        </p:nvSpPr>
+        <p:spPr>
+          <a:xfrm>
+            <a:off x="6400800" y="3840480"/>
+            <a:ext cx="1280160" cy="137160"/>
+          </a:xfrm>
+          <a:prstGeom prst="rect">
+            <a:avLst/>
+          </a:prstGeom>
+          <a:noFill/>
+          <a:ln/>
+        </p:spPr>
+        <p:txBody>
+          <a:bodyPr wrap="square" lIns="0" tIns="0" rIns="0" bIns="0" rtlCol="0" anchor="ctr"/>
+          <a:lstStyle/>
+          <a:p>
+            <a:pPr algn="r" indent="0" marL="0">
+              <a:buNone/>
+            </a:pPr>
+            <a:r>
+              <a:rPr lang="en-US" sz="700" b="1" dirty="0">
+                <a:solidFill>
+                  <a:srgbClr val="5E7280"/>
+                </a:solidFill>
+                <a:latin typeface="Poppins" pitchFamily="34" charset="0"/>
+                <a:ea typeface="Poppins" pitchFamily="34" charset="-122"/>
+                <a:cs typeface="Poppins" pitchFamily="34" charset="-120"/>
+              </a:rPr>
+              <a:t>58,061</a:t>
+            </a:r>
+            <a:endParaRPr lang="en-US" sz="700" dirty="0"/>
+          </a:p>
+        </p:txBody>
+      </p:sp>
+      <p:sp>
+        <p:nvSpPr>
+          <p:cNvPr id="118" name="Text 116"/>
+          <p:cNvSpPr txBox="1"/>
+          <p:nvPr/>
+        </p:nvSpPr>
+        <p:spPr>
+          <a:xfrm>
+            <a:off x="594360" y="3986784"/>
+            <a:ext cx="1417320" cy="137160"/>
+          </a:xfrm>
+          <a:prstGeom prst="rect">
+            <a:avLst/>
+          </a:prstGeom>
+          <a:noFill/>
+          <a:ln/>
+        </p:spPr>
+        <p:txBody>
+          <a:bodyPr wrap="square" lIns="0" tIns="0" rIns="0" bIns="0" rtlCol="0" anchor="ctr"/>
+          <a:lstStyle/>
+          <a:p>
+            <a:pPr indent="0" marL="0">
+              <a:buNone/>
+            </a:pPr>
+            <a:r>
+              <a:rPr lang="en-US" sz="720" b="1" dirty="0">
+                <a:solidFill>
+                  <a:srgbClr val="12293A"/>
+                </a:solidFill>
+                <a:latin typeface="Poppins" pitchFamily="34" charset="0"/>
+                <a:ea typeface="Poppins" pitchFamily="34" charset="-122"/>
+                <a:cs typeface="Poppins" pitchFamily="34" charset="-120"/>
+              </a:rPr>
+              <a:t>Rahul Kumar</a:t>
+            </a:r>
+            <a:endParaRPr lang="en-US" sz="720" dirty="0"/>
+          </a:p>
+        </p:txBody>
+      </p:sp>
+      <p:sp>
+        <p:nvSpPr>
+          <p:cNvPr id="119" name="Text 117"/>
+          <p:cNvSpPr txBox="1"/>
+          <p:nvPr/>
+        </p:nvSpPr>
+        <p:spPr>
+          <a:xfrm>
+            <a:off x="2057400" y="3986784"/>
+            <a:ext cx="1051560" cy="137160"/>
+          </a:xfrm>
+          <a:prstGeom prst="rect">
+            <a:avLst/>
+          </a:prstGeom>
+          <a:noFill/>
+          <a:ln/>
+        </p:spPr>
+        <p:txBody>
+          <a:bodyPr wrap="square" lIns="0" tIns="0" rIns="0" bIns="0" rtlCol="0" anchor="ctr"/>
+          <a:lstStyle/>
+          <a:p>
+            <a:pPr algn="ctr" indent="0" marL="0">
+              <a:buNone/>
+            </a:pPr>
+            <a:r>
+              <a:rPr lang="en-US" sz="680" dirty="0">
+                <a:solidFill>
                   <a:srgbClr val="8FA1AC"/>
                 </a:solidFill>
                 <a:latin typeface="Poppins" pitchFamily="34" charset="0"/>
@@ -17640,14 +19091,34 @@
       </p:sp>
       <p:sp>
         <p:nvSpPr>
-          <p:cNvPr id="75" name="Text 73"/>
-          <p:cNvSpPr txBox="1"/>
-          <p:nvPr/>
-        </p:nvSpPr>
-        <p:spPr>
-          <a:xfrm>
-            <a:off x="4215384" y="3192562"/>
-            <a:ext cx="1051560" cy="116259"/>
+          <p:cNvPr id="120" name="Shape 118"/>
+          <p:cNvSpPr/>
+          <p:nvPr/>
+        </p:nvSpPr>
+        <p:spPr>
+          <a:xfrm>
+            <a:off x="3163824" y="3994099"/>
+            <a:ext cx="996696" cy="123444"/>
+          </a:xfrm>
+          <a:prstGeom prst="rect">
+            <a:avLst/>
+          </a:prstGeom>
+          <a:solidFill>
+            <a:srgbClr val="EDF5F7"/>
+          </a:solidFill>
+          <a:ln/>
+        </p:spPr>
+      </p:sp>
+      <p:sp>
+        <p:nvSpPr>
+          <p:cNvPr id="121" name="Text 119"/>
+          <p:cNvSpPr txBox="1"/>
+          <p:nvPr/>
+        </p:nvSpPr>
+        <p:spPr>
+          <a:xfrm>
+            <a:off x="3136392" y="3986784"/>
+            <a:ext cx="1051560" cy="137160"/>
           </a:xfrm>
           <a:prstGeom prst="rect">
             <a:avLst/>
@@ -17665,13 +19136,13 @@
             <a:r>
               <a:rPr lang="en-US" sz="680" dirty="0">
                 <a:solidFill>
-                  <a:srgbClr val="8FA1AC"/>
-                </a:solidFill>
-                <a:latin typeface="Poppins" pitchFamily="34" charset="0"/>
-                <a:ea typeface="Poppins" pitchFamily="34" charset="-122"/>
-                <a:cs typeface="Poppins" pitchFamily="34" charset="-120"/>
-              </a:rPr>
-              <a:t>—</a:t>
+                  <a:srgbClr val="12293A"/>
+                </a:solidFill>
+                <a:latin typeface="Poppins" pitchFamily="34" charset="0"/>
+                <a:ea typeface="Poppins" pitchFamily="34" charset="-122"/>
+                <a:cs typeface="Poppins" pitchFamily="34" charset="-120"/>
+              </a:rPr>
+              <a:t>42,859</a:t>
             </a:r>
             <a:endParaRPr lang="en-US" sz="680" dirty="0"/>
           </a:p>
@@ -17679,34 +19150,34 @@
       </p:sp>
       <p:sp>
         <p:nvSpPr>
-          <p:cNvPr id="76" name="Shape 74"/>
-          <p:cNvSpPr/>
-          <p:nvPr/>
-        </p:nvSpPr>
-        <p:spPr>
-          <a:xfrm>
-            <a:off x="5321808" y="3199877"/>
-            <a:ext cx="996696" cy="102543"/>
-          </a:xfrm>
-          <a:prstGeom prst="rect">
-            <a:avLst/>
-          </a:prstGeom>
-          <a:solidFill>
-            <a:srgbClr val="D4E9ED"/>
-          </a:solidFill>
-          <a:ln/>
-        </p:spPr>
-      </p:sp>
-      <p:sp>
-        <p:nvSpPr>
-          <p:cNvPr id="77" name="Text 75"/>
-          <p:cNvSpPr txBox="1"/>
-          <p:nvPr/>
-        </p:nvSpPr>
-        <p:spPr>
-          <a:xfrm>
-            <a:off x="5294376" y="3192562"/>
-            <a:ext cx="1051560" cy="116259"/>
+          <p:cNvPr id="122" name="Shape 120"/>
+          <p:cNvSpPr/>
+          <p:nvPr/>
+        </p:nvSpPr>
+        <p:spPr>
+          <a:xfrm>
+            <a:off x="4242816" y="3994099"/>
+            <a:ext cx="996696" cy="123444"/>
+          </a:xfrm>
+          <a:prstGeom prst="rect">
+            <a:avLst/>
+          </a:prstGeom>
+          <a:solidFill>
+            <a:srgbClr val="EDF5F7"/>
+          </a:solidFill>
+          <a:ln/>
+        </p:spPr>
+      </p:sp>
+      <p:sp>
+        <p:nvSpPr>
+          <p:cNvPr id="123" name="Text 121"/>
+          <p:cNvSpPr txBox="1"/>
+          <p:nvPr/>
+        </p:nvSpPr>
+        <p:spPr>
+          <a:xfrm>
+            <a:off x="4215384" y="3986784"/>
+            <a:ext cx="1051560" cy="137160"/>
           </a:xfrm>
           <a:prstGeom prst="rect">
             <a:avLst/>
@@ -17730,7 +19201,7 @@
                 <a:ea typeface="Poppins" pitchFamily="34" charset="-122"/>
                 <a:cs typeface="Poppins" pitchFamily="34" charset="-120"/>
               </a:rPr>
-              <a:t>100,487</a:t>
+              <a:t>23,286</a:t>
             </a:r>
             <a:endParaRPr lang="en-US" sz="680" dirty="0"/>
           </a:p>
@@ -17738,14 +19209,73 @@
       </p:sp>
       <p:sp>
         <p:nvSpPr>
-          <p:cNvPr id="78" name="Text 76"/>
-          <p:cNvSpPr txBox="1"/>
-          <p:nvPr/>
-        </p:nvSpPr>
-        <p:spPr>
-          <a:xfrm>
-            <a:off x="6400800" y="3192562"/>
-            <a:ext cx="1280160" cy="116259"/>
+          <p:cNvPr id="124" name="Shape 122"/>
+          <p:cNvSpPr/>
+          <p:nvPr/>
+        </p:nvSpPr>
+        <p:spPr>
+          <a:xfrm>
+            <a:off x="5321808" y="3994099"/>
+            <a:ext cx="996696" cy="123444"/>
+          </a:xfrm>
+          <a:prstGeom prst="rect">
+            <a:avLst/>
+          </a:prstGeom>
+          <a:solidFill>
+            <a:srgbClr val="EDF5F7"/>
+          </a:solidFill>
+          <a:ln/>
+        </p:spPr>
+      </p:sp>
+      <p:sp>
+        <p:nvSpPr>
+          <p:cNvPr id="125" name="Text 123"/>
+          <p:cNvSpPr txBox="1"/>
+          <p:nvPr/>
+        </p:nvSpPr>
+        <p:spPr>
+          <a:xfrm>
+            <a:off x="5294376" y="3986784"/>
+            <a:ext cx="1051560" cy="137160"/>
+          </a:xfrm>
+          <a:prstGeom prst="rect">
+            <a:avLst/>
+          </a:prstGeom>
+          <a:noFill/>
+          <a:ln/>
+        </p:spPr>
+        <p:txBody>
+          <a:bodyPr wrap="square" lIns="0" tIns="0" rIns="0" bIns="0" rtlCol="0" anchor="ctr"/>
+          <a:lstStyle/>
+          <a:p>
+            <a:pPr algn="ctr" indent="0" marL="0">
+              <a:buNone/>
+            </a:pPr>
+            <a:r>
+              <a:rPr lang="en-US" sz="680" dirty="0">
+                <a:solidFill>
+                  <a:srgbClr val="12293A"/>
+                </a:solidFill>
+                <a:latin typeface="Poppins" pitchFamily="34" charset="0"/>
+                <a:ea typeface="Poppins" pitchFamily="34" charset="-122"/>
+                <a:cs typeface="Poppins" pitchFamily="34" charset="-120"/>
+              </a:rPr>
+              <a:t>17,747</a:t>
+            </a:r>
+            <a:endParaRPr lang="en-US" sz="680" dirty="0"/>
+          </a:p>
+        </p:txBody>
+      </p:sp>
+      <p:sp>
+        <p:nvSpPr>
+          <p:cNvPr id="126" name="Text 124"/>
+          <p:cNvSpPr txBox="1"/>
+          <p:nvPr/>
+        </p:nvSpPr>
+        <p:spPr>
+          <a:xfrm>
+            <a:off x="6400800" y="3986784"/>
+            <a:ext cx="1280160" cy="137160"/>
           </a:xfrm>
           <a:prstGeom prst="rect">
             <a:avLst/>
@@ -17769,7 +19299,7 @@
                 <a:ea typeface="Poppins" pitchFamily="34" charset="-122"/>
                 <a:cs typeface="Poppins" pitchFamily="34" charset="-120"/>
               </a:rPr>
-              <a:t>100,487</a:t>
+              <a:t>83,892</a:t>
             </a:r>
             <a:endParaRPr lang="en-US" sz="700" dirty="0"/>
           </a:p>
@@ -17777,14 +19307,14 @@
       </p:sp>
       <p:sp>
         <p:nvSpPr>
-          <p:cNvPr id="79" name="Text 77"/>
-          <p:cNvSpPr txBox="1"/>
-          <p:nvPr/>
-        </p:nvSpPr>
-        <p:spPr>
-          <a:xfrm>
-            <a:off x="594360" y="3317966"/>
-            <a:ext cx="1417320" cy="116259"/>
+          <p:cNvPr id="127" name="Text 125"/>
+          <p:cNvSpPr txBox="1"/>
+          <p:nvPr/>
+        </p:nvSpPr>
+        <p:spPr>
+          <a:xfrm>
+            <a:off x="594360" y="4133088"/>
+            <a:ext cx="1417320" cy="137160"/>
           </a:xfrm>
           <a:prstGeom prst="rect">
             <a:avLst/>
@@ -17808,7 +19338,7 @@
                 <a:ea typeface="Poppins" pitchFamily="34" charset="-122"/>
                 <a:cs typeface="Poppins" pitchFamily="34" charset="-120"/>
               </a:rPr>
-              <a:t>danm@ (unconfirmed)</a:t>
+              <a:t>Mohamed Ammar</a:t>
             </a:r>
             <a:endParaRPr lang="en-US" sz="720" dirty="0"/>
           </a:p>
@@ -17816,14 +19346,34 @@
       </p:sp>
       <p:sp>
         <p:nvSpPr>
-          <p:cNvPr id="80" name="Text 78"/>
-          <p:cNvSpPr txBox="1"/>
-          <p:nvPr/>
-        </p:nvSpPr>
-        <p:spPr>
-          <a:xfrm>
-            <a:off x="2057400" y="3317966"/>
-            <a:ext cx="1051560" cy="116259"/>
+          <p:cNvPr id="128" name="Shape 126"/>
+          <p:cNvSpPr/>
+          <p:nvPr/>
+        </p:nvSpPr>
+        <p:spPr>
+          <a:xfrm>
+            <a:off x="2084832" y="4140403"/>
+            <a:ext cx="996696" cy="123444"/>
+          </a:xfrm>
+          <a:prstGeom prst="rect">
+            <a:avLst/>
+          </a:prstGeom>
+          <a:solidFill>
+            <a:srgbClr val="EDF5F7"/>
+          </a:solidFill>
+          <a:ln/>
+        </p:spPr>
+      </p:sp>
+      <p:sp>
+        <p:nvSpPr>
+          <p:cNvPr id="129" name="Text 127"/>
+          <p:cNvSpPr txBox="1"/>
+          <p:nvPr/>
+        </p:nvSpPr>
+        <p:spPr>
+          <a:xfrm>
+            <a:off x="2057400" y="4133088"/>
+            <a:ext cx="1051560" cy="137160"/>
           </a:xfrm>
           <a:prstGeom prst="rect">
             <a:avLst/>
@@ -17841,13 +19391,13 @@
             <a:r>
               <a:rPr lang="en-US" sz="680" dirty="0">
                 <a:solidFill>
-                  <a:srgbClr val="8FA1AC"/>
-                </a:solidFill>
-                <a:latin typeface="Poppins" pitchFamily="34" charset="0"/>
-                <a:ea typeface="Poppins" pitchFamily="34" charset="-122"/>
-                <a:cs typeface="Poppins" pitchFamily="34" charset="-120"/>
-              </a:rPr>
-              <a:t>—</a:t>
+                  <a:srgbClr val="12293A"/>
+                </a:solidFill>
+                <a:latin typeface="Poppins" pitchFamily="34" charset="0"/>
+                <a:ea typeface="Poppins" pitchFamily="34" charset="-122"/>
+                <a:cs typeface="Poppins" pitchFamily="34" charset="-120"/>
+              </a:rPr>
+              <a:t>6,582</a:t>
             </a:r>
             <a:endParaRPr lang="en-US" sz="680" dirty="0"/>
           </a:p>
@@ -17855,14 +19405,34 @@
       </p:sp>
       <p:sp>
         <p:nvSpPr>
-          <p:cNvPr id="81" name="Text 79"/>
-          <p:cNvSpPr txBox="1"/>
-          <p:nvPr/>
-        </p:nvSpPr>
-        <p:spPr>
-          <a:xfrm>
-            <a:off x="3136392" y="3317966"/>
-            <a:ext cx="1051560" cy="116259"/>
+          <p:cNvPr id="130" name="Shape 128"/>
+          <p:cNvSpPr/>
+          <p:nvPr/>
+        </p:nvSpPr>
+        <p:spPr>
+          <a:xfrm>
+            <a:off x="3163824" y="4140403"/>
+            <a:ext cx="996696" cy="123444"/>
+          </a:xfrm>
+          <a:prstGeom prst="rect">
+            <a:avLst/>
+          </a:prstGeom>
+          <a:solidFill>
+            <a:srgbClr val="EDF5F7"/>
+          </a:solidFill>
+          <a:ln/>
+        </p:spPr>
+      </p:sp>
+      <p:sp>
+        <p:nvSpPr>
+          <p:cNvPr id="131" name="Text 129"/>
+          <p:cNvSpPr txBox="1"/>
+          <p:nvPr/>
+        </p:nvSpPr>
+        <p:spPr>
+          <a:xfrm>
+            <a:off x="3136392" y="4133088"/>
+            <a:ext cx="1051560" cy="137160"/>
           </a:xfrm>
           <a:prstGeom prst="rect">
             <a:avLst/>
@@ -17880,13 +19450,13 @@
             <a:r>
               <a:rPr lang="en-US" sz="680" dirty="0">
                 <a:solidFill>
-                  <a:srgbClr val="8FA1AC"/>
-                </a:solidFill>
-                <a:latin typeface="Poppins" pitchFamily="34" charset="0"/>
-                <a:ea typeface="Poppins" pitchFamily="34" charset="-122"/>
-                <a:cs typeface="Poppins" pitchFamily="34" charset="-120"/>
-              </a:rPr>
-              <a:t>—</a:t>
+                  <a:srgbClr val="12293A"/>
+                </a:solidFill>
+                <a:latin typeface="Poppins" pitchFamily="34" charset="0"/>
+                <a:ea typeface="Poppins" pitchFamily="34" charset="-122"/>
+                <a:cs typeface="Poppins" pitchFamily="34" charset="-120"/>
+              </a:rPr>
+              <a:t>23,266</a:t>
             </a:r>
             <a:endParaRPr lang="en-US" sz="680" dirty="0"/>
           </a:p>
@@ -17894,14 +19464,34 @@
       </p:sp>
       <p:sp>
         <p:nvSpPr>
-          <p:cNvPr id="82" name="Text 80"/>
-          <p:cNvSpPr txBox="1"/>
-          <p:nvPr/>
-        </p:nvSpPr>
-        <p:spPr>
-          <a:xfrm>
-            <a:off x="4215384" y="3317966"/>
-            <a:ext cx="1051560" cy="116259"/>
+          <p:cNvPr id="132" name="Shape 130"/>
+          <p:cNvSpPr/>
+          <p:nvPr/>
+        </p:nvSpPr>
+        <p:spPr>
+          <a:xfrm>
+            <a:off x="4242816" y="4140403"/>
+            <a:ext cx="996696" cy="123444"/>
+          </a:xfrm>
+          <a:prstGeom prst="rect">
+            <a:avLst/>
+          </a:prstGeom>
+          <a:solidFill>
+            <a:srgbClr val="EDF5F7"/>
+          </a:solidFill>
+          <a:ln/>
+        </p:spPr>
+      </p:sp>
+      <p:sp>
+        <p:nvSpPr>
+          <p:cNvPr id="133" name="Text 131"/>
+          <p:cNvSpPr txBox="1"/>
+          <p:nvPr/>
+        </p:nvSpPr>
+        <p:spPr>
+          <a:xfrm>
+            <a:off x="4215384" y="4133088"/>
+            <a:ext cx="1051560" cy="137160"/>
           </a:xfrm>
           <a:prstGeom prst="rect">
             <a:avLst/>
@@ -17919,13 +19509,13 @@
             <a:r>
               <a:rPr lang="en-US" sz="680" dirty="0">
                 <a:solidFill>
-                  <a:srgbClr val="8FA1AC"/>
-                </a:solidFill>
-                <a:latin typeface="Poppins" pitchFamily="34" charset="0"/>
-                <a:ea typeface="Poppins" pitchFamily="34" charset="-122"/>
-                <a:cs typeface="Poppins" pitchFamily="34" charset="-120"/>
-              </a:rPr>
-              <a:t>—</a:t>
+                  <a:srgbClr val="12293A"/>
+                </a:solidFill>
+                <a:latin typeface="Poppins" pitchFamily="34" charset="0"/>
+                <a:ea typeface="Poppins" pitchFamily="34" charset="-122"/>
+                <a:cs typeface="Poppins" pitchFamily="34" charset="-120"/>
+              </a:rPr>
+              <a:t>4,322</a:t>
             </a:r>
             <a:endParaRPr lang="en-US" sz="680" dirty="0"/>
           </a:p>
@@ -17933,34 +19523,34 @@
       </p:sp>
       <p:sp>
         <p:nvSpPr>
-          <p:cNvPr id="83" name="Shape 81"/>
-          <p:cNvSpPr/>
-          <p:nvPr/>
-        </p:nvSpPr>
-        <p:spPr>
-          <a:xfrm>
-            <a:off x="5321808" y="3325281"/>
-            <a:ext cx="996696" cy="102543"/>
-          </a:xfrm>
-          <a:prstGeom prst="rect">
-            <a:avLst/>
-          </a:prstGeom>
-          <a:solidFill>
-            <a:srgbClr val="D4E9ED"/>
-          </a:solidFill>
-          <a:ln/>
-        </p:spPr>
-      </p:sp>
-      <p:sp>
-        <p:nvSpPr>
-          <p:cNvPr id="84" name="Text 82"/>
-          <p:cNvSpPr txBox="1"/>
-          <p:nvPr/>
-        </p:nvSpPr>
-        <p:spPr>
-          <a:xfrm>
-            <a:off x="5294376" y="3317966"/>
-            <a:ext cx="1051560" cy="116259"/>
+          <p:cNvPr id="134" name="Shape 132"/>
+          <p:cNvSpPr/>
+          <p:nvPr/>
+        </p:nvSpPr>
+        <p:spPr>
+          <a:xfrm>
+            <a:off x="5321808" y="4140403"/>
+            <a:ext cx="996696" cy="123444"/>
+          </a:xfrm>
+          <a:prstGeom prst="rect">
+            <a:avLst/>
+          </a:prstGeom>
+          <a:solidFill>
+            <a:srgbClr val="EDF5F7"/>
+          </a:solidFill>
+          <a:ln/>
+        </p:spPr>
+      </p:sp>
+      <p:sp>
+        <p:nvSpPr>
+          <p:cNvPr id="135" name="Text 133"/>
+          <p:cNvSpPr txBox="1"/>
+          <p:nvPr/>
+        </p:nvSpPr>
+        <p:spPr>
+          <a:xfrm>
+            <a:off x="5294376" y="4133088"/>
+            <a:ext cx="1051560" cy="137160"/>
           </a:xfrm>
           <a:prstGeom prst="rect">
             <a:avLst/>
@@ -17984,7 +19574,7 @@
                 <a:ea typeface="Poppins" pitchFamily="34" charset="-122"/>
                 <a:cs typeface="Poppins" pitchFamily="34" charset="-120"/>
               </a:rPr>
-              <a:t>151,122</a:t>
+              <a:t>8,922</a:t>
             </a:r>
             <a:endParaRPr lang="en-US" sz="680" dirty="0"/>
           </a:p>
@@ -17992,14 +19582,14 @@
       </p:sp>
       <p:sp>
         <p:nvSpPr>
-          <p:cNvPr id="85" name="Text 83"/>
-          <p:cNvSpPr txBox="1"/>
-          <p:nvPr/>
-        </p:nvSpPr>
-        <p:spPr>
-          <a:xfrm>
-            <a:off x="6400800" y="3317966"/>
-            <a:ext cx="1280160" cy="116259"/>
+          <p:cNvPr id="136" name="Text 134"/>
+          <p:cNvSpPr txBox="1"/>
+          <p:nvPr/>
+        </p:nvSpPr>
+        <p:spPr>
+          <a:xfrm>
+            <a:off x="6400800" y="4133088"/>
+            <a:ext cx="1280160" cy="137160"/>
           </a:xfrm>
           <a:prstGeom prst="rect">
             <a:avLst/>
@@ -18023,7 +19613,7 @@
                 <a:ea typeface="Poppins" pitchFamily="34" charset="-122"/>
                 <a:cs typeface="Poppins" pitchFamily="34" charset="-120"/>
               </a:rPr>
-              <a:t>151,122</a:t>
+              <a:t>43,092</a:t>
             </a:r>
             <a:endParaRPr lang="en-US" sz="700" dirty="0"/>
           </a:p>
@@ -18031,14 +19621,14 @@
       </p:sp>
       <p:sp>
         <p:nvSpPr>
-          <p:cNvPr id="86" name="Text 84"/>
-          <p:cNvSpPr txBox="1"/>
-          <p:nvPr/>
-        </p:nvSpPr>
-        <p:spPr>
-          <a:xfrm>
-            <a:off x="594360" y="3443369"/>
-            <a:ext cx="1417320" cy="116259"/>
+          <p:cNvPr id="137" name="Text 135"/>
+          <p:cNvSpPr txBox="1"/>
+          <p:nvPr/>
+        </p:nvSpPr>
+        <p:spPr>
+          <a:xfrm>
+            <a:off x="594360" y="4279392"/>
+            <a:ext cx="1417320" cy="137160"/>
           </a:xfrm>
           <a:prstGeom prst="rect">
             <a:avLst/>
@@ -18062,7 +19652,7 @@
                 <a:ea typeface="Poppins" pitchFamily="34" charset="-122"/>
                 <a:cs typeface="Poppins" pitchFamily="34" charset="-120"/>
               </a:rPr>
-              <a:t>dan@ (unconfirmed)</a:t>
+              <a:t>Tony Ghoussein</a:t>
             </a:r>
             <a:endParaRPr lang="en-US" sz="720" dirty="0"/>
           </a:p>
@@ -18070,14 +19660,34 @@
       </p:sp>
       <p:sp>
         <p:nvSpPr>
-          <p:cNvPr id="87" name="Text 85"/>
-          <p:cNvSpPr txBox="1"/>
-          <p:nvPr/>
-        </p:nvSpPr>
-        <p:spPr>
-          <a:xfrm>
-            <a:off x="2057400" y="3443369"/>
-            <a:ext cx="1051560" cy="116259"/>
+          <p:cNvPr id="138" name="Shape 136"/>
+          <p:cNvSpPr/>
+          <p:nvPr/>
+        </p:nvSpPr>
+        <p:spPr>
+          <a:xfrm>
+            <a:off x="2084832" y="4286707"/>
+            <a:ext cx="996696" cy="123444"/>
+          </a:xfrm>
+          <a:prstGeom prst="rect">
+            <a:avLst/>
+          </a:prstGeom>
+          <a:solidFill>
+            <a:srgbClr val="EDF5F7"/>
+          </a:solidFill>
+          <a:ln/>
+        </p:spPr>
+      </p:sp>
+      <p:sp>
+        <p:nvSpPr>
+          <p:cNvPr id="139" name="Text 137"/>
+          <p:cNvSpPr txBox="1"/>
+          <p:nvPr/>
+        </p:nvSpPr>
+        <p:spPr>
+          <a:xfrm>
+            <a:off x="2057400" y="4279392"/>
+            <a:ext cx="1051560" cy="137160"/>
           </a:xfrm>
           <a:prstGeom prst="rect">
             <a:avLst/>
@@ -18095,13 +19705,13 @@
             <a:r>
               <a:rPr lang="en-US" sz="680" dirty="0">
                 <a:solidFill>
-                  <a:srgbClr val="8FA1AC"/>
-                </a:solidFill>
-                <a:latin typeface="Poppins" pitchFamily="34" charset="0"/>
-                <a:ea typeface="Poppins" pitchFamily="34" charset="-122"/>
-                <a:cs typeface="Poppins" pitchFamily="34" charset="-120"/>
-              </a:rPr>
-              <a:t>—</a:t>
+                  <a:srgbClr val="12293A"/>
+                </a:solidFill>
+                <a:latin typeface="Poppins" pitchFamily="34" charset="0"/>
+                <a:ea typeface="Poppins" pitchFamily="34" charset="-122"/>
+                <a:cs typeface="Poppins" pitchFamily="34" charset="-120"/>
+              </a:rPr>
+              <a:t>6,208</a:t>
             </a:r>
             <a:endParaRPr lang="en-US" sz="680" dirty="0"/>
           </a:p>
@@ -18109,14 +19719,34 @@
       </p:sp>
       <p:sp>
         <p:nvSpPr>
-          <p:cNvPr id="88" name="Text 86"/>
-          <p:cNvSpPr txBox="1"/>
-          <p:nvPr/>
-        </p:nvSpPr>
-        <p:spPr>
-          <a:xfrm>
-            <a:off x="3136392" y="3443369"/>
-            <a:ext cx="1051560" cy="116259"/>
+          <p:cNvPr id="140" name="Shape 138"/>
+          <p:cNvSpPr/>
+          <p:nvPr/>
+        </p:nvSpPr>
+        <p:spPr>
+          <a:xfrm>
+            <a:off x="3163824" y="4286707"/>
+            <a:ext cx="996696" cy="123444"/>
+          </a:xfrm>
+          <a:prstGeom prst="rect">
+            <a:avLst/>
+          </a:prstGeom>
+          <a:solidFill>
+            <a:srgbClr val="EDF5F7"/>
+          </a:solidFill>
+          <a:ln/>
+        </p:spPr>
+      </p:sp>
+      <p:sp>
+        <p:nvSpPr>
+          <p:cNvPr id="141" name="Text 139"/>
+          <p:cNvSpPr txBox="1"/>
+          <p:nvPr/>
+        </p:nvSpPr>
+        <p:spPr>
+          <a:xfrm>
+            <a:off x="3136392" y="4279392"/>
+            <a:ext cx="1051560" cy="137160"/>
           </a:xfrm>
           <a:prstGeom prst="rect">
             <a:avLst/>
@@ -18134,13 +19764,13 @@
             <a:r>
               <a:rPr lang="en-US" sz="680" dirty="0">
                 <a:solidFill>
-                  <a:srgbClr val="8FA1AC"/>
-                </a:solidFill>
-                <a:latin typeface="Poppins" pitchFamily="34" charset="0"/>
-                <a:ea typeface="Poppins" pitchFamily="34" charset="-122"/>
-                <a:cs typeface="Poppins" pitchFamily="34" charset="-120"/>
-              </a:rPr>
-              <a:t>—</a:t>
+                  <a:srgbClr val="12293A"/>
+                </a:solidFill>
+                <a:latin typeface="Poppins" pitchFamily="34" charset="0"/>
+                <a:ea typeface="Poppins" pitchFamily="34" charset="-122"/>
+                <a:cs typeface="Poppins" pitchFamily="34" charset="-120"/>
+              </a:rPr>
+              <a:t>10,369</a:t>
             </a:r>
             <a:endParaRPr lang="en-US" sz="680" dirty="0"/>
           </a:p>
@@ -18148,14 +19778,34 @@
       </p:sp>
       <p:sp>
         <p:nvSpPr>
-          <p:cNvPr id="89" name="Text 87"/>
-          <p:cNvSpPr txBox="1"/>
-          <p:nvPr/>
-        </p:nvSpPr>
-        <p:spPr>
-          <a:xfrm>
-            <a:off x="4215384" y="3443369"/>
-            <a:ext cx="1051560" cy="116259"/>
+          <p:cNvPr id="142" name="Shape 140"/>
+          <p:cNvSpPr/>
+          <p:nvPr/>
+        </p:nvSpPr>
+        <p:spPr>
+          <a:xfrm>
+            <a:off x="4242816" y="4286707"/>
+            <a:ext cx="996696" cy="123444"/>
+          </a:xfrm>
+          <a:prstGeom prst="rect">
+            <a:avLst/>
+          </a:prstGeom>
+          <a:solidFill>
+            <a:srgbClr val="EDF5F7"/>
+          </a:solidFill>
+          <a:ln/>
+        </p:spPr>
+      </p:sp>
+      <p:sp>
+        <p:nvSpPr>
+          <p:cNvPr id="143" name="Text 141"/>
+          <p:cNvSpPr txBox="1"/>
+          <p:nvPr/>
+        </p:nvSpPr>
+        <p:spPr>
+          <a:xfrm>
+            <a:off x="4215384" y="4279392"/>
+            <a:ext cx="1051560" cy="137160"/>
           </a:xfrm>
           <a:prstGeom prst="rect">
             <a:avLst/>
@@ -18173,13 +19823,13 @@
             <a:r>
               <a:rPr lang="en-US" sz="680" dirty="0">
                 <a:solidFill>
-                  <a:srgbClr val="8FA1AC"/>
-                </a:solidFill>
-                <a:latin typeface="Poppins" pitchFamily="34" charset="0"/>
-                <a:ea typeface="Poppins" pitchFamily="34" charset="-122"/>
-                <a:cs typeface="Poppins" pitchFamily="34" charset="-120"/>
-              </a:rPr>
-              <a:t>—</a:t>
+                  <a:srgbClr val="12293A"/>
+                </a:solidFill>
+                <a:latin typeface="Poppins" pitchFamily="34" charset="0"/>
+                <a:ea typeface="Poppins" pitchFamily="34" charset="-122"/>
+                <a:cs typeface="Poppins" pitchFamily="34" charset="-120"/>
+              </a:rPr>
+              <a:t>11,891</a:t>
             </a:r>
             <a:endParaRPr lang="en-US" sz="680" dirty="0"/>
           </a:p>
@@ -18187,14 +19837,14 @@
       </p:sp>
       <p:sp>
         <p:nvSpPr>
-          <p:cNvPr id="90" name="Shape 88"/>
-          <p:cNvSpPr/>
-          <p:nvPr/>
-        </p:nvSpPr>
-        <p:spPr>
-          <a:xfrm>
-            <a:off x="5321808" y="3450684"/>
-            <a:ext cx="996696" cy="102543"/>
+          <p:cNvPr id="144" name="Shape 142"/>
+          <p:cNvSpPr/>
+          <p:nvPr/>
+        </p:nvSpPr>
+        <p:spPr>
+          <a:xfrm>
+            <a:off x="5321808" y="4286707"/>
+            <a:ext cx="996696" cy="123444"/>
           </a:xfrm>
           <a:prstGeom prst="rect">
             <a:avLst/>
@@ -18207,14 +19857,14 @@
       </p:sp>
       <p:sp>
         <p:nvSpPr>
-          <p:cNvPr id="91" name="Text 89"/>
-          <p:cNvSpPr txBox="1"/>
-          <p:nvPr/>
-        </p:nvSpPr>
-        <p:spPr>
-          <a:xfrm>
-            <a:off x="5294376" y="3443369"/>
-            <a:ext cx="1051560" cy="116259"/>
+          <p:cNvPr id="145" name="Text 143"/>
+          <p:cNvSpPr txBox="1"/>
+          <p:nvPr/>
+        </p:nvSpPr>
+        <p:spPr>
+          <a:xfrm>
+            <a:off x="5294376" y="4279392"/>
+            <a:ext cx="1051560" cy="137160"/>
           </a:xfrm>
           <a:prstGeom prst="rect">
             <a:avLst/>
@@ -18238,7 +19888,7 @@
                 <a:ea typeface="Poppins" pitchFamily="34" charset="-122"/>
                 <a:cs typeface="Poppins" pitchFamily="34" charset="-120"/>
               </a:rPr>
-              <a:t>86,307</a:t>
+              <a:t>30,083</a:t>
             </a:r>
             <a:endParaRPr lang="en-US" sz="680" dirty="0"/>
           </a:p>
@@ -18246,14 +19896,14 @@
       </p:sp>
       <p:sp>
         <p:nvSpPr>
-          <p:cNvPr id="92" name="Text 90"/>
-          <p:cNvSpPr txBox="1"/>
-          <p:nvPr/>
-        </p:nvSpPr>
-        <p:spPr>
-          <a:xfrm>
-            <a:off x="6400800" y="3443369"/>
-            <a:ext cx="1280160" cy="116259"/>
+          <p:cNvPr id="146" name="Text 144"/>
+          <p:cNvSpPr txBox="1"/>
+          <p:nvPr/>
+        </p:nvSpPr>
+        <p:spPr>
+          <a:xfrm>
+            <a:off x="6400800" y="4279392"/>
+            <a:ext cx="1280160" cy="137160"/>
           </a:xfrm>
           <a:prstGeom prst="rect">
             <a:avLst/>
@@ -18277,7 +19927,7 @@
                 <a:ea typeface="Poppins" pitchFamily="34" charset="-122"/>
                 <a:cs typeface="Poppins" pitchFamily="34" charset="-120"/>
               </a:rPr>
-              <a:t>86,307</a:t>
+              <a:t>58,551</a:t>
             </a:r>
             <a:endParaRPr lang="en-US" sz="700" dirty="0"/>
           </a:p>
@@ -18285,14 +19935,14 @@
       </p:sp>
       <p:sp>
         <p:nvSpPr>
-          <p:cNvPr id="93" name="Text 91"/>
-          <p:cNvSpPr txBox="1"/>
-          <p:nvPr/>
-        </p:nvSpPr>
-        <p:spPr>
-          <a:xfrm>
-            <a:off x="594360" y="3568773"/>
-            <a:ext cx="1417320" cy="116259"/>
+          <p:cNvPr id="147" name="Text 145"/>
+          <p:cNvSpPr txBox="1"/>
+          <p:nvPr/>
+        </p:nvSpPr>
+        <p:spPr>
+          <a:xfrm>
+            <a:off x="594360" y="4425696"/>
+            <a:ext cx="1417320" cy="137160"/>
           </a:xfrm>
           <a:prstGeom prst="rect">
             <a:avLst/>
@@ -18316,7 +19966,7 @@
                 <a:ea typeface="Poppins" pitchFamily="34" charset="-122"/>
                 <a:cs typeface="Poppins" pitchFamily="34" charset="-120"/>
               </a:rPr>
-              <a:t>Hawraa Khalil</a:t>
+              <a:t>Eric Cruz</a:t>
             </a:r>
             <a:endParaRPr lang="en-US" sz="720" dirty="0"/>
           </a:p>
@@ -18324,14 +19974,14 @@
       </p:sp>
       <p:sp>
         <p:nvSpPr>
-          <p:cNvPr id="94" name="Shape 92"/>
-          <p:cNvSpPr/>
-          <p:nvPr/>
-        </p:nvSpPr>
-        <p:spPr>
-          <a:xfrm>
-            <a:off x="2084832" y="3576088"/>
-            <a:ext cx="996696" cy="102543"/>
+          <p:cNvPr id="148" name="Shape 146"/>
+          <p:cNvSpPr/>
+          <p:nvPr/>
+        </p:nvSpPr>
+        <p:spPr>
+          <a:xfrm>
+            <a:off x="2084832" y="4433011"/>
+            <a:ext cx="996696" cy="123444"/>
           </a:xfrm>
           <a:prstGeom prst="rect">
             <a:avLst/>
@@ -18344,14 +19994,14 @@
       </p:sp>
       <p:sp>
         <p:nvSpPr>
-          <p:cNvPr id="95" name="Text 93"/>
-          <p:cNvSpPr txBox="1"/>
-          <p:nvPr/>
-        </p:nvSpPr>
-        <p:spPr>
-          <a:xfrm>
-            <a:off x="2057400" y="3568773"/>
-            <a:ext cx="1051560" cy="116259"/>
+          <p:cNvPr id="149" name="Text 147"/>
+          <p:cNvSpPr txBox="1"/>
+          <p:nvPr/>
+        </p:nvSpPr>
+        <p:spPr>
+          <a:xfrm>
+            <a:off x="2057400" y="4425696"/>
+            <a:ext cx="1051560" cy="137160"/>
           </a:xfrm>
           <a:prstGeom prst="rect">
             <a:avLst/>
@@ -18375,7 +20025,7 @@
                 <a:ea typeface="Poppins" pitchFamily="34" charset="-122"/>
                 <a:cs typeface="Poppins" pitchFamily="34" charset="-120"/>
               </a:rPr>
-              <a:t>28,536</a:t>
+              <a:t>2,970</a:t>
             </a:r>
             <a:endParaRPr lang="en-US" sz="680" dirty="0"/>
           </a:p>
@@ -18383,14 +20033,14 @@
       </p:sp>
       <p:sp>
         <p:nvSpPr>
-          <p:cNvPr id="96" name="Shape 94"/>
-          <p:cNvSpPr/>
-          <p:nvPr/>
-        </p:nvSpPr>
-        <p:spPr>
-          <a:xfrm>
-            <a:off x="3163824" y="3576088"/>
-            <a:ext cx="996696" cy="102543"/>
+          <p:cNvPr id="150" name="Shape 148"/>
+          <p:cNvSpPr/>
+          <p:nvPr/>
+        </p:nvSpPr>
+        <p:spPr>
+          <a:xfrm>
+            <a:off x="3163824" y="4433011"/>
+            <a:ext cx="996696" cy="123444"/>
           </a:xfrm>
           <a:prstGeom prst="rect">
             <a:avLst/>
@@ -18403,14 +20053,14 @@
       </p:sp>
       <p:sp>
         <p:nvSpPr>
-          <p:cNvPr id="97" name="Text 95"/>
-          <p:cNvSpPr txBox="1"/>
-          <p:nvPr/>
-        </p:nvSpPr>
-        <p:spPr>
-          <a:xfrm>
-            <a:off x="3136392" y="3568773"/>
-            <a:ext cx="1051560" cy="116259"/>
+          <p:cNvPr id="151" name="Text 149"/>
+          <p:cNvSpPr txBox="1"/>
+          <p:nvPr/>
+        </p:nvSpPr>
+        <p:spPr>
+          <a:xfrm>
+            <a:off x="3136392" y="4425696"/>
+            <a:ext cx="1051560" cy="137160"/>
           </a:xfrm>
           <a:prstGeom prst="rect">
             <a:avLst/>
@@ -18434,7 +20084,7 @@
                 <a:ea typeface="Poppins" pitchFamily="34" charset="-122"/>
                 <a:cs typeface="Poppins" pitchFamily="34" charset="-120"/>
               </a:rPr>
-              <a:t>23,285</a:t>
+              <a:t>7,237</a:t>
             </a:r>
             <a:endParaRPr lang="en-US" sz="680" dirty="0"/>
           </a:p>
@@ -18442,14 +20092,14 @@
       </p:sp>
       <p:sp>
         <p:nvSpPr>
-          <p:cNvPr id="98" name="Shape 96"/>
-          <p:cNvSpPr/>
-          <p:nvPr/>
-        </p:nvSpPr>
-        <p:spPr>
-          <a:xfrm>
-            <a:off x="4242816" y="3576088"/>
-            <a:ext cx="996696" cy="102543"/>
+          <p:cNvPr id="152" name="Shape 150"/>
+          <p:cNvSpPr/>
+          <p:nvPr/>
+        </p:nvSpPr>
+        <p:spPr>
+          <a:xfrm>
+            <a:off x="4242816" y="4433011"/>
+            <a:ext cx="996696" cy="123444"/>
           </a:xfrm>
           <a:prstGeom prst="rect">
             <a:avLst/>
@@ -18462,14 +20112,14 @@
       </p:sp>
       <p:sp>
         <p:nvSpPr>
-          <p:cNvPr id="99" name="Text 97"/>
-          <p:cNvSpPr txBox="1"/>
-          <p:nvPr/>
-        </p:nvSpPr>
-        <p:spPr>
-          <a:xfrm>
-            <a:off x="4215384" y="3568773"/>
-            <a:ext cx="1051560" cy="116259"/>
+          <p:cNvPr id="153" name="Text 151"/>
+          <p:cNvSpPr txBox="1"/>
+          <p:nvPr/>
+        </p:nvSpPr>
+        <p:spPr>
+          <a:xfrm>
+            <a:off x="4215384" y="4425696"/>
+            <a:ext cx="1051560" cy="137160"/>
           </a:xfrm>
           <a:prstGeom prst="rect">
             <a:avLst/>
@@ -18493,7 +20143,7 @@
                 <a:ea typeface="Poppins" pitchFamily="34" charset="-122"/>
                 <a:cs typeface="Poppins" pitchFamily="34" charset="-120"/>
               </a:rPr>
-              <a:t>19,047</a:t>
+              <a:t>19,289</a:t>
             </a:r>
             <a:endParaRPr lang="en-US" sz="680" dirty="0"/>
           </a:p>
@@ -18501,14 +20151,34 @@
       </p:sp>
       <p:sp>
         <p:nvSpPr>
-          <p:cNvPr id="100" name="Text 98"/>
-          <p:cNvSpPr txBox="1"/>
-          <p:nvPr/>
-        </p:nvSpPr>
-        <p:spPr>
-          <a:xfrm>
-            <a:off x="5294376" y="3568773"/>
-            <a:ext cx="1051560" cy="116259"/>
+          <p:cNvPr id="154" name="Shape 152"/>
+          <p:cNvSpPr/>
+          <p:nvPr/>
+        </p:nvSpPr>
+        <p:spPr>
+          <a:xfrm>
+            <a:off x="5321808" y="4433011"/>
+            <a:ext cx="996696" cy="123444"/>
+          </a:xfrm>
+          <a:prstGeom prst="rect">
+            <a:avLst/>
+          </a:prstGeom>
+          <a:solidFill>
+            <a:srgbClr val="EDF5F7"/>
+          </a:solidFill>
+          <a:ln/>
+        </p:spPr>
+      </p:sp>
+      <p:sp>
+        <p:nvSpPr>
+          <p:cNvPr id="155" name="Text 153"/>
+          <p:cNvSpPr txBox="1"/>
+          <p:nvPr/>
+        </p:nvSpPr>
+        <p:spPr>
+          <a:xfrm>
+            <a:off x="5294376" y="4425696"/>
+            <a:ext cx="1051560" cy="137160"/>
           </a:xfrm>
           <a:prstGeom prst="rect">
             <a:avLst/>
@@ -18526,13 +20196,13 @@
             <a:r>
               <a:rPr lang="en-US" sz="680" dirty="0">
                 <a:solidFill>
-                  <a:srgbClr val="8FA1AC"/>
-                </a:solidFill>
-                <a:latin typeface="Poppins" pitchFamily="34" charset="0"/>
-                <a:ea typeface="Poppins" pitchFamily="34" charset="-122"/>
-                <a:cs typeface="Poppins" pitchFamily="34" charset="-120"/>
-              </a:rPr>
-              <a:t>—</a:t>
+                  <a:srgbClr val="12293A"/>
+                </a:solidFill>
+                <a:latin typeface="Poppins" pitchFamily="34" charset="0"/>
+                <a:ea typeface="Poppins" pitchFamily="34" charset="-122"/>
+                <a:cs typeface="Poppins" pitchFamily="34" charset="-120"/>
+              </a:rPr>
+              <a:t>6,155</a:t>
             </a:r>
             <a:endParaRPr lang="en-US" sz="680" dirty="0"/>
           </a:p>
@@ -18540,14 +20210,14 @@
       </p:sp>
       <p:sp>
         <p:nvSpPr>
-          <p:cNvPr id="101" name="Text 99"/>
-          <p:cNvSpPr txBox="1"/>
-          <p:nvPr/>
-        </p:nvSpPr>
-        <p:spPr>
-          <a:xfrm>
-            <a:off x="6400800" y="3568773"/>
-            <a:ext cx="1280160" cy="116259"/>
+          <p:cNvPr id="156" name="Text 154"/>
+          <p:cNvSpPr txBox="1"/>
+          <p:nvPr/>
+        </p:nvSpPr>
+        <p:spPr>
+          <a:xfrm>
+            <a:off x="6400800" y="4425696"/>
+            <a:ext cx="1280160" cy="137160"/>
           </a:xfrm>
           <a:prstGeom prst="rect">
             <a:avLst/>
@@ -18571,7 +20241,7 @@
                 <a:ea typeface="Poppins" pitchFamily="34" charset="-122"/>
                 <a:cs typeface="Poppins" pitchFamily="34" charset="-120"/>
               </a:rPr>
-              <a:t>70,868</a:t>
+              <a:t>35,651</a:t>
             </a:r>
             <a:endParaRPr lang="en-US" sz="700" dirty="0"/>
           </a:p>
@@ -18579,2185 +20249,7 @@
       </p:sp>
       <p:sp>
         <p:nvSpPr>
-          <p:cNvPr id="102" name="Text 100"/>
-          <p:cNvSpPr txBox="1"/>
-          <p:nvPr/>
-        </p:nvSpPr>
-        <p:spPr>
-          <a:xfrm>
-            <a:off x="594360" y="3694176"/>
-            <a:ext cx="1417320" cy="116259"/>
-          </a:xfrm>
-          <a:prstGeom prst="rect">
-            <a:avLst/>
-          </a:prstGeom>
-          <a:noFill/>
-          <a:ln/>
-        </p:spPr>
-        <p:txBody>
-          <a:bodyPr wrap="square" lIns="0" tIns="0" rIns="0" bIns="0" rtlCol="0" anchor="ctr"/>
-          <a:lstStyle/>
-          <a:p>
-            <a:pPr indent="0" marL="0">
-              <a:buNone/>
-            </a:pPr>
-            <a:r>
-              <a:rPr lang="en-US" sz="720" b="1" dirty="0">
-                <a:solidFill>
-                  <a:srgbClr val="12293A"/>
-                </a:solidFill>
-                <a:latin typeface="Poppins" pitchFamily="34" charset="0"/>
-                <a:ea typeface="Poppins" pitchFamily="34" charset="-122"/>
-                <a:cs typeface="Poppins" pitchFamily="34" charset="-120"/>
-              </a:rPr>
-              <a:t>Ciaran Dempsey</a:t>
-            </a:r>
-            <a:endParaRPr lang="en-US" sz="720" dirty="0"/>
-          </a:p>
-        </p:txBody>
-      </p:sp>
-      <p:sp>
-        <p:nvSpPr>
-          <p:cNvPr id="103" name="Shape 101"/>
-          <p:cNvSpPr/>
-          <p:nvPr/>
-        </p:nvSpPr>
-        <p:spPr>
-          <a:xfrm>
-            <a:off x="2084832" y="3701491"/>
-            <a:ext cx="996696" cy="102543"/>
-          </a:xfrm>
-          <a:prstGeom prst="rect">
-            <a:avLst/>
-          </a:prstGeom>
-          <a:solidFill>
-            <a:srgbClr val="EDF5F7"/>
-          </a:solidFill>
-          <a:ln/>
-        </p:spPr>
-      </p:sp>
-      <p:sp>
-        <p:nvSpPr>
-          <p:cNvPr id="104" name="Text 102"/>
-          <p:cNvSpPr txBox="1"/>
-          <p:nvPr/>
-        </p:nvSpPr>
-        <p:spPr>
-          <a:xfrm>
-            <a:off x="2057400" y="3694176"/>
-            <a:ext cx="1051560" cy="116259"/>
-          </a:xfrm>
-          <a:prstGeom prst="rect">
-            <a:avLst/>
-          </a:prstGeom>
-          <a:noFill/>
-          <a:ln/>
-        </p:spPr>
-        <p:txBody>
-          <a:bodyPr wrap="square" lIns="0" tIns="0" rIns="0" bIns="0" rtlCol="0" anchor="ctr"/>
-          <a:lstStyle/>
-          <a:p>
-            <a:pPr algn="ctr" indent="0" marL="0">
-              <a:buNone/>
-            </a:pPr>
-            <a:r>
-              <a:rPr lang="en-US" sz="680" dirty="0">
-                <a:solidFill>
-                  <a:srgbClr val="12293A"/>
-                </a:solidFill>
-                <a:latin typeface="Poppins" pitchFamily="34" charset="0"/>
-                <a:ea typeface="Poppins" pitchFamily="34" charset="-122"/>
-                <a:cs typeface="Poppins" pitchFamily="34" charset="-120"/>
-              </a:rPr>
-              <a:t>18,918</a:t>
-            </a:r>
-            <a:endParaRPr lang="en-US" sz="680" dirty="0"/>
-          </a:p>
-        </p:txBody>
-      </p:sp>
-      <p:sp>
-        <p:nvSpPr>
-          <p:cNvPr id="105" name="Shape 103"/>
-          <p:cNvSpPr/>
-          <p:nvPr/>
-        </p:nvSpPr>
-        <p:spPr>
-          <a:xfrm>
-            <a:off x="3163824" y="3701491"/>
-            <a:ext cx="996696" cy="102543"/>
-          </a:xfrm>
-          <a:prstGeom prst="rect">
-            <a:avLst/>
-          </a:prstGeom>
-          <a:solidFill>
-            <a:srgbClr val="EDF5F7"/>
-          </a:solidFill>
-          <a:ln/>
-        </p:spPr>
-      </p:sp>
-      <p:sp>
-        <p:nvSpPr>
-          <p:cNvPr id="106" name="Text 104"/>
-          <p:cNvSpPr txBox="1"/>
-          <p:nvPr/>
-        </p:nvSpPr>
-        <p:spPr>
-          <a:xfrm>
-            <a:off x="3136392" y="3694176"/>
-            <a:ext cx="1051560" cy="116259"/>
-          </a:xfrm>
-          <a:prstGeom prst="rect">
-            <a:avLst/>
-          </a:prstGeom>
-          <a:noFill/>
-          <a:ln/>
-        </p:spPr>
-        <p:txBody>
-          <a:bodyPr wrap="square" lIns="0" tIns="0" rIns="0" bIns="0" rtlCol="0" anchor="ctr"/>
-          <a:lstStyle/>
-          <a:p>
-            <a:pPr algn="ctr" indent="0" marL="0">
-              <a:buNone/>
-            </a:pPr>
-            <a:r>
-              <a:rPr lang="en-US" sz="680" dirty="0">
-                <a:solidFill>
-                  <a:srgbClr val="12293A"/>
-                </a:solidFill>
-                <a:latin typeface="Poppins" pitchFamily="34" charset="0"/>
-                <a:ea typeface="Poppins" pitchFamily="34" charset="-122"/>
-                <a:cs typeface="Poppins" pitchFamily="34" charset="-120"/>
-              </a:rPr>
-              <a:t>23,650</a:t>
-            </a:r>
-            <a:endParaRPr lang="en-US" sz="680" dirty="0"/>
-          </a:p>
-        </p:txBody>
-      </p:sp>
-      <p:sp>
-        <p:nvSpPr>
-          <p:cNvPr id="107" name="Shape 105"/>
-          <p:cNvSpPr/>
-          <p:nvPr/>
-        </p:nvSpPr>
-        <p:spPr>
-          <a:xfrm>
-            <a:off x="4242816" y="3701491"/>
-            <a:ext cx="996696" cy="102543"/>
-          </a:xfrm>
-          <a:prstGeom prst="rect">
-            <a:avLst/>
-          </a:prstGeom>
-          <a:solidFill>
-            <a:srgbClr val="EDF5F7"/>
-          </a:solidFill>
-          <a:ln/>
-        </p:spPr>
-      </p:sp>
-      <p:sp>
-        <p:nvSpPr>
-          <p:cNvPr id="108" name="Text 106"/>
-          <p:cNvSpPr txBox="1"/>
-          <p:nvPr/>
-        </p:nvSpPr>
-        <p:spPr>
-          <a:xfrm>
-            <a:off x="4215384" y="3694176"/>
-            <a:ext cx="1051560" cy="116259"/>
-          </a:xfrm>
-          <a:prstGeom prst="rect">
-            <a:avLst/>
-          </a:prstGeom>
-          <a:noFill/>
-          <a:ln/>
-        </p:spPr>
-        <p:txBody>
-          <a:bodyPr wrap="square" lIns="0" tIns="0" rIns="0" bIns="0" rtlCol="0" anchor="ctr"/>
-          <a:lstStyle/>
-          <a:p>
-            <a:pPr algn="ctr" indent="0" marL="0">
-              <a:buNone/>
-            </a:pPr>
-            <a:r>
-              <a:rPr lang="en-US" sz="680" dirty="0">
-                <a:solidFill>
-                  <a:srgbClr val="12293A"/>
-                </a:solidFill>
-                <a:latin typeface="Poppins" pitchFamily="34" charset="0"/>
-                <a:ea typeface="Poppins" pitchFamily="34" charset="-122"/>
-                <a:cs typeface="Poppins" pitchFamily="34" charset="-120"/>
-              </a:rPr>
-              <a:t>24,443</a:t>
-            </a:r>
-            <a:endParaRPr lang="en-US" sz="680" dirty="0"/>
-          </a:p>
-        </p:txBody>
-      </p:sp>
-      <p:sp>
-        <p:nvSpPr>
-          <p:cNvPr id="109" name="Shape 107"/>
-          <p:cNvSpPr/>
-          <p:nvPr/>
-        </p:nvSpPr>
-        <p:spPr>
-          <a:xfrm>
-            <a:off x="5321808" y="3701491"/>
-            <a:ext cx="996696" cy="102543"/>
-          </a:xfrm>
-          <a:prstGeom prst="rect">
-            <a:avLst/>
-          </a:prstGeom>
-          <a:solidFill>
-            <a:srgbClr val="EDF5F7"/>
-          </a:solidFill>
-          <a:ln/>
-        </p:spPr>
-      </p:sp>
-      <p:sp>
-        <p:nvSpPr>
-          <p:cNvPr id="110" name="Text 108"/>
-          <p:cNvSpPr txBox="1"/>
-          <p:nvPr/>
-        </p:nvSpPr>
-        <p:spPr>
-          <a:xfrm>
-            <a:off x="5294376" y="3694176"/>
-            <a:ext cx="1051560" cy="116259"/>
-          </a:xfrm>
-          <a:prstGeom prst="rect">
-            <a:avLst/>
-          </a:prstGeom>
-          <a:noFill/>
-          <a:ln/>
-        </p:spPr>
-        <p:txBody>
-          <a:bodyPr wrap="square" lIns="0" tIns="0" rIns="0" bIns="0" rtlCol="0" anchor="ctr"/>
-          <a:lstStyle/>
-          <a:p>
-            <a:pPr algn="ctr" indent="0" marL="0">
-              <a:buNone/>
-            </a:pPr>
-            <a:r>
-              <a:rPr lang="en-US" sz="680" dirty="0">
-                <a:solidFill>
-                  <a:srgbClr val="12293A"/>
-                </a:solidFill>
-                <a:latin typeface="Poppins" pitchFamily="34" charset="0"/>
-                <a:ea typeface="Poppins" pitchFamily="34" charset="-122"/>
-                <a:cs typeface="Poppins" pitchFamily="34" charset="-120"/>
-              </a:rPr>
-              <a:t>5,382</a:t>
-            </a:r>
-            <a:endParaRPr lang="en-US" sz="680" dirty="0"/>
-          </a:p>
-        </p:txBody>
-      </p:sp>
-      <p:sp>
-        <p:nvSpPr>
-          <p:cNvPr id="111" name="Text 109"/>
-          <p:cNvSpPr txBox="1"/>
-          <p:nvPr/>
-        </p:nvSpPr>
-        <p:spPr>
-          <a:xfrm>
-            <a:off x="6400800" y="3694176"/>
-            <a:ext cx="1280160" cy="116259"/>
-          </a:xfrm>
-          <a:prstGeom prst="rect">
-            <a:avLst/>
-          </a:prstGeom>
-          <a:noFill/>
-          <a:ln/>
-        </p:spPr>
-        <p:txBody>
-          <a:bodyPr wrap="square" lIns="0" tIns="0" rIns="0" bIns="0" rtlCol="0" anchor="ctr"/>
-          <a:lstStyle/>
-          <a:p>
-            <a:pPr algn="r" indent="0" marL="0">
-              <a:buNone/>
-            </a:pPr>
-            <a:r>
-              <a:rPr lang="en-US" sz="700" b="1" dirty="0">
-                <a:solidFill>
-                  <a:srgbClr val="5E7280"/>
-                </a:solidFill>
-                <a:latin typeface="Poppins" pitchFamily="34" charset="0"/>
-                <a:ea typeface="Poppins" pitchFamily="34" charset="-122"/>
-                <a:cs typeface="Poppins" pitchFamily="34" charset="-120"/>
-              </a:rPr>
-              <a:t>72,393</a:t>
-            </a:r>
-            <a:endParaRPr lang="en-US" sz="700" dirty="0"/>
-          </a:p>
-        </p:txBody>
-      </p:sp>
-      <p:sp>
-        <p:nvSpPr>
-          <p:cNvPr id="112" name="Text 110"/>
-          <p:cNvSpPr txBox="1"/>
-          <p:nvPr/>
-        </p:nvSpPr>
-        <p:spPr>
-          <a:xfrm>
-            <a:off x="594360" y="3819579"/>
-            <a:ext cx="1417320" cy="116259"/>
-          </a:xfrm>
-          <a:prstGeom prst="rect">
-            <a:avLst/>
-          </a:prstGeom>
-          <a:noFill/>
-          <a:ln/>
-        </p:spPr>
-        <p:txBody>
-          <a:bodyPr wrap="square" lIns="0" tIns="0" rIns="0" bIns="0" rtlCol="0" anchor="ctr"/>
-          <a:lstStyle/>
-          <a:p>
-            <a:pPr indent="0" marL="0">
-              <a:buNone/>
-            </a:pPr>
-            <a:r>
-              <a:rPr lang="en-US" sz="720" b="1" dirty="0">
-                <a:solidFill>
-                  <a:srgbClr val="12293A"/>
-                </a:solidFill>
-                <a:latin typeface="Poppins" pitchFamily="34" charset="0"/>
-                <a:ea typeface="Poppins" pitchFamily="34" charset="-122"/>
-                <a:cs typeface="Poppins" pitchFamily="34" charset="-120"/>
-              </a:rPr>
-              <a:t>David Corbett</a:t>
-            </a:r>
-            <a:endParaRPr lang="en-US" sz="720" dirty="0"/>
-          </a:p>
-        </p:txBody>
-      </p:sp>
-      <p:sp>
-        <p:nvSpPr>
-          <p:cNvPr id="113" name="Shape 111"/>
-          <p:cNvSpPr/>
-          <p:nvPr/>
-        </p:nvSpPr>
-        <p:spPr>
-          <a:xfrm>
-            <a:off x="2084832" y="3826895"/>
-            <a:ext cx="996696" cy="102543"/>
-          </a:xfrm>
-          <a:prstGeom prst="rect">
-            <a:avLst/>
-          </a:prstGeom>
-          <a:solidFill>
-            <a:srgbClr val="EDF5F7"/>
-          </a:solidFill>
-          <a:ln/>
-        </p:spPr>
-      </p:sp>
-      <p:sp>
-        <p:nvSpPr>
-          <p:cNvPr id="114" name="Text 112"/>
-          <p:cNvSpPr txBox="1"/>
-          <p:nvPr/>
-        </p:nvSpPr>
-        <p:spPr>
-          <a:xfrm>
-            <a:off x="2057400" y="3819579"/>
-            <a:ext cx="1051560" cy="116259"/>
-          </a:xfrm>
-          <a:prstGeom prst="rect">
-            <a:avLst/>
-          </a:prstGeom>
-          <a:noFill/>
-          <a:ln/>
-        </p:spPr>
-        <p:txBody>
-          <a:bodyPr wrap="square" lIns="0" tIns="0" rIns="0" bIns="0" rtlCol="0" anchor="ctr"/>
-          <a:lstStyle/>
-          <a:p>
-            <a:pPr algn="ctr" indent="0" marL="0">
-              <a:buNone/>
-            </a:pPr>
-            <a:r>
-              <a:rPr lang="en-US" sz="680" dirty="0">
-                <a:solidFill>
-                  <a:srgbClr val="12293A"/>
-                </a:solidFill>
-                <a:latin typeface="Poppins" pitchFamily="34" charset="0"/>
-                <a:ea typeface="Poppins" pitchFamily="34" charset="-122"/>
-                <a:cs typeface="Poppins" pitchFamily="34" charset="-120"/>
-              </a:rPr>
-              <a:t>27,031</a:t>
-            </a:r>
-            <a:endParaRPr lang="en-US" sz="680" dirty="0"/>
-          </a:p>
-        </p:txBody>
-      </p:sp>
-      <p:sp>
-        <p:nvSpPr>
-          <p:cNvPr id="115" name="Shape 113"/>
-          <p:cNvSpPr/>
-          <p:nvPr/>
-        </p:nvSpPr>
-        <p:spPr>
-          <a:xfrm>
-            <a:off x="3163824" y="3826895"/>
-            <a:ext cx="996696" cy="102543"/>
-          </a:xfrm>
-          <a:prstGeom prst="rect">
-            <a:avLst/>
-          </a:prstGeom>
-          <a:solidFill>
-            <a:srgbClr val="EDF5F7"/>
-          </a:solidFill>
-          <a:ln/>
-        </p:spPr>
-      </p:sp>
-      <p:sp>
-        <p:nvSpPr>
-          <p:cNvPr id="116" name="Text 114"/>
-          <p:cNvSpPr txBox="1"/>
-          <p:nvPr/>
-        </p:nvSpPr>
-        <p:spPr>
-          <a:xfrm>
-            <a:off x="3136392" y="3819579"/>
-            <a:ext cx="1051560" cy="116259"/>
-          </a:xfrm>
-          <a:prstGeom prst="rect">
-            <a:avLst/>
-          </a:prstGeom>
-          <a:noFill/>
-          <a:ln/>
-        </p:spPr>
-        <p:txBody>
-          <a:bodyPr wrap="square" lIns="0" tIns="0" rIns="0" bIns="0" rtlCol="0" anchor="ctr"/>
-          <a:lstStyle/>
-          <a:p>
-            <a:pPr algn="ctr" indent="0" marL="0">
-              <a:buNone/>
-            </a:pPr>
-            <a:r>
-              <a:rPr lang="en-US" sz="680" dirty="0">
-                <a:solidFill>
-                  <a:srgbClr val="12293A"/>
-                </a:solidFill>
-                <a:latin typeface="Poppins" pitchFamily="34" charset="0"/>
-                <a:ea typeface="Poppins" pitchFamily="34" charset="-122"/>
-                <a:cs typeface="Poppins" pitchFamily="34" charset="-120"/>
-              </a:rPr>
-              <a:t>10,145</a:t>
-            </a:r>
-            <a:endParaRPr lang="en-US" sz="680" dirty="0"/>
-          </a:p>
-        </p:txBody>
-      </p:sp>
-      <p:sp>
-        <p:nvSpPr>
-          <p:cNvPr id="117" name="Shape 115"/>
-          <p:cNvSpPr/>
-          <p:nvPr/>
-        </p:nvSpPr>
-        <p:spPr>
-          <a:xfrm>
-            <a:off x="4242816" y="3826895"/>
-            <a:ext cx="996696" cy="102543"/>
-          </a:xfrm>
-          <a:prstGeom prst="rect">
-            <a:avLst/>
-          </a:prstGeom>
-          <a:solidFill>
-            <a:srgbClr val="EDF5F7"/>
-          </a:solidFill>
-          <a:ln/>
-        </p:spPr>
-      </p:sp>
-      <p:sp>
-        <p:nvSpPr>
-          <p:cNvPr id="118" name="Text 116"/>
-          <p:cNvSpPr txBox="1"/>
-          <p:nvPr/>
-        </p:nvSpPr>
-        <p:spPr>
-          <a:xfrm>
-            <a:off x="4215384" y="3819579"/>
-            <a:ext cx="1051560" cy="116259"/>
-          </a:xfrm>
-          <a:prstGeom prst="rect">
-            <a:avLst/>
-          </a:prstGeom>
-          <a:noFill/>
-          <a:ln/>
-        </p:spPr>
-        <p:txBody>
-          <a:bodyPr wrap="square" lIns="0" tIns="0" rIns="0" bIns="0" rtlCol="0" anchor="ctr"/>
-          <a:lstStyle/>
-          <a:p>
-            <a:pPr algn="ctr" indent="0" marL="0">
-              <a:buNone/>
-            </a:pPr>
-            <a:r>
-              <a:rPr lang="en-US" sz="680" dirty="0">
-                <a:solidFill>
-                  <a:srgbClr val="12293A"/>
-                </a:solidFill>
-                <a:latin typeface="Poppins" pitchFamily="34" charset="0"/>
-                <a:ea typeface="Poppins" pitchFamily="34" charset="-122"/>
-                <a:cs typeface="Poppins" pitchFamily="34" charset="-120"/>
-              </a:rPr>
-              <a:t>30,828</a:t>
-            </a:r>
-            <a:endParaRPr lang="en-US" sz="680" dirty="0"/>
-          </a:p>
-        </p:txBody>
-      </p:sp>
-      <p:sp>
-        <p:nvSpPr>
-          <p:cNvPr id="119" name="Shape 117"/>
-          <p:cNvSpPr/>
-          <p:nvPr/>
-        </p:nvSpPr>
-        <p:spPr>
-          <a:xfrm>
-            <a:off x="5321808" y="3826895"/>
-            <a:ext cx="996696" cy="102543"/>
-          </a:xfrm>
-          <a:prstGeom prst="rect">
-            <a:avLst/>
-          </a:prstGeom>
-          <a:solidFill>
-            <a:srgbClr val="EDF5F7"/>
-          </a:solidFill>
-          <a:ln/>
-        </p:spPr>
-      </p:sp>
-      <p:sp>
-        <p:nvSpPr>
-          <p:cNvPr id="120" name="Text 118"/>
-          <p:cNvSpPr txBox="1"/>
-          <p:nvPr/>
-        </p:nvSpPr>
-        <p:spPr>
-          <a:xfrm>
-            <a:off x="5294376" y="3819579"/>
-            <a:ext cx="1051560" cy="116259"/>
-          </a:xfrm>
-          <a:prstGeom prst="rect">
-            <a:avLst/>
-          </a:prstGeom>
-          <a:noFill/>
-          <a:ln/>
-        </p:spPr>
-        <p:txBody>
-          <a:bodyPr wrap="square" lIns="0" tIns="0" rIns="0" bIns="0" rtlCol="0" anchor="ctr"/>
-          <a:lstStyle/>
-          <a:p>
-            <a:pPr algn="ctr" indent="0" marL="0">
-              <a:buNone/>
-            </a:pPr>
-            <a:r>
-              <a:rPr lang="en-US" sz="680" dirty="0">
-                <a:solidFill>
-                  <a:srgbClr val="12293A"/>
-                </a:solidFill>
-                <a:latin typeface="Poppins" pitchFamily="34" charset="0"/>
-                <a:ea typeface="Poppins" pitchFamily="34" charset="-122"/>
-                <a:cs typeface="Poppins" pitchFamily="34" charset="-120"/>
-              </a:rPr>
-              <a:t>43,988</a:t>
-            </a:r>
-            <a:endParaRPr lang="en-US" sz="680" dirty="0"/>
-          </a:p>
-        </p:txBody>
-      </p:sp>
-      <p:sp>
-        <p:nvSpPr>
-          <p:cNvPr id="121" name="Text 119"/>
-          <p:cNvSpPr txBox="1"/>
-          <p:nvPr/>
-        </p:nvSpPr>
-        <p:spPr>
-          <a:xfrm>
-            <a:off x="6400800" y="3819579"/>
-            <a:ext cx="1280160" cy="116259"/>
-          </a:xfrm>
-          <a:prstGeom prst="rect">
-            <a:avLst/>
-          </a:prstGeom>
-          <a:noFill/>
-          <a:ln/>
-        </p:spPr>
-        <p:txBody>
-          <a:bodyPr wrap="square" lIns="0" tIns="0" rIns="0" bIns="0" rtlCol="0" anchor="ctr"/>
-          <a:lstStyle/>
-          <a:p>
-            <a:pPr algn="r" indent="0" marL="0">
-              <a:buNone/>
-            </a:pPr>
-            <a:r>
-              <a:rPr lang="en-US" sz="700" b="1" dirty="0">
-                <a:solidFill>
-                  <a:srgbClr val="5E7280"/>
-                </a:solidFill>
-                <a:latin typeface="Poppins" pitchFamily="34" charset="0"/>
-                <a:ea typeface="Poppins" pitchFamily="34" charset="-122"/>
-                <a:cs typeface="Poppins" pitchFamily="34" charset="-120"/>
-              </a:rPr>
-              <a:t>111,992</a:t>
-            </a:r>
-            <a:endParaRPr lang="en-US" sz="700" dirty="0"/>
-          </a:p>
-        </p:txBody>
-      </p:sp>
-      <p:sp>
-        <p:nvSpPr>
-          <p:cNvPr id="122" name="Text 120"/>
-          <p:cNvSpPr txBox="1"/>
-          <p:nvPr/>
-        </p:nvSpPr>
-        <p:spPr>
-          <a:xfrm>
-            <a:off x="594360" y="3944983"/>
-            <a:ext cx="1417320" cy="116259"/>
-          </a:xfrm>
-          <a:prstGeom prst="rect">
-            <a:avLst/>
-          </a:prstGeom>
-          <a:noFill/>
-          <a:ln/>
-        </p:spPr>
-        <p:txBody>
-          <a:bodyPr wrap="square" lIns="0" tIns="0" rIns="0" bIns="0" rtlCol="0" anchor="ctr"/>
-          <a:lstStyle/>
-          <a:p>
-            <a:pPr indent="0" marL="0">
-              <a:buNone/>
-            </a:pPr>
-            <a:r>
-              <a:rPr lang="en-US" sz="720" b="1" dirty="0">
-                <a:solidFill>
-                  <a:srgbClr val="12293A"/>
-                </a:solidFill>
-                <a:latin typeface="Poppins" pitchFamily="34" charset="0"/>
-                <a:ea typeface="Poppins" pitchFamily="34" charset="-122"/>
-                <a:cs typeface="Poppins" pitchFamily="34" charset="-120"/>
-              </a:rPr>
-              <a:t>Chris Huang</a:t>
-            </a:r>
-            <a:endParaRPr lang="en-US" sz="720" dirty="0"/>
-          </a:p>
-        </p:txBody>
-      </p:sp>
-      <p:sp>
-        <p:nvSpPr>
-          <p:cNvPr id="123" name="Shape 121"/>
-          <p:cNvSpPr/>
-          <p:nvPr/>
-        </p:nvSpPr>
-        <p:spPr>
-          <a:xfrm>
-            <a:off x="2084832" y="3952298"/>
-            <a:ext cx="996696" cy="102543"/>
-          </a:xfrm>
-          <a:prstGeom prst="rect">
-            <a:avLst/>
-          </a:prstGeom>
-          <a:solidFill>
-            <a:srgbClr val="EDF5F7"/>
-          </a:solidFill>
-          <a:ln/>
-        </p:spPr>
-      </p:sp>
-      <p:sp>
-        <p:nvSpPr>
-          <p:cNvPr id="124" name="Text 122"/>
-          <p:cNvSpPr txBox="1"/>
-          <p:nvPr/>
-        </p:nvSpPr>
-        <p:spPr>
-          <a:xfrm>
-            <a:off x="2057400" y="3944983"/>
-            <a:ext cx="1051560" cy="116259"/>
-          </a:xfrm>
-          <a:prstGeom prst="rect">
-            <a:avLst/>
-          </a:prstGeom>
-          <a:noFill/>
-          <a:ln/>
-        </p:spPr>
-        <p:txBody>
-          <a:bodyPr wrap="square" lIns="0" tIns="0" rIns="0" bIns="0" rtlCol="0" anchor="ctr"/>
-          <a:lstStyle/>
-          <a:p>
-            <a:pPr algn="ctr" indent="0" marL="0">
-              <a:buNone/>
-            </a:pPr>
-            <a:r>
-              <a:rPr lang="en-US" sz="680" dirty="0">
-                <a:solidFill>
-                  <a:srgbClr val="12293A"/>
-                </a:solidFill>
-                <a:latin typeface="Poppins" pitchFamily="34" charset="0"/>
-                <a:ea typeface="Poppins" pitchFamily="34" charset="-122"/>
-                <a:cs typeface="Poppins" pitchFamily="34" charset="-120"/>
-              </a:rPr>
-              <a:t>19,535</a:t>
-            </a:r>
-            <a:endParaRPr lang="en-US" sz="680" dirty="0"/>
-          </a:p>
-        </p:txBody>
-      </p:sp>
-      <p:sp>
-        <p:nvSpPr>
-          <p:cNvPr id="125" name="Shape 123"/>
-          <p:cNvSpPr/>
-          <p:nvPr/>
-        </p:nvSpPr>
-        <p:spPr>
-          <a:xfrm>
-            <a:off x="3163824" y="3952298"/>
-            <a:ext cx="996696" cy="102543"/>
-          </a:xfrm>
-          <a:prstGeom prst="rect">
-            <a:avLst/>
-          </a:prstGeom>
-          <a:solidFill>
-            <a:srgbClr val="EDF5F7"/>
-          </a:solidFill>
-          <a:ln/>
-        </p:spPr>
-      </p:sp>
-      <p:sp>
-        <p:nvSpPr>
-          <p:cNvPr id="126" name="Text 124"/>
-          <p:cNvSpPr txBox="1"/>
-          <p:nvPr/>
-        </p:nvSpPr>
-        <p:spPr>
-          <a:xfrm>
-            <a:off x="3136392" y="3944983"/>
-            <a:ext cx="1051560" cy="116259"/>
-          </a:xfrm>
-          <a:prstGeom prst="rect">
-            <a:avLst/>
-          </a:prstGeom>
-          <a:noFill/>
-          <a:ln/>
-        </p:spPr>
-        <p:txBody>
-          <a:bodyPr wrap="square" lIns="0" tIns="0" rIns="0" bIns="0" rtlCol="0" anchor="ctr"/>
-          <a:lstStyle/>
-          <a:p>
-            <a:pPr algn="ctr" indent="0" marL="0">
-              <a:buNone/>
-            </a:pPr>
-            <a:r>
-              <a:rPr lang="en-US" sz="680" dirty="0">
-                <a:solidFill>
-                  <a:srgbClr val="12293A"/>
-                </a:solidFill>
-                <a:latin typeface="Poppins" pitchFamily="34" charset="0"/>
-                <a:ea typeface="Poppins" pitchFamily="34" charset="-122"/>
-                <a:cs typeface="Poppins" pitchFamily="34" charset="-120"/>
-              </a:rPr>
-              <a:t>12,856</a:t>
-            </a:r>
-            <a:endParaRPr lang="en-US" sz="680" dirty="0"/>
-          </a:p>
-        </p:txBody>
-      </p:sp>
-      <p:sp>
-        <p:nvSpPr>
-          <p:cNvPr id="127" name="Shape 125"/>
-          <p:cNvSpPr/>
-          <p:nvPr/>
-        </p:nvSpPr>
-        <p:spPr>
-          <a:xfrm>
-            <a:off x="4242816" y="3952298"/>
-            <a:ext cx="996696" cy="102543"/>
-          </a:xfrm>
-          <a:prstGeom prst="rect">
-            <a:avLst/>
-          </a:prstGeom>
-          <a:solidFill>
-            <a:srgbClr val="EDF5F7"/>
-          </a:solidFill>
-          <a:ln/>
-        </p:spPr>
-      </p:sp>
-      <p:sp>
-        <p:nvSpPr>
-          <p:cNvPr id="128" name="Text 126"/>
-          <p:cNvSpPr txBox="1"/>
-          <p:nvPr/>
-        </p:nvSpPr>
-        <p:spPr>
-          <a:xfrm>
-            <a:off x="4215384" y="3944983"/>
-            <a:ext cx="1051560" cy="116259"/>
-          </a:xfrm>
-          <a:prstGeom prst="rect">
-            <a:avLst/>
-          </a:prstGeom>
-          <a:noFill/>
-          <a:ln/>
-        </p:spPr>
-        <p:txBody>
-          <a:bodyPr wrap="square" lIns="0" tIns="0" rIns="0" bIns="0" rtlCol="0" anchor="ctr"/>
-          <a:lstStyle/>
-          <a:p>
-            <a:pPr algn="ctr" indent="0" marL="0">
-              <a:buNone/>
-            </a:pPr>
-            <a:r>
-              <a:rPr lang="en-US" sz="680" dirty="0">
-                <a:solidFill>
-                  <a:srgbClr val="12293A"/>
-                </a:solidFill>
-                <a:latin typeface="Poppins" pitchFamily="34" charset="0"/>
-                <a:ea typeface="Poppins" pitchFamily="34" charset="-122"/>
-                <a:cs typeface="Poppins" pitchFamily="34" charset="-120"/>
-              </a:rPr>
-              <a:t>17,516</a:t>
-            </a:r>
-            <a:endParaRPr lang="en-US" sz="680" dirty="0"/>
-          </a:p>
-        </p:txBody>
-      </p:sp>
-      <p:sp>
-        <p:nvSpPr>
-          <p:cNvPr id="129" name="Shape 127"/>
-          <p:cNvSpPr/>
-          <p:nvPr/>
-        </p:nvSpPr>
-        <p:spPr>
-          <a:xfrm>
-            <a:off x="5321808" y="3952298"/>
-            <a:ext cx="996696" cy="102543"/>
-          </a:xfrm>
-          <a:prstGeom prst="rect">
-            <a:avLst/>
-          </a:prstGeom>
-          <a:solidFill>
-            <a:srgbClr val="EDF5F7"/>
-          </a:solidFill>
-          <a:ln/>
-        </p:spPr>
-      </p:sp>
-      <p:sp>
-        <p:nvSpPr>
-          <p:cNvPr id="130" name="Text 128"/>
-          <p:cNvSpPr txBox="1"/>
-          <p:nvPr/>
-        </p:nvSpPr>
-        <p:spPr>
-          <a:xfrm>
-            <a:off x="5294376" y="3944983"/>
-            <a:ext cx="1051560" cy="116259"/>
-          </a:xfrm>
-          <a:prstGeom prst="rect">
-            <a:avLst/>
-          </a:prstGeom>
-          <a:noFill/>
-          <a:ln/>
-        </p:spPr>
-        <p:txBody>
-          <a:bodyPr wrap="square" lIns="0" tIns="0" rIns="0" bIns="0" rtlCol="0" anchor="ctr"/>
-          <a:lstStyle/>
-          <a:p>
-            <a:pPr algn="ctr" indent="0" marL="0">
-              <a:buNone/>
-            </a:pPr>
-            <a:r>
-              <a:rPr lang="en-US" sz="680" dirty="0">
-                <a:solidFill>
-                  <a:srgbClr val="12293A"/>
-                </a:solidFill>
-                <a:latin typeface="Poppins" pitchFamily="34" charset="0"/>
-                <a:ea typeface="Poppins" pitchFamily="34" charset="-122"/>
-                <a:cs typeface="Poppins" pitchFamily="34" charset="-120"/>
-              </a:rPr>
-              <a:t>8,154</a:t>
-            </a:r>
-            <a:endParaRPr lang="en-US" sz="680" dirty="0"/>
-          </a:p>
-        </p:txBody>
-      </p:sp>
-      <p:sp>
-        <p:nvSpPr>
-          <p:cNvPr id="131" name="Text 129"/>
-          <p:cNvSpPr txBox="1"/>
-          <p:nvPr/>
-        </p:nvSpPr>
-        <p:spPr>
-          <a:xfrm>
-            <a:off x="6400800" y="3944983"/>
-            <a:ext cx="1280160" cy="116259"/>
-          </a:xfrm>
-          <a:prstGeom prst="rect">
-            <a:avLst/>
-          </a:prstGeom>
-          <a:noFill/>
-          <a:ln/>
-        </p:spPr>
-        <p:txBody>
-          <a:bodyPr wrap="square" lIns="0" tIns="0" rIns="0" bIns="0" rtlCol="0" anchor="ctr"/>
-          <a:lstStyle/>
-          <a:p>
-            <a:pPr algn="r" indent="0" marL="0">
-              <a:buNone/>
-            </a:pPr>
-            <a:r>
-              <a:rPr lang="en-US" sz="700" b="1" dirty="0">
-                <a:solidFill>
-                  <a:srgbClr val="5E7280"/>
-                </a:solidFill>
-                <a:latin typeface="Poppins" pitchFamily="34" charset="0"/>
-                <a:ea typeface="Poppins" pitchFamily="34" charset="-122"/>
-                <a:cs typeface="Poppins" pitchFamily="34" charset="-120"/>
-              </a:rPr>
-              <a:t>58,061</a:t>
-            </a:r>
-            <a:endParaRPr lang="en-US" sz="700" dirty="0"/>
-          </a:p>
-        </p:txBody>
-      </p:sp>
-      <p:sp>
-        <p:nvSpPr>
-          <p:cNvPr id="132" name="Text 130"/>
-          <p:cNvSpPr txBox="1"/>
-          <p:nvPr/>
-        </p:nvSpPr>
-        <p:spPr>
-          <a:xfrm>
-            <a:off x="594360" y="4070386"/>
-            <a:ext cx="1417320" cy="116259"/>
-          </a:xfrm>
-          <a:prstGeom prst="rect">
-            <a:avLst/>
-          </a:prstGeom>
-          <a:noFill/>
-          <a:ln/>
-        </p:spPr>
-        <p:txBody>
-          <a:bodyPr wrap="square" lIns="0" tIns="0" rIns="0" bIns="0" rtlCol="0" anchor="ctr"/>
-          <a:lstStyle/>
-          <a:p>
-            <a:pPr indent="0" marL="0">
-              <a:buNone/>
-            </a:pPr>
-            <a:r>
-              <a:rPr lang="en-US" sz="720" b="1" dirty="0">
-                <a:solidFill>
-                  <a:srgbClr val="12293A"/>
-                </a:solidFill>
-                <a:latin typeface="Poppins" pitchFamily="34" charset="0"/>
-                <a:ea typeface="Poppins" pitchFamily="34" charset="-122"/>
-                <a:cs typeface="Poppins" pitchFamily="34" charset="-120"/>
-              </a:rPr>
-              <a:t>Rahul Kumar</a:t>
-            </a:r>
-            <a:endParaRPr lang="en-US" sz="720" dirty="0"/>
-          </a:p>
-        </p:txBody>
-      </p:sp>
-      <p:sp>
-        <p:nvSpPr>
-          <p:cNvPr id="133" name="Text 131"/>
-          <p:cNvSpPr txBox="1"/>
-          <p:nvPr/>
-        </p:nvSpPr>
-        <p:spPr>
-          <a:xfrm>
-            <a:off x="2057400" y="4070386"/>
-            <a:ext cx="1051560" cy="116259"/>
-          </a:xfrm>
-          <a:prstGeom prst="rect">
-            <a:avLst/>
-          </a:prstGeom>
-          <a:noFill/>
-          <a:ln/>
-        </p:spPr>
-        <p:txBody>
-          <a:bodyPr wrap="square" lIns="0" tIns="0" rIns="0" bIns="0" rtlCol="0" anchor="ctr"/>
-          <a:lstStyle/>
-          <a:p>
-            <a:pPr algn="ctr" indent="0" marL="0">
-              <a:buNone/>
-            </a:pPr>
-            <a:r>
-              <a:rPr lang="en-US" sz="680" dirty="0">
-                <a:solidFill>
-                  <a:srgbClr val="8FA1AC"/>
-                </a:solidFill>
-                <a:latin typeface="Poppins" pitchFamily="34" charset="0"/>
-                <a:ea typeface="Poppins" pitchFamily="34" charset="-122"/>
-                <a:cs typeface="Poppins" pitchFamily="34" charset="-120"/>
-              </a:rPr>
-              <a:t>—</a:t>
-            </a:r>
-            <a:endParaRPr lang="en-US" sz="680" dirty="0"/>
-          </a:p>
-        </p:txBody>
-      </p:sp>
-      <p:sp>
-        <p:nvSpPr>
-          <p:cNvPr id="134" name="Shape 132"/>
-          <p:cNvSpPr/>
-          <p:nvPr/>
-        </p:nvSpPr>
-        <p:spPr>
-          <a:xfrm>
-            <a:off x="3163824" y="4077701"/>
-            <a:ext cx="996696" cy="102543"/>
-          </a:xfrm>
-          <a:prstGeom prst="rect">
-            <a:avLst/>
-          </a:prstGeom>
-          <a:solidFill>
-            <a:srgbClr val="EDF5F7"/>
-          </a:solidFill>
-          <a:ln/>
-        </p:spPr>
-      </p:sp>
-      <p:sp>
-        <p:nvSpPr>
-          <p:cNvPr id="135" name="Text 133"/>
-          <p:cNvSpPr txBox="1"/>
-          <p:nvPr/>
-        </p:nvSpPr>
-        <p:spPr>
-          <a:xfrm>
-            <a:off x="3136392" y="4070386"/>
-            <a:ext cx="1051560" cy="116259"/>
-          </a:xfrm>
-          <a:prstGeom prst="rect">
-            <a:avLst/>
-          </a:prstGeom>
-          <a:noFill/>
-          <a:ln/>
-        </p:spPr>
-        <p:txBody>
-          <a:bodyPr wrap="square" lIns="0" tIns="0" rIns="0" bIns="0" rtlCol="0" anchor="ctr"/>
-          <a:lstStyle/>
-          <a:p>
-            <a:pPr algn="ctr" indent="0" marL="0">
-              <a:buNone/>
-            </a:pPr>
-            <a:r>
-              <a:rPr lang="en-US" sz="680" dirty="0">
-                <a:solidFill>
-                  <a:srgbClr val="12293A"/>
-                </a:solidFill>
-                <a:latin typeface="Poppins" pitchFamily="34" charset="0"/>
-                <a:ea typeface="Poppins" pitchFamily="34" charset="-122"/>
-                <a:cs typeface="Poppins" pitchFamily="34" charset="-120"/>
-              </a:rPr>
-              <a:t>42,859</a:t>
-            </a:r>
-            <a:endParaRPr lang="en-US" sz="680" dirty="0"/>
-          </a:p>
-        </p:txBody>
-      </p:sp>
-      <p:sp>
-        <p:nvSpPr>
-          <p:cNvPr id="136" name="Shape 134"/>
-          <p:cNvSpPr/>
-          <p:nvPr/>
-        </p:nvSpPr>
-        <p:spPr>
-          <a:xfrm>
-            <a:off x="4242816" y="4077701"/>
-            <a:ext cx="996696" cy="102543"/>
-          </a:xfrm>
-          <a:prstGeom prst="rect">
-            <a:avLst/>
-          </a:prstGeom>
-          <a:solidFill>
-            <a:srgbClr val="EDF5F7"/>
-          </a:solidFill>
-          <a:ln/>
-        </p:spPr>
-      </p:sp>
-      <p:sp>
-        <p:nvSpPr>
-          <p:cNvPr id="137" name="Text 135"/>
-          <p:cNvSpPr txBox="1"/>
-          <p:nvPr/>
-        </p:nvSpPr>
-        <p:spPr>
-          <a:xfrm>
-            <a:off x="4215384" y="4070386"/>
-            <a:ext cx="1051560" cy="116259"/>
-          </a:xfrm>
-          <a:prstGeom prst="rect">
-            <a:avLst/>
-          </a:prstGeom>
-          <a:noFill/>
-          <a:ln/>
-        </p:spPr>
-        <p:txBody>
-          <a:bodyPr wrap="square" lIns="0" tIns="0" rIns="0" bIns="0" rtlCol="0" anchor="ctr"/>
-          <a:lstStyle/>
-          <a:p>
-            <a:pPr algn="ctr" indent="0" marL="0">
-              <a:buNone/>
-            </a:pPr>
-            <a:r>
-              <a:rPr lang="en-US" sz="680" dirty="0">
-                <a:solidFill>
-                  <a:srgbClr val="12293A"/>
-                </a:solidFill>
-                <a:latin typeface="Poppins" pitchFamily="34" charset="0"/>
-                <a:ea typeface="Poppins" pitchFamily="34" charset="-122"/>
-                <a:cs typeface="Poppins" pitchFamily="34" charset="-120"/>
-              </a:rPr>
-              <a:t>23,286</a:t>
-            </a:r>
-            <a:endParaRPr lang="en-US" sz="680" dirty="0"/>
-          </a:p>
-        </p:txBody>
-      </p:sp>
-      <p:sp>
-        <p:nvSpPr>
-          <p:cNvPr id="138" name="Shape 136"/>
-          <p:cNvSpPr/>
-          <p:nvPr/>
-        </p:nvSpPr>
-        <p:spPr>
-          <a:xfrm>
-            <a:off x="5321808" y="4077701"/>
-            <a:ext cx="996696" cy="102543"/>
-          </a:xfrm>
-          <a:prstGeom prst="rect">
-            <a:avLst/>
-          </a:prstGeom>
-          <a:solidFill>
-            <a:srgbClr val="EDF5F7"/>
-          </a:solidFill>
-          <a:ln/>
-        </p:spPr>
-      </p:sp>
-      <p:sp>
-        <p:nvSpPr>
-          <p:cNvPr id="139" name="Text 137"/>
-          <p:cNvSpPr txBox="1"/>
-          <p:nvPr/>
-        </p:nvSpPr>
-        <p:spPr>
-          <a:xfrm>
-            <a:off x="5294376" y="4070386"/>
-            <a:ext cx="1051560" cy="116259"/>
-          </a:xfrm>
-          <a:prstGeom prst="rect">
-            <a:avLst/>
-          </a:prstGeom>
-          <a:noFill/>
-          <a:ln/>
-        </p:spPr>
-        <p:txBody>
-          <a:bodyPr wrap="square" lIns="0" tIns="0" rIns="0" bIns="0" rtlCol="0" anchor="ctr"/>
-          <a:lstStyle/>
-          <a:p>
-            <a:pPr algn="ctr" indent="0" marL="0">
-              <a:buNone/>
-            </a:pPr>
-            <a:r>
-              <a:rPr lang="en-US" sz="680" dirty="0">
-                <a:solidFill>
-                  <a:srgbClr val="12293A"/>
-                </a:solidFill>
-                <a:latin typeface="Poppins" pitchFamily="34" charset="0"/>
-                <a:ea typeface="Poppins" pitchFamily="34" charset="-122"/>
-                <a:cs typeface="Poppins" pitchFamily="34" charset="-120"/>
-              </a:rPr>
-              <a:t>17,747</a:t>
-            </a:r>
-            <a:endParaRPr lang="en-US" sz="680" dirty="0"/>
-          </a:p>
-        </p:txBody>
-      </p:sp>
-      <p:sp>
-        <p:nvSpPr>
-          <p:cNvPr id="140" name="Text 138"/>
-          <p:cNvSpPr txBox="1"/>
-          <p:nvPr/>
-        </p:nvSpPr>
-        <p:spPr>
-          <a:xfrm>
-            <a:off x="6400800" y="4070386"/>
-            <a:ext cx="1280160" cy="116259"/>
-          </a:xfrm>
-          <a:prstGeom prst="rect">
-            <a:avLst/>
-          </a:prstGeom>
-          <a:noFill/>
-          <a:ln/>
-        </p:spPr>
-        <p:txBody>
-          <a:bodyPr wrap="square" lIns="0" tIns="0" rIns="0" bIns="0" rtlCol="0" anchor="ctr"/>
-          <a:lstStyle/>
-          <a:p>
-            <a:pPr algn="r" indent="0" marL="0">
-              <a:buNone/>
-            </a:pPr>
-            <a:r>
-              <a:rPr lang="en-US" sz="700" b="1" dirty="0">
-                <a:solidFill>
-                  <a:srgbClr val="5E7280"/>
-                </a:solidFill>
-                <a:latin typeface="Poppins" pitchFamily="34" charset="0"/>
-                <a:ea typeface="Poppins" pitchFamily="34" charset="-122"/>
-                <a:cs typeface="Poppins" pitchFamily="34" charset="-120"/>
-              </a:rPr>
-              <a:t>83,892</a:t>
-            </a:r>
-            <a:endParaRPr lang="en-US" sz="700" dirty="0"/>
-          </a:p>
-        </p:txBody>
-      </p:sp>
-      <p:sp>
-        <p:nvSpPr>
-          <p:cNvPr id="141" name="Text 139"/>
-          <p:cNvSpPr txBox="1"/>
-          <p:nvPr/>
-        </p:nvSpPr>
-        <p:spPr>
-          <a:xfrm>
-            <a:off x="594360" y="4195790"/>
-            <a:ext cx="1417320" cy="116259"/>
-          </a:xfrm>
-          <a:prstGeom prst="rect">
-            <a:avLst/>
-          </a:prstGeom>
-          <a:noFill/>
-          <a:ln/>
-        </p:spPr>
-        <p:txBody>
-          <a:bodyPr wrap="square" lIns="0" tIns="0" rIns="0" bIns="0" rtlCol="0" anchor="ctr"/>
-          <a:lstStyle/>
-          <a:p>
-            <a:pPr indent="0" marL="0">
-              <a:buNone/>
-            </a:pPr>
-            <a:r>
-              <a:rPr lang="en-US" sz="720" b="1" dirty="0">
-                <a:solidFill>
-                  <a:srgbClr val="12293A"/>
-                </a:solidFill>
-                <a:latin typeface="Poppins" pitchFamily="34" charset="0"/>
-                <a:ea typeface="Poppins" pitchFamily="34" charset="-122"/>
-                <a:cs typeface="Poppins" pitchFamily="34" charset="-120"/>
-              </a:rPr>
-              <a:t>Mohamed Ammar</a:t>
-            </a:r>
-            <a:endParaRPr lang="en-US" sz="720" dirty="0"/>
-          </a:p>
-        </p:txBody>
-      </p:sp>
-      <p:sp>
-        <p:nvSpPr>
-          <p:cNvPr id="142" name="Shape 140"/>
-          <p:cNvSpPr/>
-          <p:nvPr/>
-        </p:nvSpPr>
-        <p:spPr>
-          <a:xfrm>
-            <a:off x="2084832" y="4203105"/>
-            <a:ext cx="996696" cy="102543"/>
-          </a:xfrm>
-          <a:prstGeom prst="rect">
-            <a:avLst/>
-          </a:prstGeom>
-          <a:solidFill>
-            <a:srgbClr val="EDF5F7"/>
-          </a:solidFill>
-          <a:ln/>
-        </p:spPr>
-      </p:sp>
-      <p:sp>
-        <p:nvSpPr>
-          <p:cNvPr id="143" name="Text 141"/>
-          <p:cNvSpPr txBox="1"/>
-          <p:nvPr/>
-        </p:nvSpPr>
-        <p:spPr>
-          <a:xfrm>
-            <a:off x="2057400" y="4195790"/>
-            <a:ext cx="1051560" cy="116259"/>
-          </a:xfrm>
-          <a:prstGeom prst="rect">
-            <a:avLst/>
-          </a:prstGeom>
-          <a:noFill/>
-          <a:ln/>
-        </p:spPr>
-        <p:txBody>
-          <a:bodyPr wrap="square" lIns="0" tIns="0" rIns="0" bIns="0" rtlCol="0" anchor="ctr"/>
-          <a:lstStyle/>
-          <a:p>
-            <a:pPr algn="ctr" indent="0" marL="0">
-              <a:buNone/>
-            </a:pPr>
-            <a:r>
-              <a:rPr lang="en-US" sz="680" dirty="0">
-                <a:solidFill>
-                  <a:srgbClr val="12293A"/>
-                </a:solidFill>
-                <a:latin typeface="Poppins" pitchFamily="34" charset="0"/>
-                <a:ea typeface="Poppins" pitchFamily="34" charset="-122"/>
-                <a:cs typeface="Poppins" pitchFamily="34" charset="-120"/>
-              </a:rPr>
-              <a:t>6,582</a:t>
-            </a:r>
-            <a:endParaRPr lang="en-US" sz="680" dirty="0"/>
-          </a:p>
-        </p:txBody>
-      </p:sp>
-      <p:sp>
-        <p:nvSpPr>
-          <p:cNvPr id="144" name="Shape 142"/>
-          <p:cNvSpPr/>
-          <p:nvPr/>
-        </p:nvSpPr>
-        <p:spPr>
-          <a:xfrm>
-            <a:off x="3163824" y="4203105"/>
-            <a:ext cx="996696" cy="102543"/>
-          </a:xfrm>
-          <a:prstGeom prst="rect">
-            <a:avLst/>
-          </a:prstGeom>
-          <a:solidFill>
-            <a:srgbClr val="EDF5F7"/>
-          </a:solidFill>
-          <a:ln/>
-        </p:spPr>
-      </p:sp>
-      <p:sp>
-        <p:nvSpPr>
-          <p:cNvPr id="145" name="Text 143"/>
-          <p:cNvSpPr txBox="1"/>
-          <p:nvPr/>
-        </p:nvSpPr>
-        <p:spPr>
-          <a:xfrm>
-            <a:off x="3136392" y="4195790"/>
-            <a:ext cx="1051560" cy="116259"/>
-          </a:xfrm>
-          <a:prstGeom prst="rect">
-            <a:avLst/>
-          </a:prstGeom>
-          <a:noFill/>
-          <a:ln/>
-        </p:spPr>
-        <p:txBody>
-          <a:bodyPr wrap="square" lIns="0" tIns="0" rIns="0" bIns="0" rtlCol="0" anchor="ctr"/>
-          <a:lstStyle/>
-          <a:p>
-            <a:pPr algn="ctr" indent="0" marL="0">
-              <a:buNone/>
-            </a:pPr>
-            <a:r>
-              <a:rPr lang="en-US" sz="680" dirty="0">
-                <a:solidFill>
-                  <a:srgbClr val="12293A"/>
-                </a:solidFill>
-                <a:latin typeface="Poppins" pitchFamily="34" charset="0"/>
-                <a:ea typeface="Poppins" pitchFamily="34" charset="-122"/>
-                <a:cs typeface="Poppins" pitchFamily="34" charset="-120"/>
-              </a:rPr>
-              <a:t>23,266</a:t>
-            </a:r>
-            <a:endParaRPr lang="en-US" sz="680" dirty="0"/>
-          </a:p>
-        </p:txBody>
-      </p:sp>
-      <p:sp>
-        <p:nvSpPr>
-          <p:cNvPr id="146" name="Shape 144"/>
-          <p:cNvSpPr/>
-          <p:nvPr/>
-        </p:nvSpPr>
-        <p:spPr>
-          <a:xfrm>
-            <a:off x="4242816" y="4203105"/>
-            <a:ext cx="996696" cy="102543"/>
-          </a:xfrm>
-          <a:prstGeom prst="rect">
-            <a:avLst/>
-          </a:prstGeom>
-          <a:solidFill>
-            <a:srgbClr val="EDF5F7"/>
-          </a:solidFill>
-          <a:ln/>
-        </p:spPr>
-      </p:sp>
-      <p:sp>
-        <p:nvSpPr>
-          <p:cNvPr id="147" name="Text 145"/>
-          <p:cNvSpPr txBox="1"/>
-          <p:nvPr/>
-        </p:nvSpPr>
-        <p:spPr>
-          <a:xfrm>
-            <a:off x="4215384" y="4195790"/>
-            <a:ext cx="1051560" cy="116259"/>
-          </a:xfrm>
-          <a:prstGeom prst="rect">
-            <a:avLst/>
-          </a:prstGeom>
-          <a:noFill/>
-          <a:ln/>
-        </p:spPr>
-        <p:txBody>
-          <a:bodyPr wrap="square" lIns="0" tIns="0" rIns="0" bIns="0" rtlCol="0" anchor="ctr"/>
-          <a:lstStyle/>
-          <a:p>
-            <a:pPr algn="ctr" indent="0" marL="0">
-              <a:buNone/>
-            </a:pPr>
-            <a:r>
-              <a:rPr lang="en-US" sz="680" dirty="0">
-                <a:solidFill>
-                  <a:srgbClr val="12293A"/>
-                </a:solidFill>
-                <a:latin typeface="Poppins" pitchFamily="34" charset="0"/>
-                <a:ea typeface="Poppins" pitchFamily="34" charset="-122"/>
-                <a:cs typeface="Poppins" pitchFamily="34" charset="-120"/>
-              </a:rPr>
-              <a:t>4,322</a:t>
-            </a:r>
-            <a:endParaRPr lang="en-US" sz="680" dirty="0"/>
-          </a:p>
-        </p:txBody>
-      </p:sp>
-      <p:sp>
-        <p:nvSpPr>
-          <p:cNvPr id="148" name="Shape 146"/>
-          <p:cNvSpPr/>
-          <p:nvPr/>
-        </p:nvSpPr>
-        <p:spPr>
-          <a:xfrm>
-            <a:off x="5321808" y="4203105"/>
-            <a:ext cx="996696" cy="102543"/>
-          </a:xfrm>
-          <a:prstGeom prst="rect">
-            <a:avLst/>
-          </a:prstGeom>
-          <a:solidFill>
-            <a:srgbClr val="EDF5F7"/>
-          </a:solidFill>
-          <a:ln/>
-        </p:spPr>
-      </p:sp>
-      <p:sp>
-        <p:nvSpPr>
-          <p:cNvPr id="149" name="Text 147"/>
-          <p:cNvSpPr txBox="1"/>
-          <p:nvPr/>
-        </p:nvSpPr>
-        <p:spPr>
-          <a:xfrm>
-            <a:off x="5294376" y="4195790"/>
-            <a:ext cx="1051560" cy="116259"/>
-          </a:xfrm>
-          <a:prstGeom prst="rect">
-            <a:avLst/>
-          </a:prstGeom>
-          <a:noFill/>
-          <a:ln/>
-        </p:spPr>
-        <p:txBody>
-          <a:bodyPr wrap="square" lIns="0" tIns="0" rIns="0" bIns="0" rtlCol="0" anchor="ctr"/>
-          <a:lstStyle/>
-          <a:p>
-            <a:pPr algn="ctr" indent="0" marL="0">
-              <a:buNone/>
-            </a:pPr>
-            <a:r>
-              <a:rPr lang="en-US" sz="680" dirty="0">
-                <a:solidFill>
-                  <a:srgbClr val="12293A"/>
-                </a:solidFill>
-                <a:latin typeface="Poppins" pitchFamily="34" charset="0"/>
-                <a:ea typeface="Poppins" pitchFamily="34" charset="-122"/>
-                <a:cs typeface="Poppins" pitchFamily="34" charset="-120"/>
-              </a:rPr>
-              <a:t>8,922</a:t>
-            </a:r>
-            <a:endParaRPr lang="en-US" sz="680" dirty="0"/>
-          </a:p>
-        </p:txBody>
-      </p:sp>
-      <p:sp>
-        <p:nvSpPr>
-          <p:cNvPr id="150" name="Text 148"/>
-          <p:cNvSpPr txBox="1"/>
-          <p:nvPr/>
-        </p:nvSpPr>
-        <p:spPr>
-          <a:xfrm>
-            <a:off x="6400800" y="4195790"/>
-            <a:ext cx="1280160" cy="116259"/>
-          </a:xfrm>
-          <a:prstGeom prst="rect">
-            <a:avLst/>
-          </a:prstGeom>
-          <a:noFill/>
-          <a:ln/>
-        </p:spPr>
-        <p:txBody>
-          <a:bodyPr wrap="square" lIns="0" tIns="0" rIns="0" bIns="0" rtlCol="0" anchor="ctr"/>
-          <a:lstStyle/>
-          <a:p>
-            <a:pPr algn="r" indent="0" marL="0">
-              <a:buNone/>
-            </a:pPr>
-            <a:r>
-              <a:rPr lang="en-US" sz="700" b="1" dirty="0">
-                <a:solidFill>
-                  <a:srgbClr val="5E7280"/>
-                </a:solidFill>
-                <a:latin typeface="Poppins" pitchFamily="34" charset="0"/>
-                <a:ea typeface="Poppins" pitchFamily="34" charset="-122"/>
-                <a:cs typeface="Poppins" pitchFamily="34" charset="-120"/>
-              </a:rPr>
-              <a:t>43,092</a:t>
-            </a:r>
-            <a:endParaRPr lang="en-US" sz="700" dirty="0"/>
-          </a:p>
-        </p:txBody>
-      </p:sp>
-      <p:sp>
-        <p:nvSpPr>
-          <p:cNvPr id="151" name="Text 149"/>
-          <p:cNvSpPr txBox="1"/>
-          <p:nvPr/>
-        </p:nvSpPr>
-        <p:spPr>
-          <a:xfrm>
-            <a:off x="594360" y="4321193"/>
-            <a:ext cx="1417320" cy="116259"/>
-          </a:xfrm>
-          <a:prstGeom prst="rect">
-            <a:avLst/>
-          </a:prstGeom>
-          <a:noFill/>
-          <a:ln/>
-        </p:spPr>
-        <p:txBody>
-          <a:bodyPr wrap="square" lIns="0" tIns="0" rIns="0" bIns="0" rtlCol="0" anchor="ctr"/>
-          <a:lstStyle/>
-          <a:p>
-            <a:pPr indent="0" marL="0">
-              <a:buNone/>
-            </a:pPr>
-            <a:r>
-              <a:rPr lang="en-US" sz="720" b="1" dirty="0">
-                <a:solidFill>
-                  <a:srgbClr val="12293A"/>
-                </a:solidFill>
-                <a:latin typeface="Poppins" pitchFamily="34" charset="0"/>
-                <a:ea typeface="Poppins" pitchFamily="34" charset="-122"/>
-                <a:cs typeface="Poppins" pitchFamily="34" charset="-120"/>
-              </a:rPr>
-              <a:t>Tony Ghoussein</a:t>
-            </a:r>
-            <a:endParaRPr lang="en-US" sz="720" dirty="0"/>
-          </a:p>
-        </p:txBody>
-      </p:sp>
-      <p:sp>
-        <p:nvSpPr>
-          <p:cNvPr id="152" name="Shape 150"/>
-          <p:cNvSpPr/>
-          <p:nvPr/>
-        </p:nvSpPr>
-        <p:spPr>
-          <a:xfrm>
-            <a:off x="2084832" y="4328508"/>
-            <a:ext cx="996696" cy="102543"/>
-          </a:xfrm>
-          <a:prstGeom prst="rect">
-            <a:avLst/>
-          </a:prstGeom>
-          <a:solidFill>
-            <a:srgbClr val="EDF5F7"/>
-          </a:solidFill>
-          <a:ln/>
-        </p:spPr>
-      </p:sp>
-      <p:sp>
-        <p:nvSpPr>
-          <p:cNvPr id="153" name="Text 151"/>
-          <p:cNvSpPr txBox="1"/>
-          <p:nvPr/>
-        </p:nvSpPr>
-        <p:spPr>
-          <a:xfrm>
-            <a:off x="2057400" y="4321193"/>
-            <a:ext cx="1051560" cy="116259"/>
-          </a:xfrm>
-          <a:prstGeom prst="rect">
-            <a:avLst/>
-          </a:prstGeom>
-          <a:noFill/>
-          <a:ln/>
-        </p:spPr>
-        <p:txBody>
-          <a:bodyPr wrap="square" lIns="0" tIns="0" rIns="0" bIns="0" rtlCol="0" anchor="ctr"/>
-          <a:lstStyle/>
-          <a:p>
-            <a:pPr algn="ctr" indent="0" marL="0">
-              <a:buNone/>
-            </a:pPr>
-            <a:r>
-              <a:rPr lang="en-US" sz="680" dirty="0">
-                <a:solidFill>
-                  <a:srgbClr val="12293A"/>
-                </a:solidFill>
-                <a:latin typeface="Poppins" pitchFamily="34" charset="0"/>
-                <a:ea typeface="Poppins" pitchFamily="34" charset="-122"/>
-                <a:cs typeface="Poppins" pitchFamily="34" charset="-120"/>
-              </a:rPr>
-              <a:t>6,208</a:t>
-            </a:r>
-            <a:endParaRPr lang="en-US" sz="680" dirty="0"/>
-          </a:p>
-        </p:txBody>
-      </p:sp>
-      <p:sp>
-        <p:nvSpPr>
-          <p:cNvPr id="154" name="Shape 152"/>
-          <p:cNvSpPr/>
-          <p:nvPr/>
-        </p:nvSpPr>
-        <p:spPr>
-          <a:xfrm>
-            <a:off x="3163824" y="4328508"/>
-            <a:ext cx="996696" cy="102543"/>
-          </a:xfrm>
-          <a:prstGeom prst="rect">
-            <a:avLst/>
-          </a:prstGeom>
-          <a:solidFill>
-            <a:srgbClr val="EDF5F7"/>
-          </a:solidFill>
-          <a:ln/>
-        </p:spPr>
-      </p:sp>
-      <p:sp>
-        <p:nvSpPr>
-          <p:cNvPr id="155" name="Text 153"/>
-          <p:cNvSpPr txBox="1"/>
-          <p:nvPr/>
-        </p:nvSpPr>
-        <p:spPr>
-          <a:xfrm>
-            <a:off x="3136392" y="4321193"/>
-            <a:ext cx="1051560" cy="116259"/>
-          </a:xfrm>
-          <a:prstGeom prst="rect">
-            <a:avLst/>
-          </a:prstGeom>
-          <a:noFill/>
-          <a:ln/>
-        </p:spPr>
-        <p:txBody>
-          <a:bodyPr wrap="square" lIns="0" tIns="0" rIns="0" bIns="0" rtlCol="0" anchor="ctr"/>
-          <a:lstStyle/>
-          <a:p>
-            <a:pPr algn="ctr" indent="0" marL="0">
-              <a:buNone/>
-            </a:pPr>
-            <a:r>
-              <a:rPr lang="en-US" sz="680" dirty="0">
-                <a:solidFill>
-                  <a:srgbClr val="12293A"/>
-                </a:solidFill>
-                <a:latin typeface="Poppins" pitchFamily="34" charset="0"/>
-                <a:ea typeface="Poppins" pitchFamily="34" charset="-122"/>
-                <a:cs typeface="Poppins" pitchFamily="34" charset="-120"/>
-              </a:rPr>
-              <a:t>10,369</a:t>
-            </a:r>
-            <a:endParaRPr lang="en-US" sz="680" dirty="0"/>
-          </a:p>
-        </p:txBody>
-      </p:sp>
-      <p:sp>
-        <p:nvSpPr>
-          <p:cNvPr id="156" name="Shape 154"/>
-          <p:cNvSpPr/>
-          <p:nvPr/>
-        </p:nvSpPr>
-        <p:spPr>
-          <a:xfrm>
-            <a:off x="4242816" y="4328508"/>
-            <a:ext cx="996696" cy="102543"/>
-          </a:xfrm>
-          <a:prstGeom prst="rect">
-            <a:avLst/>
-          </a:prstGeom>
-          <a:solidFill>
-            <a:srgbClr val="EDF5F7"/>
-          </a:solidFill>
-          <a:ln/>
-        </p:spPr>
-      </p:sp>
-      <p:sp>
-        <p:nvSpPr>
-          <p:cNvPr id="157" name="Text 155"/>
-          <p:cNvSpPr txBox="1"/>
-          <p:nvPr/>
-        </p:nvSpPr>
-        <p:spPr>
-          <a:xfrm>
-            <a:off x="4215384" y="4321193"/>
-            <a:ext cx="1051560" cy="116259"/>
-          </a:xfrm>
-          <a:prstGeom prst="rect">
-            <a:avLst/>
-          </a:prstGeom>
-          <a:noFill/>
-          <a:ln/>
-        </p:spPr>
-        <p:txBody>
-          <a:bodyPr wrap="square" lIns="0" tIns="0" rIns="0" bIns="0" rtlCol="0" anchor="ctr"/>
-          <a:lstStyle/>
-          <a:p>
-            <a:pPr algn="ctr" indent="0" marL="0">
-              <a:buNone/>
-            </a:pPr>
-            <a:r>
-              <a:rPr lang="en-US" sz="680" dirty="0">
-                <a:solidFill>
-                  <a:srgbClr val="12293A"/>
-                </a:solidFill>
-                <a:latin typeface="Poppins" pitchFamily="34" charset="0"/>
-                <a:ea typeface="Poppins" pitchFamily="34" charset="-122"/>
-                <a:cs typeface="Poppins" pitchFamily="34" charset="-120"/>
-              </a:rPr>
-              <a:t>11,891</a:t>
-            </a:r>
-            <a:endParaRPr lang="en-US" sz="680" dirty="0"/>
-          </a:p>
-        </p:txBody>
-      </p:sp>
-      <p:sp>
-        <p:nvSpPr>
-          <p:cNvPr id="158" name="Shape 156"/>
-          <p:cNvSpPr/>
-          <p:nvPr/>
-        </p:nvSpPr>
-        <p:spPr>
-          <a:xfrm>
-            <a:off x="5321808" y="4328508"/>
-            <a:ext cx="996696" cy="102543"/>
-          </a:xfrm>
-          <a:prstGeom prst="rect">
-            <a:avLst/>
-          </a:prstGeom>
-          <a:solidFill>
-            <a:srgbClr val="EDF5F7"/>
-          </a:solidFill>
-          <a:ln/>
-        </p:spPr>
-      </p:sp>
-      <p:sp>
-        <p:nvSpPr>
-          <p:cNvPr id="159" name="Text 157"/>
-          <p:cNvSpPr txBox="1"/>
-          <p:nvPr/>
-        </p:nvSpPr>
-        <p:spPr>
-          <a:xfrm>
-            <a:off x="5294376" y="4321193"/>
-            <a:ext cx="1051560" cy="116259"/>
-          </a:xfrm>
-          <a:prstGeom prst="rect">
-            <a:avLst/>
-          </a:prstGeom>
-          <a:noFill/>
-          <a:ln/>
-        </p:spPr>
-        <p:txBody>
-          <a:bodyPr wrap="square" lIns="0" tIns="0" rIns="0" bIns="0" rtlCol="0" anchor="ctr"/>
-          <a:lstStyle/>
-          <a:p>
-            <a:pPr algn="ctr" indent="0" marL="0">
-              <a:buNone/>
-            </a:pPr>
-            <a:r>
-              <a:rPr lang="en-US" sz="680" dirty="0">
-                <a:solidFill>
-                  <a:srgbClr val="12293A"/>
-                </a:solidFill>
-                <a:latin typeface="Poppins" pitchFamily="34" charset="0"/>
-                <a:ea typeface="Poppins" pitchFamily="34" charset="-122"/>
-                <a:cs typeface="Poppins" pitchFamily="34" charset="-120"/>
-              </a:rPr>
-              <a:t>30,083</a:t>
-            </a:r>
-            <a:endParaRPr lang="en-US" sz="680" dirty="0"/>
-          </a:p>
-        </p:txBody>
-      </p:sp>
-      <p:sp>
-        <p:nvSpPr>
-          <p:cNvPr id="160" name="Text 158"/>
-          <p:cNvSpPr txBox="1"/>
-          <p:nvPr/>
-        </p:nvSpPr>
-        <p:spPr>
-          <a:xfrm>
-            <a:off x="6400800" y="4321193"/>
-            <a:ext cx="1280160" cy="116259"/>
-          </a:xfrm>
-          <a:prstGeom prst="rect">
-            <a:avLst/>
-          </a:prstGeom>
-          <a:noFill/>
-          <a:ln/>
-        </p:spPr>
-        <p:txBody>
-          <a:bodyPr wrap="square" lIns="0" tIns="0" rIns="0" bIns="0" rtlCol="0" anchor="ctr"/>
-          <a:lstStyle/>
-          <a:p>
-            <a:pPr algn="r" indent="0" marL="0">
-              <a:buNone/>
-            </a:pPr>
-            <a:r>
-              <a:rPr lang="en-US" sz="700" b="1" dirty="0">
-                <a:solidFill>
-                  <a:srgbClr val="5E7280"/>
-                </a:solidFill>
-                <a:latin typeface="Poppins" pitchFamily="34" charset="0"/>
-                <a:ea typeface="Poppins" pitchFamily="34" charset="-122"/>
-                <a:cs typeface="Poppins" pitchFamily="34" charset="-120"/>
-              </a:rPr>
-              <a:t>58,551</a:t>
-            </a:r>
-            <a:endParaRPr lang="en-US" sz="700" dirty="0"/>
-          </a:p>
-        </p:txBody>
-      </p:sp>
-      <p:sp>
-        <p:nvSpPr>
-          <p:cNvPr id="161" name="Text 159"/>
-          <p:cNvSpPr txBox="1"/>
-          <p:nvPr/>
-        </p:nvSpPr>
-        <p:spPr>
-          <a:xfrm>
-            <a:off x="594360" y="4446597"/>
-            <a:ext cx="1417320" cy="116259"/>
-          </a:xfrm>
-          <a:prstGeom prst="rect">
-            <a:avLst/>
-          </a:prstGeom>
-          <a:noFill/>
-          <a:ln/>
-        </p:spPr>
-        <p:txBody>
-          <a:bodyPr wrap="square" lIns="0" tIns="0" rIns="0" bIns="0" rtlCol="0" anchor="ctr"/>
-          <a:lstStyle/>
-          <a:p>
-            <a:pPr indent="0" marL="0">
-              <a:buNone/>
-            </a:pPr>
-            <a:r>
-              <a:rPr lang="en-US" sz="720" b="1" dirty="0">
-                <a:solidFill>
-                  <a:srgbClr val="12293A"/>
-                </a:solidFill>
-                <a:latin typeface="Poppins" pitchFamily="34" charset="0"/>
-                <a:ea typeface="Poppins" pitchFamily="34" charset="-122"/>
-                <a:cs typeface="Poppins" pitchFamily="34" charset="-120"/>
-              </a:rPr>
-              <a:t>Eric Cruz</a:t>
-            </a:r>
-            <a:endParaRPr lang="en-US" sz="720" dirty="0"/>
-          </a:p>
-        </p:txBody>
-      </p:sp>
-      <p:sp>
-        <p:nvSpPr>
-          <p:cNvPr id="162" name="Shape 160"/>
-          <p:cNvSpPr/>
-          <p:nvPr/>
-        </p:nvSpPr>
-        <p:spPr>
-          <a:xfrm>
-            <a:off x="2084832" y="4453912"/>
-            <a:ext cx="996696" cy="102543"/>
-          </a:xfrm>
-          <a:prstGeom prst="rect">
-            <a:avLst/>
-          </a:prstGeom>
-          <a:solidFill>
-            <a:srgbClr val="EDF5F7"/>
-          </a:solidFill>
-          <a:ln/>
-        </p:spPr>
-      </p:sp>
-      <p:sp>
-        <p:nvSpPr>
-          <p:cNvPr id="163" name="Text 161"/>
-          <p:cNvSpPr txBox="1"/>
-          <p:nvPr/>
-        </p:nvSpPr>
-        <p:spPr>
-          <a:xfrm>
-            <a:off x="2057400" y="4446597"/>
-            <a:ext cx="1051560" cy="116259"/>
-          </a:xfrm>
-          <a:prstGeom prst="rect">
-            <a:avLst/>
-          </a:prstGeom>
-          <a:noFill/>
-          <a:ln/>
-        </p:spPr>
-        <p:txBody>
-          <a:bodyPr wrap="square" lIns="0" tIns="0" rIns="0" bIns="0" rtlCol="0" anchor="ctr"/>
-          <a:lstStyle/>
-          <a:p>
-            <a:pPr algn="ctr" indent="0" marL="0">
-              <a:buNone/>
-            </a:pPr>
-            <a:r>
-              <a:rPr lang="en-US" sz="680" dirty="0">
-                <a:solidFill>
-                  <a:srgbClr val="12293A"/>
-                </a:solidFill>
-                <a:latin typeface="Poppins" pitchFamily="34" charset="0"/>
-                <a:ea typeface="Poppins" pitchFamily="34" charset="-122"/>
-                <a:cs typeface="Poppins" pitchFamily="34" charset="-120"/>
-              </a:rPr>
-              <a:t>2,970</a:t>
-            </a:r>
-            <a:endParaRPr lang="en-US" sz="680" dirty="0"/>
-          </a:p>
-        </p:txBody>
-      </p:sp>
-      <p:sp>
-        <p:nvSpPr>
-          <p:cNvPr id="164" name="Shape 162"/>
-          <p:cNvSpPr/>
-          <p:nvPr/>
-        </p:nvSpPr>
-        <p:spPr>
-          <a:xfrm>
-            <a:off x="3163824" y="4453912"/>
-            <a:ext cx="996696" cy="102543"/>
-          </a:xfrm>
-          <a:prstGeom prst="rect">
-            <a:avLst/>
-          </a:prstGeom>
-          <a:solidFill>
-            <a:srgbClr val="EDF5F7"/>
-          </a:solidFill>
-          <a:ln/>
-        </p:spPr>
-      </p:sp>
-      <p:sp>
-        <p:nvSpPr>
-          <p:cNvPr id="165" name="Text 163"/>
-          <p:cNvSpPr txBox="1"/>
-          <p:nvPr/>
-        </p:nvSpPr>
-        <p:spPr>
-          <a:xfrm>
-            <a:off x="3136392" y="4446597"/>
-            <a:ext cx="1051560" cy="116259"/>
-          </a:xfrm>
-          <a:prstGeom prst="rect">
-            <a:avLst/>
-          </a:prstGeom>
-          <a:noFill/>
-          <a:ln/>
-        </p:spPr>
-        <p:txBody>
-          <a:bodyPr wrap="square" lIns="0" tIns="0" rIns="0" bIns="0" rtlCol="0" anchor="ctr"/>
-          <a:lstStyle/>
-          <a:p>
-            <a:pPr algn="ctr" indent="0" marL="0">
-              <a:buNone/>
-            </a:pPr>
-            <a:r>
-              <a:rPr lang="en-US" sz="680" dirty="0">
-                <a:solidFill>
-                  <a:srgbClr val="12293A"/>
-                </a:solidFill>
-                <a:latin typeface="Poppins" pitchFamily="34" charset="0"/>
-                <a:ea typeface="Poppins" pitchFamily="34" charset="-122"/>
-                <a:cs typeface="Poppins" pitchFamily="34" charset="-120"/>
-              </a:rPr>
-              <a:t>7,237</a:t>
-            </a:r>
-            <a:endParaRPr lang="en-US" sz="680" dirty="0"/>
-          </a:p>
-        </p:txBody>
-      </p:sp>
-      <p:sp>
-        <p:nvSpPr>
-          <p:cNvPr id="166" name="Shape 164"/>
-          <p:cNvSpPr/>
-          <p:nvPr/>
-        </p:nvSpPr>
-        <p:spPr>
-          <a:xfrm>
-            <a:off x="4242816" y="4453912"/>
-            <a:ext cx="996696" cy="102543"/>
-          </a:xfrm>
-          <a:prstGeom prst="rect">
-            <a:avLst/>
-          </a:prstGeom>
-          <a:solidFill>
-            <a:srgbClr val="EDF5F7"/>
-          </a:solidFill>
-          <a:ln/>
-        </p:spPr>
-      </p:sp>
-      <p:sp>
-        <p:nvSpPr>
-          <p:cNvPr id="167" name="Text 165"/>
-          <p:cNvSpPr txBox="1"/>
-          <p:nvPr/>
-        </p:nvSpPr>
-        <p:spPr>
-          <a:xfrm>
-            <a:off x="4215384" y="4446597"/>
-            <a:ext cx="1051560" cy="116259"/>
-          </a:xfrm>
-          <a:prstGeom prst="rect">
-            <a:avLst/>
-          </a:prstGeom>
-          <a:noFill/>
-          <a:ln/>
-        </p:spPr>
-        <p:txBody>
-          <a:bodyPr wrap="square" lIns="0" tIns="0" rIns="0" bIns="0" rtlCol="0" anchor="ctr"/>
-          <a:lstStyle/>
-          <a:p>
-            <a:pPr algn="ctr" indent="0" marL="0">
-              <a:buNone/>
-            </a:pPr>
-            <a:r>
-              <a:rPr lang="en-US" sz="680" dirty="0">
-                <a:solidFill>
-                  <a:srgbClr val="12293A"/>
-                </a:solidFill>
-                <a:latin typeface="Poppins" pitchFamily="34" charset="0"/>
-                <a:ea typeface="Poppins" pitchFamily="34" charset="-122"/>
-                <a:cs typeface="Poppins" pitchFamily="34" charset="-120"/>
-              </a:rPr>
-              <a:t>19,289</a:t>
-            </a:r>
-            <a:endParaRPr lang="en-US" sz="680" dirty="0"/>
-          </a:p>
-        </p:txBody>
-      </p:sp>
-      <p:sp>
-        <p:nvSpPr>
-          <p:cNvPr id="168" name="Shape 166"/>
-          <p:cNvSpPr/>
-          <p:nvPr/>
-        </p:nvSpPr>
-        <p:spPr>
-          <a:xfrm>
-            <a:off x="5321808" y="4453912"/>
-            <a:ext cx="996696" cy="102543"/>
-          </a:xfrm>
-          <a:prstGeom prst="rect">
-            <a:avLst/>
-          </a:prstGeom>
-          <a:solidFill>
-            <a:srgbClr val="EDF5F7"/>
-          </a:solidFill>
-          <a:ln/>
-        </p:spPr>
-      </p:sp>
-      <p:sp>
-        <p:nvSpPr>
-          <p:cNvPr id="169" name="Text 167"/>
-          <p:cNvSpPr txBox="1"/>
-          <p:nvPr/>
-        </p:nvSpPr>
-        <p:spPr>
-          <a:xfrm>
-            <a:off x="5294376" y="4446597"/>
-            <a:ext cx="1051560" cy="116259"/>
-          </a:xfrm>
-          <a:prstGeom prst="rect">
-            <a:avLst/>
-          </a:prstGeom>
-          <a:noFill/>
-          <a:ln/>
-        </p:spPr>
-        <p:txBody>
-          <a:bodyPr wrap="square" lIns="0" tIns="0" rIns="0" bIns="0" rtlCol="0" anchor="ctr"/>
-          <a:lstStyle/>
-          <a:p>
-            <a:pPr algn="ctr" indent="0" marL="0">
-              <a:buNone/>
-            </a:pPr>
-            <a:r>
-              <a:rPr lang="en-US" sz="680" dirty="0">
-                <a:solidFill>
-                  <a:srgbClr val="12293A"/>
-                </a:solidFill>
-                <a:latin typeface="Poppins" pitchFamily="34" charset="0"/>
-                <a:ea typeface="Poppins" pitchFamily="34" charset="-122"/>
-                <a:cs typeface="Poppins" pitchFamily="34" charset="-120"/>
-              </a:rPr>
-              <a:t>6,155</a:t>
-            </a:r>
-            <a:endParaRPr lang="en-US" sz="680" dirty="0"/>
-          </a:p>
-        </p:txBody>
-      </p:sp>
-      <p:sp>
-        <p:nvSpPr>
-          <p:cNvPr id="170" name="Text 168"/>
-          <p:cNvSpPr txBox="1"/>
-          <p:nvPr/>
-        </p:nvSpPr>
-        <p:spPr>
-          <a:xfrm>
-            <a:off x="6400800" y="4446597"/>
-            <a:ext cx="1280160" cy="116259"/>
-          </a:xfrm>
-          <a:prstGeom prst="rect">
-            <a:avLst/>
-          </a:prstGeom>
-          <a:noFill/>
-          <a:ln/>
-        </p:spPr>
-        <p:txBody>
-          <a:bodyPr wrap="square" lIns="0" tIns="0" rIns="0" bIns="0" rtlCol="0" anchor="ctr"/>
-          <a:lstStyle/>
-          <a:p>
-            <a:pPr algn="r" indent="0" marL="0">
-              <a:buNone/>
-            </a:pPr>
-            <a:r>
-              <a:rPr lang="en-US" sz="700" b="1" dirty="0">
-                <a:solidFill>
-                  <a:srgbClr val="5E7280"/>
-                </a:solidFill>
-                <a:latin typeface="Poppins" pitchFamily="34" charset="0"/>
-                <a:ea typeface="Poppins" pitchFamily="34" charset="-122"/>
-                <a:cs typeface="Poppins" pitchFamily="34" charset="-120"/>
-              </a:rPr>
-              <a:t>35,651</a:t>
-            </a:r>
-            <a:endParaRPr lang="en-US" sz="700" dirty="0"/>
-          </a:p>
-        </p:txBody>
-      </p:sp>
-      <p:sp>
-        <p:nvSpPr>
-          <p:cNvPr id="171" name="Shape 169"/>
+          <p:cNvPr id="157" name="Shape 155"/>
           <p:cNvSpPr/>
           <p:nvPr/>
         </p:nvSpPr>
@@ -20777,7 +20269,7 @@
       </p:sp>
       <p:sp>
         <p:nvSpPr>
-          <p:cNvPr id="172" name="Text 170"/>
+          <p:cNvPr id="158" name="Text 156"/>
           <p:cNvSpPr txBox="1"/>
           <p:nvPr/>
         </p:nvSpPr>
@@ -20816,7 +20308,7 @@
       </p:sp>
       <p:sp>
         <p:nvSpPr>
-          <p:cNvPr id="173" name="Text 171"/>
+          <p:cNvPr id="159" name="Text 157"/>
           <p:cNvSpPr txBox="1"/>
           <p:nvPr/>
         </p:nvSpPr>
@@ -20855,7 +20347,7 @@
       </p:sp>
       <p:sp>
         <p:nvSpPr>
-          <p:cNvPr id="174" name="Text 172"/>
+          <p:cNvPr id="160" name="Text 158"/>
           <p:cNvSpPr txBox="1"/>
           <p:nvPr/>
         </p:nvSpPr>
@@ -20894,7 +20386,7 @@
       </p:sp>
       <p:sp>
         <p:nvSpPr>
-          <p:cNvPr id="175" name="Text 173"/>
+          <p:cNvPr id="161" name="Text 159"/>
           <p:cNvSpPr txBox="1"/>
           <p:nvPr/>
         </p:nvSpPr>
@@ -20933,7 +20425,7 @@
       </p:sp>
       <p:sp>
         <p:nvSpPr>
-          <p:cNvPr id="176" name="Text 174"/>
+          <p:cNvPr id="162" name="Text 160"/>
           <p:cNvSpPr txBox="1"/>
           <p:nvPr/>
         </p:nvSpPr>
@@ -20972,7 +20464,7 @@
       </p:sp>
       <p:sp>
         <p:nvSpPr>
-          <p:cNvPr id="177" name="Text 175"/>
+          <p:cNvPr id="163" name="Text 161"/>
           <p:cNvSpPr txBox="1"/>
           <p:nvPr/>
         </p:nvSpPr>
@@ -21011,7 +20503,7 @@
       </p:sp>
       <p:sp>
         <p:nvSpPr>
-          <p:cNvPr id="178" name="Text 176"/>
+          <p:cNvPr id="164" name="Text 162"/>
           <p:cNvSpPr txBox="1"/>
           <p:nvPr/>
         </p:nvSpPr>
@@ -21064,7 +20556,7 @@
       </p:sp>
       <p:sp>
         <p:nvSpPr>
-          <p:cNvPr id="179" name="Shape 177"/>
+          <p:cNvPr id="165" name="Shape 163"/>
           <p:cNvSpPr/>
           <p:nvPr/>
         </p:nvSpPr>
@@ -21084,7 +20576,7 @@
       </p:sp>
       <p:sp>
         <p:nvSpPr>
-          <p:cNvPr id="180" name="Text 178"/>
+          <p:cNvPr id="166" name="Text 164"/>
           <p:cNvSpPr txBox="1"/>
           <p:nvPr/>
         </p:nvSpPr>
@@ -21123,7 +20615,7 @@
       </p:sp>
       <p:sp>
         <p:nvSpPr>
-          <p:cNvPr id="181" name="Text 179"/>
+          <p:cNvPr id="167" name="Text 165"/>
           <p:cNvSpPr txBox="1"/>
           <p:nvPr/>
         </p:nvSpPr>
@@ -21162,7 +20654,7 @@
       </p:sp>
       <p:sp>
         <p:nvSpPr>
-          <p:cNvPr id="182" name="Shape 180"/>
+          <p:cNvPr id="168" name="Shape 166"/>
           <p:cNvSpPr/>
           <p:nvPr/>
         </p:nvSpPr>
@@ -21182,7 +20674,7 @@
       </p:sp>
       <p:sp>
         <p:nvSpPr>
-          <p:cNvPr id="183" name="Text 181"/>
+          <p:cNvPr id="169" name="Text 167"/>
           <p:cNvSpPr txBox="1"/>
           <p:nvPr/>
         </p:nvSpPr>
@@ -21221,7 +20713,7 @@
       </p:sp>
       <p:sp>
         <p:nvSpPr>
-          <p:cNvPr id="184" name="Text 182"/>
+          <p:cNvPr id="170" name="Text 168"/>
           <p:cNvSpPr txBox="1"/>
           <p:nvPr/>
         </p:nvSpPr>
@@ -21260,7 +20752,7 @@
       </p:sp>
       <p:sp>
         <p:nvSpPr>
-          <p:cNvPr id="185" name="Shape 183"/>
+          <p:cNvPr id="171" name="Shape 169"/>
           <p:cNvSpPr/>
           <p:nvPr/>
         </p:nvSpPr>
@@ -21280,7 +20772,7 @@
       </p:sp>
       <p:sp>
         <p:nvSpPr>
-          <p:cNvPr id="186" name="Text 184"/>
+          <p:cNvPr id="172" name="Text 170"/>
           <p:cNvSpPr txBox="1"/>
           <p:nvPr/>
         </p:nvSpPr>
@@ -21319,7 +20811,7 @@
       </p:sp>
       <p:sp>
         <p:nvSpPr>
-          <p:cNvPr id="187" name="Text 185"/>
+          <p:cNvPr id="173" name="Text 171"/>
           <p:cNvSpPr txBox="1"/>
           <p:nvPr/>
         </p:nvSpPr>
@@ -21358,7 +20850,7 @@
       </p:sp>
       <p:sp>
         <p:nvSpPr>
-          <p:cNvPr id="188" name="Shape 186"/>
+          <p:cNvPr id="174" name="Shape 172"/>
           <p:cNvSpPr/>
           <p:nvPr/>
         </p:nvSpPr>
@@ -21378,7 +20870,7 @@
       </p:sp>
       <p:sp>
         <p:nvSpPr>
-          <p:cNvPr id="189" name="Text 187"/>
+          <p:cNvPr id="175" name="Text 173"/>
           <p:cNvSpPr txBox="1"/>
           <p:nvPr/>
         </p:nvSpPr>
@@ -21417,7 +20909,7 @@
       </p:sp>
       <p:sp>
         <p:nvSpPr>
-          <p:cNvPr id="190" name="Text 188"/>
+          <p:cNvPr id="176" name="Text 174"/>
           <p:cNvSpPr txBox="1"/>
           <p:nvPr/>
         </p:nvSpPr>
@@ -21456,7 +20948,7 @@
       </p:sp>
       <p:sp>
         <p:nvSpPr>
-          <p:cNvPr id="191" name="Shape 189"/>
+          <p:cNvPr id="177" name="Shape 175"/>
           <p:cNvSpPr/>
           <p:nvPr/>
         </p:nvSpPr>
@@ -21476,7 +20968,7 @@
       </p:sp>
       <p:sp>
         <p:nvSpPr>
-          <p:cNvPr id="192" name="Text 190"/>
+          <p:cNvPr id="178" name="Text 176"/>
           <p:cNvSpPr txBox="1"/>
           <p:nvPr/>
         </p:nvSpPr>
@@ -21515,7 +21007,7 @@
       </p:sp>
       <p:sp>
         <p:nvSpPr>
-          <p:cNvPr id="193" name="Text 191"/>
+          <p:cNvPr id="179" name="Text 177"/>
           <p:cNvSpPr txBox="1"/>
           <p:nvPr/>
         </p:nvSpPr>
@@ -21554,7 +21046,7 @@
       </p:sp>
       <p:sp>
         <p:nvSpPr>
-          <p:cNvPr id="194" name="Shape 192"/>
+          <p:cNvPr id="180" name="Shape 178"/>
           <p:cNvSpPr/>
           <p:nvPr/>
         </p:nvSpPr>
@@ -21574,7 +21066,7 @@
       </p:sp>
       <p:sp>
         <p:nvSpPr>
-          <p:cNvPr id="195" name="Text 193"/>
+          <p:cNvPr id="181" name="Text 179"/>
           <p:cNvSpPr txBox="1"/>
           <p:nvPr/>
         </p:nvSpPr>
@@ -21613,7 +21105,7 @@
       </p:sp>
       <p:sp>
         <p:nvSpPr>
-          <p:cNvPr id="196" name="Text 194"/>
+          <p:cNvPr id="182" name="Text 180"/>
           <p:cNvSpPr txBox="1"/>
           <p:nvPr/>
         </p:nvSpPr>
@@ -21652,7 +21144,7 @@
       </p:sp>
       <p:sp>
         <p:nvSpPr>
-          <p:cNvPr id="197" name="Shape 195"/>
+          <p:cNvPr id="183" name="Shape 181"/>
           <p:cNvSpPr/>
           <p:nvPr/>
         </p:nvSpPr>
@@ -21672,7 +21164,7 @@
       </p:sp>
       <p:sp>
         <p:nvSpPr>
-          <p:cNvPr id="198" name="Text 196"/>
+          <p:cNvPr id="184" name="Text 182"/>
           <p:cNvSpPr txBox="1"/>
           <p:nvPr/>
         </p:nvSpPr>
@@ -21711,7 +21203,7 @@
       </p:sp>
       <p:sp>
         <p:nvSpPr>
-          <p:cNvPr id="199" name="Text 197"/>
+          <p:cNvPr id="185" name="Text 183"/>
           <p:cNvSpPr txBox="1"/>
           <p:nvPr/>
         </p:nvSpPr>
@@ -21750,7 +21242,7 @@
       </p:sp>
       <p:sp>
         <p:nvSpPr>
-          <p:cNvPr id="200" name="Shape 198"/>
+          <p:cNvPr id="186" name="Shape 184"/>
           <p:cNvSpPr/>
           <p:nvPr/>
         </p:nvSpPr>
@@ -21770,7 +21262,7 @@
       </p:sp>
       <p:sp>
         <p:nvSpPr>
-          <p:cNvPr id="201" name="Text 199"/>
+          <p:cNvPr id="187" name="Text 185"/>
           <p:cNvSpPr txBox="1"/>
           <p:nvPr/>
         </p:nvSpPr>
@@ -21809,7 +21301,7 @@
       </p:sp>
       <p:sp>
         <p:nvSpPr>
-          <p:cNvPr id="202" name="Text 200"/>
+          <p:cNvPr id="188" name="Text 186"/>
           <p:cNvSpPr txBox="1"/>
           <p:nvPr/>
         </p:nvSpPr>
@@ -21848,7 +21340,7 @@
       </p:sp>
       <p:sp>
         <p:nvSpPr>
-          <p:cNvPr id="203" name="Shape 201"/>
+          <p:cNvPr id="189" name="Shape 187"/>
           <p:cNvSpPr/>
           <p:nvPr/>
         </p:nvSpPr>
@@ -21868,7 +21360,7 @@
       </p:sp>
       <p:sp>
         <p:nvSpPr>
-          <p:cNvPr id="204" name="Text 202"/>
+          <p:cNvPr id="190" name="Text 188"/>
           <p:cNvSpPr txBox="1"/>
           <p:nvPr/>
         </p:nvSpPr>
@@ -21907,7 +21399,7 @@
       </p:sp>
       <p:sp>
         <p:nvSpPr>
-          <p:cNvPr id="205" name="Text 203"/>
+          <p:cNvPr id="191" name="Text 189"/>
           <p:cNvSpPr txBox="1"/>
           <p:nvPr/>
         </p:nvSpPr>
@@ -21946,7 +21438,7 @@
       </p:sp>
       <p:sp>
         <p:nvSpPr>
-          <p:cNvPr id="206" name="Shape 204"/>
+          <p:cNvPr id="192" name="Shape 190"/>
           <p:cNvSpPr/>
           <p:nvPr/>
         </p:nvSpPr>
@@ -21966,7 +21458,7 @@
       </p:sp>
       <p:sp>
         <p:nvSpPr>
-          <p:cNvPr id="207" name="Text 205"/>
+          <p:cNvPr id="193" name="Text 191"/>
           <p:cNvSpPr txBox="1"/>
           <p:nvPr/>
         </p:nvSpPr>
@@ -22005,7 +21497,7 @@
       </p:sp>
       <p:sp>
         <p:nvSpPr>
-          <p:cNvPr id="208" name="Text 206"/>
+          <p:cNvPr id="194" name="Text 192"/>
           <p:cNvSpPr txBox="1"/>
           <p:nvPr/>
         </p:nvSpPr>
@@ -22044,7 +21536,7 @@
       </p:sp>
       <p:sp>
         <p:nvSpPr>
-          <p:cNvPr id="209" name="Shape 207"/>
+          <p:cNvPr id="195" name="Shape 193"/>
           <p:cNvSpPr/>
           <p:nvPr/>
         </p:nvSpPr>
@@ -22064,7 +21556,7 @@
       </p:sp>
       <p:sp>
         <p:nvSpPr>
-          <p:cNvPr id="210" name="Text 208"/>
+          <p:cNvPr id="196" name="Text 194"/>
           <p:cNvSpPr txBox="1"/>
           <p:nvPr/>
         </p:nvSpPr>
@@ -22103,7 +21595,7 @@
       </p:sp>
       <p:sp>
         <p:nvSpPr>
-          <p:cNvPr id="211" name="Text 209"/>
+          <p:cNvPr id="197" name="Text 195"/>
           <p:cNvSpPr txBox="1"/>
           <p:nvPr/>
         </p:nvSpPr>
@@ -22142,7 +21634,7 @@
       </p:sp>
       <p:sp>
         <p:nvSpPr>
-          <p:cNvPr id="212" name="Shape 210"/>
+          <p:cNvPr id="198" name="Shape 196"/>
           <p:cNvSpPr/>
           <p:nvPr/>
         </p:nvSpPr>
@@ -22162,7 +21654,7 @@
       </p:sp>
       <p:sp>
         <p:nvSpPr>
-          <p:cNvPr id="213" name="Text 211"/>
+          <p:cNvPr id="199" name="Text 197"/>
           <p:cNvSpPr txBox="1"/>
           <p:nvPr/>
         </p:nvSpPr>
@@ -22201,7 +21693,7 @@
       </p:sp>
       <p:sp>
         <p:nvSpPr>
-          <p:cNvPr id="214" name="Text 212"/>
+          <p:cNvPr id="200" name="Text 198"/>
           <p:cNvSpPr txBox="1"/>
           <p:nvPr/>
         </p:nvSpPr>
@@ -22240,7 +21732,7 @@
       </p:sp>
       <p:sp>
         <p:nvSpPr>
-          <p:cNvPr id="215" name="Shape 213"/>
+          <p:cNvPr id="201" name="Shape 199"/>
           <p:cNvSpPr/>
           <p:nvPr/>
         </p:nvSpPr>
@@ -22260,7 +21752,7 @@
       </p:sp>
       <p:sp>
         <p:nvSpPr>
-          <p:cNvPr id="216" name="Text 214"/>
+          <p:cNvPr id="202" name="Text 200"/>
           <p:cNvSpPr txBox="1"/>
           <p:nvPr/>
         </p:nvSpPr>
@@ -22299,7 +21791,7 @@
       </p:sp>
       <p:sp>
         <p:nvSpPr>
-          <p:cNvPr id="217" name="Text 215"/>
+          <p:cNvPr id="203" name="Text 201"/>
           <p:cNvSpPr txBox="1"/>
           <p:nvPr/>
         </p:nvSpPr>
@@ -22338,7 +21830,7 @@
       </p:sp>
       <p:sp>
         <p:nvSpPr>
-          <p:cNvPr id="218" name="Shape 216"/>
+          <p:cNvPr id="204" name="Shape 202"/>
           <p:cNvSpPr/>
           <p:nvPr/>
         </p:nvSpPr>
@@ -22358,7 +21850,7 @@
       </p:sp>
       <p:sp>
         <p:nvSpPr>
-          <p:cNvPr id="219" name="Text 217"/>
+          <p:cNvPr id="205" name="Text 203"/>
           <p:cNvSpPr txBox="1"/>
           <p:nvPr/>
         </p:nvSpPr>
@@ -22397,7 +21889,7 @@
       </p:sp>
       <p:sp>
         <p:nvSpPr>
-          <p:cNvPr id="220" name="Text 218"/>
+          <p:cNvPr id="206" name="Text 204"/>
           <p:cNvSpPr txBox="1"/>
           <p:nvPr/>
         </p:nvSpPr>
@@ -22436,7 +21928,7 @@
       </p:sp>
       <p:sp>
         <p:nvSpPr>
-          <p:cNvPr id="221" name="Text 219"/>
+          <p:cNvPr id="207" name="Text 205"/>
           <p:cNvSpPr txBox="1"/>
           <p:nvPr/>
         </p:nvSpPr>
@@ -22467,7 +21959,7 @@
                 <a:ea typeface="Poppins" pitchFamily="34" charset="-122"/>
                 <a:cs typeface="Poppins" pitchFamily="34" charset="-120"/>
               </a:rPr>
-              <a:t>cell = one week · series ends w/c 06 Sep — later captures give month-to-date only · Nicolas Ibrahim and Daniel Maddern each have two accounts, combined here; Daniel Maddern is new to the capture, so Jul–Sep are unavailable for him, not zero</a:t>
+              <a:t>cell = one week · series ends w/c 06 Sep — later captures give month-to-date only · Nicolas Ibrahim (two accounts) and Daniel Maddern (four accounts) are combined here; Daniel Maddern is new to the capture, so Jul–Sep are unavailable for him, not zero</a:t>
             </a:r>
             <a:endParaRPr lang="en-US" sz="600" dirty="0"/>
           </a:p>
@@ -22475,7 +21967,7 @@
       </p:sp>
       <p:sp>
         <p:nvSpPr>
-          <p:cNvPr id="222" name="Shape 220"/>
+          <p:cNvPr id="208" name="Shape 206"/>
           <p:cNvSpPr/>
           <p:nvPr/>
         </p:nvSpPr>
@@ -22504,7 +21996,7 @@
       </p:sp>
       <p:sp>
         <p:nvSpPr>
-          <p:cNvPr id="223" name="Text 221"/>
+          <p:cNvPr id="209" name="Text 207"/>
           <p:cNvSpPr txBox="1"/>
           <p:nvPr/>
         </p:nvSpPr>
@@ -22543,7 +22035,7 @@
       </p:sp>
       <p:sp>
         <p:nvSpPr>
-          <p:cNvPr id="224" name="Text 222"/>
+          <p:cNvPr id="210" name="Text 208"/>
           <p:cNvSpPr txBox="1"/>
           <p:nvPr/>
         </p:nvSpPr>
@@ -22582,7 +22074,7 @@
       </p:sp>
       <p:sp>
         <p:nvSpPr>
-          <p:cNvPr id="225" name="Text 223"/>
+          <p:cNvPr id="211" name="Text 209"/>
           <p:cNvSpPr txBox="1"/>
           <p:nvPr/>
         </p:nvSpPr>
@@ -22636,7 +22128,7 @@
       </p:sp>
       <p:sp>
         <p:nvSpPr>
-          <p:cNvPr id="226" name="Text 224"/>
+          <p:cNvPr id="212" name="Text 210"/>
           <p:cNvSpPr txBox="1"/>
           <p:nvPr/>
         </p:nvSpPr>
@@ -22675,7 +22167,7 @@
       </p:sp>
       <p:sp>
         <p:nvSpPr>
-          <p:cNvPr id="227" name="Text 225"/>
+          <p:cNvPr id="213" name="Text 211"/>
           <p:cNvSpPr txBox="1"/>
           <p:nvPr/>
         </p:nvSpPr>
@@ -22714,7 +22206,7 @@
       </p:sp>
       <p:sp>
         <p:nvSpPr>
-          <p:cNvPr id="228" name="Text 226"/>
+          <p:cNvPr id="214" name="Text 212"/>
           <p:cNvSpPr txBox="1"/>
           <p:nvPr/>
         </p:nvSpPr>
@@ -22753,7 +22245,7 @@
       </p:sp>
       <p:sp>
         <p:nvSpPr>
-          <p:cNvPr id="229" name="Text 227"/>
+          <p:cNvPr id="215" name="Text 213"/>
           <p:cNvSpPr txBox="1"/>
           <p:nvPr/>
         </p:nvSpPr>
@@ -22792,7 +22284,7 @@
       </p:sp>
       <p:sp>
         <p:nvSpPr>
-          <p:cNvPr id="230" name="Text 228"/>
+          <p:cNvPr id="216" name="Text 214"/>
           <p:cNvSpPr txBox="1"/>
           <p:nvPr/>
         </p:nvSpPr>
@@ -22831,7 +22323,7 @@
       </p:sp>
       <p:sp>
         <p:nvSpPr>
-          <p:cNvPr id="231" name="Text 229"/>
+          <p:cNvPr id="217" name="Text 215"/>
           <p:cNvSpPr txBox="1"/>
           <p:nvPr/>
         </p:nvSpPr>
@@ -22870,7 +22362,7 @@
       </p:sp>
       <p:sp>
         <p:nvSpPr>
-          <p:cNvPr id="232" name="Text 230"/>
+          <p:cNvPr id="218" name="Text 216"/>
           <p:cNvSpPr txBox="1"/>
           <p:nvPr/>
         </p:nvSpPr>
@@ -22909,7 +22401,7 @@
       </p:sp>
       <p:sp>
         <p:nvSpPr>
-          <p:cNvPr id="233" name="Text 231"/>
+          <p:cNvPr id="219" name="Text 217"/>
           <p:cNvSpPr txBox="1"/>
           <p:nvPr/>
         </p:nvSpPr>
@@ -22948,7 +22440,7 @@
       </p:sp>
       <p:sp>
         <p:nvSpPr>
-          <p:cNvPr id="234" name="Text 232"/>
+          <p:cNvPr id="220" name="Text 218"/>
           <p:cNvSpPr txBox="1"/>
           <p:nvPr/>
         </p:nvSpPr>
@@ -22987,7 +22479,7 @@
       </p:sp>
       <p:sp>
         <p:nvSpPr>
-          <p:cNvPr id="235" name="Text 233"/>
+          <p:cNvPr id="221" name="Text 219"/>
           <p:cNvSpPr txBox="1"/>
           <p:nvPr/>
         </p:nvSpPr>
@@ -23026,7 +22518,7 @@
       </p:sp>
       <p:sp>
         <p:nvSpPr>
-          <p:cNvPr id="236" name="Text 234"/>
+          <p:cNvPr id="222" name="Text 220"/>
           <p:cNvSpPr txBox="1"/>
           <p:nvPr/>
         </p:nvSpPr>
@@ -23065,7 +22557,7 @@
       </p:sp>
       <p:sp>
         <p:nvSpPr>
-          <p:cNvPr id="237" name="Text 235"/>
+          <p:cNvPr id="223" name="Text 221"/>
           <p:cNvSpPr txBox="1"/>
           <p:nvPr/>
         </p:nvSpPr>
@@ -23104,7 +22596,7 @@
       </p:sp>
       <p:sp>
         <p:nvSpPr>
-          <p:cNvPr id="238" name="Text 236"/>
+          <p:cNvPr id="224" name="Text 222"/>
           <p:cNvSpPr txBox="1"/>
           <p:nvPr/>
         </p:nvSpPr>
@@ -23143,7 +22635,7 @@
       </p:sp>
       <p:sp>
         <p:nvSpPr>
-          <p:cNvPr id="239" name="Text 237"/>
+          <p:cNvPr id="225" name="Text 223"/>
           <p:cNvSpPr txBox="1"/>
           <p:nvPr/>
         </p:nvSpPr>
@@ -23182,7 +22674,7 @@
       </p:sp>
       <p:sp>
         <p:nvSpPr>
-          <p:cNvPr id="240" name="Text 238"/>
+          <p:cNvPr id="226" name="Text 224"/>
           <p:cNvSpPr txBox="1"/>
           <p:nvPr/>
         </p:nvSpPr>
@@ -23221,7 +22713,7 @@
       </p:sp>
       <p:sp>
         <p:nvSpPr>
-          <p:cNvPr id="241" name="Text 239"/>
+          <p:cNvPr id="227" name="Text 225"/>
           <p:cNvSpPr txBox="1"/>
           <p:nvPr/>
         </p:nvSpPr>
@@ -23260,7 +22752,7 @@
       </p:sp>
       <p:sp>
         <p:nvSpPr>
-          <p:cNvPr id="242" name="Text 240"/>
+          <p:cNvPr id="228" name="Text 226"/>
           <p:cNvSpPr txBox="1"/>
           <p:nvPr/>
         </p:nvSpPr>
@@ -23299,7 +22791,7 @@
       </p:sp>
       <p:sp>
         <p:nvSpPr>
-          <p:cNvPr id="243" name="Text 241"/>
+          <p:cNvPr id="229" name="Text 227"/>
           <p:cNvSpPr txBox="1"/>
           <p:nvPr/>
         </p:nvSpPr>
@@ -23338,7 +22830,7 @@
       </p:sp>
       <p:sp>
         <p:nvSpPr>
-          <p:cNvPr id="244" name="Text 242"/>
+          <p:cNvPr id="230" name="Text 228"/>
           <p:cNvSpPr txBox="1"/>
           <p:nvPr/>
         </p:nvSpPr>
@@ -23377,7 +22869,7 @@
       </p:sp>
       <p:sp>
         <p:nvSpPr>
-          <p:cNvPr id="245" name="Text 243"/>
+          <p:cNvPr id="231" name="Text 229"/>
           <p:cNvSpPr txBox="1"/>
           <p:nvPr/>
         </p:nvSpPr>
@@ -23416,7 +22908,7 @@
       </p:sp>
       <p:sp>
         <p:nvSpPr>
-          <p:cNvPr id="246" name="Text 244"/>
+          <p:cNvPr id="232" name="Text 230"/>
           <p:cNvSpPr txBox="1"/>
           <p:nvPr/>
         </p:nvSpPr>
@@ -23455,7 +22947,7 @@
       </p:sp>
       <p:sp>
         <p:nvSpPr>
-          <p:cNvPr id="247" name="Text 245"/>
+          <p:cNvPr id="233" name="Text 231"/>
           <p:cNvSpPr txBox="1"/>
           <p:nvPr/>
         </p:nvSpPr>
@@ -23494,7 +22986,7 @@
       </p:sp>
       <p:sp>
         <p:nvSpPr>
-          <p:cNvPr id="248" name="Text 246"/>
+          <p:cNvPr id="234" name="Text 232"/>
           <p:cNvSpPr txBox="1"/>
           <p:nvPr/>
         </p:nvSpPr>
@@ -23533,7 +23025,7 @@
       </p:sp>
       <p:sp>
         <p:nvSpPr>
-          <p:cNvPr id="249" name="Text 247"/>
+          <p:cNvPr id="235" name="Text 233"/>
           <p:cNvSpPr txBox="1"/>
           <p:nvPr/>
         </p:nvSpPr>
@@ -23572,7 +23064,7 @@
       </p:sp>
       <p:sp>
         <p:nvSpPr>
-          <p:cNvPr id="250" name="Text 248"/>
+          <p:cNvPr id="236" name="Text 234"/>
           <p:cNvSpPr txBox="1"/>
           <p:nvPr/>
         </p:nvSpPr>
@@ -23611,7 +23103,7 @@
       </p:sp>
       <p:sp>
         <p:nvSpPr>
-          <p:cNvPr id="251" name="Text 249"/>
+          <p:cNvPr id="237" name="Text 235"/>
           <p:cNvSpPr txBox="1"/>
           <p:nvPr/>
         </p:nvSpPr>
@@ -23650,7 +23142,7 @@
       </p:sp>
       <p:sp>
         <p:nvSpPr>
-          <p:cNvPr id="252" name="Text 250"/>
+          <p:cNvPr id="238" name="Text 236"/>
           <p:cNvSpPr txBox="1"/>
           <p:nvPr/>
         </p:nvSpPr>
@@ -23689,7 +23181,7 @@
       </p:sp>
       <p:sp>
         <p:nvSpPr>
-          <p:cNvPr id="253" name="Text 251"/>
+          <p:cNvPr id="239" name="Text 237"/>
           <p:cNvSpPr txBox="1"/>
           <p:nvPr/>
         </p:nvSpPr>
@@ -23728,7 +23220,7 @@
       </p:sp>
       <p:sp>
         <p:nvSpPr>
-          <p:cNvPr id="254" name="Text 252"/>
+          <p:cNvPr id="240" name="Text 238"/>
           <p:cNvSpPr txBox="1"/>
           <p:nvPr/>
         </p:nvSpPr>
@@ -23767,7 +23259,7 @@
       </p:sp>
       <p:sp>
         <p:nvSpPr>
-          <p:cNvPr id="255" name="Text 253"/>
+          <p:cNvPr id="241" name="Text 239"/>
           <p:cNvSpPr txBox="1"/>
           <p:nvPr/>
         </p:nvSpPr>
@@ -23806,7 +23298,7 @@
       </p:sp>
       <p:sp>
         <p:nvSpPr>
-          <p:cNvPr id="256" name="Text 254"/>
+          <p:cNvPr id="242" name="Text 240"/>
           <p:cNvSpPr txBox="1"/>
           <p:nvPr/>
         </p:nvSpPr>
@@ -23845,7 +23337,7 @@
       </p:sp>
       <p:sp>
         <p:nvSpPr>
-          <p:cNvPr id="257" name="Shape 255"/>
+          <p:cNvPr id="243" name="Shape 241"/>
           <p:cNvSpPr/>
           <p:nvPr/>
         </p:nvSpPr>
@@ -23874,7 +23366,7 @@
       </p:sp>
       <p:sp>
         <p:nvSpPr>
-          <p:cNvPr id="258" name="Text 256"/>
+          <p:cNvPr id="244" name="Text 242"/>
           <p:cNvSpPr txBox="1"/>
           <p:nvPr/>
         </p:nvSpPr>
@@ -23913,7 +23405,7 @@
       </p:sp>
       <p:sp>
         <p:nvSpPr>
-          <p:cNvPr id="259" name="Text 257"/>
+          <p:cNvPr id="245" name="Text 243"/>
           <p:cNvSpPr txBox="1"/>
           <p:nvPr/>
         </p:nvSpPr>
@@ -23975,7 +23467,7 @@
                 <a:ea typeface="Poppins" pitchFamily="34" charset="-122"/>
                 <a:cs typeface="Poppins" pitchFamily="34" charset="-120"/>
               </a:rPr>
-              <a:t>October code output has reached 1,234,279 lines to 26 Oct, nearly four times last week's 329,436 capture. Daniel Maddern's two accounts are 486,570 of it and Nicolas Ibrahim's 255,985; two further 'dan' accounts (danm@ 151,122, dan@ 86,307) are shown separately until confirmed. Mostafa Essa enters at 100,487. 193 PRs in Code over 30 days, ▲60%; spend $657, ▼37%.</a:t>
+              <a:t>October code output has reached 1,234,279 lines to 26 Oct, nearly four times last week's 329,436 capture. Daniel Maddern's four accounts are 723,999 of it (59%) and Nicolas Ibrahim's two 255,985. Mostafa Essa enters at 100,487. 193 PRs in Code over 30 days, ▲60%; spend $657, ▼37%.</a:t>
             </a:r>
             <a:endParaRPr lang="en-US" sz="900" dirty="0"/>
           </a:p>
@@ -23983,7 +23475,7 @@
       </p:sp>
       <p:sp>
         <p:nvSpPr>
-          <p:cNvPr id="260" name="Shape 258"/>
+          <p:cNvPr id="246" name="Shape 244"/>
           <p:cNvSpPr/>
           <p:nvPr/>
         </p:nvSpPr>
@@ -24005,7 +23497,7 @@
       </p:sp>
       <p:sp>
         <p:nvSpPr>
-          <p:cNvPr id="261" name="Text 259"/>
+          <p:cNvPr id="247" name="Text 245"/>
           <p:cNvSpPr txBox="1"/>
           <p:nvPr/>
         </p:nvSpPr>

--- a/exec-deck/output/H&L Weekly Update - WC 19 Oct 2026.pptx
+++ b/exec-deck/output/H&L Weekly Update - WC 19 Oct 2026.pptx
@@ -47323,8 +47323,47 @@
         </p:nvSpPr>
         <p:spPr>
           <a:xfrm>
+            <a:off x="9765792" y="4352544"/>
+            <a:ext cx="1664208" cy="164592"/>
+          </a:xfrm>
+          <a:prstGeom prst="rect">
+            <a:avLst/>
+          </a:prstGeom>
+          <a:noFill/>
+          <a:ln/>
+        </p:spPr>
+        <p:txBody>
+          <a:bodyPr wrap="square" lIns="0" tIns="0" rIns="0" bIns="0" rtlCol="0" anchor="ctr"/>
+          <a:lstStyle/>
+          <a:p>
+            <a:pPr indent="0" marL="0">
+              <a:buNone/>
+            </a:pPr>
+            <a:r>
+              <a:rPr lang="en-US" sz="700" b="1" dirty="0">
+                <a:solidFill>
+                  <a:srgbClr val="8FA1AC"/>
+                </a:solidFill>
+                <a:latin typeface="Poppins" pitchFamily="34" charset="0"/>
+                <a:ea typeface="Poppins" pitchFamily="34" charset="-122"/>
+                <a:cs typeface="Poppins" pitchFamily="34" charset="-120"/>
+              </a:rPr>
+              <a:t>PS STATUS · 26 OCT</a:t>
+            </a:r>
+            <a:endParaRPr lang="en-US" sz="700" dirty="0"/>
+          </a:p>
+        </p:txBody>
+      </p:sp>
+      <p:sp>
+        <p:nvSpPr>
+          <p:cNvPr id="32" name="Text 29"/>
+          <p:cNvSpPr txBox="1"/>
+          <p:nvPr/>
+        </p:nvSpPr>
+        <p:spPr>
+          <a:xfrm>
             <a:off x="6748272" y="4352544"/>
-            <a:ext cx="2286000" cy="164592"/>
+            <a:ext cx="1371600" cy="164592"/>
           </a:xfrm>
           <a:prstGeom prst="rect">
             <a:avLst/>
@@ -47356,14 +47395,14 @@
       </p:sp>
       <p:sp>
         <p:nvSpPr>
-          <p:cNvPr id="32" name="Text 29"/>
-          <p:cNvSpPr txBox="1"/>
-          <p:nvPr/>
-        </p:nvSpPr>
-        <p:spPr>
-          <a:xfrm>
-            <a:off x="9052560" y="4352544"/>
-            <a:ext cx="822960" cy="164592"/>
+          <p:cNvPr id="33" name="Text 30"/>
+          <p:cNvSpPr txBox="1"/>
+          <p:nvPr/>
+        </p:nvSpPr>
+        <p:spPr>
+          <a:xfrm>
+            <a:off x="8138160" y="4352544"/>
+            <a:ext cx="548640" cy="164592"/>
           </a:xfrm>
           <a:prstGeom prst="rect">
             <a:avLst/>
@@ -47395,14 +47434,14 @@
       </p:sp>
       <p:sp>
         <p:nvSpPr>
-          <p:cNvPr id="33" name="Text 30"/>
-          <p:cNvSpPr txBox="1"/>
-          <p:nvPr/>
-        </p:nvSpPr>
-        <p:spPr>
-          <a:xfrm>
-            <a:off x="9921240" y="4352544"/>
-            <a:ext cx="685800" cy="164592"/>
+          <p:cNvPr id="34" name="Text 31"/>
+          <p:cNvSpPr txBox="1"/>
+          <p:nvPr/>
+        </p:nvSpPr>
+        <p:spPr>
+          <a:xfrm>
+            <a:off x="8705088" y="4352544"/>
+            <a:ext cx="548640" cy="164592"/>
           </a:xfrm>
           <a:prstGeom prst="rect">
             <a:avLst/>
@@ -47434,14 +47473,14 @@
       </p:sp>
       <p:sp>
         <p:nvSpPr>
-          <p:cNvPr id="34" name="Text 31"/>
-          <p:cNvSpPr txBox="1"/>
-          <p:nvPr/>
-        </p:nvSpPr>
-        <p:spPr>
-          <a:xfrm>
-            <a:off x="10652760" y="4352544"/>
-            <a:ext cx="457200" cy="164592"/>
+          <p:cNvPr id="35" name="Text 32"/>
+          <p:cNvSpPr txBox="1"/>
+          <p:nvPr/>
+        </p:nvSpPr>
+        <p:spPr>
+          <a:xfrm>
+            <a:off x="9281160" y="4352544"/>
+            <a:ext cx="365760" cy="164592"/>
           </a:xfrm>
           <a:prstGeom prst="rect">
             <a:avLst/>
@@ -47473,14 +47512,14 @@
       </p:sp>
       <p:sp>
         <p:nvSpPr>
-          <p:cNvPr id="35" name="Text 32"/>
-          <p:cNvSpPr txBox="1"/>
-          <p:nvPr/>
-        </p:nvSpPr>
-        <p:spPr>
-          <a:xfrm>
-            <a:off x="11155680" y="4352544"/>
-            <a:ext cx="384048" cy="164592"/>
+          <p:cNvPr id="36" name="Text 33"/>
+          <p:cNvSpPr txBox="1"/>
+          <p:nvPr/>
+        </p:nvSpPr>
+        <p:spPr>
+          <a:xfrm>
+            <a:off x="11448288" y="4352544"/>
+            <a:ext cx="182880" cy="164592"/>
           </a:xfrm>
           <a:prstGeom prst="rect">
             <a:avLst/>
@@ -47501,7 +47540,7 @@
       </p:sp>
       <p:sp>
         <p:nvSpPr>
-          <p:cNvPr id="36" name="Text 33"/>
+          <p:cNvPr id="37" name="Text 34"/>
           <p:cNvSpPr txBox="1"/>
           <p:nvPr/>
         </p:nvSpPr>
@@ -47540,14 +47579,14 @@
       </p:sp>
       <p:sp>
         <p:nvSpPr>
-          <p:cNvPr id="37" name="Text 34"/>
+          <p:cNvPr id="38" name="Text 35"/>
           <p:cNvSpPr txBox="1"/>
           <p:nvPr/>
         </p:nvSpPr>
         <p:spPr>
           <a:xfrm>
             <a:off x="6748272" y="4535424"/>
-            <a:ext cx="2286000" cy="173736"/>
+            <a:ext cx="1371600" cy="173736"/>
           </a:xfrm>
           <a:prstGeom prst="rect">
             <a:avLst/>
@@ -47579,14 +47618,14 @@
       </p:sp>
       <p:sp>
         <p:nvSpPr>
-          <p:cNvPr id="38" name="Text 35"/>
-          <p:cNvSpPr txBox="1"/>
-          <p:nvPr/>
-        </p:nvSpPr>
-        <p:spPr>
-          <a:xfrm>
-            <a:off x="9052560" y="4535424"/>
-            <a:ext cx="822960" cy="173736"/>
+          <p:cNvPr id="39" name="Text 36"/>
+          <p:cNvSpPr txBox="1"/>
+          <p:nvPr/>
+        </p:nvSpPr>
+        <p:spPr>
+          <a:xfrm>
+            <a:off x="8138160" y="4535424"/>
+            <a:ext cx="548640" cy="173736"/>
           </a:xfrm>
           <a:prstGeom prst="rect">
             <a:avLst/>
@@ -47618,14 +47657,14 @@
       </p:sp>
       <p:sp>
         <p:nvSpPr>
-          <p:cNvPr id="39" name="Text 36"/>
-          <p:cNvSpPr txBox="1"/>
-          <p:nvPr/>
-        </p:nvSpPr>
-        <p:spPr>
-          <a:xfrm>
-            <a:off x="9921240" y="4535424"/>
-            <a:ext cx="685800" cy="173736"/>
+          <p:cNvPr id="40" name="Text 37"/>
+          <p:cNvSpPr txBox="1"/>
+          <p:nvPr/>
+        </p:nvSpPr>
+        <p:spPr>
+          <a:xfrm>
+            <a:off x="8705088" y="4535424"/>
+            <a:ext cx="548640" cy="173736"/>
           </a:xfrm>
           <a:prstGeom prst="rect">
             <a:avLst/>
@@ -47657,14 +47696,14 @@
       </p:sp>
       <p:sp>
         <p:nvSpPr>
-          <p:cNvPr id="40" name="Text 37"/>
-          <p:cNvSpPr txBox="1"/>
-          <p:nvPr/>
-        </p:nvSpPr>
-        <p:spPr>
-          <a:xfrm>
-            <a:off x="10652760" y="4535424"/>
-            <a:ext cx="457200" cy="173736"/>
+          <p:cNvPr id="41" name="Text 38"/>
+          <p:cNvSpPr txBox="1"/>
+          <p:nvPr/>
+        </p:nvSpPr>
+        <p:spPr>
+          <a:xfrm>
+            <a:off x="9281160" y="4535424"/>
+            <a:ext cx="365760" cy="173736"/>
           </a:xfrm>
           <a:prstGeom prst="rect">
             <a:avLst/>
@@ -47696,14 +47735,55 @@
       </p:sp>
       <p:sp>
         <p:nvSpPr>
-          <p:cNvPr id="41" name="Text 38"/>
-          <p:cNvSpPr txBox="1"/>
-          <p:nvPr/>
-        </p:nvSpPr>
-        <p:spPr>
-          <a:xfrm>
-            <a:off x="11155680" y="4535424"/>
-            <a:ext cx="384048" cy="173736"/>
+          <p:cNvPr id="42" name="Text 39"/>
+          <p:cNvSpPr txBox="1"/>
+          <p:nvPr/>
+        </p:nvSpPr>
+        <p:spPr>
+          <a:xfrm>
+            <a:off x="9765792" y="4535424"/>
+            <a:ext cx="1664208" cy="173736"/>
+          </a:xfrm>
+          <a:prstGeom prst="rect">
+            <a:avLst/>
+          </a:prstGeom>
+          <a:noFill/>
+          <a:ln/>
+        </p:spPr>
+        <p:txBody>
+          <a:bodyPr wrap="square" lIns="0" tIns="0" rIns="0" bIns="0" rtlCol="0" anchor="ctr">
+            <a:normAutofit/>
+          </a:bodyPr>
+          <a:lstStyle/>
+          <a:p>
+            <a:pPr indent="0" marL="0">
+              <a:buNone/>
+            </a:pPr>
+            <a:r>
+              <a:rPr lang="en-US" sz="680" dirty="0">
+                <a:solidFill>
+                  <a:srgbClr val="12293A"/>
+                </a:solidFill>
+                <a:latin typeface="Poppins" pitchFamily="34" charset="0"/>
+                <a:ea typeface="Poppins" pitchFamily="34" charset="-122"/>
+                <a:cs typeface="Poppins" pitchFamily="34" charset="-120"/>
+              </a:rPr>
+              <a:t>Signed · 49 sites · live mid-Jan</a:t>
+            </a:r>
+            <a:endParaRPr lang="en-US" sz="680" dirty="0"/>
+          </a:p>
+        </p:txBody>
+      </p:sp>
+      <p:sp>
+        <p:nvSpPr>
+          <p:cNvPr id="43" name="Text 40"/>
+          <p:cNvSpPr txBox="1"/>
+          <p:nvPr/>
+        </p:nvSpPr>
+        <p:spPr>
+          <a:xfrm>
+            <a:off x="11448288" y="4535424"/>
+            <a:ext cx="182880" cy="173736"/>
           </a:xfrm>
           <a:prstGeom prst="rect">
             <a:avLst/>
@@ -47735,7 +47815,7 @@
       </p:sp>
       <p:sp>
         <p:nvSpPr>
-          <p:cNvPr id="42" name="Text 39"/>
+          <p:cNvPr id="44" name="Text 41"/>
           <p:cNvSpPr txBox="1"/>
           <p:nvPr/>
         </p:nvSpPr>
@@ -47774,14 +47854,14 @@
       </p:sp>
       <p:sp>
         <p:nvSpPr>
-          <p:cNvPr id="43" name="Text 40"/>
+          <p:cNvPr id="45" name="Text 42"/>
           <p:cNvSpPr txBox="1"/>
           <p:nvPr/>
         </p:nvSpPr>
         <p:spPr>
           <a:xfrm>
             <a:off x="6748272" y="4710989"/>
-            <a:ext cx="2286000" cy="173736"/>
+            <a:ext cx="1371600" cy="173736"/>
           </a:xfrm>
           <a:prstGeom prst="rect">
             <a:avLst/>
@@ -47813,14 +47893,14 @@
       </p:sp>
       <p:sp>
         <p:nvSpPr>
-          <p:cNvPr id="44" name="Text 41"/>
-          <p:cNvSpPr txBox="1"/>
-          <p:nvPr/>
-        </p:nvSpPr>
-        <p:spPr>
-          <a:xfrm>
-            <a:off x="9052560" y="4710989"/>
-            <a:ext cx="822960" cy="173736"/>
+          <p:cNvPr id="46" name="Text 43"/>
+          <p:cNvSpPr txBox="1"/>
+          <p:nvPr/>
+        </p:nvSpPr>
+        <p:spPr>
+          <a:xfrm>
+            <a:off x="8138160" y="4710989"/>
+            <a:ext cx="548640" cy="173736"/>
           </a:xfrm>
           <a:prstGeom prst="rect">
             <a:avLst/>
@@ -47852,14 +47932,14 @@
       </p:sp>
       <p:sp>
         <p:nvSpPr>
-          <p:cNvPr id="45" name="Text 42"/>
-          <p:cNvSpPr txBox="1"/>
-          <p:nvPr/>
-        </p:nvSpPr>
-        <p:spPr>
-          <a:xfrm>
-            <a:off x="9921240" y="4710989"/>
-            <a:ext cx="685800" cy="173736"/>
+          <p:cNvPr id="47" name="Text 44"/>
+          <p:cNvSpPr txBox="1"/>
+          <p:nvPr/>
+        </p:nvSpPr>
+        <p:spPr>
+          <a:xfrm>
+            <a:off x="8705088" y="4710989"/>
+            <a:ext cx="548640" cy="173736"/>
           </a:xfrm>
           <a:prstGeom prst="rect">
             <a:avLst/>
@@ -47891,14 +47971,14 @@
       </p:sp>
       <p:sp>
         <p:nvSpPr>
-          <p:cNvPr id="46" name="Text 43"/>
-          <p:cNvSpPr txBox="1"/>
-          <p:nvPr/>
-        </p:nvSpPr>
-        <p:spPr>
-          <a:xfrm>
-            <a:off x="10652760" y="4710989"/>
-            <a:ext cx="457200" cy="173736"/>
+          <p:cNvPr id="48" name="Text 45"/>
+          <p:cNvSpPr txBox="1"/>
+          <p:nvPr/>
+        </p:nvSpPr>
+        <p:spPr>
+          <a:xfrm>
+            <a:off x="9281160" y="4710989"/>
+            <a:ext cx="365760" cy="173736"/>
           </a:xfrm>
           <a:prstGeom prst="rect">
             <a:avLst/>
@@ -47930,14 +48010,55 @@
       </p:sp>
       <p:sp>
         <p:nvSpPr>
-          <p:cNvPr id="47" name="Text 44"/>
-          <p:cNvSpPr txBox="1"/>
-          <p:nvPr/>
-        </p:nvSpPr>
-        <p:spPr>
-          <a:xfrm>
-            <a:off x="11155680" y="4710989"/>
-            <a:ext cx="384048" cy="173736"/>
+          <p:cNvPr id="49" name="Text 46"/>
+          <p:cNvSpPr txBox="1"/>
+          <p:nvPr/>
+        </p:nvSpPr>
+        <p:spPr>
+          <a:xfrm>
+            <a:off x="9765792" y="4710989"/>
+            <a:ext cx="1664208" cy="173736"/>
+          </a:xfrm>
+          <a:prstGeom prst="rect">
+            <a:avLst/>
+          </a:prstGeom>
+          <a:noFill/>
+          <a:ln/>
+        </p:spPr>
+        <p:txBody>
+          <a:bodyPr wrap="square" lIns="0" tIns="0" rIns="0" bIns="0" rtlCol="0" anchor="ctr">
+            <a:normAutofit/>
+          </a:bodyPr>
+          <a:lstStyle/>
+          <a:p>
+            <a:pPr indent="0" marL="0">
+              <a:buNone/>
+            </a:pPr>
+            <a:r>
+              <a:rPr lang="en-US" sz="680" dirty="0">
+                <a:solidFill>
+                  <a:srgbClr val="12293A"/>
+                </a:solidFill>
+                <a:latin typeface="Poppins" pitchFamily="34" charset="0"/>
+                <a:ea typeface="Poppins" pitchFamily="34" charset="-122"/>
+                <a:cs typeface="Poppins" pitchFamily="34" charset="-120"/>
+              </a:rPr>
+              <a:t>Registration changeover</a:t>
+            </a:r>
+            <a:endParaRPr lang="en-US" sz="680" dirty="0"/>
+          </a:p>
+        </p:txBody>
+      </p:sp>
+      <p:sp>
+        <p:nvSpPr>
+          <p:cNvPr id="50" name="Text 47"/>
+          <p:cNvSpPr txBox="1"/>
+          <p:nvPr/>
+        </p:nvSpPr>
+        <p:spPr>
+          <a:xfrm>
+            <a:off x="11448288" y="4710989"/>
+            <a:ext cx="182880" cy="173736"/>
           </a:xfrm>
           <a:prstGeom prst="rect">
             <a:avLst/>
@@ -47958,7 +48079,7 @@
       </p:sp>
       <p:sp>
         <p:nvSpPr>
-          <p:cNvPr id="48" name="Text 45"/>
+          <p:cNvPr id="51" name="Text 48"/>
           <p:cNvSpPr txBox="1"/>
           <p:nvPr/>
         </p:nvSpPr>
@@ -47997,14 +48118,14 @@
       </p:sp>
       <p:sp>
         <p:nvSpPr>
-          <p:cNvPr id="49" name="Text 46"/>
+          <p:cNvPr id="52" name="Text 49"/>
           <p:cNvSpPr txBox="1"/>
           <p:nvPr/>
         </p:nvSpPr>
         <p:spPr>
           <a:xfrm>
             <a:off x="6748272" y="4886554"/>
-            <a:ext cx="2286000" cy="173736"/>
+            <a:ext cx="1371600" cy="173736"/>
           </a:xfrm>
           <a:prstGeom prst="rect">
             <a:avLst/>
@@ -48036,14 +48157,14 @@
       </p:sp>
       <p:sp>
         <p:nvSpPr>
-          <p:cNvPr id="50" name="Text 47"/>
-          <p:cNvSpPr txBox="1"/>
-          <p:nvPr/>
-        </p:nvSpPr>
-        <p:spPr>
-          <a:xfrm>
-            <a:off x="9052560" y="4886554"/>
-            <a:ext cx="822960" cy="173736"/>
+          <p:cNvPr id="53" name="Text 50"/>
+          <p:cNvSpPr txBox="1"/>
+          <p:nvPr/>
+        </p:nvSpPr>
+        <p:spPr>
+          <a:xfrm>
+            <a:off x="8138160" y="4886554"/>
+            <a:ext cx="548640" cy="173736"/>
           </a:xfrm>
           <a:prstGeom prst="rect">
             <a:avLst/>
@@ -48075,14 +48196,14 @@
       </p:sp>
       <p:sp>
         <p:nvSpPr>
-          <p:cNvPr id="51" name="Text 48"/>
-          <p:cNvSpPr txBox="1"/>
-          <p:nvPr/>
-        </p:nvSpPr>
-        <p:spPr>
-          <a:xfrm>
-            <a:off x="9921240" y="4886554"/>
-            <a:ext cx="685800" cy="173736"/>
+          <p:cNvPr id="54" name="Text 51"/>
+          <p:cNvSpPr txBox="1"/>
+          <p:nvPr/>
+        </p:nvSpPr>
+        <p:spPr>
+          <a:xfrm>
+            <a:off x="8705088" y="4886554"/>
+            <a:ext cx="548640" cy="173736"/>
           </a:xfrm>
           <a:prstGeom prst="rect">
             <a:avLst/>
@@ -48114,14 +48235,14 @@
       </p:sp>
       <p:sp>
         <p:nvSpPr>
-          <p:cNvPr id="52" name="Text 49"/>
-          <p:cNvSpPr txBox="1"/>
-          <p:nvPr/>
-        </p:nvSpPr>
-        <p:spPr>
-          <a:xfrm>
-            <a:off x="10652760" y="4886554"/>
-            <a:ext cx="457200" cy="173736"/>
+          <p:cNvPr id="55" name="Text 52"/>
+          <p:cNvSpPr txBox="1"/>
+          <p:nvPr/>
+        </p:nvSpPr>
+        <p:spPr>
+          <a:xfrm>
+            <a:off x="9281160" y="4886554"/>
+            <a:ext cx="365760" cy="173736"/>
           </a:xfrm>
           <a:prstGeom prst="rect">
             <a:avLst/>
@@ -48153,14 +48274,55 @@
       </p:sp>
       <p:sp>
         <p:nvSpPr>
-          <p:cNvPr id="53" name="Text 50"/>
-          <p:cNvSpPr txBox="1"/>
-          <p:nvPr/>
-        </p:nvSpPr>
-        <p:spPr>
-          <a:xfrm>
-            <a:off x="11155680" y="4886554"/>
-            <a:ext cx="384048" cy="173736"/>
+          <p:cNvPr id="56" name="Text 53"/>
+          <p:cNvSpPr txBox="1"/>
+          <p:nvPr/>
+        </p:nvSpPr>
+        <p:spPr>
+          <a:xfrm>
+            <a:off x="9765792" y="4886554"/>
+            <a:ext cx="1664208" cy="173736"/>
+          </a:xfrm>
+          <a:prstGeom prst="rect">
+            <a:avLst/>
+          </a:prstGeom>
+          <a:noFill/>
+          <a:ln/>
+        </p:spPr>
+        <p:txBody>
+          <a:bodyPr wrap="square" lIns="0" tIns="0" rIns="0" bIns="0" rtlCol="0" anchor="ctr">
+            <a:normAutofit/>
+          </a:bodyPr>
+          <a:lstStyle/>
+          <a:p>
+            <a:pPr indent="0" marL="0">
+              <a:buNone/>
+            </a:pPr>
+            <a:r>
+              <a:rPr lang="en-US" sz="680" dirty="0">
+                <a:solidFill>
+                  <a:srgbClr val="12293A"/>
+                </a:solidFill>
+                <a:latin typeface="Poppins" pitchFamily="34" charset="0"/>
+                <a:ea typeface="Poppins" pitchFamily="34" charset="-122"/>
+                <a:cs typeface="Poppins" pitchFamily="34" charset="-120"/>
+              </a:rPr>
+              <a:t>Done last qtr · to close out</a:t>
+            </a:r>
+            <a:endParaRPr lang="en-US" sz="680" dirty="0"/>
+          </a:p>
+        </p:txBody>
+      </p:sp>
+      <p:sp>
+        <p:nvSpPr>
+          <p:cNvPr id="57" name="Text 54"/>
+          <p:cNvSpPr txBox="1"/>
+          <p:nvPr/>
+        </p:nvSpPr>
+        <p:spPr>
+          <a:xfrm>
+            <a:off x="11448288" y="4886554"/>
+            <a:ext cx="182880" cy="173736"/>
           </a:xfrm>
           <a:prstGeom prst="rect">
             <a:avLst/>
@@ -48181,7 +48343,7 @@
       </p:sp>
       <p:sp>
         <p:nvSpPr>
-          <p:cNvPr id="54" name="Text 51"/>
+          <p:cNvPr id="58" name="Text 55"/>
           <p:cNvSpPr txBox="1"/>
           <p:nvPr/>
         </p:nvSpPr>
@@ -48220,14 +48382,14 @@
       </p:sp>
       <p:sp>
         <p:nvSpPr>
-          <p:cNvPr id="55" name="Text 52"/>
+          <p:cNvPr id="59" name="Text 56"/>
           <p:cNvSpPr txBox="1"/>
           <p:nvPr/>
         </p:nvSpPr>
         <p:spPr>
           <a:xfrm>
             <a:off x="6748272" y="5062118"/>
-            <a:ext cx="2286000" cy="173736"/>
+            <a:ext cx="1371600" cy="173736"/>
           </a:xfrm>
           <a:prstGeom prst="rect">
             <a:avLst/>
@@ -48259,14 +48421,14 @@
       </p:sp>
       <p:sp>
         <p:nvSpPr>
-          <p:cNvPr id="56" name="Text 53"/>
-          <p:cNvSpPr txBox="1"/>
-          <p:nvPr/>
-        </p:nvSpPr>
-        <p:spPr>
-          <a:xfrm>
-            <a:off x="9052560" y="5062118"/>
-            <a:ext cx="822960" cy="173736"/>
+          <p:cNvPr id="60" name="Text 57"/>
+          <p:cNvSpPr txBox="1"/>
+          <p:nvPr/>
+        </p:nvSpPr>
+        <p:spPr>
+          <a:xfrm>
+            <a:off x="8138160" y="5062118"/>
+            <a:ext cx="548640" cy="173736"/>
           </a:xfrm>
           <a:prstGeom prst="rect">
             <a:avLst/>
@@ -48298,14 +48460,14 @@
       </p:sp>
       <p:sp>
         <p:nvSpPr>
-          <p:cNvPr id="57" name="Text 54"/>
-          <p:cNvSpPr txBox="1"/>
-          <p:nvPr/>
-        </p:nvSpPr>
-        <p:spPr>
-          <a:xfrm>
-            <a:off x="9921240" y="5062118"/>
-            <a:ext cx="685800" cy="173736"/>
+          <p:cNvPr id="61" name="Text 58"/>
+          <p:cNvSpPr txBox="1"/>
+          <p:nvPr/>
+        </p:nvSpPr>
+        <p:spPr>
+          <a:xfrm>
+            <a:off x="8705088" y="5062118"/>
+            <a:ext cx="548640" cy="173736"/>
           </a:xfrm>
           <a:prstGeom prst="rect">
             <a:avLst/>
@@ -48337,14 +48499,14 @@
       </p:sp>
       <p:sp>
         <p:nvSpPr>
-          <p:cNvPr id="58" name="Text 55"/>
-          <p:cNvSpPr txBox="1"/>
-          <p:nvPr/>
-        </p:nvSpPr>
-        <p:spPr>
-          <a:xfrm>
-            <a:off x="10652760" y="5062118"/>
-            <a:ext cx="457200" cy="173736"/>
+          <p:cNvPr id="62" name="Text 59"/>
+          <p:cNvSpPr txBox="1"/>
+          <p:nvPr/>
+        </p:nvSpPr>
+        <p:spPr>
+          <a:xfrm>
+            <a:off x="9281160" y="5062118"/>
+            <a:ext cx="365760" cy="173736"/>
           </a:xfrm>
           <a:prstGeom prst="rect">
             <a:avLst/>
@@ -48376,14 +48538,55 @@
       </p:sp>
       <p:sp>
         <p:nvSpPr>
-          <p:cNvPr id="59" name="Text 56"/>
-          <p:cNvSpPr txBox="1"/>
-          <p:nvPr/>
-        </p:nvSpPr>
-        <p:spPr>
-          <a:xfrm>
-            <a:off x="11155680" y="5062118"/>
-            <a:ext cx="384048" cy="173736"/>
+          <p:cNvPr id="63" name="Text 60"/>
+          <p:cNvSpPr txBox="1"/>
+          <p:nvPr/>
+        </p:nvSpPr>
+        <p:spPr>
+          <a:xfrm>
+            <a:off x="9765792" y="5062118"/>
+            <a:ext cx="1664208" cy="173736"/>
+          </a:xfrm>
+          <a:prstGeom prst="rect">
+            <a:avLst/>
+          </a:prstGeom>
+          <a:noFill/>
+          <a:ln/>
+        </p:spPr>
+        <p:txBody>
+          <a:bodyPr wrap="square" lIns="0" tIns="0" rIns="0" bIns="0" rtlCol="0" anchor="ctr">
+            <a:normAutofit/>
+          </a:bodyPr>
+          <a:lstStyle/>
+          <a:p>
+            <a:pPr indent="0" marL="0">
+              <a:buNone/>
+            </a:pPr>
+            <a:r>
+              <a:rPr lang="en-US" sz="680" dirty="0">
+                <a:solidFill>
+                  <a:srgbClr val="12293A"/>
+                </a:solidFill>
+                <a:latin typeface="Poppins" pitchFamily="34" charset="0"/>
+                <a:ea typeface="Poppins" pitchFamily="34" charset="-122"/>
+                <a:cs typeface="Poppins" pitchFamily="34" charset="-120"/>
+              </a:rPr>
+              <a:t>Build late Nov · live ~23 Nov</a:t>
+            </a:r>
+            <a:endParaRPr lang="en-US" sz="680" dirty="0"/>
+          </a:p>
+        </p:txBody>
+      </p:sp>
+      <p:sp>
+        <p:nvSpPr>
+          <p:cNvPr id="64" name="Text 61"/>
+          <p:cNvSpPr txBox="1"/>
+          <p:nvPr/>
+        </p:nvSpPr>
+        <p:spPr>
+          <a:xfrm>
+            <a:off x="11448288" y="5062118"/>
+            <a:ext cx="182880" cy="173736"/>
           </a:xfrm>
           <a:prstGeom prst="rect">
             <a:avLst/>
@@ -48404,7 +48607,7 @@
       </p:sp>
       <p:sp>
         <p:nvSpPr>
-          <p:cNvPr id="60" name="Text 57"/>
+          <p:cNvPr id="65" name="Text 62"/>
           <p:cNvSpPr txBox="1"/>
           <p:nvPr/>
         </p:nvSpPr>
@@ -48443,14 +48646,14 @@
       </p:sp>
       <p:sp>
         <p:nvSpPr>
-          <p:cNvPr id="61" name="Text 58"/>
+          <p:cNvPr id="66" name="Text 63"/>
           <p:cNvSpPr txBox="1"/>
           <p:nvPr/>
         </p:nvSpPr>
         <p:spPr>
           <a:xfrm>
             <a:off x="6748272" y="5237683"/>
-            <a:ext cx="2286000" cy="173736"/>
+            <a:ext cx="1371600" cy="173736"/>
           </a:xfrm>
           <a:prstGeom prst="rect">
             <a:avLst/>
@@ -48482,14 +48685,14 @@
       </p:sp>
       <p:sp>
         <p:nvSpPr>
-          <p:cNvPr id="62" name="Text 59"/>
-          <p:cNvSpPr txBox="1"/>
-          <p:nvPr/>
-        </p:nvSpPr>
-        <p:spPr>
-          <a:xfrm>
-            <a:off x="9052560" y="5237683"/>
-            <a:ext cx="822960" cy="173736"/>
+          <p:cNvPr id="67" name="Text 64"/>
+          <p:cNvSpPr txBox="1"/>
+          <p:nvPr/>
+        </p:nvSpPr>
+        <p:spPr>
+          <a:xfrm>
+            <a:off x="8138160" y="5237683"/>
+            <a:ext cx="548640" cy="173736"/>
           </a:xfrm>
           <a:prstGeom prst="rect">
             <a:avLst/>
@@ -48521,14 +48724,14 @@
       </p:sp>
       <p:sp>
         <p:nvSpPr>
-          <p:cNvPr id="63" name="Text 60"/>
-          <p:cNvSpPr txBox="1"/>
-          <p:nvPr/>
-        </p:nvSpPr>
-        <p:spPr>
-          <a:xfrm>
-            <a:off x="9921240" y="5237683"/>
-            <a:ext cx="685800" cy="173736"/>
+          <p:cNvPr id="68" name="Text 65"/>
+          <p:cNvSpPr txBox="1"/>
+          <p:nvPr/>
+        </p:nvSpPr>
+        <p:spPr>
+          <a:xfrm>
+            <a:off x="8705088" y="5237683"/>
+            <a:ext cx="548640" cy="173736"/>
           </a:xfrm>
           <a:prstGeom prst="rect">
             <a:avLst/>
@@ -48560,14 +48763,14 @@
       </p:sp>
       <p:sp>
         <p:nvSpPr>
-          <p:cNvPr id="64" name="Text 61"/>
-          <p:cNvSpPr txBox="1"/>
-          <p:nvPr/>
-        </p:nvSpPr>
-        <p:spPr>
-          <a:xfrm>
-            <a:off x="10652760" y="5237683"/>
-            <a:ext cx="457200" cy="173736"/>
+          <p:cNvPr id="69" name="Text 66"/>
+          <p:cNvSpPr txBox="1"/>
+          <p:nvPr/>
+        </p:nvSpPr>
+        <p:spPr>
+          <a:xfrm>
+            <a:off x="9281160" y="5237683"/>
+            <a:ext cx="365760" cy="173736"/>
           </a:xfrm>
           <a:prstGeom prst="rect">
             <a:avLst/>
@@ -48599,14 +48802,55 @@
       </p:sp>
       <p:sp>
         <p:nvSpPr>
-          <p:cNvPr id="65" name="Text 62"/>
-          <p:cNvSpPr txBox="1"/>
-          <p:nvPr/>
-        </p:nvSpPr>
-        <p:spPr>
-          <a:xfrm>
-            <a:off x="11155680" y="5237683"/>
-            <a:ext cx="384048" cy="173736"/>
+          <p:cNvPr id="70" name="Text 67"/>
+          <p:cNvSpPr txBox="1"/>
+          <p:nvPr/>
+        </p:nvSpPr>
+        <p:spPr>
+          <a:xfrm>
+            <a:off x="9765792" y="5237683"/>
+            <a:ext cx="1664208" cy="173736"/>
+          </a:xfrm>
+          <a:prstGeom prst="rect">
+            <a:avLst/>
+          </a:prstGeom>
+          <a:noFill/>
+          <a:ln/>
+        </p:spPr>
+        <p:txBody>
+          <a:bodyPr wrap="square" lIns="0" tIns="0" rIns="0" bIns="0" rtlCol="0" anchor="ctr">
+            <a:normAutofit/>
+          </a:bodyPr>
+          <a:lstStyle/>
+          <a:p>
+            <a:pPr indent="0" marL="0">
+              <a:buNone/>
+            </a:pPr>
+            <a:r>
+              <a:rPr lang="en-US" sz="680" dirty="0">
+                <a:solidFill>
+                  <a:srgbClr val="12293A"/>
+                </a:solidFill>
+                <a:latin typeface="Poppins" pitchFamily="34" charset="0"/>
+                <a:ea typeface="Poppins" pitchFamily="34" charset="-122"/>
+                <a:cs typeface="Poppins" pitchFamily="34" charset="-120"/>
+              </a:rPr>
+              <a:t>Venue still building · ~Dec</a:t>
+            </a:r>
+            <a:endParaRPr lang="en-US" sz="680" dirty="0"/>
+          </a:p>
+        </p:txBody>
+      </p:sp>
+      <p:sp>
+        <p:nvSpPr>
+          <p:cNvPr id="71" name="Text 68"/>
+          <p:cNvSpPr txBox="1"/>
+          <p:nvPr/>
+        </p:nvSpPr>
+        <p:spPr>
+          <a:xfrm>
+            <a:off x="11448288" y="5237683"/>
+            <a:ext cx="182880" cy="173736"/>
           </a:xfrm>
           <a:prstGeom prst="rect">
             <a:avLst/>
@@ -48627,7 +48871,7 @@
       </p:sp>
       <p:sp>
         <p:nvSpPr>
-          <p:cNvPr id="66" name="Text 63"/>
+          <p:cNvPr id="72" name="Text 69"/>
           <p:cNvSpPr txBox="1"/>
           <p:nvPr/>
         </p:nvSpPr>
@@ -48666,14 +48910,14 @@
       </p:sp>
       <p:sp>
         <p:nvSpPr>
-          <p:cNvPr id="67" name="Text 64"/>
+          <p:cNvPr id="73" name="Text 70"/>
           <p:cNvSpPr txBox="1"/>
           <p:nvPr/>
         </p:nvSpPr>
         <p:spPr>
           <a:xfrm>
             <a:off x="6748272" y="5413248"/>
-            <a:ext cx="2286000" cy="173736"/>
+            <a:ext cx="1371600" cy="173736"/>
           </a:xfrm>
           <a:prstGeom prst="rect">
             <a:avLst/>
@@ -48705,14 +48949,14 @@
       </p:sp>
       <p:sp>
         <p:nvSpPr>
-          <p:cNvPr id="68" name="Text 65"/>
-          <p:cNvSpPr txBox="1"/>
-          <p:nvPr/>
-        </p:nvSpPr>
-        <p:spPr>
-          <a:xfrm>
-            <a:off x="9052560" y="5413248"/>
-            <a:ext cx="822960" cy="173736"/>
+          <p:cNvPr id="74" name="Text 71"/>
+          <p:cNvSpPr txBox="1"/>
+          <p:nvPr/>
+        </p:nvSpPr>
+        <p:spPr>
+          <a:xfrm>
+            <a:off x="8138160" y="5413248"/>
+            <a:ext cx="548640" cy="173736"/>
           </a:xfrm>
           <a:prstGeom prst="rect">
             <a:avLst/>
@@ -48744,14 +48988,14 @@
       </p:sp>
       <p:sp>
         <p:nvSpPr>
-          <p:cNvPr id="69" name="Text 66"/>
-          <p:cNvSpPr txBox="1"/>
-          <p:nvPr/>
-        </p:nvSpPr>
-        <p:spPr>
-          <a:xfrm>
-            <a:off x="9921240" y="5413248"/>
-            <a:ext cx="685800" cy="173736"/>
+          <p:cNvPr id="75" name="Text 72"/>
+          <p:cNvSpPr txBox="1"/>
+          <p:nvPr/>
+        </p:nvSpPr>
+        <p:spPr>
+          <a:xfrm>
+            <a:off x="8705088" y="5413248"/>
+            <a:ext cx="548640" cy="173736"/>
           </a:xfrm>
           <a:prstGeom prst="rect">
             <a:avLst/>
@@ -48783,14 +49027,14 @@
       </p:sp>
       <p:sp>
         <p:nvSpPr>
-          <p:cNvPr id="70" name="Text 67"/>
-          <p:cNvSpPr txBox="1"/>
-          <p:nvPr/>
-        </p:nvSpPr>
-        <p:spPr>
-          <a:xfrm>
-            <a:off x="10652760" y="5413248"/>
-            <a:ext cx="457200" cy="173736"/>
+          <p:cNvPr id="76" name="Text 73"/>
+          <p:cNvSpPr txBox="1"/>
+          <p:nvPr/>
+        </p:nvSpPr>
+        <p:spPr>
+          <a:xfrm>
+            <a:off x="9281160" y="5413248"/>
+            <a:ext cx="365760" cy="173736"/>
           </a:xfrm>
           <a:prstGeom prst="rect">
             <a:avLst/>
@@ -48822,14 +49066,55 @@
       </p:sp>
       <p:sp>
         <p:nvSpPr>
-          <p:cNvPr id="71" name="Text 68"/>
-          <p:cNvSpPr txBox="1"/>
-          <p:nvPr/>
-        </p:nvSpPr>
-        <p:spPr>
-          <a:xfrm>
-            <a:off x="11155680" y="5413248"/>
-            <a:ext cx="384048" cy="173736"/>
+          <p:cNvPr id="77" name="Text 74"/>
+          <p:cNvSpPr txBox="1"/>
+          <p:nvPr/>
+        </p:nvSpPr>
+        <p:spPr>
+          <a:xfrm>
+            <a:off x="9765792" y="5413248"/>
+            <a:ext cx="1664208" cy="173736"/>
+          </a:xfrm>
+          <a:prstGeom prst="rect">
+            <a:avLst/>
+          </a:prstGeom>
+          <a:noFill/>
+          <a:ln/>
+        </p:spPr>
+        <p:txBody>
+          <a:bodyPr wrap="square" lIns="0" tIns="0" rIns="0" bIns="0" rtlCol="0" anchor="ctr">
+            <a:normAutofit/>
+          </a:bodyPr>
+          <a:lstStyle/>
+          <a:p>
+            <a:pPr indent="0" marL="0">
+              <a:buNone/>
+            </a:pPr>
+            <a:r>
+              <a:rPr lang="en-US" sz="680" dirty="0">
+                <a:solidFill>
+                  <a:srgbClr val="8FA1AC"/>
+                </a:solidFill>
+                <a:latin typeface="Poppins" pitchFamily="34" charset="0"/>
+                <a:ea typeface="Poppins" pitchFamily="34" charset="-122"/>
+                <a:cs typeface="Poppins" pitchFamily="34" charset="-120"/>
+              </a:rPr>
+              <a:t>—</a:t>
+            </a:r>
+            <a:endParaRPr lang="en-US" sz="680" dirty="0"/>
+          </a:p>
+        </p:txBody>
+      </p:sp>
+      <p:sp>
+        <p:nvSpPr>
+          <p:cNvPr id="78" name="Text 75"/>
+          <p:cNvSpPr txBox="1"/>
+          <p:nvPr/>
+        </p:nvSpPr>
+        <p:spPr>
+          <a:xfrm>
+            <a:off x="11448288" y="5413248"/>
+            <a:ext cx="182880" cy="173736"/>
           </a:xfrm>
           <a:prstGeom prst="rect">
             <a:avLst/>
@@ -48850,7 +49135,7 @@
       </p:sp>
       <p:sp>
         <p:nvSpPr>
-          <p:cNvPr id="72" name="Text 69"/>
+          <p:cNvPr id="79" name="Text 76"/>
           <p:cNvSpPr txBox="1"/>
           <p:nvPr/>
         </p:nvSpPr>
@@ -48889,14 +49174,14 @@
       </p:sp>
       <p:sp>
         <p:nvSpPr>
-          <p:cNvPr id="73" name="Text 70"/>
+          <p:cNvPr id="80" name="Text 77"/>
           <p:cNvSpPr txBox="1"/>
           <p:nvPr/>
         </p:nvSpPr>
         <p:spPr>
           <a:xfrm>
             <a:off x="6748272" y="5588813"/>
-            <a:ext cx="2286000" cy="173736"/>
+            <a:ext cx="1371600" cy="173736"/>
           </a:xfrm>
           <a:prstGeom prst="rect">
             <a:avLst/>
@@ -48928,14 +49213,14 @@
       </p:sp>
       <p:sp>
         <p:nvSpPr>
-          <p:cNvPr id="74" name="Text 71"/>
-          <p:cNvSpPr txBox="1"/>
-          <p:nvPr/>
-        </p:nvSpPr>
-        <p:spPr>
-          <a:xfrm>
-            <a:off x="9052560" y="5588813"/>
-            <a:ext cx="822960" cy="173736"/>
+          <p:cNvPr id="81" name="Text 78"/>
+          <p:cNvSpPr txBox="1"/>
+          <p:nvPr/>
+        </p:nvSpPr>
+        <p:spPr>
+          <a:xfrm>
+            <a:off x="8138160" y="5588813"/>
+            <a:ext cx="548640" cy="173736"/>
           </a:xfrm>
           <a:prstGeom prst="rect">
             <a:avLst/>
@@ -48967,14 +49252,14 @@
       </p:sp>
       <p:sp>
         <p:nvSpPr>
-          <p:cNvPr id="75" name="Text 72"/>
-          <p:cNvSpPr txBox="1"/>
-          <p:nvPr/>
-        </p:nvSpPr>
-        <p:spPr>
-          <a:xfrm>
-            <a:off x="9921240" y="5588813"/>
-            <a:ext cx="685800" cy="173736"/>
+          <p:cNvPr id="82" name="Text 79"/>
+          <p:cNvSpPr txBox="1"/>
+          <p:nvPr/>
+        </p:nvSpPr>
+        <p:spPr>
+          <a:xfrm>
+            <a:off x="8705088" y="5588813"/>
+            <a:ext cx="548640" cy="173736"/>
           </a:xfrm>
           <a:prstGeom prst="rect">
             <a:avLst/>
@@ -49006,14 +49291,14 @@
       </p:sp>
       <p:sp>
         <p:nvSpPr>
-          <p:cNvPr id="76" name="Text 73"/>
-          <p:cNvSpPr txBox="1"/>
-          <p:nvPr/>
-        </p:nvSpPr>
-        <p:spPr>
-          <a:xfrm>
-            <a:off x="10652760" y="5588813"/>
-            <a:ext cx="457200" cy="173736"/>
+          <p:cNvPr id="83" name="Text 80"/>
+          <p:cNvSpPr txBox="1"/>
+          <p:nvPr/>
+        </p:nvSpPr>
+        <p:spPr>
+          <a:xfrm>
+            <a:off x="9281160" y="5588813"/>
+            <a:ext cx="365760" cy="173736"/>
           </a:xfrm>
           <a:prstGeom prst="rect">
             <a:avLst/>
@@ -49045,14 +49330,55 @@
       </p:sp>
       <p:sp>
         <p:nvSpPr>
-          <p:cNvPr id="77" name="Text 74"/>
-          <p:cNvSpPr txBox="1"/>
-          <p:nvPr/>
-        </p:nvSpPr>
-        <p:spPr>
-          <a:xfrm>
-            <a:off x="11155680" y="5588813"/>
-            <a:ext cx="384048" cy="173736"/>
+          <p:cNvPr id="84" name="Text 81"/>
+          <p:cNvSpPr txBox="1"/>
+          <p:nvPr/>
+        </p:nvSpPr>
+        <p:spPr>
+          <a:xfrm>
+            <a:off x="9765792" y="5588813"/>
+            <a:ext cx="1664208" cy="173736"/>
+          </a:xfrm>
+          <a:prstGeom prst="rect">
+            <a:avLst/>
+          </a:prstGeom>
+          <a:noFill/>
+          <a:ln/>
+        </p:spPr>
+        <p:txBody>
+          <a:bodyPr wrap="square" lIns="0" tIns="0" rIns="0" bIns="0" rtlCol="0" anchor="ctr">
+            <a:normAutofit/>
+          </a:bodyPr>
+          <a:lstStyle/>
+          <a:p>
+            <a:pPr indent="0" marL="0">
+              <a:buNone/>
+            </a:pPr>
+            <a:r>
+              <a:rPr lang="en-US" sz="680" dirty="0">
+                <a:solidFill>
+                  <a:srgbClr val="8FA1AC"/>
+                </a:solidFill>
+                <a:latin typeface="Poppins" pitchFamily="34" charset="0"/>
+                <a:ea typeface="Poppins" pitchFamily="34" charset="-122"/>
+                <a:cs typeface="Poppins" pitchFamily="34" charset="-120"/>
+              </a:rPr>
+              <a:t>—</a:t>
+            </a:r>
+            <a:endParaRPr lang="en-US" sz="680" dirty="0"/>
+          </a:p>
+        </p:txBody>
+      </p:sp>
+      <p:sp>
+        <p:nvSpPr>
+          <p:cNvPr id="85" name="Text 82"/>
+          <p:cNvSpPr txBox="1"/>
+          <p:nvPr/>
+        </p:nvSpPr>
+        <p:spPr>
+          <a:xfrm>
+            <a:off x="11448288" y="5588813"/>
+            <a:ext cx="182880" cy="173736"/>
           </a:xfrm>
           <a:prstGeom prst="rect">
             <a:avLst/>
@@ -49073,7 +49399,7 @@
       </p:sp>
       <p:sp>
         <p:nvSpPr>
-          <p:cNvPr id="78" name="Text 75"/>
+          <p:cNvPr id="86" name="Text 83"/>
           <p:cNvSpPr txBox="1"/>
           <p:nvPr/>
         </p:nvSpPr>
@@ -49112,14 +49438,14 @@
       </p:sp>
       <p:sp>
         <p:nvSpPr>
-          <p:cNvPr id="79" name="Text 76"/>
+          <p:cNvPr id="87" name="Text 84"/>
           <p:cNvSpPr txBox="1"/>
           <p:nvPr/>
         </p:nvSpPr>
         <p:spPr>
           <a:xfrm>
             <a:off x="6748272" y="5764378"/>
-            <a:ext cx="2286000" cy="173736"/>
+            <a:ext cx="1371600" cy="173736"/>
           </a:xfrm>
           <a:prstGeom prst="rect">
             <a:avLst/>
@@ -49151,14 +49477,14 @@
       </p:sp>
       <p:sp>
         <p:nvSpPr>
-          <p:cNvPr id="80" name="Text 77"/>
-          <p:cNvSpPr txBox="1"/>
-          <p:nvPr/>
-        </p:nvSpPr>
-        <p:spPr>
-          <a:xfrm>
-            <a:off x="9052560" y="5764378"/>
-            <a:ext cx="822960" cy="173736"/>
+          <p:cNvPr id="88" name="Text 85"/>
+          <p:cNvSpPr txBox="1"/>
+          <p:nvPr/>
+        </p:nvSpPr>
+        <p:spPr>
+          <a:xfrm>
+            <a:off x="8138160" y="5764378"/>
+            <a:ext cx="548640" cy="173736"/>
           </a:xfrm>
           <a:prstGeom prst="rect">
             <a:avLst/>
@@ -49190,14 +49516,14 @@
       </p:sp>
       <p:sp>
         <p:nvSpPr>
-          <p:cNvPr id="81" name="Text 78"/>
-          <p:cNvSpPr txBox="1"/>
-          <p:nvPr/>
-        </p:nvSpPr>
-        <p:spPr>
-          <a:xfrm>
-            <a:off x="9921240" y="5764378"/>
-            <a:ext cx="685800" cy="173736"/>
+          <p:cNvPr id="89" name="Text 86"/>
+          <p:cNvSpPr txBox="1"/>
+          <p:nvPr/>
+        </p:nvSpPr>
+        <p:spPr>
+          <a:xfrm>
+            <a:off x="8705088" y="5764378"/>
+            <a:ext cx="548640" cy="173736"/>
           </a:xfrm>
           <a:prstGeom prst="rect">
             <a:avLst/>
@@ -49229,14 +49555,14 @@
       </p:sp>
       <p:sp>
         <p:nvSpPr>
-          <p:cNvPr id="82" name="Text 79"/>
-          <p:cNvSpPr txBox="1"/>
-          <p:nvPr/>
-        </p:nvSpPr>
-        <p:spPr>
-          <a:xfrm>
-            <a:off x="10652760" y="5764378"/>
-            <a:ext cx="457200" cy="173736"/>
+          <p:cNvPr id="90" name="Text 87"/>
+          <p:cNvSpPr txBox="1"/>
+          <p:nvPr/>
+        </p:nvSpPr>
+        <p:spPr>
+          <a:xfrm>
+            <a:off x="9281160" y="5764378"/>
+            <a:ext cx="365760" cy="173736"/>
           </a:xfrm>
           <a:prstGeom prst="rect">
             <a:avLst/>
@@ -49268,14 +49594,55 @@
       </p:sp>
       <p:sp>
         <p:nvSpPr>
-          <p:cNvPr id="83" name="Text 80"/>
-          <p:cNvSpPr txBox="1"/>
-          <p:nvPr/>
-        </p:nvSpPr>
-        <p:spPr>
-          <a:xfrm>
-            <a:off x="11155680" y="5764378"/>
-            <a:ext cx="384048" cy="173736"/>
+          <p:cNvPr id="91" name="Text 88"/>
+          <p:cNvSpPr txBox="1"/>
+          <p:nvPr/>
+        </p:nvSpPr>
+        <p:spPr>
+          <a:xfrm>
+            <a:off x="9765792" y="5764378"/>
+            <a:ext cx="1664208" cy="173736"/>
+          </a:xfrm>
+          <a:prstGeom prst="rect">
+            <a:avLst/>
+          </a:prstGeom>
+          <a:noFill/>
+          <a:ln/>
+        </p:spPr>
+        <p:txBody>
+          <a:bodyPr wrap="square" lIns="0" tIns="0" rIns="0" bIns="0" rtlCol="0" anchor="ctr">
+            <a:normAutofit/>
+          </a:bodyPr>
+          <a:lstStyle/>
+          <a:p>
+            <a:pPr indent="0" marL="0">
+              <a:buNone/>
+            </a:pPr>
+            <a:r>
+              <a:rPr lang="en-US" sz="680" dirty="0">
+                <a:solidFill>
+                  <a:srgbClr val="8FA1AC"/>
+                </a:solidFill>
+                <a:latin typeface="Poppins" pitchFamily="34" charset="0"/>
+                <a:ea typeface="Poppins" pitchFamily="34" charset="-122"/>
+                <a:cs typeface="Poppins" pitchFamily="34" charset="-120"/>
+              </a:rPr>
+              <a:t>—</a:t>
+            </a:r>
+            <a:endParaRPr lang="en-US" sz="680" dirty="0"/>
+          </a:p>
+        </p:txBody>
+      </p:sp>
+      <p:sp>
+        <p:nvSpPr>
+          <p:cNvPr id="92" name="Text 89"/>
+          <p:cNvSpPr txBox="1"/>
+          <p:nvPr/>
+        </p:nvSpPr>
+        <p:spPr>
+          <a:xfrm>
+            <a:off x="11448288" y="5764378"/>
+            <a:ext cx="182880" cy="173736"/>
           </a:xfrm>
           <a:prstGeom prst="rect">
             <a:avLst/>
@@ -49296,7 +49663,7 @@
       </p:sp>
       <p:sp>
         <p:nvSpPr>
-          <p:cNvPr id="84" name="Text 81"/>
+          <p:cNvPr id="93" name="Text 90"/>
           <p:cNvSpPr txBox="1"/>
           <p:nvPr/>
         </p:nvSpPr>
@@ -49335,14 +49702,14 @@
       </p:sp>
       <p:sp>
         <p:nvSpPr>
-          <p:cNvPr id="85" name="Text 82"/>
+          <p:cNvPr id="94" name="Text 91"/>
           <p:cNvSpPr txBox="1"/>
           <p:nvPr/>
         </p:nvSpPr>
         <p:spPr>
           <a:xfrm>
             <a:off x="6748272" y="5939942"/>
-            <a:ext cx="2286000" cy="173736"/>
+            <a:ext cx="1371600" cy="173736"/>
           </a:xfrm>
           <a:prstGeom prst="rect">
             <a:avLst/>
@@ -49374,14 +49741,14 @@
       </p:sp>
       <p:sp>
         <p:nvSpPr>
-          <p:cNvPr id="86" name="Text 83"/>
-          <p:cNvSpPr txBox="1"/>
-          <p:nvPr/>
-        </p:nvSpPr>
-        <p:spPr>
-          <a:xfrm>
-            <a:off x="9052560" y="5939942"/>
-            <a:ext cx="822960" cy="173736"/>
+          <p:cNvPr id="95" name="Text 92"/>
+          <p:cNvSpPr txBox="1"/>
+          <p:nvPr/>
+        </p:nvSpPr>
+        <p:spPr>
+          <a:xfrm>
+            <a:off x="8138160" y="5939942"/>
+            <a:ext cx="548640" cy="173736"/>
           </a:xfrm>
           <a:prstGeom prst="rect">
             <a:avLst/>
@@ -49413,14 +49780,14 @@
       </p:sp>
       <p:sp>
         <p:nvSpPr>
-          <p:cNvPr id="87" name="Text 84"/>
-          <p:cNvSpPr txBox="1"/>
-          <p:nvPr/>
-        </p:nvSpPr>
-        <p:spPr>
-          <a:xfrm>
-            <a:off x="9921240" y="5939942"/>
-            <a:ext cx="685800" cy="173736"/>
+          <p:cNvPr id="96" name="Text 93"/>
+          <p:cNvSpPr txBox="1"/>
+          <p:nvPr/>
+        </p:nvSpPr>
+        <p:spPr>
+          <a:xfrm>
+            <a:off x="8705088" y="5939942"/>
+            <a:ext cx="548640" cy="173736"/>
           </a:xfrm>
           <a:prstGeom prst="rect">
             <a:avLst/>
@@ -49452,14 +49819,14 @@
       </p:sp>
       <p:sp>
         <p:nvSpPr>
-          <p:cNvPr id="88" name="Text 85"/>
-          <p:cNvSpPr txBox="1"/>
-          <p:nvPr/>
-        </p:nvSpPr>
-        <p:spPr>
-          <a:xfrm>
-            <a:off x="10652760" y="5939942"/>
-            <a:ext cx="457200" cy="173736"/>
+          <p:cNvPr id="97" name="Text 94"/>
+          <p:cNvSpPr txBox="1"/>
+          <p:nvPr/>
+        </p:nvSpPr>
+        <p:spPr>
+          <a:xfrm>
+            <a:off x="9281160" y="5939942"/>
+            <a:ext cx="365760" cy="173736"/>
           </a:xfrm>
           <a:prstGeom prst="rect">
             <a:avLst/>
@@ -49491,14 +49858,55 @@
       </p:sp>
       <p:sp>
         <p:nvSpPr>
-          <p:cNvPr id="89" name="Text 86"/>
-          <p:cNvSpPr txBox="1"/>
-          <p:nvPr/>
-        </p:nvSpPr>
-        <p:spPr>
-          <a:xfrm>
-            <a:off x="11155680" y="5939942"/>
-            <a:ext cx="384048" cy="173736"/>
+          <p:cNvPr id="98" name="Text 95"/>
+          <p:cNvSpPr txBox="1"/>
+          <p:nvPr/>
+        </p:nvSpPr>
+        <p:spPr>
+          <a:xfrm>
+            <a:off x="9765792" y="5939942"/>
+            <a:ext cx="1664208" cy="173736"/>
+          </a:xfrm>
+          <a:prstGeom prst="rect">
+            <a:avLst/>
+          </a:prstGeom>
+          <a:noFill/>
+          <a:ln/>
+        </p:spPr>
+        <p:txBody>
+          <a:bodyPr wrap="square" lIns="0" tIns="0" rIns="0" bIns="0" rtlCol="0" anchor="ctr">
+            <a:normAutofit/>
+          </a:bodyPr>
+          <a:lstStyle/>
+          <a:p>
+            <a:pPr indent="0" marL="0">
+              <a:buNone/>
+            </a:pPr>
+            <a:r>
+              <a:rPr lang="en-US" sz="680" dirty="0">
+                <a:solidFill>
+                  <a:srgbClr val="8FA1AC"/>
+                </a:solidFill>
+                <a:latin typeface="Poppins" pitchFamily="34" charset="0"/>
+                <a:ea typeface="Poppins" pitchFamily="34" charset="-122"/>
+                <a:cs typeface="Poppins" pitchFamily="34" charset="-120"/>
+              </a:rPr>
+              <a:t>—</a:t>
+            </a:r>
+            <a:endParaRPr lang="en-US" sz="680" dirty="0"/>
+          </a:p>
+        </p:txBody>
+      </p:sp>
+      <p:sp>
+        <p:nvSpPr>
+          <p:cNvPr id="99" name="Text 96"/>
+          <p:cNvSpPr txBox="1"/>
+          <p:nvPr/>
+        </p:nvSpPr>
+        <p:spPr>
+          <a:xfrm>
+            <a:off x="11448288" y="5939942"/>
+            <a:ext cx="182880" cy="173736"/>
           </a:xfrm>
           <a:prstGeom prst="rect">
             <a:avLst/>
@@ -49519,7 +49927,7 @@
       </p:sp>
       <p:sp>
         <p:nvSpPr>
-          <p:cNvPr id="90" name="Text 87"/>
+          <p:cNvPr id="100" name="Text 97"/>
           <p:cNvSpPr txBox="1"/>
           <p:nvPr/>
         </p:nvSpPr>
@@ -49558,14 +49966,14 @@
       </p:sp>
       <p:sp>
         <p:nvSpPr>
-          <p:cNvPr id="91" name="Text 88"/>
+          <p:cNvPr id="101" name="Text 98"/>
           <p:cNvSpPr txBox="1"/>
           <p:nvPr/>
         </p:nvSpPr>
         <p:spPr>
           <a:xfrm>
             <a:off x="6748272" y="6115507"/>
-            <a:ext cx="2286000" cy="173736"/>
+            <a:ext cx="1371600" cy="173736"/>
           </a:xfrm>
           <a:prstGeom prst="rect">
             <a:avLst/>
@@ -49597,14 +50005,14 @@
       </p:sp>
       <p:sp>
         <p:nvSpPr>
-          <p:cNvPr id="92" name="Text 89"/>
-          <p:cNvSpPr txBox="1"/>
-          <p:nvPr/>
-        </p:nvSpPr>
-        <p:spPr>
-          <a:xfrm>
-            <a:off x="9052560" y="6115507"/>
-            <a:ext cx="822960" cy="173736"/>
+          <p:cNvPr id="102" name="Text 99"/>
+          <p:cNvSpPr txBox="1"/>
+          <p:nvPr/>
+        </p:nvSpPr>
+        <p:spPr>
+          <a:xfrm>
+            <a:off x="8138160" y="6115507"/>
+            <a:ext cx="548640" cy="173736"/>
           </a:xfrm>
           <a:prstGeom prst="rect">
             <a:avLst/>
@@ -49636,14 +50044,14 @@
       </p:sp>
       <p:sp>
         <p:nvSpPr>
-          <p:cNvPr id="93" name="Text 90"/>
-          <p:cNvSpPr txBox="1"/>
-          <p:nvPr/>
-        </p:nvSpPr>
-        <p:spPr>
-          <a:xfrm>
-            <a:off x="9921240" y="6115507"/>
-            <a:ext cx="685800" cy="173736"/>
+          <p:cNvPr id="103" name="Text 100"/>
+          <p:cNvSpPr txBox="1"/>
+          <p:nvPr/>
+        </p:nvSpPr>
+        <p:spPr>
+          <a:xfrm>
+            <a:off x="8705088" y="6115507"/>
+            <a:ext cx="548640" cy="173736"/>
           </a:xfrm>
           <a:prstGeom prst="rect">
             <a:avLst/>
@@ -49675,14 +50083,14 @@
       </p:sp>
       <p:sp>
         <p:nvSpPr>
-          <p:cNvPr id="94" name="Text 91"/>
-          <p:cNvSpPr txBox="1"/>
-          <p:nvPr/>
-        </p:nvSpPr>
-        <p:spPr>
-          <a:xfrm>
-            <a:off x="10652760" y="6115507"/>
-            <a:ext cx="457200" cy="173736"/>
+          <p:cNvPr id="104" name="Text 101"/>
+          <p:cNvSpPr txBox="1"/>
+          <p:nvPr/>
+        </p:nvSpPr>
+        <p:spPr>
+          <a:xfrm>
+            <a:off x="9281160" y="6115507"/>
+            <a:ext cx="365760" cy="173736"/>
           </a:xfrm>
           <a:prstGeom prst="rect">
             <a:avLst/>
@@ -49714,14 +50122,55 @@
       </p:sp>
       <p:sp>
         <p:nvSpPr>
-          <p:cNvPr id="95" name="Text 92"/>
-          <p:cNvSpPr txBox="1"/>
-          <p:nvPr/>
-        </p:nvSpPr>
-        <p:spPr>
-          <a:xfrm>
-            <a:off x="11155680" y="6115507"/>
-            <a:ext cx="384048" cy="173736"/>
+          <p:cNvPr id="105" name="Text 102"/>
+          <p:cNvSpPr txBox="1"/>
+          <p:nvPr/>
+        </p:nvSpPr>
+        <p:spPr>
+          <a:xfrm>
+            <a:off x="9765792" y="6115507"/>
+            <a:ext cx="1664208" cy="173736"/>
+          </a:xfrm>
+          <a:prstGeom prst="rect">
+            <a:avLst/>
+          </a:prstGeom>
+          <a:noFill/>
+          <a:ln/>
+        </p:spPr>
+        <p:txBody>
+          <a:bodyPr wrap="square" lIns="0" tIns="0" rIns="0" bIns="0" rtlCol="0" anchor="ctr">
+            <a:normAutofit/>
+          </a:bodyPr>
+          <a:lstStyle/>
+          <a:p>
+            <a:pPr indent="0" marL="0">
+              <a:buNone/>
+            </a:pPr>
+            <a:r>
+              <a:rPr lang="en-US" sz="680" dirty="0">
+                <a:solidFill>
+                  <a:srgbClr val="8FA1AC"/>
+                </a:solidFill>
+                <a:latin typeface="Poppins" pitchFamily="34" charset="0"/>
+                <a:ea typeface="Poppins" pitchFamily="34" charset="-122"/>
+                <a:cs typeface="Poppins" pitchFamily="34" charset="-120"/>
+              </a:rPr>
+              <a:t>—</a:t>
+            </a:r>
+            <a:endParaRPr lang="en-US" sz="680" dirty="0"/>
+          </a:p>
+        </p:txBody>
+      </p:sp>
+      <p:sp>
+        <p:nvSpPr>
+          <p:cNvPr id="106" name="Text 103"/>
+          <p:cNvSpPr txBox="1"/>
+          <p:nvPr/>
+        </p:nvSpPr>
+        <p:spPr>
+          <a:xfrm>
+            <a:off x="11448288" y="6115507"/>
+            <a:ext cx="182880" cy="173736"/>
           </a:xfrm>
           <a:prstGeom prst="rect">
             <a:avLst/>
@@ -49742,7 +50191,7 @@
       </p:sp>
       <p:sp>
         <p:nvSpPr>
-          <p:cNvPr id="96" name="Shape 93"/>
+          <p:cNvPr id="107" name="Shape 104"/>
           <p:cNvSpPr/>
           <p:nvPr/>
         </p:nvSpPr>
@@ -49771,7 +50220,7 @@
       </p:sp>
       <p:sp>
         <p:nvSpPr>
-          <p:cNvPr id="97" name="Text 94"/>
+          <p:cNvPr id="108" name="Text 105"/>
           <p:cNvSpPr txBox="1"/>
           <p:nvPr/>
         </p:nvSpPr>
@@ -49810,7 +50259,7 @@
       </p:sp>
       <p:sp>
         <p:nvSpPr>
-          <p:cNvPr id="98" name="Text 95"/>
+          <p:cNvPr id="109" name="Text 106"/>
           <p:cNvSpPr txBox="1"/>
           <p:nvPr/>
         </p:nvSpPr>
@@ -49968,7 +50417,7 @@
                 <a:ea typeface="Poppins" pitchFamily="34" charset="-122"/>
                 <a:cs typeface="Poppins" pitchFamily="34" charset="-120"/>
               </a:rPr>
-              <a:t>24 of the 86 deals that carried software MRR in 2026 — six of this week's wins have no row yet. Oscars Group is $155k of it.</a:t>
+              <a:t>24 of the 86 deals that carried software MRR in 2026. Oscars Group is $155k of it: 49 sites, build over Dec–Jan for a mid-January go-live. Pier Hotel follows Terminus Morgan (live 26 Oct) around 23 Nov; Iris Pavilion waits on its building.</a:t>
             </a:r>
             <a:endParaRPr lang="en-US" sz="850" dirty="0"/>
           </a:p>
@@ -49985,7 +50434,7 @@
                 <a:ea typeface="Poppins" pitchFamily="34" charset="-122"/>
                 <a:cs typeface="Poppins" pitchFamily="34" charset="-120"/>
               </a:rPr>
-              <a:t>◆ Oscars Group — signed, ~1.5x rollout, held by the old provider's contract terms. AVC new sites are excluded throughout — 17 deals worth $8,759 of 2026 software MRR, parked licences that are not counted in MRR or ARR. Eight more sit below the cut, worth $1.6k/mo.</a:t>
+              <a:t>◆ Oscars Group — across the line per PS Weekly 26 Oct: 49 sites (the HubSpot deal reads 19), build Dec–Jan, go-live mid-January. AVC new sites are excluded throughout — 17 deals worth $8,759 of 2026 software MRR, parked licences that are not counted in MRR or ARR. Eight more sit below the cut, worth $1.6k/mo.</a:t>
             </a:r>
             <a:endParaRPr lang="en-US" sz="850" dirty="0"/>
           </a:p>
@@ -49993,7 +50442,7 @@
       </p:sp>
       <p:sp>
         <p:nvSpPr>
-          <p:cNvPr id="99" name="Text 96"/>
+          <p:cNvPr id="110" name="Text 107"/>
           <p:cNvSpPr txBox="1"/>
           <p:nvPr/>
         </p:nvSpPr>
@@ -50032,7 +50481,7 @@
       </p:sp>
       <p:sp>
         <p:nvSpPr>
-          <p:cNvPr id="100" name="Shape 97"/>
+          <p:cNvPr id="111" name="Shape 108"/>
           <p:cNvSpPr/>
           <p:nvPr/>
         </p:nvSpPr>
@@ -50054,7 +50503,7 @@
       </p:sp>
       <p:sp>
         <p:nvSpPr>
-          <p:cNvPr id="101" name="Text 98"/>
+          <p:cNvPr id="112" name="Text 109"/>
           <p:cNvSpPr txBox="1"/>
           <p:nvPr/>
         </p:nvSpPr>

--- a/exec-deck/output/H&L Weekly Update - WC 19 Oct 2026.pptx
+++ b/exec-deck/output/H&L Weekly Update - WC 19 Oct 2026.pptx
@@ -1949,7 +1949,7 @@
                   <c:v>561</c:v>
                 </c:pt>
                 <c:pt idx="24">
-                  <c:v>396</c:v>
+                  <c:v>395</c:v>
                 </c:pt>
               </c:numCache>
             </c:numRef>
@@ -2164,7 +2164,7 @@
                   <c:v>608</c:v>
                 </c:pt>
                 <c:pt idx="24">
-                  <c:v>597</c:v>
+                  <c:v>595</c:v>
                 </c:pt>
               </c:numCache>
             </c:numRef>
@@ -2435,7 +2435,7 @@
                   <c:v>-47</c:v>
                 </c:pt>
                 <c:pt idx="24">
-                  <c:v>-201</c:v>
+                  <c:v>-200</c:v>
                 </c:pt>
               </c:numCache>
             </c:numRef>
@@ -25631,7 +25631,7 @@
                 <a:ea typeface="Poppins" pitchFamily="34" charset="-122"/>
                 <a:cs typeface="Poppins" pitchFamily="34" charset="-120"/>
               </a:rPr>
-              <a:t>billable utilisation 3.7% — 11.5h of 311.6h; 10.5h chargeable, 1.0h non-chargeable; Q4 hidden work 20h = $3,000 unrecognised PS revenue</a:t>
+              <a:t>billable utilisation 4.7% — 13.5h of 288.8h; 10.5h chargeable, 3.0h non-chargeable; Q4 hidden work 22h = $3,300 unrecognised PS revenue</a:t>
             </a:r>
             <a:endParaRPr lang="en-US" sz="900" dirty="0"/>
           </a:p>
@@ -25820,7 +25820,7 @@
                 <a:ea typeface="Poppins" pitchFamily="34" charset="-122"/>
                 <a:cs typeface="Poppins" pitchFamily="34" charset="-120"/>
               </a:rPr>
-              <a:t>inflow 396 vs resolved 597 — backlog 588 → 389, third straight fall; 54 of the closes were one bulk close of September voice tickets</a:t>
+              <a:t>inflow 395 vs resolved 595 — backlog 588 → 389, third straight fall; 54 of the closes were one bulk close of September voice tickets</a:t>
             </a:r>
             <a:endParaRPr lang="en-US" sz="900" dirty="0"/>
           </a:p>
@@ -32278,7 +32278,7 @@
                 <a:ea typeface="Poppins" pitchFamily="34" charset="-122"/>
                 <a:cs typeface="Poppins" pitchFamily="34" charset="-120"/>
               </a:rPr>
-              <a:t>US$2,081</a:t>
+              <a:t>US$1,846</a:t>
             </a:r>
             <a:endParaRPr lang="en-US" sz="2400" dirty="0"/>
           </a:p>
@@ -32317,7 +32317,7 @@
                 <a:ea typeface="Poppins" pitchFamily="34" charset="-122"/>
                 <a:cs typeface="Poppins" pitchFamily="34" charset="-120"/>
               </a:rPr>
-              <a:t>A$2,922 · 32 deals not yet ordered</a:t>
+              <a:t>A$2,592 · 35 deals not yet ordered</a:t>
             </a:r>
             <a:endParaRPr lang="en-US" sz="780" dirty="0"/>
           </a:p>
@@ -32424,7 +32424,7 @@
                 <a:ea typeface="Poppins" pitchFamily="34" charset="-122"/>
                 <a:cs typeface="Poppins" pitchFamily="34" charset="-120"/>
               </a:rPr>
-              <a:t>US$552</a:t>
+              <a:t>US$596</a:t>
             </a:r>
             <a:endParaRPr lang="en-US" sz="2400" dirty="0"/>
           </a:p>
@@ -32463,7 +32463,7 @@
                 <a:ea typeface="Poppins" pitchFamily="34" charset="-122"/>
                 <a:cs typeface="Poppins" pitchFamily="34" charset="-120"/>
               </a:rPr>
-              <a:t>A$775 · 11 deals since 1 Jul</a:t>
+              <a:t>A$837 · 12 deals since 1 Jul</a:t>
             </a:r>
             <a:endParaRPr lang="en-US" sz="780" dirty="0"/>
           </a:p>
@@ -32570,7 +32570,7 @@
                 <a:ea typeface="Poppins" pitchFamily="34" charset="-122"/>
                 <a:cs typeface="Poppins" pitchFamily="34" charset="-120"/>
               </a:rPr>
-              <a:t>US$360</a:t>
+              <a:t>US$595</a:t>
             </a:r>
             <a:endParaRPr lang="en-US" sz="2400" dirty="0"/>
           </a:p>
@@ -32609,7 +32609,7 @@
                 <a:ea typeface="Poppins" pitchFamily="34" charset="-122"/>
                 <a:cs typeface="Poppins" pitchFamily="34" charset="-120"/>
               </a:rPr>
-              <a:t>A$506 · 7 deals since 1 Jul</a:t>
+              <a:t>A$836 · 8 deals since 1 Jul</a:t>
             </a:r>
             <a:endParaRPr lang="en-US" sz="780" dirty="0"/>
           </a:p>
@@ -32716,7 +32716,7 @@
                 <a:ea typeface="Poppins" pitchFamily="34" charset="-122"/>
                 <a:cs typeface="Poppins" pitchFamily="34" charset="-120"/>
               </a:rPr>
-              <a:t>61%</a:t>
+              <a:t>60%</a:t>
             </a:r>
             <a:endParaRPr lang="en-US" sz="2400" dirty="0"/>
           </a:p>
@@ -32755,7 +32755,7 @@
                 <a:ea typeface="Poppins" pitchFamily="34" charset="-122"/>
                 <a:cs typeface="Poppins" pitchFamily="34" charset="-120"/>
               </a:rPr>
-              <a:t>11 placed / 7 lost by count · 60% by value</a:t>
+              <a:t>12 placed / 8 lost by count · 50% by value</a:t>
             </a:r>
             <a:endParaRPr lang="en-US" sz="780" dirty="0"/>
           </a:p>
@@ -32976,7 +32976,7 @@
                 <a:ea typeface="Poppins" pitchFamily="34" charset="-122"/>
                 <a:cs typeface="Poppins" pitchFamily="34" charset="-120"/>
               </a:rPr>
-              <a:t>6 deals</a:t>
+              <a:t>10 deals</a:t>
             </a:r>
             <a:endParaRPr lang="en-US" sz="750" dirty="0"/>
           </a:p>
@@ -33169,7 +33169,7 @@
         <p:spPr>
           <a:xfrm>
             <a:off x="1828800" y="3313176"/>
-            <a:ext cx="2811201" cy="182880"/>
+            <a:ext cx="2047036" cy="182880"/>
           </a:xfrm>
           <a:prstGeom prst="roundRect">
             <a:avLst>
@@ -33215,7 +33215,7 @@
                 <a:ea typeface="Poppins" pitchFamily="34" charset="-122"/>
                 <a:cs typeface="Poppins" pitchFamily="34" charset="-120"/>
               </a:rPr>
-              <a:t>US$865</a:t>
+              <a:t>US$630</a:t>
             </a:r>
             <a:endParaRPr lang="en-US" sz="900" dirty="0"/>
           </a:p>
@@ -33254,7 +33254,7 @@
                 <a:ea typeface="Poppins" pitchFamily="34" charset="-122"/>
                 <a:cs typeface="Poppins" pitchFamily="34" charset="-120"/>
               </a:rPr>
-              <a:t>7 deals</a:t>
+              <a:t>6 deals</a:t>
             </a:r>
             <a:endParaRPr lang="en-US" sz="750" dirty="0"/>
           </a:p>
@@ -33447,7 +33447,7 @@
         <p:spPr>
           <a:xfrm>
             <a:off x="1828800" y="3892296"/>
-            <a:ext cx="1794630" cy="182880"/>
+            <a:ext cx="1938200" cy="182880"/>
           </a:xfrm>
           <a:prstGeom prst="roundRect">
             <a:avLst>
@@ -33493,7 +33493,7 @@
                 <a:ea typeface="Poppins" pitchFamily="34" charset="-122"/>
                 <a:cs typeface="Poppins" pitchFamily="34" charset="-120"/>
               </a:rPr>
-              <a:t>US$552</a:t>
+              <a:t>US$596</a:t>
             </a:r>
             <a:endParaRPr lang="en-US" sz="900" dirty="0"/>
           </a:p>
@@ -33532,7 +33532,7 @@
                 <a:ea typeface="Poppins" pitchFamily="34" charset="-122"/>
                 <a:cs typeface="Poppins" pitchFamily="34" charset="-120"/>
               </a:rPr>
-              <a:t>11 deals</a:t>
+              <a:t>12 deals</a:t>
             </a:r>
             <a:endParaRPr lang="en-US" sz="750" dirty="0"/>
           </a:p>
@@ -33586,7 +33586,7 @@
         <p:spPr>
           <a:xfrm>
             <a:off x="1828800" y="4181856"/>
-            <a:ext cx="1171720" cy="182880"/>
+            <a:ext cx="1935885" cy="182880"/>
           </a:xfrm>
           <a:prstGeom prst="roundRect">
             <a:avLst>
@@ -33632,7 +33632,7 @@
                 <a:ea typeface="Poppins" pitchFamily="34" charset="-122"/>
                 <a:cs typeface="Poppins" pitchFamily="34" charset="-120"/>
               </a:rPr>
-              <a:t>US$360</a:t>
+              <a:t>US$595</a:t>
             </a:r>
             <a:endParaRPr lang="en-US" sz="900" dirty="0"/>
           </a:p>
@@ -33671,7 +33671,7 @@
                 <a:ea typeface="Poppins" pitchFamily="34" charset="-122"/>
                 <a:cs typeface="Poppins" pitchFamily="34" charset="-120"/>
               </a:rPr>
-              <a:t>7 deals</a:t>
+              <a:t>8 deals</a:t>
             </a:r>
             <a:endParaRPr lang="en-US" sz="750" dirty="0"/>
           </a:p>
@@ -33862,7 +33862,7 @@
         <p:spPr>
           <a:xfrm>
             <a:off x="1828800" y="4800600"/>
-            <a:ext cx="876762" cy="164592"/>
+            <a:ext cx="933138" cy="164592"/>
           </a:xfrm>
           <a:prstGeom prst="rect">
             <a:avLst/>
@@ -33882,7 +33882,7 @@
         <p:spPr>
           <a:xfrm>
             <a:off x="1828800" y="4782312"/>
-            <a:ext cx="876762" cy="201168"/>
+            <a:ext cx="933138" cy="201168"/>
           </a:xfrm>
           <a:prstGeom prst="rect">
             <a:avLst/>
@@ -33906,7 +33906,7 @@
                 <a:ea typeface="Poppins" pitchFamily="34" charset="-122"/>
                 <a:cs typeface="Poppins" pitchFamily="34" charset="-120"/>
               </a:rPr>
-              <a:t>18%</a:t>
+              <a:t>20%</a:t>
             </a:r>
             <a:endParaRPr lang="en-US" sz="650" dirty="0"/>
           </a:p>
@@ -33920,8 +33920,8 @@
         </p:nvSpPr>
         <p:spPr>
           <a:xfrm>
-            <a:off x="2723850" y="4800600"/>
-            <a:ext cx="3305677" cy="164592"/>
+            <a:off x="2780226" y="4800600"/>
+            <a:ext cx="2889718" cy="164592"/>
           </a:xfrm>
           <a:prstGeom prst="rect">
             <a:avLst/>
@@ -33940,8 +33940,8 @@
         </p:nvSpPr>
         <p:spPr>
           <a:xfrm>
-            <a:off x="2723850" y="4782312"/>
-            <a:ext cx="3305677" cy="201168"/>
+            <a:off x="2780226" y="4782312"/>
+            <a:ext cx="2889718" cy="201168"/>
           </a:xfrm>
           <a:prstGeom prst="rect">
             <a:avLst/>
@@ -33965,7 +33965,7 @@
                 <a:ea typeface="Poppins" pitchFamily="34" charset="-122"/>
                 <a:cs typeface="Poppins" pitchFamily="34" charset="-120"/>
               </a:rPr>
-              <a:t>70%</a:t>
+              <a:t>61%</a:t>
             </a:r>
             <a:endParaRPr lang="en-US" sz="650" dirty="0"/>
           </a:p>
@@ -33979,8 +33979,8 @@
         </p:nvSpPr>
         <p:spPr>
           <a:xfrm>
-            <a:off x="6047815" y="4800600"/>
-            <a:ext cx="572441" cy="164592"/>
+            <a:off x="5688233" y="4800600"/>
+            <a:ext cx="932023" cy="164592"/>
           </a:xfrm>
           <a:prstGeom prst="rect">
             <a:avLst/>
@@ -33999,8 +33999,8 @@
         </p:nvSpPr>
         <p:spPr>
           <a:xfrm>
-            <a:off x="6047815" y="4782312"/>
-            <a:ext cx="572441" cy="201168"/>
+            <a:off x="5688233" y="4782312"/>
+            <a:ext cx="932023" cy="201168"/>
           </a:xfrm>
           <a:prstGeom prst="rect">
             <a:avLst/>
@@ -34024,7 +34024,7 @@
                 <a:ea typeface="Poppins" pitchFamily="34" charset="-122"/>
                 <a:cs typeface="Poppins" pitchFamily="34" charset="-120"/>
               </a:rPr>
-              <a:t>12%</a:t>
+              <a:t>20%</a:t>
             </a:r>
             <a:endParaRPr lang="en-US" sz="650" dirty="0"/>
           </a:p>
@@ -34078,7 +34078,7 @@
         <p:spPr>
           <a:xfrm>
             <a:off x="1828800" y="5111496"/>
-            <a:ext cx="1046074" cy="164592"/>
+            <a:ext cx="1037428" cy="164592"/>
           </a:xfrm>
           <a:prstGeom prst="rect">
             <a:avLst/>
@@ -34098,7 +34098,7 @@
         <p:spPr>
           <a:xfrm>
             <a:off x="1828800" y="5093208"/>
-            <a:ext cx="1046074" cy="201168"/>
+            <a:ext cx="1037428" cy="201168"/>
           </a:xfrm>
           <a:prstGeom prst="rect">
             <a:avLst/>
@@ -34136,8 +34136,8 @@
         </p:nvSpPr>
         <p:spPr>
           <a:xfrm>
-            <a:off x="2893162" y="5111496"/>
-            <a:ext cx="3043123" cy="164592"/>
+            <a:off x="2884516" y="5111496"/>
+            <a:ext cx="3025833" cy="164592"/>
           </a:xfrm>
           <a:prstGeom prst="rect">
             <a:avLst/>
@@ -34156,8 +34156,8 @@
         </p:nvSpPr>
         <p:spPr>
           <a:xfrm>
-            <a:off x="2893162" y="5093208"/>
-            <a:ext cx="3043123" cy="201168"/>
+            <a:off x="2884516" y="5093208"/>
+            <a:ext cx="3025833" cy="201168"/>
           </a:xfrm>
           <a:prstGeom prst="rect">
             <a:avLst/>
@@ -34195,8 +34195,8 @@
         </p:nvSpPr>
         <p:spPr>
           <a:xfrm>
-            <a:off x="5954573" y="5111496"/>
-            <a:ext cx="665683" cy="164592"/>
+            <a:off x="5928637" y="5111496"/>
+            <a:ext cx="691619" cy="164592"/>
           </a:xfrm>
           <a:prstGeom prst="rect">
             <a:avLst/>
@@ -34215,8 +34215,8 @@
         </p:nvSpPr>
         <p:spPr>
           <a:xfrm>
-            <a:off x="5954573" y="5093208"/>
-            <a:ext cx="665683" cy="201168"/>
+            <a:off x="5928637" y="5093208"/>
+            <a:ext cx="691619" cy="201168"/>
           </a:xfrm>
           <a:prstGeom prst="rect">
             <a:avLst/>
@@ -34240,7 +34240,7 @@
                 <a:ea typeface="Poppins" pitchFamily="34" charset="-122"/>
                 <a:cs typeface="Poppins" pitchFamily="34" charset="-120"/>
               </a:rPr>
-              <a:t>14%</a:t>
+              <a:t>15%</a:t>
             </a:r>
             <a:endParaRPr lang="en-US" sz="650" dirty="0"/>
           </a:p>
@@ -34758,7 +34758,7 @@
                 <a:ea typeface="Poppins" pitchFamily="34" charset="-122"/>
                 <a:cs typeface="Poppins" pitchFamily="34" charset="-120"/>
               </a:rPr>
-              <a:t>US$1,229</a:t>
+              <a:t>US$1,207</a:t>
             </a:r>
             <a:endParaRPr lang="en-US" sz="750" dirty="0"/>
           </a:p>
@@ -34797,7 +34797,7 @@
                 <a:ea typeface="Poppins" pitchFamily="34" charset="-122"/>
                 <a:cs typeface="Poppins" pitchFamily="34" charset="-120"/>
               </a:rPr>
-              <a:t>US$552</a:t>
+              <a:t>US$596</a:t>
             </a:r>
             <a:endParaRPr lang="en-US" sz="750" dirty="0"/>
           </a:p>
@@ -34836,7 +34836,7 @@
                 <a:ea typeface="Poppins" pitchFamily="34" charset="-122"/>
                 <a:cs typeface="Poppins" pitchFamily="34" charset="-120"/>
               </a:rPr>
-              <a:t>US$147</a:t>
+              <a:t>US$170</a:t>
             </a:r>
             <a:endParaRPr lang="en-US" sz="750" dirty="0"/>
           </a:p>
@@ -34953,7 +34953,7 @@
                 <a:ea typeface="Poppins" pitchFamily="34" charset="-122"/>
                 <a:cs typeface="Poppins" pitchFamily="34" charset="-120"/>
               </a:rPr>
-              <a:t>US$852</a:t>
+              <a:t>US$639</a:t>
             </a:r>
             <a:endParaRPr lang="en-US" sz="750" dirty="0"/>
           </a:p>
@@ -35031,7 +35031,7 @@
                 <a:ea typeface="Poppins" pitchFamily="34" charset="-122"/>
                 <a:cs typeface="Poppins" pitchFamily="34" charset="-120"/>
               </a:rPr>
-              <a:t>US$213</a:t>
+              <a:t>US$426</a:t>
             </a:r>
             <a:endParaRPr lang="en-US" sz="750" dirty="0"/>
           </a:p>
@@ -35109,7 +35109,7 @@
                 <a:ea typeface="Poppins" pitchFamily="34" charset="-122"/>
                 <a:cs typeface="Poppins" pitchFamily="34" charset="-120"/>
               </a:rPr>
-              <a:t>9 lines on deals, every one priced $0</a:t>
+              <a:t>14 lines on deals, every one priced $0</a:t>
             </a:r>
             <a:endParaRPr lang="en-US" sz="530" dirty="0"/>
           </a:p>
@@ -35528,7 +35528,7 @@
                 <a:ea typeface="Poppins" pitchFamily="34" charset="-122"/>
                 <a:cs typeface="Poppins" pitchFamily="34" charset="-120"/>
               </a:rPr>
-              <a:t>US$14,751</a:t>
+              <a:t>US$14,486</a:t>
             </a:r>
             <a:endParaRPr lang="en-US" sz="1800" dirty="0"/>
           </a:p>
@@ -35567,7 +35567,7 @@
                 <a:ea typeface="Poppins" pitchFamily="34" charset="-122"/>
                 <a:cs typeface="Poppins" pitchFamily="34" charset="-120"/>
               </a:rPr>
-              <a:t>open ROAM pipeline at ×12 (A$20,712) — the contract value behind the US$2,081 of monthly lines</a:t>
+              <a:t>open ROAM pipeline at ×12 (A$20,340) — the contract value behind the US$1,846 of monthly lines</a:t>
             </a:r>
             <a:endParaRPr lang="en-US" sz="700" dirty="0"/>
           </a:p>
@@ -35744,7 +35744,7 @@
                 <a:ea typeface="Poppins" pitchFamily="34" charset="-122"/>
                 <a:cs typeface="Poppins" pitchFamily="34" charset="-120"/>
               </a:rPr>
-              <a:t>11 orders placed since 1 Jul (US$552) against 7 lost — 61% by count, 60% by value. All of it is ROAM; Sentinel has US$852 in play and no order yet.</a:t>
+              <a:t>12 orders placed since 1 Jul (US$596) against 8 lost — 60% by count, 50% by value. All of it is ROAM; Sentinel has US$639 in play and no order yet.</a:t>
             </a:r>
             <a:endParaRPr lang="en-US" sz="900" dirty="0"/>
           </a:p>
@@ -35792,7 +35792,7 @@
                 <a:ea typeface="Poppins" pitchFamily="34" charset="-122"/>
                 <a:cs typeface="Poppins" pitchFamily="34" charset="-120"/>
               </a:rPr>
-              <a:t>US$2,018 of the US$2,081 open sits in Quote Sent and Negotiation across 25 deals — the movement to chase is quote-to-order, not top-of-funnel.</a:t>
+              <a:t>US$1,783 of the US$1,846 open sits in Quote Sent and Negotiation across 24 deals — the movement to chase is quote-to-order, not top-of-funnel.</a:t>
             </a:r>
             <a:endParaRPr lang="en-US" sz="900" dirty="0"/>
           </a:p>
@@ -35826,7 +35826,7 @@
                 <a:ea typeface="Poppins" pitchFamily="34" charset="-122"/>
                 <a:cs typeface="Poppins" pitchFamily="34" charset="-120"/>
               </a:rPr>
-              <a:t>Two ROAM orders placed this week (Dave &amp; Busters Perth, Prendiville Norfolk — A$124) · QR Ordering lines still all $0 · 28 ROAM lines (A$2,170) on no deal are excluded.</a:t>
+              <a:t>26 Oct: Night Owl 393 Murray St placed (A$62), The Club Beaudesert lost (A$330), four $0 OrderNow demos opened · 28 ROAM lines (A$2,170) on no deal excluded.</a:t>
             </a:r>
             <a:endParaRPr lang="en-US" sz="900" dirty="0"/>
           </a:p>
@@ -35840,8 +35840,8 @@
         </p:nvSpPr>
         <p:spPr>
           <a:xfrm>
-            <a:off x="7585862" y="6510528"/>
-            <a:ext cx="4191610" cy="256032"/>
+            <a:off x="6839712" y="6510528"/>
+            <a:ext cx="4937760" cy="256032"/>
           </a:xfrm>
           <a:prstGeom prst="roundRect">
             <a:avLst>
@@ -35862,8 +35862,8 @@
         </p:nvSpPr>
         <p:spPr>
           <a:xfrm>
-            <a:off x="7585862" y="6510528"/>
-            <a:ext cx="4191610" cy="256032"/>
+            <a:off x="6839712" y="6510528"/>
+            <a:ext cx="4937760" cy="256032"/>
           </a:xfrm>
           <a:prstGeom prst="rect">
             <a:avLst/>
@@ -35887,7 +35887,7 @@
                 <a:ea typeface="Poppins" pitchFamily="34" charset="-122"/>
                 <a:cs typeface="Poppins" pitchFamily="34" charset="-120"/>
               </a:rPr>
-              <a:t>Source: HubSpot line items · products flagged ai_infused (live)</a:t>
+              <a:t>Source: HubSpot line items · products flagged ai_infused (live read 26 Oct)</a:t>
             </a:r>
             <a:endParaRPr lang="en-US" sz="700" dirty="0"/>
           </a:p>
@@ -39648,7 +39648,7 @@
                 <a:ea typeface="Poppins" pitchFamily="34" charset="-122"/>
                 <a:cs typeface="Poppins" pitchFamily="34" charset="-120"/>
               </a:rPr>
-              <a:t>11.5h</a:t>
+              <a:t>13.5h</a:t>
             </a:r>
             <a:pPr indent="0" marL="0">
               <a:buNone/>
@@ -39662,7 +39662,7 @@
                 <a:ea typeface="Poppins" pitchFamily="34" charset="-122"/>
                 <a:cs typeface="Poppins" pitchFamily="34" charset="-120"/>
               </a:rPr>
-              <a:t>  of 311.6h</a:t>
+              <a:t>  of 288.8h</a:t>
             </a:r>
             <a:endParaRPr lang="en-US" sz="2000" dirty="0"/>
           </a:p>
@@ -39701,7 +39701,7 @@
                 <a:ea typeface="Poppins" pitchFamily="34" charset="-122"/>
                 <a:cs typeface="Poppins" pitchFamily="34" charset="-120"/>
               </a:rPr>
-              <a:t>▼ from 51.0h last week</a:t>
+              <a:t>▼ from 60.0h last week</a:t>
             </a:r>
             <a:endParaRPr lang="en-US" sz="650" dirty="0"/>
           </a:p>
@@ -39828,7 +39828,7 @@
                 <a:ea typeface="Poppins" pitchFamily="34" charset="-122"/>
                 <a:cs typeface="Poppins" pitchFamily="34" charset="-120"/>
               </a:rPr>
-              <a:t>3.7%</a:t>
+              <a:t>4.7%</a:t>
             </a:r>
             <a:pPr indent="0" marL="0">
               <a:buNone/>
@@ -39881,7 +39881,7 @@
                 <a:ea typeface="Poppins" pitchFamily="34" charset="-122"/>
                 <a:cs typeface="Poppins" pitchFamily="34" charset="-120"/>
               </a:rPr>
-              <a:t>▼ from 16.8% last week</a:t>
+              <a:t>▼ from 19.7% last week</a:t>
             </a:r>
             <a:endParaRPr lang="en-US" sz="650" dirty="0"/>
           </a:p>
@@ -40022,7 +40022,7 @@
                 <a:ea typeface="Poppins" pitchFamily="34" charset="-122"/>
                 <a:cs typeface="Poppins" pitchFamily="34" charset="-120"/>
               </a:rPr>
-              <a:t>  91% of billable</a:t>
+              <a:t>  78% of billable</a:t>
             </a:r>
             <a:endParaRPr lang="en-US" sz="2000" dirty="0"/>
           </a:p>
@@ -40061,7 +40061,7 @@
                 <a:ea typeface="Poppins" pitchFamily="34" charset="-122"/>
                 <a:cs typeface="Poppins" pitchFamily="34" charset="-120"/>
               </a:rPr>
-              <a:t>▼ from 50.0h (98%) last week</a:t>
+              <a:t>▼ from 59.0h (98%) last week</a:t>
             </a:r>
             <a:endParaRPr lang="en-US" sz="650" dirty="0"/>
           </a:p>
@@ -40188,7 +40188,7 @@
                 <a:ea typeface="Poppins" pitchFamily="34" charset="-122"/>
                 <a:cs typeface="Poppins" pitchFamily="34" charset="-120"/>
               </a:rPr>
-              <a:t>1.0h</a:t>
+              <a:t>3.0h</a:t>
             </a:r>
             <a:pPr indent="0" marL="0">
               <a:buNone/>
@@ -40202,7 +40202,7 @@
                 <a:ea typeface="Poppins" pitchFamily="34" charset="-122"/>
                 <a:cs typeface="Poppins" pitchFamily="34" charset="-120"/>
               </a:rPr>
-              <a:t>  9% of billable</a:t>
+              <a:t>  22% of billable</a:t>
             </a:r>
             <a:endParaRPr lang="en-US" sz="2000" dirty="0"/>
           </a:p>
@@ -40241,7 +40241,7 @@
                 <a:ea typeface="Poppins" pitchFamily="34" charset="-122"/>
                 <a:cs typeface="Poppins" pitchFamily="34" charset="-120"/>
               </a:rPr>
-              <a:t>— from 1.0h (2%) last week</a:t>
+              <a:t>▲ from 1.0h (2%) last week</a:t>
             </a:r>
             <a:endParaRPr lang="en-US" sz="650" dirty="0"/>
           </a:p>
@@ -41305,7 +41305,7 @@
                 <a:ea typeface="Poppins" pitchFamily="34" charset="-122"/>
                 <a:cs typeface="Poppins" pitchFamily="34" charset="-120"/>
               </a:rPr>
-              <a:t>51.0h</a:t>
+              <a:t>60.0h</a:t>
             </a:r>
             <a:endParaRPr lang="en-US" sz="780" dirty="0"/>
           </a:p>
@@ -41344,7 +41344,7 @@
                 <a:ea typeface="Poppins" pitchFamily="34" charset="-122"/>
                 <a:cs typeface="Poppins" pitchFamily="34" charset="-120"/>
               </a:rPr>
-              <a:t>50.0h</a:t>
+              <a:t>59.0h</a:t>
             </a:r>
             <a:endParaRPr lang="en-US" sz="780" dirty="0"/>
           </a:p>
@@ -41422,7 +41422,7 @@
                 <a:ea typeface="Poppins" pitchFamily="34" charset="-122"/>
                 <a:cs typeface="Poppins" pitchFamily="34" charset="-120"/>
               </a:rPr>
-              <a:t>16.8%</a:t>
+              <a:t>19.7%</a:t>
             </a:r>
             <a:endParaRPr lang="en-US" sz="780" dirty="0"/>
           </a:p>
@@ -41461,7 +41461,7 @@
                 <a:ea typeface="Poppins" pitchFamily="34" charset="-122"/>
                 <a:cs typeface="Poppins" pitchFamily="34" charset="-120"/>
               </a:rPr>
-              <a:t>39.5h  ▲ +11.6h</a:t>
+              <a:t>39.5h  ▲ +20.6h</a:t>
             </a:r>
             <a:endParaRPr lang="en-US" sz="680" dirty="0"/>
           </a:p>
@@ -41559,7 +41559,7 @@
                 <a:ea typeface="Poppins" pitchFamily="34" charset="-122"/>
                 <a:cs typeface="Poppins" pitchFamily="34" charset="-120"/>
               </a:rPr>
-              <a:t>11.5h</a:t>
+              <a:t>13.5h</a:t>
             </a:r>
             <a:endParaRPr lang="en-US" sz="780" dirty="0"/>
           </a:p>
@@ -41637,7 +41637,7 @@
                 <a:ea typeface="Poppins" pitchFamily="34" charset="-122"/>
                 <a:cs typeface="Poppins" pitchFamily="34" charset="-120"/>
               </a:rPr>
-              <a:t>1.0h</a:t>
+              <a:t>3.0h</a:t>
             </a:r>
             <a:endParaRPr lang="en-US" sz="780" dirty="0"/>
           </a:p>
@@ -41676,7 +41676,7 @@
                 <a:ea typeface="Poppins" pitchFamily="34" charset="-122"/>
                 <a:cs typeface="Poppins" pitchFamily="34" charset="-120"/>
               </a:rPr>
-              <a:t>3.7%</a:t>
+              <a:t>4.7%</a:t>
             </a:r>
             <a:endParaRPr lang="en-US" sz="780" dirty="0"/>
           </a:p>
@@ -41707,15 +41707,15 @@
               <a:buNone/>
             </a:pPr>
             <a:r>
-              <a:rPr lang="en-US" sz="680" dirty="0">
-                <a:solidFill>
-                  <a:srgbClr val="8FA1AC"/>
-                </a:solidFill>
-                <a:latin typeface="Poppins" pitchFamily="34" charset="0"/>
-                <a:ea typeface="Poppins" pitchFamily="34" charset="-122"/>
-                <a:cs typeface="Poppins" pitchFamily="34" charset="-120"/>
-              </a:rPr>
-              <a:t>first report</a:t>
+              <a:rPr lang="en-US" sz="680" b="1" dirty="0">
+                <a:solidFill>
+                  <a:srgbClr val="B4552D"/>
+                </a:solidFill>
+                <a:latin typeface="Poppins" pitchFamily="34" charset="0"/>
+                <a:ea typeface="Poppins" pitchFamily="34" charset="-122"/>
+                <a:cs typeface="Poppins" pitchFamily="34" charset="-120"/>
+              </a:rPr>
+              <a:t>11.5h  ▲ +2.0h</a:t>
             </a:r>
             <a:endParaRPr lang="en-US" sz="680" dirty="0"/>
           </a:p>
@@ -44448,7 +44448,7 @@
                 <a:ea typeface="Poppins" pitchFamily="34" charset="-122"/>
                 <a:cs typeface="Poppins" pitchFamily="34" charset="-120"/>
               </a:rPr>
-              <a:t>Solotel</a:t>
+              <a:t>Perks Hospitality</a:t>
             </a:r>
             <a:endParaRPr lang="en-US" sz="680" dirty="0"/>
           </a:p>
@@ -44487,7 +44487,7 @@
                 <a:ea typeface="Poppins" pitchFamily="34" charset="-122"/>
                 <a:cs typeface="Poppins" pitchFamily="34" charset="-120"/>
               </a:rPr>
-              <a:t>7.0h</a:t>
+              <a:t>10.0h</a:t>
             </a:r>
             <a:endParaRPr lang="en-US" sz="680" dirty="0"/>
           </a:p>
@@ -44526,7 +44526,7 @@
                 <a:ea typeface="Poppins" pitchFamily="34" charset="-122"/>
                 <a:cs typeface="Poppins" pitchFamily="34" charset="-120"/>
               </a:rPr>
-              <a:t>7.0h</a:t>
+              <a:t>10.0h</a:t>
             </a:r>
             <a:endParaRPr lang="en-US" sz="680" dirty="0"/>
           </a:p>
@@ -44643,7 +44643,7 @@
                 <a:ea typeface="Poppins" pitchFamily="34" charset="-122"/>
                 <a:cs typeface="Poppins" pitchFamily="34" charset="-120"/>
               </a:rPr>
-              <a:t>Trader House</a:t>
+              <a:t>Solotel</a:t>
             </a:r>
             <a:endParaRPr lang="en-US" sz="680" dirty="0"/>
           </a:p>
@@ -44682,7 +44682,7 @@
                 <a:ea typeface="Poppins" pitchFamily="34" charset="-122"/>
                 <a:cs typeface="Poppins" pitchFamily="34" charset="-120"/>
               </a:rPr>
-              <a:t>3.5h</a:t>
+              <a:t>7.0h</a:t>
             </a:r>
             <a:endParaRPr lang="en-US" sz="680" dirty="0"/>
           </a:p>
@@ -44721,7 +44721,7 @@
                 <a:ea typeface="Poppins" pitchFamily="34" charset="-122"/>
                 <a:cs typeface="Poppins" pitchFamily="34" charset="-120"/>
               </a:rPr>
-              <a:t>3.5h</a:t>
+              <a:t>7.0h</a:t>
             </a:r>
             <a:endParaRPr lang="en-US" sz="680" dirty="0"/>
           </a:p>
@@ -44858,7 +44858,7 @@
                 <a:ea typeface="Poppins" pitchFamily="34" charset="-122"/>
                 <a:cs typeface="Poppins" pitchFamily="34" charset="-120"/>
               </a:rPr>
-              <a:t>Locals Co</a:t>
+              <a:t>Trader House</a:t>
             </a:r>
             <a:endParaRPr lang="en-US" sz="680" dirty="0"/>
           </a:p>
@@ -45053,7 +45053,7 @@
                 <a:ea typeface="Poppins" pitchFamily="34" charset="-122"/>
                 <a:cs typeface="Poppins" pitchFamily="34" charset="-120"/>
               </a:rPr>
-              <a:t>HHG</a:t>
+              <a:t>Locals Co</a:t>
             </a:r>
             <a:endParaRPr lang="en-US" sz="680" dirty="0"/>
           </a:p>
@@ -45268,7 +45268,7 @@
                 <a:ea typeface="Poppins" pitchFamily="34" charset="-122"/>
                 <a:cs typeface="Poppins" pitchFamily="34" charset="-120"/>
               </a:rPr>
-              <a:t>Lucas Collective</a:t>
+              <a:t>HHG</a:t>
             </a:r>
             <a:endParaRPr lang="en-US" sz="680" dirty="0"/>
           </a:p>
@@ -45307,7 +45307,7 @@
                 <a:ea typeface="Poppins" pitchFamily="34" charset="-122"/>
                 <a:cs typeface="Poppins" pitchFamily="34" charset="-120"/>
               </a:rPr>
-              <a:t>3.0h</a:t>
+              <a:t>3.5h</a:t>
             </a:r>
             <a:endParaRPr lang="en-US" sz="680" dirty="0"/>
           </a:p>
@@ -45346,7 +45346,7 @@
                 <a:ea typeface="Poppins" pitchFamily="34" charset="-122"/>
                 <a:cs typeface="Poppins" pitchFamily="34" charset="-120"/>
               </a:rPr>
-              <a:t>3.0h</a:t>
+              <a:t>3.5h</a:t>
             </a:r>
             <a:endParaRPr lang="en-US" sz="680" dirty="0"/>
           </a:p>
@@ -45463,7 +45463,7 @@
                 <a:ea typeface="Poppins" pitchFamily="34" charset="-122"/>
                 <a:cs typeface="Poppins" pitchFamily="34" charset="-120"/>
               </a:rPr>
-              <a:t>Liquor Barons</a:t>
+              <a:t>Lucas Collective</a:t>
             </a:r>
             <a:endParaRPr lang="en-US" sz="680" dirty="0"/>
           </a:p>
@@ -45502,7 +45502,7 @@
                 <a:ea typeface="Poppins" pitchFamily="34" charset="-122"/>
                 <a:cs typeface="Poppins" pitchFamily="34" charset="-120"/>
               </a:rPr>
-              <a:t>2.5h</a:t>
+              <a:t>3.0h</a:t>
             </a:r>
             <a:endParaRPr lang="en-US" sz="680" dirty="0"/>
           </a:p>
@@ -45541,7 +45541,7 @@
                 <a:ea typeface="Poppins" pitchFamily="34" charset="-122"/>
                 <a:cs typeface="Poppins" pitchFamily="34" charset="-120"/>
               </a:rPr>
-              <a:t>2.5h</a:t>
+              <a:t>3.0h</a:t>
             </a:r>
             <a:endParaRPr lang="en-US" sz="680" dirty="0"/>
           </a:p>
@@ -45678,7 +45678,7 @@
                 <a:ea typeface="Poppins" pitchFamily="34" charset="-122"/>
                 <a:cs typeface="Poppins" pitchFamily="34" charset="-120"/>
               </a:rPr>
-              <a:t>BRG</a:t>
+              <a:t>Liquor Barons</a:t>
             </a:r>
             <a:endParaRPr lang="en-US" sz="680" dirty="0"/>
           </a:p>
@@ -45717,7 +45717,7 @@
                 <a:ea typeface="Poppins" pitchFamily="34" charset="-122"/>
                 <a:cs typeface="Poppins" pitchFamily="34" charset="-120"/>
               </a:rPr>
-              <a:t>2.1h</a:t>
+              <a:t>2.5h</a:t>
             </a:r>
             <a:endParaRPr lang="en-US" sz="680" dirty="0"/>
           </a:p>
@@ -45756,7 +45756,7 @@
                 <a:ea typeface="Poppins" pitchFamily="34" charset="-122"/>
                 <a:cs typeface="Poppins" pitchFamily="34" charset="-120"/>
               </a:rPr>
-              <a:t>2.1h</a:t>
+              <a:t>2.5h</a:t>
             </a:r>
             <a:endParaRPr lang="en-US" sz="680" dirty="0"/>
           </a:p>
@@ -45873,7 +45873,7 @@
                 <a:ea typeface="Poppins" pitchFamily="34" charset="-122"/>
                 <a:cs typeface="Poppins" pitchFamily="34" charset="-120"/>
               </a:rPr>
-              <a:t>Perks Hospitality</a:t>
+              <a:t>BRG</a:t>
             </a:r>
             <a:endParaRPr lang="en-US" sz="680" dirty="0"/>
           </a:p>
@@ -45912,7 +45912,7 @@
                 <a:ea typeface="Poppins" pitchFamily="34" charset="-122"/>
                 <a:cs typeface="Poppins" pitchFamily="34" charset="-120"/>
               </a:rPr>
-              <a:t>2.0h</a:t>
+              <a:t>2.1h</a:t>
             </a:r>
             <a:endParaRPr lang="en-US" sz="680" dirty="0"/>
           </a:p>
@@ -45951,7 +45951,7 @@
                 <a:ea typeface="Poppins" pitchFamily="34" charset="-122"/>
                 <a:cs typeface="Poppins" pitchFamily="34" charset="-120"/>
               </a:rPr>
-              <a:t>2.0h</a:t>
+              <a:t>2.1h</a:t>
             </a:r>
             <a:endParaRPr lang="en-US" sz="680" dirty="0"/>
           </a:p>
@@ -46198,7 +46198,7 @@
                 <a:ea typeface="Poppins" pitchFamily="34" charset="-122"/>
                 <a:cs typeface="Poppins" pitchFamily="34" charset="-120"/>
               </a:rPr>
-              <a:t>Q4's hidden work so far: 20h, $3,000 of unrecognised PS revenue. </a:t>
+              <a:t>Q4's hidden work so far: 22h, $3,300 of unrecognised PS revenue. </a:t>
             </a:r>
             <a:pPr indent="0" marL="0">
               <a:spcAft>
@@ -46215,7 +46215,7 @@
                 <a:ea typeface="Poppins" pitchFamily="34" charset="-122"/>
                 <a:cs typeface="Poppins" pitchFamily="34" charset="-120"/>
               </a:rPr>
-              <a:t>AVC's 9.2 upgrades (18h, $2,700) and H&amp;L Pay activations (2h, $300). </a:t>
+              <a:t>AVC's 9.2 upgrades (18h, $2,700) and four H&amp;L Pay activations (4h, $600) — two not yet tagged H&amp;L Pay on Integration Level 3.</a:t>
             </a:r>
             <a:endParaRPr lang="en-US" sz="900" dirty="0"/>
           </a:p>
@@ -52613,7 +52613,7 @@
                 <a:ea typeface="Poppins" pitchFamily="34" charset="-122"/>
                 <a:cs typeface="Poppins" pitchFamily="34" charset="-120"/>
               </a:rPr>
-              <a:t>597 closed against 396 new this week — net −201, the biggest weekly fall in six months. Open is 389, down from 588.</a:t>
+              <a:t>595 closed against 395 new this week — net −200, the biggest weekly fall in six months. Open is 389, down from 588.</a:t>
             </a:r>
             <a:endParaRPr lang="en-US" sz="900" dirty="0"/>
           </a:p>
